--- a/lecons/USA/Population Geography/08_USA_POP_L06_Age_and_Sex_Composition.pptx
+++ b/lecons/USA/Population Geography/08_USA_POP_L06_Age_and_Sex_Composition.pptx
@@ -69,10 +69,9 @@
     <p:sldId id="317" r:id="rId63"/>
     <p:sldId id="318" r:id="rId64"/>
     <p:sldId id="319" r:id="rId65"/>
-    <p:sldId id="320" r:id="rId66"/>
   </p:sldIdLst>
   <p:notesMasterIdLst>
-    <p:notesMasterId r:id="rId67"/>
+    <p:notesMasterId r:id="rId66"/>
   </p:notesMasterIdLst>
   <p:sldSz cx="12192000" cy="6858000"/>
   <p:notesSz cx="6858000" cy="12192000"/>
@@ -3118,7 +3117,7 @@
           <a:p>
             <a:r>
               <a:rPr lang="en-US" dirty="0"/>
-              <a:t>Let us copy the definitions. The key terms of this lesson are defined as follows. On this slide we have Age composition and Sex composition. Write each point on a new line, with the key term first, and explain it in your own words when we revise. When you finish, we go to the next slide.</a:t>
+              <a:t>Let us copy the definitions. The key terms of this lesson are defined as follows. On this slide we have Age composition and Sex ratio. Write each point on a new line, with the key term first, and explain it in your own words when we revise. When you finish, we go to the next slide.</a:t>
             </a:r>
             <a:endParaRPr lang="en-US" dirty="0"/>
           </a:p>
@@ -3206,7 +3205,7 @@
           <a:p>
             <a:r>
               <a:rPr lang="en-US" dirty="0"/>
-              <a:t>We continue with the definitions. On this slide we have Sex ratio and Youthful population. Write each point on a new line, with the key term first, and explain it in your own words when we revise. When you finish, we go to the next slide.</a:t>
+              <a:t>We continue with the definitions. On this slide we have Youthful population and Ageing population. Write each point on a new line, with the key term first, and explain it in your own words when we revise.</a:t>
             </a:r>
             <a:endParaRPr lang="en-US" dirty="0"/>
           </a:p>
@@ -3294,7 +3293,7 @@
           <a:p>
             <a:r>
               <a:rPr lang="en-US" dirty="0"/>
-              <a:t>We continue with the definitions. On this slide we have Ageing population. Write each point on a new line, with the key term first, and explain it in your own words when we revise.</a:t>
+              <a:t>Let us copy Meaning of Age and Sex Composition. Age and sex composition is explained as follows. Copy the point on Age groups: write the key term first, then its explanation.</a:t>
             </a:r>
             <a:endParaRPr lang="en-US" dirty="0"/>
           </a:p>
@@ -3382,7 +3381,7 @@
           <a:p>
             <a:r>
               <a:rPr lang="en-US" dirty="0"/>
-              <a:t>Let us copy Meaning of Age and Sex Composition. Age and sex composition is presented as follows. On this slide we have Basis of analysis. Write each point on a new line, with the key term first, and explain it in your own words when we revise. When you finish, we go to the next slide.</a:t>
+              <a:t>Copy the point on The sex ratio on the left, then draw the diagram on the right: the sex ratio. Give it a title and label it clearly.</a:t>
             </a:r>
             <a:endParaRPr lang="en-US" dirty="0"/>
           </a:p>
@@ -3558,7 +3557,7 @@
           <a:p>
             <a:r>
               <a:rPr lang="en-US" dirty="0"/>
-              <a:t>We continue with Meaning of Age and Sex Composition. On this slide we have Age groups. Write each point on a new line, with the key term first, and explain it in your own words when we revise. When you finish, we go to the next slide.</a:t>
+              <a:t>We continue with Meaning of Age and Sex Composition. Copy the point on Factors of the sex ratio: write the key term first, then its explanation.</a:t>
             </a:r>
             <a:endParaRPr lang="en-US" dirty="0"/>
           </a:p>
@@ -3646,7 +3645,7 @@
           <a:p>
             <a:r>
               <a:rPr lang="en-US" dirty="0"/>
-              <a:t>We continue with Meaning of Age and Sex Composition. Copy this carefully.</a:t>
+              <a:t>Let us copy The Youthful Population. The youthful population has the following characteristics. Copy the point on Characteristics on the left, then draw the diagram on the right: youthful and ageing populations. Give it a title and label it clearly.</a:t>
             </a:r>
             <a:endParaRPr lang="en-US" dirty="0"/>
           </a:p>
@@ -3734,7 +3733,7 @@
           <a:p>
             <a:r>
               <a:rPr lang="en-US" dirty="0"/>
-              <a:t>Copy the point on Sex ratio on the left, then draw the diagram on the right: the sex ratio. Give it a title and label it clearly.</a:t>
+              <a:t>Copy the point on Example of Cameroon on the left, then draw the diagram on the right: the pyramid of Cameroon. Give it a title and label it clearly.</a:t>
             </a:r>
             <a:endParaRPr lang="en-US" dirty="0"/>
           </a:p>
@@ -3822,7 +3821,7 @@
           <a:p>
             <a:r>
               <a:rPr lang="en-US" dirty="0"/>
-              <a:t>We continue with Meaning of Age and Sex Composition. On this slide we have Factors of the sex ratio. Write each point on a new line, with the key term first, and explain it in your own words when we revise. When you finish, we go to the next slide.</a:t>
+              <a:t>Let us copy Consequences of a Youthful Population. A youthful population has the following socio-economic consequences. Copy the point on High dependency: write the key term first, then its explanation.</a:t>
             </a:r>
             <a:endParaRPr lang="en-US" dirty="0"/>
           </a:p>
@@ -3910,7 +3909,7 @@
           <a:p>
             <a:r>
               <a:rPr lang="en-US" dirty="0"/>
-              <a:t>We continue with Meaning of Age and Sex Composition. Copy this carefully.</a:t>
+              <a:t>Copy the point on Pressure on services on the left, then draw the diagram on the right: a classroom. Give it a title and label it clearly.</a:t>
             </a:r>
             <a:endParaRPr lang="en-US" dirty="0"/>
           </a:p>
@@ -3998,7 +3997,7 @@
           <a:p>
             <a:r>
               <a:rPr lang="en-US" dirty="0"/>
-              <a:t>Let us copy The Youthful Population. The youthful population has the following characteristics. Copy the point on Characteristics on the left, then draw the diagram on the right: young and old people. Give it a title and label it clearly.</a:t>
+              <a:t>We continue with Consequences of a Youthful Population. Copy the point on Unemployment: write the key term first, then its explanation.</a:t>
             </a:r>
             <a:endParaRPr lang="en-US" dirty="0"/>
           </a:p>
@@ -4086,7 +4085,7 @@
           <a:p>
             <a:r>
               <a:rPr lang="en-US" dirty="0"/>
-              <a:t>Copy the point on Example of Cameroon on the left, then draw the diagram on the right: the pyramid of Cameroon. Give it a title and label it clearly.</a:t>
+              <a:t>We continue with Consequences of a Youthful Population. Copy the point on A future labour force: write the key term first, then its explanation.</a:t>
             </a:r>
             <a:endParaRPr lang="en-US" dirty="0"/>
           </a:p>
@@ -4174,7 +4173,7 @@
           <a:p>
             <a:r>
               <a:rPr lang="en-US" dirty="0"/>
-              <a:t>We continue with The Youthful Population. On this slide we have High dependency. Write each point on a new line, with the key term first, and explain it in your own words when we revise.</a:t>
+              <a:t>Let us copy The Ageing Population. The ageing population has the following characteristics. Copy the point on Characteristics on the left, then draw the diagram on the right: the pyramid of Japan. Give it a title and label it clearly.</a:t>
             </a:r>
             <a:endParaRPr lang="en-US" dirty="0"/>
           </a:p>
@@ -4262,7 +4261,7 @@
           <a:p>
             <a:r>
               <a:rPr lang="en-US" dirty="0"/>
-              <a:t>Copy the point on Pressure on services on the left, then draw the diagram on the right: a crowded classroom. Give it a title and label it clearly.</a:t>
+              <a:t>We continue with The Ageing Population. Copy the point on Example of Japan: write the key term first, then its explanation.</a:t>
             </a:r>
             <a:endParaRPr lang="en-US" dirty="0"/>
           </a:p>
@@ -4350,7 +4349,7 @@
           <a:p>
             <a:r>
               <a:rPr lang="en-US" dirty="0"/>
-              <a:t>We continue with The Youthful Population. On this slide we have Unemployment and Population momentum. Write each point on a new line, with the key term first, and explain it in your own words when we revise.</a:t>
+              <a:t>Let us copy Consequences of an Ageing Population. An ageing population has the following socio-economic consequences. Copy the point on A shrinking workforce: write the key term first, then its explanation.</a:t>
             </a:r>
             <a:endParaRPr lang="en-US" dirty="0"/>
           </a:p>
@@ -4526,7 +4525,7 @@
           <a:p>
             <a:r>
               <a:rPr lang="en-US" dirty="0"/>
-              <a:t>Let us copy The Ageing Population. The ageing population has the following characteristics. Copy the point on Characteristics on the left, then draw the diagram on the right: the pyramid of Japan. Give it a title and label it clearly.</a:t>
+              <a:t>Copy the point on High state spending on the left, then draw the diagram on the right: health care. Give it a title and label it clearly.</a:t>
             </a:r>
             <a:endParaRPr lang="en-US" dirty="0"/>
           </a:p>
@@ -4614,7 +4613,7 @@
           <a:p>
             <a:r>
               <a:rPr lang="en-US" dirty="0"/>
-              <a:t>We continue with The Ageing Population. On this slide we have Example of Japan and Shrinking workforce. Write each point on a new line, with the key term first, and explain it in your own words when we revise.</a:t>
+              <a:t>We continue with Consequences of an Ageing Population. Copy the point on Closure of services: write the key term first, then its explanation.</a:t>
             </a:r>
             <a:endParaRPr lang="en-US" dirty="0"/>
           </a:p>
@@ -4702,7 +4701,7 @@
           <a:p>
             <a:r>
               <a:rPr lang="en-US" dirty="0"/>
-              <a:t>Copy the point on High State spending on the left, then draw the diagram on the right: health care. Give it a title and label it clearly.</a:t>
+              <a:t>We continue with Consequences of an Ageing Population. Copy the point on Government responses: write the key term first, then its explanation.</a:t>
             </a:r>
             <a:endParaRPr lang="en-US" dirty="0"/>
           </a:p>
@@ -4790,7 +4789,7 @@
           <a:p>
             <a:r>
               <a:rPr lang="en-US" dirty="0"/>
-              <a:t>We continue with The Ageing Population. On this slide we have Closure of services and Policies. Write each point on a new line, with the key term first, and explain it in your own words when we revise.</a:t>
+              <a:t>Now let us check what you have understood. Question 1: Give two characteristics of a youthful population. Answer in your exercise book.</a:t>
             </a:r>
             <a:endParaRPr lang="en-US" dirty="0"/>
           </a:p>
@@ -4878,7 +4877,7 @@
           <a:p>
             <a:r>
               <a:rPr lang="en-US" dirty="0"/>
-              <a:t>Now let us check what you have understood. Question 1: Give two characteristics of a youthful population. Answer in your exercise book.</a:t>
+              <a:t>The expected answer is: over 40 % of people under 15 and fewer than 5 % aged 65 or over; high birth rates. If you got it right, well done.</a:t>
             </a:r>
             <a:endParaRPr lang="en-US" dirty="0"/>
           </a:p>
@@ -4966,7 +4965,7 @@
           <a:p>
             <a:r>
               <a:rPr lang="en-US" dirty="0"/>
-              <a:t>The expected answer is: over 40 % of people under 15 and fewer than 5 % aged 65 or over; high birth rates. If you got it right, well done.</a:t>
+              <a:t>Now let us check what you have understood. Question 2: Give two consequences of an ageing population. Answer in your exercise book.</a:t>
             </a:r>
             <a:endParaRPr lang="en-US" dirty="0"/>
           </a:p>
@@ -5054,7 +5053,7 @@
           <a:p>
             <a:r>
               <a:rPr lang="en-US" dirty="0"/>
-              <a:t>Now let us check what you have understood. Question 2: Give two consequences of an ageing population. Answer in your exercise book.</a:t>
+              <a:t>The expected answer is: labour shortages and high spending on pensions and health care (also school closures). If you got it right, well done.</a:t>
             </a:r>
             <a:endParaRPr lang="en-US" dirty="0"/>
           </a:p>
@@ -5142,7 +5141,7 @@
           <a:p>
             <a:r>
               <a:rPr lang="en-US" dirty="0"/>
-              <a:t>The expected answer is: labour shortages and high spending on pensions and health care (also school closures). If you got it right, well done.</a:t>
+              <a:t>For those who need more practice, fill in the blanks in your exercise book. The answers are: number 1, sex ratio; number 2, youthful; number 3, ageing.</a:t>
             </a:r>
             <a:endParaRPr lang="en-US" dirty="0"/>
           </a:p>
@@ -5230,7 +5229,7 @@
           <a:p>
             <a:r>
               <a:rPr lang="en-US" dirty="0"/>
-              <a:t>For those who need more practice, fill in the blanks in your exercise book. The answers are: number 1, sex ratio; number 2, youthful; number 3, ageing.</a:t>
+              <a:t>For your homework: State what the base of a population pyramid represents. We shall correct it at the beginning of our next lesson.</a:t>
             </a:r>
             <a:endParaRPr lang="en-US" dirty="0"/>
           </a:p>
@@ -5318,7 +5317,7 @@
           <a:p>
             <a:r>
               <a:rPr lang="en-US" dirty="0"/>
-              <a:t>For your homework: State what the base of a population pyramid represents. We shall correct it at the beginning of our next lesson.</a:t>
+              <a:t>Our next lesson will be on Lesson 7: Population Pyramids. Thank you for your attention, and see you next time.</a:t>
             </a:r>
             <a:endParaRPr lang="en-US" dirty="0"/>
           </a:p>
@@ -5494,7 +5493,7 @@
           <a:p>
             <a:r>
               <a:rPr lang="en-US" dirty="0"/>
-              <a:t>Our next lesson will be on Lesson 7: Population Pyramids. Thank you for your attention, and see you next time.</a:t>
+              <a:t>Let us play the bilingual game. I say a word in English, and you give me the French word. Then we do the reverse.</a:t>
             </a:r>
             <a:endParaRPr lang="en-US" dirty="0"/>
           </a:p>
@@ -5582,7 +5581,7 @@
           <a:p>
             <a:r>
               <a:rPr lang="en-US" dirty="0"/>
-              <a:t>Let us play the bilingual game. I say a word in English, and you give me the French word. Then we do the reverse.</a:t>
+              <a:t>I record this information in the official logbook of the class after the lesson.</a:t>
             </a:r>
             <a:endParaRPr lang="en-US" dirty="0"/>
           </a:p>
@@ -5670,7 +5669,7 @@
           <a:p>
             <a:r>
               <a:rPr lang="en-US" dirty="0"/>
-              <a:t>I record this information in the official logbook of the class after the lesson.</a:t>
+              <a:t>I complete the second page of the logbook: the matter taught, the evaluation, the homework and the attendance.</a:t>
             </a:r>
             <a:endParaRPr lang="en-US" dirty="0"/>
           </a:p>
@@ -5758,7 +5757,7 @@
           <a:p>
             <a:r>
               <a:rPr lang="en-US" dirty="0"/>
-              <a:t>I complete the second page of the logbook: the matter taught, the evaluation, the homework and the attendance.</a:t>
+              <a:t>This slide is for me, the teacher: it gives the timing of the lesson and what to do if the projector is not available.</a:t>
             </a:r>
             <a:endParaRPr lang="en-US" dirty="0"/>
           </a:p>
@@ -5846,7 +5845,7 @@
           <a:p>
             <a:r>
               <a:rPr lang="en-US" dirty="0"/>
-              <a:t>This slide is for me, the teacher: it gives the timing of the lesson and what to do if the projector is not available.</a:t>
+              <a:t>These are the references and picture credits used to prepare this lesson.</a:t>
             </a:r>
             <a:endParaRPr lang="en-US" dirty="0"/>
           </a:p>
@@ -5870,94 +5869,6 @@
             <a:fld id="{F7021451-1387-4CA6-816F-3879F97B5CBC}" type="slidenum">
               <a:rPr lang="en-US"/>
               <a:t>64</a:t>
-            </a:fld>
-            <a:endParaRPr lang="en-US"/>
-          </a:p>
-        </p:txBody>
-      </p:sp>
-    </p:spTree>
-    <p:extLst>
-      <p:ext uri="{BB962C8B-B14F-4D97-AF65-F5344CB8AC3E}">
-        <p14:creationId xmlns:p14="http://schemas.microsoft.com/office/powerpoint/2010/main" val="1024086991"/>
-      </p:ext>
-    </p:extLst>
-  </p:cSld>
-  <p:clrMapOvr>
-    <a:masterClrMapping/>
-  </p:clrMapOvr>
-</p:notes>
-</file>
-
-<file path=ppt/notesSlides/notesSlide65.xml><?xml version="1.0" encoding="utf-8"?>
-<p:notes xmlns:a="http://schemas.openxmlformats.org/drawingml/2006/main" xmlns:r="http://schemas.openxmlformats.org/officeDocument/2006/relationships" xmlns:p="http://schemas.openxmlformats.org/presentationml/2006/main">
-  <p:cSld>
-    <p:spTree>
-      <p:nvGrpSpPr>
-        <p:cNvPr id="1" name=""/>
-        <p:cNvGrpSpPr/>
-        <p:nvPr/>
-      </p:nvGrpSpPr>
-      <p:grpSpPr>
-        <a:xfrm>
-          <a:off x="0" y="0"/>
-          <a:ext cx="0" cy="0"/>
-          <a:chOff x="0" y="0"/>
-          <a:chExt cx="0" cy="0"/>
-        </a:xfrm>
-      </p:grpSpPr>
-      <p:sp>
-        <p:nvSpPr>
-          <p:cNvPr id="2" name="Slide Image Placeholder 1"/>
-          <p:cNvSpPr>
-            <a:spLocks noGrp="1" noRot="1" noChangeAspect="1"/>
-          </p:cNvSpPr>
-          <p:nvPr>
-            <p:ph type="sldImg"/>
-          </p:nvPr>
-        </p:nvSpPr>
-        <p:spPr/>
-      </p:sp>
-      <p:sp>
-        <p:nvSpPr>
-          <p:cNvPr id="3" name="Notes Placeholder 2"/>
-          <p:cNvSpPr>
-            <a:spLocks noGrp="1"/>
-          </p:cNvSpPr>
-          <p:nvPr>
-            <p:ph type="body" idx="1"/>
-          </p:nvPr>
-        </p:nvSpPr>
-        <p:spPr/>
-        <p:txBody>
-          <a:bodyPr/>
-          <a:lstStyle/>
-          <a:p>
-            <a:r>
-              <a:rPr lang="en-US" dirty="0"/>
-              <a:t>These are the references and picture credits used to prepare this lesson.</a:t>
-            </a:r>
-            <a:endParaRPr lang="en-US" dirty="0"/>
-          </a:p>
-        </p:txBody>
-      </p:sp>
-      <p:sp>
-        <p:nvSpPr>
-          <p:cNvPr id="4" name="Slide Number Placeholder 3"/>
-          <p:cNvSpPr>
-            <a:spLocks noGrp="1"/>
-          </p:cNvSpPr>
-          <p:nvPr>
-            <p:ph type="sldNum" sz="quarter" idx="10"/>
-          </p:nvPr>
-        </p:nvSpPr>
-        <p:spPr/>
-        <p:txBody>
-          <a:bodyPr/>
-          <a:lstStyle/>
-          <a:p>
-            <a:fld id="{F7021451-1387-4CA6-816F-3879F97B5CBC}" type="slidenum">
-              <a:rPr lang="en-US"/>
-              <a:t>65</a:t>
             </a:fld>
             <a:endParaRPr lang="en-US"/>
           </a:p>
@@ -14931,7 +14842,7 @@
         <p:spPr>
           <a:xfrm>
             <a:off x="0" y="658368"/>
-            <a:ext cx="2468880" cy="5833872"/>
+            <a:ext cx="3840480" cy="5833872"/>
           </a:xfrm>
           <a:prstGeom prst="rect">
             <a:avLst/>
@@ -14946,8 +14857,8 @@
         </p:nvSpPr>
         <p:spPr>
           <a:xfrm>
-            <a:off x="2697480" y="1005840"/>
-            <a:ext cx="9174175" cy="731520"/>
+            <a:off x="4069080" y="1005840"/>
+            <a:ext cx="7802575" cy="731520"/>
           </a:xfrm>
           <a:prstGeom prst="rect">
             <a:avLst/>
@@ -14987,8 +14898,8 @@
         </p:nvSpPr>
         <p:spPr>
           <a:xfrm>
-            <a:off x="2697480" y="1783080"/>
-            <a:ext cx="9174175" cy="4663440"/>
+            <a:off x="4069080" y="1783080"/>
+            <a:ext cx="7802575" cy="4663440"/>
           </a:xfrm>
           <a:prstGeom prst="rect">
             <a:avLst/>
@@ -15072,7 +14983,7 @@
                 <a:ea typeface="Times New Roman" pitchFamily="34" charset="-122"/>
                 <a:cs typeface="Times New Roman" pitchFamily="34" charset="-120"/>
               </a:rPr>
-              <a:t>Sex composition: </a:t>
+              <a:t>Sex ratio: </a:t>
             </a:r>
             <a:pPr algn="l" indent="0" marL="0">
               <a:spcAft>
@@ -15089,7 +15000,7 @@
                 <a:ea typeface="Times New Roman" pitchFamily="34" charset="-122"/>
                 <a:cs typeface="Times New Roman" pitchFamily="34" charset="-120"/>
               </a:rPr>
-              <a:t>It is the balance between males and females in a population.</a:t>
+              <a:t>It is the number of males for every 100 females.</a:t>
             </a:r>
             <a:endParaRPr lang="en-US" sz="4000" dirty="0"/>
           </a:p>
@@ -15224,7 +15135,7 @@
         <p:spPr>
           <a:xfrm>
             <a:off x="0" y="658368"/>
-            <a:ext cx="3840480" cy="5833872"/>
+            <a:ext cx="2468880" cy="5833872"/>
           </a:xfrm>
           <a:prstGeom prst="rect">
             <a:avLst/>
@@ -15239,8 +15150,8 @@
         </p:nvSpPr>
         <p:spPr>
           <a:xfrm>
-            <a:off x="4069080" y="1005840"/>
-            <a:ext cx="7802575" cy="731520"/>
+            <a:off x="2697480" y="1005840"/>
+            <a:ext cx="9174175" cy="731520"/>
           </a:xfrm>
           <a:prstGeom prst="rect">
             <a:avLst/>
@@ -15280,8 +15191,8 @@
         </p:nvSpPr>
         <p:spPr>
           <a:xfrm>
-            <a:off x="4069080" y="1783080"/>
-            <a:ext cx="7802575" cy="4663440"/>
+            <a:off x="2697480" y="1783080"/>
+            <a:ext cx="9174175" cy="4663440"/>
           </a:xfrm>
           <a:prstGeom prst="rect">
             <a:avLst/>
@@ -15308,7 +15219,7 @@
                 <a:ea typeface="Times New Roman" pitchFamily="34" charset="-122"/>
                 <a:cs typeface="Times New Roman" pitchFamily="34" charset="-120"/>
               </a:rPr>
-              <a:t>Sex ratio: </a:t>
+              <a:t>Youthful population: </a:t>
             </a:r>
             <a:pPr algn="l" indent="0" marL="0">
               <a:spcAft>
@@ -15325,7 +15236,7 @@
                 <a:ea typeface="Times New Roman" pitchFamily="34" charset="-122"/>
                 <a:cs typeface="Times New Roman" pitchFamily="34" charset="-120"/>
               </a:rPr>
-              <a:t>It is the number of males for every 100 females.</a:t>
+              <a:t>It is a population with a high share of young people (over 40 % under 15) and few old people.</a:t>
             </a:r>
             <a:endParaRPr lang="en-US" sz="4000" dirty="0"/>
           </a:p>
@@ -15345,7 +15256,7 @@
                 <a:ea typeface="Times New Roman" pitchFamily="34" charset="-122"/>
                 <a:cs typeface="Times New Roman" pitchFamily="34" charset="-120"/>
               </a:rPr>
-              <a:t>Youthful population: </a:t>
+              <a:t>Ageing population: </a:t>
             </a:r>
             <a:pPr algn="l" indent="0" marL="0">
               <a:spcAft>
@@ -15362,7 +15273,7 @@
                 <a:ea typeface="Times New Roman" pitchFamily="34" charset="-122"/>
                 <a:cs typeface="Times New Roman" pitchFamily="34" charset="-120"/>
               </a:rPr>
-              <a:t>It is a population with a high share of young people (over 40 % under 15) and few old people.</a:t>
+              <a:t>It is a population with a high share of old people (over 15 % aged 65 and over) and few children.</a:t>
             </a:r>
             <a:endParaRPr lang="en-US" sz="4000" dirty="0"/>
           </a:p>
@@ -15497,7 +15408,7 @@
         <p:spPr>
           <a:xfrm>
             <a:off x="0" y="658368"/>
-            <a:ext cx="5120640" cy="5833872"/>
+            <a:ext cx="2468880" cy="5833872"/>
           </a:xfrm>
           <a:prstGeom prst="rect">
             <a:avLst/>
@@ -15512,8 +15423,8 @@
         </p:nvSpPr>
         <p:spPr>
           <a:xfrm>
-            <a:off x="5349240" y="1005840"/>
-            <a:ext cx="6522415" cy="731520"/>
+            <a:off x="2697480" y="1005840"/>
+            <a:ext cx="9174175" cy="731520"/>
           </a:xfrm>
           <a:prstGeom prst="rect">
             <a:avLst/>
@@ -15539,7 +15450,7 @@
                 <a:ea typeface="Times New Roman" pitchFamily="34" charset="-122"/>
                 <a:cs typeface="Times New Roman" pitchFamily="34" charset="-120"/>
               </a:rPr>
-              <a:t>DEFINITIONS (continued)</a:t>
+              <a:t>1. Meaning of Age and Sex Composition</a:t>
             </a:r>
             <a:endParaRPr lang="en-US" sz="3600" dirty="0"/>
           </a:p>
@@ -15553,8 +15464,8 @@
         </p:nvSpPr>
         <p:spPr>
           <a:xfrm>
-            <a:off x="5349240" y="1783080"/>
-            <a:ext cx="6522415" cy="4663440"/>
+            <a:off x="2697480" y="1783080"/>
+            <a:ext cx="9174175" cy="4663440"/>
           </a:xfrm>
           <a:prstGeom prst="rect">
             <a:avLst/>
@@ -15573,7 +15484,7 @@
               <a:buNone/>
             </a:pPr>
             <a:r>
-              <a:rPr lang="en-US" sz="4000" b="1" dirty="0">
+              <a:rPr lang="en-US" sz="3600" i="1" dirty="0">
                 <a:solidFill>
                   <a:srgbClr val="111111"/>
                 </a:solidFill>
@@ -15581,8 +15492,11 @@
                 <a:ea typeface="Times New Roman" pitchFamily="34" charset="-122"/>
                 <a:cs typeface="Times New Roman" pitchFamily="34" charset="-120"/>
               </a:rPr>
-              <a:t>Ageing population: </a:t>
-            </a:r>
+              <a:t>Age and sex composition is explained as follows:</a:t>
+            </a:r>
+            <a:endParaRPr lang="en-US" sz="3600" dirty="0"/>
+          </a:p>
+          <a:p>
             <a:pPr algn="l" indent="0" marL="0">
               <a:spcAft>
                 <a:spcPts val="800"/>
@@ -15590,7 +15504,7 @@
               <a:buNone/>
             </a:pPr>
             <a:r>
-              <a:rPr lang="en-US" sz="4000" dirty="0">
+              <a:rPr lang="en-US" sz="3600" b="1" dirty="0">
                 <a:solidFill>
                   <a:srgbClr val="111111"/>
                 </a:solidFill>
@@ -15598,9 +15512,26 @@
                 <a:ea typeface="Times New Roman" pitchFamily="34" charset="-122"/>
                 <a:cs typeface="Times New Roman" pitchFamily="34" charset="-120"/>
               </a:rPr>
-              <a:t>It is a population with a high share of old people (over 15 % aged 65 and over) and few children.</a:t>
-            </a:r>
-            <a:endParaRPr lang="en-US" sz="4000" dirty="0"/>
+              <a:t>Age groups: </a:t>
+            </a:r>
+            <a:pPr algn="l" indent="0" marL="0">
+              <a:spcAft>
+                <a:spcPts val="800"/>
+              </a:spcAft>
+              <a:buNone/>
+            </a:pPr>
+            <a:r>
+              <a:rPr lang="en-US" sz="3600" dirty="0">
+                <a:solidFill>
+                  <a:srgbClr val="111111"/>
+                </a:solidFill>
+                <a:latin typeface="Times New Roman" pitchFamily="34" charset="0"/>
+                <a:ea typeface="Times New Roman" pitchFamily="34" charset="-122"/>
+                <a:cs typeface="Times New Roman" pitchFamily="34" charset="-120"/>
+              </a:rPr>
+              <a:t>The population is divided into young dependants (0 to 14 years), the working population (15 to 64 years) and old dependants (65 years and over). This division shows the past of a population and helps to predict its future needs.</a:t>
+            </a:r>
+            <a:endParaRPr lang="en-US" sz="3600" dirty="0"/>
           </a:p>
         </p:txBody>
       </p:sp>
@@ -15716,9 +15647,109 @@
           </a:p>
         </p:txBody>
       </p:sp>
+      <p:sp>
+        <p:nvSpPr>
+          <p:cNvPr id="3" name="Text 1"/>
+          <p:cNvSpPr/>
+          <p:nvPr/>
+        </p:nvSpPr>
+        <p:spPr>
+          <a:xfrm>
+            <a:off x="365760" y="1005840"/>
+            <a:ext cx="11460175" cy="731520"/>
+          </a:xfrm>
+          <a:prstGeom prst="rect">
+            <a:avLst/>
+          </a:prstGeom>
+          <a:noFill/>
+          <a:ln/>
+        </p:spPr>
+        <p:txBody>
+          <a:bodyPr wrap="square" lIns="0" tIns="0" rIns="0" bIns="0" rtlCol="0" anchor="ctr">
+            <a:normAutofit/>
+          </a:bodyPr>
+          <a:lstStyle/>
+          <a:p>
+            <a:pPr algn="ctr" indent="0" marL="0">
+              <a:buNone/>
+            </a:pPr>
+            <a:r>
+              <a:rPr lang="en-US" sz="3600" b="1" dirty="0">
+                <a:solidFill>
+                  <a:srgbClr val="990011"/>
+                </a:solidFill>
+                <a:latin typeface="Times New Roman" pitchFamily="34" charset="0"/>
+                <a:ea typeface="Times New Roman" pitchFamily="34" charset="-122"/>
+                <a:cs typeface="Times New Roman" pitchFamily="34" charset="-120"/>
+              </a:rPr>
+              <a:t>1. Meaning of Age and Sex Composition</a:t>
+            </a:r>
+            <a:endParaRPr lang="en-US" sz="3600" dirty="0"/>
+          </a:p>
+        </p:txBody>
+      </p:sp>
+      <p:sp>
+        <p:nvSpPr>
+          <p:cNvPr id="4" name="Text 2"/>
+          <p:cNvSpPr/>
+          <p:nvPr/>
+        </p:nvSpPr>
+        <p:spPr>
+          <a:xfrm>
+            <a:off x="365760" y="1783080"/>
+            <a:ext cx="6035040" cy="4617720"/>
+          </a:xfrm>
+          <a:prstGeom prst="rect">
+            <a:avLst/>
+          </a:prstGeom>
+          <a:noFill/>
+          <a:ln/>
+        </p:spPr>
+        <p:txBody>
+          <a:bodyPr wrap="square" lIns="0" tIns="0" rIns="0" bIns="0" rtlCol="0" anchor="t"/>
+          <a:lstStyle/>
+          <a:p>
+            <a:pPr algn="l" indent="0" marL="0">
+              <a:spcAft>
+                <a:spcPts val="800"/>
+              </a:spcAft>
+              <a:buNone/>
+            </a:pPr>
+            <a:r>
+              <a:rPr lang="en-US" sz="3600" b="1" dirty="0">
+                <a:solidFill>
+                  <a:srgbClr val="111111"/>
+                </a:solidFill>
+                <a:latin typeface="Times New Roman" pitchFamily="34" charset="0"/>
+                <a:ea typeface="Times New Roman" pitchFamily="34" charset="-122"/>
+                <a:cs typeface="Times New Roman" pitchFamily="34" charset="-120"/>
+              </a:rPr>
+              <a:t>The sex ratio: </a:t>
+            </a:r>
+            <a:pPr algn="l" indent="0" marL="0">
+              <a:spcAft>
+                <a:spcPts val="800"/>
+              </a:spcAft>
+              <a:buNone/>
+            </a:pPr>
+            <a:r>
+              <a:rPr lang="en-US" sz="3600" dirty="0">
+                <a:solidFill>
+                  <a:srgbClr val="111111"/>
+                </a:solidFill>
+                <a:latin typeface="Times New Roman" pitchFamily="34" charset="0"/>
+                <a:ea typeface="Times New Roman" pitchFamily="34" charset="-122"/>
+                <a:cs typeface="Times New Roman" pitchFamily="34" charset="-120"/>
+              </a:rPr>
+              <a:t>It is calculated as males ÷ females × 100. A ratio above 100 means more men than women, and a ratio below 100 means more women than men.</a:t>
+            </a:r>
+            <a:endParaRPr lang="en-US" sz="3600" dirty="0"/>
+          </a:p>
+        </p:txBody>
+      </p:sp>
       <p:pic>
         <p:nvPicPr>
-          <p:cNvPr id="3" name="Image 0" descr="/home/claude/f4/img/minesec_sheet.png">    </p:cNvPr>
+          <p:cNvPr id="5" name="Image 0" descr="/home/claude/f4/img/v2/pop2_sexratio.png">    </p:cNvPr>
           <p:cNvPicPr>
             <a:picLocks noChangeAspect="1"/>
           </p:cNvPicPr>
@@ -15732,8 +15763,8 @@
         </p:blipFill>
         <p:spPr>
           <a:xfrm>
-            <a:off x="0" y="658368"/>
-            <a:ext cx="5120640" cy="5833872"/>
+            <a:off x="6537960" y="2849678"/>
+            <a:ext cx="5470855" cy="2137053"/>
           </a:xfrm>
           <a:prstGeom prst="rect">
             <a:avLst/>
@@ -15742,14 +15773,14 @@
       </p:pic>
       <p:sp>
         <p:nvSpPr>
-          <p:cNvPr id="4" name="Text 1"/>
+          <p:cNvPr id="6" name="Text 3"/>
           <p:cNvSpPr/>
           <p:nvPr/>
         </p:nvSpPr>
         <p:spPr>
           <a:xfrm>
-            <a:off x="5349240" y="1005840"/>
-            <a:ext cx="6522415" cy="731520"/>
+            <a:off x="6537960" y="6089904"/>
+            <a:ext cx="5470855" cy="347472"/>
           </a:xfrm>
           <a:prstGeom prst="rect">
             <a:avLst/>
@@ -15758,105 +15789,24 @@
           <a:ln/>
         </p:spPr>
         <p:txBody>
-          <a:bodyPr wrap="square" lIns="0" tIns="0" rIns="0" bIns="0" rtlCol="0" anchor="ctr">
-            <a:normAutofit/>
-          </a:bodyPr>
+          <a:bodyPr wrap="square" lIns="0" tIns="0" rIns="0" bIns="0" rtlCol="0" anchor="ctr"/>
           <a:lstStyle/>
           <a:p>
             <a:pPr algn="ctr" indent="0" marL="0">
               <a:buNone/>
             </a:pPr>
             <a:r>
-              <a:rPr lang="en-US" sz="3600" b="1" dirty="0">
-                <a:solidFill>
-                  <a:srgbClr val="990011"/>
+              <a:rPr lang="en-US" sz="1600" i="1" dirty="0">
+                <a:solidFill>
+                  <a:srgbClr val="555555"/>
                 </a:solidFill>
                 <a:latin typeface="Times New Roman" pitchFamily="34" charset="0"/>
                 <a:ea typeface="Times New Roman" pitchFamily="34" charset="-122"/>
                 <a:cs typeface="Times New Roman" pitchFamily="34" charset="-120"/>
               </a:rPr>
-              <a:t>1. Meaning of Age and Sex Composition</a:t>
-            </a:r>
-            <a:endParaRPr lang="en-US" sz="3600" dirty="0"/>
-          </a:p>
-        </p:txBody>
-      </p:sp>
-      <p:sp>
-        <p:nvSpPr>
-          <p:cNvPr id="5" name="Text 2"/>
-          <p:cNvSpPr/>
-          <p:nvPr/>
-        </p:nvSpPr>
-        <p:spPr>
-          <a:xfrm>
-            <a:off x="5349240" y="1783080"/>
-            <a:ext cx="6522415" cy="4663440"/>
-          </a:xfrm>
-          <a:prstGeom prst="rect">
-            <a:avLst/>
-          </a:prstGeom>
-          <a:noFill/>
-          <a:ln/>
-        </p:spPr>
-        <p:txBody>
-          <a:bodyPr wrap="square" lIns="0" tIns="0" rIns="0" bIns="0" rtlCol="0" anchor="t"/>
-          <a:lstStyle/>
-          <a:p>
-            <a:pPr algn="l" indent="0" marL="0">
-              <a:spcAft>
-                <a:spcPts val="800"/>
-              </a:spcAft>
-              <a:buNone/>
-            </a:pPr>
-            <a:r>
-              <a:rPr lang="en-US" sz="4000" i="1" dirty="0">
-                <a:solidFill>
-                  <a:srgbClr val="111111"/>
-                </a:solidFill>
-                <a:latin typeface="Times New Roman" pitchFamily="34" charset="0"/>
-                <a:ea typeface="Times New Roman" pitchFamily="34" charset="-122"/>
-                <a:cs typeface="Times New Roman" pitchFamily="34" charset="-120"/>
-              </a:rPr>
-              <a:t>Age and sex composition is presented as follows:</a:t>
-            </a:r>
-            <a:endParaRPr lang="en-US" sz="4000" dirty="0"/>
-          </a:p>
-          <a:p>
-            <a:pPr algn="l" indent="0" marL="0">
-              <a:spcAft>
-                <a:spcPts val="800"/>
-              </a:spcAft>
-              <a:buNone/>
-            </a:pPr>
-            <a:r>
-              <a:rPr lang="en-US" sz="4000" b="1" dirty="0">
-                <a:solidFill>
-                  <a:srgbClr val="111111"/>
-                </a:solidFill>
-                <a:latin typeface="Times New Roman" pitchFamily="34" charset="0"/>
-                <a:ea typeface="Times New Roman" pitchFamily="34" charset="-122"/>
-                <a:cs typeface="Times New Roman" pitchFamily="34" charset="-120"/>
-              </a:rPr>
-              <a:t>Basis of analysis: </a:t>
-            </a:r>
-            <a:pPr algn="l" indent="0" marL="0">
-              <a:spcAft>
-                <a:spcPts val="800"/>
-              </a:spcAft>
-              <a:buNone/>
-            </a:pPr>
-            <a:r>
-              <a:rPr lang="en-US" sz="4000" dirty="0">
-                <a:solidFill>
-                  <a:srgbClr val="111111"/>
-                </a:solidFill>
-                <a:latin typeface="Times New Roman" pitchFamily="34" charset="0"/>
-                <a:ea typeface="Times New Roman" pitchFamily="34" charset="-122"/>
-                <a:cs typeface="Times New Roman" pitchFamily="34" charset="-120"/>
-              </a:rPr>
-              <a:t>The division of a population by age and sex shows its past and helps to predict its future needs.</a:t>
-            </a:r>
-            <a:endParaRPr lang="en-US" sz="4000" dirty="0"/>
+              <a:t>Illustration: the sex ratio</a:t>
+            </a:r>
+            <a:endParaRPr lang="en-US" sz="1600" dirty="0"/>
           </a:p>
         </p:txBody>
       </p:sp>
@@ -16228,7 +16178,7 @@
         <p:spPr>
           <a:xfrm>
             <a:off x="0" y="658368"/>
-            <a:ext cx="5120640" cy="5833872"/>
+            <a:ext cx="3840480" cy="5833872"/>
           </a:xfrm>
           <a:prstGeom prst="rect">
             <a:avLst/>
@@ -16243,8 +16193,8 @@
         </p:nvSpPr>
         <p:spPr>
           <a:xfrm>
-            <a:off x="5349240" y="1005840"/>
-            <a:ext cx="6522415" cy="731520"/>
+            <a:off x="4069080" y="1005840"/>
+            <a:ext cx="7802575" cy="731520"/>
           </a:xfrm>
           <a:prstGeom prst="rect">
             <a:avLst/>
@@ -16270,7 +16220,7 @@
                 <a:ea typeface="Times New Roman" pitchFamily="34" charset="-122"/>
                 <a:cs typeface="Times New Roman" pitchFamily="34" charset="-120"/>
               </a:rPr>
-              <a:t>1. Meaning of Age and Sex Composition (continued)</a:t>
+              <a:t>1. Meaning of Age and Sex Composition</a:t>
             </a:r>
             <a:endParaRPr lang="en-US" sz="3600" dirty="0"/>
           </a:p>
@@ -16284,8 +16234,8 @@
         </p:nvSpPr>
         <p:spPr>
           <a:xfrm>
-            <a:off x="5349240" y="1783080"/>
-            <a:ext cx="6522415" cy="4663440"/>
+            <a:off x="4069080" y="1783080"/>
+            <a:ext cx="7802575" cy="4663440"/>
           </a:xfrm>
           <a:prstGeom prst="rect">
             <a:avLst/>
@@ -16312,17 +16262,13 @@
                 <a:ea typeface="Times New Roman" pitchFamily="34" charset="-122"/>
                 <a:cs typeface="Times New Roman" pitchFamily="34" charset="-120"/>
               </a:rPr>
-              <a:t>Age groups:</a:t>
-            </a:r>
-            <a:endParaRPr lang="en-US" sz="4000" dirty="0"/>
-          </a:p>
-          <a:p>
-            <a:pPr algn="l" marL="342900" indent="-342900">
+              <a:t>Factors of the sex ratio: </a:t>
+            </a:r>
+            <a:pPr algn="l" indent="0" marL="0">
               <a:spcAft>
                 <a:spcPts val="800"/>
               </a:spcAft>
-              <a:buSzPct val="100000"/>
-              <a:buChar char="•"/>
+              <a:buNone/>
             </a:pPr>
             <a:r>
               <a:rPr lang="en-US" sz="4000" dirty="0">
@@ -16333,28 +16279,7 @@
                 <a:ea typeface="Times New Roman" pitchFamily="34" charset="-122"/>
                 <a:cs typeface="Times New Roman" pitchFamily="34" charset="-120"/>
               </a:rPr>
-              <a:t>Young dependants (0–14 years), produced by high birth rates.</a:t>
-            </a:r>
-            <a:endParaRPr lang="en-US" sz="4000" dirty="0"/>
-          </a:p>
-          <a:p>
-            <a:pPr algn="l" marL="342900" indent="-342900">
-              <a:spcAft>
-                <a:spcPts val="800"/>
-              </a:spcAft>
-              <a:buSzPct val="100000"/>
-              <a:buChar char="•"/>
-            </a:pPr>
-            <a:r>
-              <a:rPr lang="en-US" sz="4000" dirty="0">
-                <a:solidFill>
-                  <a:srgbClr val="111111"/>
-                </a:solidFill>
-                <a:latin typeface="Times New Roman" pitchFamily="34" charset="0"/>
-                <a:ea typeface="Times New Roman" pitchFamily="34" charset="-122"/>
-                <a:cs typeface="Times New Roman" pitchFamily="34" charset="-120"/>
-              </a:rPr>
-              <a:t>Working population (15–64 years), which produces and pays taxes.</a:t>
+              <a:t>About 105 boys are born for every 100 girls, but women live longer, so old people are mostly women. Men migrate more for work and are killed more in wars, so towns and mining areas have more men.</a:t>
             </a:r>
             <a:endParaRPr lang="en-US" sz="4000" dirty="0"/>
           </a:p>
@@ -16472,9 +16397,170 @@
           </a:p>
         </p:txBody>
       </p:sp>
+      <p:sp>
+        <p:nvSpPr>
+          <p:cNvPr id="3" name="Text 1"/>
+          <p:cNvSpPr/>
+          <p:nvPr/>
+        </p:nvSpPr>
+        <p:spPr>
+          <a:xfrm>
+            <a:off x="365760" y="1005840"/>
+            <a:ext cx="11460175" cy="731520"/>
+          </a:xfrm>
+          <a:prstGeom prst="rect">
+            <a:avLst/>
+          </a:prstGeom>
+          <a:noFill/>
+          <a:ln/>
+        </p:spPr>
+        <p:txBody>
+          <a:bodyPr wrap="square" lIns="0" tIns="0" rIns="0" bIns="0" rtlCol="0" anchor="ctr">
+            <a:normAutofit/>
+          </a:bodyPr>
+          <a:lstStyle/>
+          <a:p>
+            <a:pPr algn="ctr" indent="0" marL="0">
+              <a:buNone/>
+            </a:pPr>
+            <a:r>
+              <a:rPr lang="en-US" sz="3600" b="1" dirty="0">
+                <a:solidFill>
+                  <a:srgbClr val="990011"/>
+                </a:solidFill>
+                <a:latin typeface="Times New Roman" pitchFamily="34" charset="0"/>
+                <a:ea typeface="Times New Roman" pitchFamily="34" charset="-122"/>
+                <a:cs typeface="Times New Roman" pitchFamily="34" charset="-120"/>
+              </a:rPr>
+              <a:t>2. Global Patterns</a:t>
+            </a:r>
+            <a:endParaRPr lang="en-US" sz="3600" dirty="0"/>
+          </a:p>
+        </p:txBody>
+      </p:sp>
+      <p:sp>
+        <p:nvSpPr>
+          <p:cNvPr id="4" name="Text 2"/>
+          <p:cNvSpPr/>
+          <p:nvPr/>
+        </p:nvSpPr>
+        <p:spPr>
+          <a:xfrm>
+            <a:off x="365760" y="1737360"/>
+            <a:ext cx="6035040" cy="457200"/>
+          </a:xfrm>
+          <a:prstGeom prst="rect">
+            <a:avLst/>
+          </a:prstGeom>
+          <a:noFill/>
+          <a:ln/>
+        </p:spPr>
+        <p:txBody>
+          <a:bodyPr wrap="square" lIns="0" tIns="0" rIns="0" bIns="0" rtlCol="0" anchor="ctr">
+            <a:normAutofit/>
+          </a:bodyPr>
+          <a:lstStyle/>
+          <a:p>
+            <a:pPr algn="l" indent="0" marL="0">
+              <a:buNone/>
+            </a:pPr>
+            <a:r>
+              <a:rPr lang="en-US" sz="3000" b="1" dirty="0">
+                <a:solidFill>
+                  <a:srgbClr val="990011"/>
+                </a:solidFill>
+                <a:latin typeface="Times New Roman" pitchFamily="34" charset="0"/>
+                <a:ea typeface="Times New Roman" pitchFamily="34" charset="-122"/>
+                <a:cs typeface="Times New Roman" pitchFamily="34" charset="-120"/>
+              </a:rPr>
+              <a:t>A) The Youthful Population</a:t>
+            </a:r>
+            <a:endParaRPr lang="en-US" sz="3000" dirty="0"/>
+          </a:p>
+        </p:txBody>
+      </p:sp>
+      <p:sp>
+        <p:nvSpPr>
+          <p:cNvPr id="5" name="Text 3"/>
+          <p:cNvSpPr/>
+          <p:nvPr/>
+        </p:nvSpPr>
+        <p:spPr>
+          <a:xfrm>
+            <a:off x="365760" y="2240280"/>
+            <a:ext cx="6035040" cy="4160520"/>
+          </a:xfrm>
+          <a:prstGeom prst="rect">
+            <a:avLst/>
+          </a:prstGeom>
+          <a:noFill/>
+          <a:ln/>
+        </p:spPr>
+        <p:txBody>
+          <a:bodyPr wrap="square" lIns="0" tIns="0" rIns="0" bIns="0" rtlCol="0" anchor="t"/>
+          <a:lstStyle/>
+          <a:p>
+            <a:pPr algn="l" indent="0" marL="0">
+              <a:spcAft>
+                <a:spcPts val="800"/>
+              </a:spcAft>
+              <a:buNone/>
+            </a:pPr>
+            <a:r>
+              <a:rPr lang="en-US" sz="3000" i="1" dirty="0">
+                <a:solidFill>
+                  <a:srgbClr val="111111"/>
+                </a:solidFill>
+                <a:latin typeface="Times New Roman" pitchFamily="34" charset="0"/>
+                <a:ea typeface="Times New Roman" pitchFamily="34" charset="-122"/>
+                <a:cs typeface="Times New Roman" pitchFamily="34" charset="-120"/>
+              </a:rPr>
+              <a:t>The youthful population has the following characteristics:</a:t>
+            </a:r>
+            <a:endParaRPr lang="en-US" sz="3000" dirty="0"/>
+          </a:p>
+          <a:p>
+            <a:pPr algn="l" indent="0" marL="0">
+              <a:spcAft>
+                <a:spcPts val="800"/>
+              </a:spcAft>
+              <a:buNone/>
+            </a:pPr>
+            <a:r>
+              <a:rPr lang="en-US" sz="3000" b="1" dirty="0">
+                <a:solidFill>
+                  <a:srgbClr val="111111"/>
+                </a:solidFill>
+                <a:latin typeface="Times New Roman" pitchFamily="34" charset="0"/>
+                <a:ea typeface="Times New Roman" pitchFamily="34" charset="-122"/>
+                <a:cs typeface="Times New Roman" pitchFamily="34" charset="-120"/>
+              </a:rPr>
+              <a:t>Characteristics: </a:t>
+            </a:r>
+            <a:pPr algn="l" indent="0" marL="0">
+              <a:spcAft>
+                <a:spcPts val="800"/>
+              </a:spcAft>
+              <a:buNone/>
+            </a:pPr>
+            <a:r>
+              <a:rPr lang="en-US" sz="3000" dirty="0">
+                <a:solidFill>
+                  <a:srgbClr val="111111"/>
+                </a:solidFill>
+                <a:latin typeface="Times New Roman" pitchFamily="34" charset="0"/>
+                <a:ea typeface="Times New Roman" pitchFamily="34" charset="-122"/>
+                <a:cs typeface="Times New Roman" pitchFamily="34" charset="-120"/>
+              </a:rPr>
+              <a:t>More than 40 % of the people are under 15 and fewer than 5 % are 65 or over. It is found in developing countries, such as Niger, Nigeria and the DR Congo, where birth rates are high.</a:t>
+            </a:r>
+            <a:endParaRPr lang="en-US" sz="3000" dirty="0"/>
+          </a:p>
+        </p:txBody>
+      </p:sp>
       <p:pic>
         <p:nvPicPr>
-          <p:cNvPr id="3" name="Image 0" descr="/home/claude/f4/img/minesec_sheet.png">    </p:cNvPr>
+          <p:cNvPr id="6" name="Image 0" descr="/home/claude/f4/img/v2/youth_ageing_big.png">    </p:cNvPr>
           <p:cNvPicPr>
             <a:picLocks noChangeAspect="1"/>
           </p:cNvPicPr>
@@ -16488,8 +16574,8 @@
         </p:blipFill>
         <p:spPr>
           <a:xfrm>
-            <a:off x="0" y="658368"/>
-            <a:ext cx="5120640" cy="5833872"/>
+            <a:off x="6537960" y="2721454"/>
+            <a:ext cx="5470855" cy="2393499"/>
           </a:xfrm>
           <a:prstGeom prst="rect">
             <a:avLst/>
@@ -16498,14 +16584,14 @@
       </p:pic>
       <p:sp>
         <p:nvSpPr>
-          <p:cNvPr id="4" name="Text 1"/>
+          <p:cNvPr id="7" name="Text 4"/>
           <p:cNvSpPr/>
           <p:nvPr/>
         </p:nvSpPr>
         <p:spPr>
           <a:xfrm>
-            <a:off x="5349240" y="1005840"/>
-            <a:ext cx="6522415" cy="731520"/>
+            <a:off x="6537960" y="6089904"/>
+            <a:ext cx="5470855" cy="347472"/>
           </a:xfrm>
           <a:prstGeom prst="rect">
             <a:avLst/>
@@ -16514,69 +16600,24 @@
           <a:ln/>
         </p:spPr>
         <p:txBody>
-          <a:bodyPr wrap="square" lIns="0" tIns="0" rIns="0" bIns="0" rtlCol="0" anchor="ctr">
-            <a:normAutofit/>
-          </a:bodyPr>
+          <a:bodyPr wrap="square" lIns="0" tIns="0" rIns="0" bIns="0" rtlCol="0" anchor="ctr"/>
           <a:lstStyle/>
           <a:p>
             <a:pPr algn="ctr" indent="0" marL="0">
               <a:buNone/>
             </a:pPr>
             <a:r>
-              <a:rPr lang="en-US" sz="3600" b="1" dirty="0">
-                <a:solidFill>
-                  <a:srgbClr val="990011"/>
+              <a:rPr lang="en-US" sz="1600" i="1" dirty="0">
+                <a:solidFill>
+                  <a:srgbClr val="555555"/>
                 </a:solidFill>
                 <a:latin typeface="Times New Roman" pitchFamily="34" charset="0"/>
                 <a:ea typeface="Times New Roman" pitchFamily="34" charset="-122"/>
                 <a:cs typeface="Times New Roman" pitchFamily="34" charset="-120"/>
               </a:rPr>
-              <a:t>1. Meaning of Age and Sex Composition (continued)</a:t>
-            </a:r>
-            <a:endParaRPr lang="en-US" sz="3600" dirty="0"/>
-          </a:p>
-        </p:txBody>
-      </p:sp>
-      <p:sp>
-        <p:nvSpPr>
-          <p:cNvPr id="5" name="Text 2"/>
-          <p:cNvSpPr/>
-          <p:nvPr/>
-        </p:nvSpPr>
-        <p:spPr>
-          <a:xfrm>
-            <a:off x="5349240" y="1783080"/>
-            <a:ext cx="6522415" cy="4663440"/>
-          </a:xfrm>
-          <a:prstGeom prst="rect">
-            <a:avLst/>
-          </a:prstGeom>
-          <a:noFill/>
-          <a:ln/>
-        </p:spPr>
-        <p:txBody>
-          <a:bodyPr wrap="square" lIns="0" tIns="0" rIns="0" bIns="0" rtlCol="0" anchor="t"/>
-          <a:lstStyle/>
-          <a:p>
-            <a:pPr algn="l" marL="342900" indent="-342900">
-              <a:spcAft>
-                <a:spcPts val="800"/>
-              </a:spcAft>
-              <a:buSzPct val="100000"/>
-              <a:buChar char="•"/>
-            </a:pPr>
-            <a:r>
-              <a:rPr lang="en-US" sz="4000" dirty="0">
-                <a:solidFill>
-                  <a:srgbClr val="111111"/>
-                </a:solidFill>
-                <a:latin typeface="Times New Roman" pitchFamily="34" charset="0"/>
-                <a:ea typeface="Times New Roman" pitchFamily="34" charset="-122"/>
-                <a:cs typeface="Times New Roman" pitchFamily="34" charset="-120"/>
-              </a:rPr>
-              <a:t>Old dependants (65 years and over), numerous where death rates are low and life expectancy is high.</a:t>
-            </a:r>
-            <a:endParaRPr lang="en-US" sz="4000" dirty="0"/>
+              <a:t>Illustration: youthful and ageing populations</a:t>
+            </a:r>
+            <a:endParaRPr lang="en-US" sz="1600" dirty="0"/>
           </a:p>
         </p:txBody>
       </p:sp>
@@ -16727,7 +16768,7 @@
                 <a:ea typeface="Times New Roman" pitchFamily="34" charset="-122"/>
                 <a:cs typeface="Times New Roman" pitchFamily="34" charset="-120"/>
               </a:rPr>
-              <a:t>1. Meaning of Age and Sex Composition</a:t>
+              <a:t>2. Global Patterns</a:t>
             </a:r>
             <a:endParaRPr lang="en-US" sz="3600" dirty="0"/>
           </a:p>
@@ -16741,8 +16782,49 @@
         </p:nvSpPr>
         <p:spPr>
           <a:xfrm>
-            <a:off x="365760" y="1783080"/>
-            <a:ext cx="4846320" cy="4617720"/>
+            <a:off x="365760" y="1737360"/>
+            <a:ext cx="6035040" cy="457200"/>
+          </a:xfrm>
+          <a:prstGeom prst="rect">
+            <a:avLst/>
+          </a:prstGeom>
+          <a:noFill/>
+          <a:ln/>
+        </p:spPr>
+        <p:txBody>
+          <a:bodyPr wrap="square" lIns="0" tIns="0" rIns="0" bIns="0" rtlCol="0" anchor="ctr">
+            <a:normAutofit/>
+          </a:bodyPr>
+          <a:lstStyle/>
+          <a:p>
+            <a:pPr algn="l" indent="0" marL="0">
+              <a:buNone/>
+            </a:pPr>
+            <a:r>
+              <a:rPr lang="en-US" sz="3000" b="1" dirty="0">
+                <a:solidFill>
+                  <a:srgbClr val="990011"/>
+                </a:solidFill>
+                <a:latin typeface="Times New Roman" pitchFamily="34" charset="0"/>
+                <a:ea typeface="Times New Roman" pitchFamily="34" charset="-122"/>
+                <a:cs typeface="Times New Roman" pitchFamily="34" charset="-120"/>
+              </a:rPr>
+              <a:t>A) The Youthful Population</a:t>
+            </a:r>
+            <a:endParaRPr lang="en-US" sz="3000" dirty="0"/>
+          </a:p>
+        </p:txBody>
+      </p:sp>
+      <p:sp>
+        <p:nvSpPr>
+          <p:cNvPr id="5" name="Text 3"/>
+          <p:cNvSpPr/>
+          <p:nvPr/>
+        </p:nvSpPr>
+        <p:spPr>
+          <a:xfrm>
+            <a:off x="365760" y="2240280"/>
+            <a:ext cx="6035040" cy="4160520"/>
           </a:xfrm>
           <a:prstGeom prst="rect">
             <a:avLst/>
@@ -16769,7 +16851,7 @@
                 <a:ea typeface="Times New Roman" pitchFamily="34" charset="-122"/>
                 <a:cs typeface="Times New Roman" pitchFamily="34" charset="-120"/>
               </a:rPr>
-              <a:t>Sex ratio: </a:t>
+              <a:t>Example of Cameroon: </a:t>
             </a:r>
             <a:pPr algn="l" indent="0" marL="0">
               <a:spcAft>
@@ -16786,7 +16868,7 @@
                 <a:ea typeface="Times New Roman" pitchFamily="34" charset="-122"/>
                 <a:cs typeface="Times New Roman" pitchFamily="34" charset="-120"/>
               </a:rPr>
-              <a:t>It is calculated as males ÷ females × 100; a ratio above 100 means more men than women.</a:t>
+              <a:t>About 42 % of Cameroonians are under 15 and only about 3 % are 65 or over. Cameroon therefore has a youthful population.</a:t>
             </a:r>
             <a:endParaRPr lang="en-US" sz="3600" dirty="0"/>
           </a:p>
@@ -16794,7 +16876,7 @@
       </p:sp>
       <p:pic>
         <p:nvPicPr>
-          <p:cNvPr id="5" name="Image 0" descr="/home/claude/f4/img/v2/pop2_sexratio.png">    </p:cNvPr>
+          <p:cNvPr id="6" name="Image 0" descr="/home/claude/f4/img/v2/pyramid_cameroon_big.png">    </p:cNvPr>
           <p:cNvPicPr>
             <a:picLocks noChangeAspect="1"/>
           </p:cNvPicPr>
@@ -16808,8 +16890,8 @@
         </p:blipFill>
         <p:spPr>
           <a:xfrm>
-            <a:off x="5349240" y="2617506"/>
-            <a:ext cx="6659575" cy="2601397"/>
+            <a:off x="6537960" y="2678713"/>
+            <a:ext cx="5470855" cy="2478981"/>
           </a:xfrm>
           <a:prstGeom prst="rect">
             <a:avLst/>
@@ -16818,14 +16900,14 @@
       </p:pic>
       <p:sp>
         <p:nvSpPr>
-          <p:cNvPr id="6" name="Text 3"/>
+          <p:cNvPr id="7" name="Text 4"/>
           <p:cNvSpPr/>
           <p:nvPr/>
         </p:nvSpPr>
         <p:spPr>
           <a:xfrm>
-            <a:off x="5349240" y="6089904"/>
-            <a:ext cx="6659575" cy="347472"/>
+            <a:off x="6537960" y="6089904"/>
+            <a:ext cx="5470855" cy="347472"/>
           </a:xfrm>
           <a:prstGeom prst="rect">
             <a:avLst/>
@@ -16849,7 +16931,7 @@
                 <a:ea typeface="Times New Roman" pitchFamily="34" charset="-122"/>
                 <a:cs typeface="Times New Roman" pitchFamily="34" charset="-120"/>
               </a:rPr>
-              <a:t>Illustration: the sex ratio</a:t>
+              <a:t>Illustration: the pyramid of Cameroon</a:t>
             </a:r>
             <a:endParaRPr lang="en-US" sz="1600" dirty="0"/>
           </a:p>
@@ -16984,7 +17066,7 @@
         <p:spPr>
           <a:xfrm>
             <a:off x="0" y="658368"/>
-            <a:ext cx="5120640" cy="5833872"/>
+            <a:ext cx="2468880" cy="5833872"/>
           </a:xfrm>
           <a:prstGeom prst="rect">
             <a:avLst/>
@@ -16999,8 +17081,8 @@
         </p:nvSpPr>
         <p:spPr>
           <a:xfrm>
-            <a:off x="5349240" y="1005840"/>
-            <a:ext cx="6522415" cy="731520"/>
+            <a:off x="2697480" y="1005840"/>
+            <a:ext cx="9174175" cy="731520"/>
           </a:xfrm>
           <a:prstGeom prst="rect">
             <a:avLst/>
@@ -17026,7 +17108,7 @@
                 <a:ea typeface="Times New Roman" pitchFamily="34" charset="-122"/>
                 <a:cs typeface="Times New Roman" pitchFamily="34" charset="-120"/>
               </a:rPr>
-              <a:t>1. Meaning of Age and Sex Composition</a:t>
+              <a:t>2. Global Patterns</a:t>
             </a:r>
             <a:endParaRPr lang="en-US" sz="3600" dirty="0"/>
           </a:p>
@@ -17040,8 +17122,47 @@
         </p:nvSpPr>
         <p:spPr>
           <a:xfrm>
-            <a:off x="5349240" y="1783080"/>
-            <a:ext cx="6522415" cy="4663440"/>
+            <a:off x="2697480" y="1737360"/>
+            <a:ext cx="9174175" cy="457200"/>
+          </a:xfrm>
+          <a:prstGeom prst="rect">
+            <a:avLst/>
+          </a:prstGeom>
+          <a:noFill/>
+          <a:ln/>
+        </p:spPr>
+        <p:txBody>
+          <a:bodyPr wrap="square" lIns="0" tIns="0" rIns="0" bIns="0" rtlCol="0" anchor="ctr"/>
+          <a:lstStyle/>
+          <a:p>
+            <a:pPr algn="l" indent="0" marL="0">
+              <a:buNone/>
+            </a:pPr>
+            <a:r>
+              <a:rPr lang="en-US" sz="3200" b="1" dirty="0">
+                <a:solidFill>
+                  <a:srgbClr val="990011"/>
+                </a:solidFill>
+                <a:latin typeface="Times New Roman" pitchFamily="34" charset="0"/>
+                <a:ea typeface="Times New Roman" pitchFamily="34" charset="-122"/>
+                <a:cs typeface="Times New Roman" pitchFamily="34" charset="-120"/>
+              </a:rPr>
+              <a:t>B) Consequences of a Youthful Population</a:t>
+            </a:r>
+            <a:endParaRPr lang="en-US" sz="3200" dirty="0"/>
+          </a:p>
+        </p:txBody>
+      </p:sp>
+      <p:sp>
+        <p:nvSpPr>
+          <p:cNvPr id="6" name="Text 3"/>
+          <p:cNvSpPr/>
+          <p:nvPr/>
+        </p:nvSpPr>
+        <p:spPr>
+          <a:xfrm>
+            <a:off x="2697480" y="2240280"/>
+            <a:ext cx="9174175" cy="4206240"/>
           </a:xfrm>
           <a:prstGeom prst="rect">
             <a:avLst/>
@@ -17060,7 +17181,7 @@
               <a:buNone/>
             </a:pPr>
             <a:r>
-              <a:rPr lang="en-US" sz="4000" b="1" dirty="0">
+              <a:rPr lang="en-US" sz="4000" i="1" dirty="0">
                 <a:solidFill>
                   <a:srgbClr val="111111"/>
                 </a:solidFill>
@@ -17068,20 +17189,19 @@
                 <a:ea typeface="Times New Roman" pitchFamily="34" charset="-122"/>
                 <a:cs typeface="Times New Roman" pitchFamily="34" charset="-120"/>
               </a:rPr>
-              <a:t>Factors of the sex ratio:</a:t>
+              <a:t>A youthful population has the following socio-economic consequences:</a:t>
             </a:r>
             <a:endParaRPr lang="en-US" sz="4000" dirty="0"/>
           </a:p>
           <a:p>
-            <a:pPr algn="l" marL="342900" indent="-342900">
+            <a:pPr algn="l" indent="0" marL="0">
               <a:spcAft>
                 <a:spcPts val="800"/>
               </a:spcAft>
-              <a:buSzPct val="100000"/>
-              <a:buChar char="•"/>
-            </a:pPr>
-            <a:r>
-              <a:rPr lang="en-US" sz="4000" dirty="0">
+              <a:buNone/>
+            </a:pPr>
+            <a:r>
+              <a:rPr lang="en-US" sz="4000" b="1" dirty="0">
                 <a:solidFill>
                   <a:srgbClr val="111111"/>
                 </a:solidFill>
@@ -17089,17 +17209,13 @@
                 <a:ea typeface="Times New Roman" pitchFamily="34" charset="-122"/>
                 <a:cs typeface="Times New Roman" pitchFamily="34" charset="-120"/>
               </a:rPr>
-              <a:t>Births: about 105 boys are born for every 100 girls.</a:t>
-            </a:r>
-            <a:endParaRPr lang="en-US" sz="4000" dirty="0"/>
-          </a:p>
-          <a:p>
-            <a:pPr algn="l" marL="342900" indent="-342900">
+              <a:t>High dependency: </a:t>
+            </a:r>
+            <a:pPr algn="l" indent="0" marL="0">
               <a:spcAft>
                 <a:spcPts val="800"/>
               </a:spcAft>
-              <a:buSzPct val="100000"/>
-              <a:buChar char="•"/>
+              <a:buNone/>
             </a:pPr>
             <a:r>
               <a:rPr lang="en-US" sz="4000" dirty="0">
@@ -17110,7 +17226,7 @@
                 <a:ea typeface="Times New Roman" pitchFamily="34" charset="-122"/>
                 <a:cs typeface="Times New Roman" pitchFamily="34" charset="-120"/>
               </a:rPr>
-              <a:t>Life expectancy: women live longer, so old people are mostly women.</a:t>
+              <a:t>Few workers must support many children. As a result, families and the state save and invest little.</a:t>
             </a:r>
             <a:endParaRPr lang="en-US" sz="4000" dirty="0"/>
           </a:p>
@@ -17228,9 +17344,150 @@
           </a:p>
         </p:txBody>
       </p:sp>
+      <p:sp>
+        <p:nvSpPr>
+          <p:cNvPr id="3" name="Text 1"/>
+          <p:cNvSpPr/>
+          <p:nvPr/>
+        </p:nvSpPr>
+        <p:spPr>
+          <a:xfrm>
+            <a:off x="365760" y="1005840"/>
+            <a:ext cx="11460175" cy="731520"/>
+          </a:xfrm>
+          <a:prstGeom prst="rect">
+            <a:avLst/>
+          </a:prstGeom>
+          <a:noFill/>
+          <a:ln/>
+        </p:spPr>
+        <p:txBody>
+          <a:bodyPr wrap="square" lIns="0" tIns="0" rIns="0" bIns="0" rtlCol="0" anchor="ctr">
+            <a:normAutofit/>
+          </a:bodyPr>
+          <a:lstStyle/>
+          <a:p>
+            <a:pPr algn="ctr" indent="0" marL="0">
+              <a:buNone/>
+            </a:pPr>
+            <a:r>
+              <a:rPr lang="en-US" sz="3600" b="1" dirty="0">
+                <a:solidFill>
+                  <a:srgbClr val="990011"/>
+                </a:solidFill>
+                <a:latin typeface="Times New Roman" pitchFamily="34" charset="0"/>
+                <a:ea typeface="Times New Roman" pitchFamily="34" charset="-122"/>
+                <a:cs typeface="Times New Roman" pitchFamily="34" charset="-120"/>
+              </a:rPr>
+              <a:t>2. Global Patterns</a:t>
+            </a:r>
+            <a:endParaRPr lang="en-US" sz="3600" dirty="0"/>
+          </a:p>
+        </p:txBody>
+      </p:sp>
+      <p:sp>
+        <p:nvSpPr>
+          <p:cNvPr id="4" name="Text 2"/>
+          <p:cNvSpPr/>
+          <p:nvPr/>
+        </p:nvSpPr>
+        <p:spPr>
+          <a:xfrm>
+            <a:off x="365760" y="1737360"/>
+            <a:ext cx="6035040" cy="457200"/>
+          </a:xfrm>
+          <a:prstGeom prst="rect">
+            <a:avLst/>
+          </a:prstGeom>
+          <a:noFill/>
+          <a:ln/>
+        </p:spPr>
+        <p:txBody>
+          <a:bodyPr wrap="square" lIns="0" tIns="0" rIns="0" bIns="0" rtlCol="0" anchor="ctr">
+            <a:normAutofit/>
+          </a:bodyPr>
+          <a:lstStyle/>
+          <a:p>
+            <a:pPr algn="l" indent="0" marL="0">
+              <a:buNone/>
+            </a:pPr>
+            <a:r>
+              <a:rPr lang="en-US" sz="3000" b="1" dirty="0">
+                <a:solidFill>
+                  <a:srgbClr val="990011"/>
+                </a:solidFill>
+                <a:latin typeface="Times New Roman" pitchFamily="34" charset="0"/>
+                <a:ea typeface="Times New Roman" pitchFamily="34" charset="-122"/>
+                <a:cs typeface="Times New Roman" pitchFamily="34" charset="-120"/>
+              </a:rPr>
+              <a:t>B) Consequences of a Youthful Population</a:t>
+            </a:r>
+            <a:endParaRPr lang="en-US" sz="3000" dirty="0"/>
+          </a:p>
+        </p:txBody>
+      </p:sp>
+      <p:sp>
+        <p:nvSpPr>
+          <p:cNvPr id="5" name="Text 3"/>
+          <p:cNvSpPr/>
+          <p:nvPr/>
+        </p:nvSpPr>
+        <p:spPr>
+          <a:xfrm>
+            <a:off x="365760" y="2240280"/>
+            <a:ext cx="6035040" cy="4160520"/>
+          </a:xfrm>
+          <a:prstGeom prst="rect">
+            <a:avLst/>
+          </a:prstGeom>
+          <a:noFill/>
+          <a:ln/>
+        </p:spPr>
+        <p:txBody>
+          <a:bodyPr wrap="square" lIns="0" tIns="0" rIns="0" bIns="0" rtlCol="0" anchor="t"/>
+          <a:lstStyle/>
+          <a:p>
+            <a:pPr algn="l" indent="0" marL="0">
+              <a:spcAft>
+                <a:spcPts val="800"/>
+              </a:spcAft>
+              <a:buNone/>
+            </a:pPr>
+            <a:r>
+              <a:rPr lang="en-US" sz="3600" b="1" dirty="0">
+                <a:solidFill>
+                  <a:srgbClr val="111111"/>
+                </a:solidFill>
+                <a:latin typeface="Times New Roman" pitchFamily="34" charset="0"/>
+                <a:ea typeface="Times New Roman" pitchFamily="34" charset="-122"/>
+                <a:cs typeface="Times New Roman" pitchFamily="34" charset="-120"/>
+              </a:rPr>
+              <a:t>Pressure on services: </a:t>
+            </a:r>
+            <a:pPr algn="l" indent="0" marL="0">
+              <a:spcAft>
+                <a:spcPts val="800"/>
+              </a:spcAft>
+              <a:buNone/>
+            </a:pPr>
+            <a:r>
+              <a:rPr lang="en-US" sz="3600" dirty="0">
+                <a:solidFill>
+                  <a:srgbClr val="111111"/>
+                </a:solidFill>
+                <a:latin typeface="Times New Roman" pitchFamily="34" charset="0"/>
+                <a:ea typeface="Times New Roman" pitchFamily="34" charset="-122"/>
+                <a:cs typeface="Times New Roman" pitchFamily="34" charset="-120"/>
+              </a:rPr>
+              <a:t>There is a huge demand for schools, maternity wards and basic health care. Classrooms are overcrowded, as in many schools of Garoua.</a:t>
+            </a:r>
+            <a:endParaRPr lang="en-US" sz="3600" dirty="0"/>
+          </a:p>
+        </p:txBody>
+      </p:sp>
       <p:pic>
         <p:nvPicPr>
-          <p:cNvPr id="3" name="Image 0" descr="/home/claude/f4/img/minesec_sheet.png">    </p:cNvPr>
+          <p:cNvPr id="6" name="Image 0" descr="/home/claude/f4/img/v2/f2t_classroom.jpg">    </p:cNvPr>
           <p:cNvPicPr>
             <a:picLocks noChangeAspect="1"/>
           </p:cNvPicPr>
@@ -17244,8 +17501,8 @@
         </p:blipFill>
         <p:spPr>
           <a:xfrm>
-            <a:off x="0" y="658368"/>
-            <a:ext cx="5120640" cy="5833872"/>
+            <a:off x="6537960" y="2400897"/>
+            <a:ext cx="5470855" cy="3034615"/>
           </a:xfrm>
           <a:prstGeom prst="rect">
             <a:avLst/>
@@ -17254,14 +17511,14 @@
       </p:pic>
       <p:sp>
         <p:nvSpPr>
-          <p:cNvPr id="4" name="Text 1"/>
+          <p:cNvPr id="7" name="Text 4"/>
           <p:cNvSpPr/>
           <p:nvPr/>
         </p:nvSpPr>
         <p:spPr>
           <a:xfrm>
-            <a:off x="5349240" y="1005840"/>
-            <a:ext cx="6522415" cy="731520"/>
+            <a:off x="6537960" y="6089904"/>
+            <a:ext cx="5470855" cy="347472"/>
           </a:xfrm>
           <a:prstGeom prst="rect">
             <a:avLst/>
@@ -17270,90 +17527,24 @@
           <a:ln/>
         </p:spPr>
         <p:txBody>
-          <a:bodyPr wrap="square" lIns="0" tIns="0" rIns="0" bIns="0" rtlCol="0" anchor="ctr">
-            <a:normAutofit/>
-          </a:bodyPr>
+          <a:bodyPr wrap="square" lIns="0" tIns="0" rIns="0" bIns="0" rtlCol="0" anchor="ctr"/>
           <a:lstStyle/>
           <a:p>
             <a:pPr algn="ctr" indent="0" marL="0">
               <a:buNone/>
             </a:pPr>
             <a:r>
-              <a:rPr lang="en-US" sz="3600" b="1" dirty="0">
-                <a:solidFill>
-                  <a:srgbClr val="990011"/>
+              <a:rPr lang="en-US" sz="1600" i="1" dirty="0">
+                <a:solidFill>
+                  <a:srgbClr val="555555"/>
                 </a:solidFill>
                 <a:latin typeface="Times New Roman" pitchFamily="34" charset="0"/>
                 <a:ea typeface="Times New Roman" pitchFamily="34" charset="-122"/>
                 <a:cs typeface="Times New Roman" pitchFamily="34" charset="-120"/>
               </a:rPr>
-              <a:t>1. Meaning of Age and Sex Composition (continued)</a:t>
-            </a:r>
-            <a:endParaRPr lang="en-US" sz="3600" dirty="0"/>
-          </a:p>
-        </p:txBody>
-      </p:sp>
-      <p:sp>
-        <p:nvSpPr>
-          <p:cNvPr id="5" name="Text 2"/>
-          <p:cNvSpPr/>
-          <p:nvPr/>
-        </p:nvSpPr>
-        <p:spPr>
-          <a:xfrm>
-            <a:off x="5349240" y="1783080"/>
-            <a:ext cx="6522415" cy="4663440"/>
-          </a:xfrm>
-          <a:prstGeom prst="rect">
-            <a:avLst/>
-          </a:prstGeom>
-          <a:noFill/>
-          <a:ln/>
-        </p:spPr>
-        <p:txBody>
-          <a:bodyPr wrap="square" lIns="0" tIns="0" rIns="0" bIns="0" rtlCol="0" anchor="t"/>
-          <a:lstStyle/>
-          <a:p>
-            <a:pPr algn="l" marL="342900" indent="-342900">
-              <a:spcAft>
-                <a:spcPts val="800"/>
-              </a:spcAft>
-              <a:buSzPct val="100000"/>
-              <a:buChar char="•"/>
-            </a:pPr>
-            <a:r>
-              <a:rPr lang="en-US" sz="4000" dirty="0">
-                <a:solidFill>
-                  <a:srgbClr val="111111"/>
-                </a:solidFill>
-                <a:latin typeface="Times New Roman" pitchFamily="34" charset="0"/>
-                <a:ea typeface="Times New Roman" pitchFamily="34" charset="-122"/>
-                <a:cs typeface="Times New Roman" pitchFamily="34" charset="-120"/>
-              </a:rPr>
-              <a:t>Migration: men migrate more for work, so towns and mining areas have more men.</a:t>
-            </a:r>
-            <a:endParaRPr lang="en-US" sz="4000" dirty="0"/>
-          </a:p>
-          <a:p>
-            <a:pPr algn="l" marL="342900" indent="-342900">
-              <a:spcAft>
-                <a:spcPts val="800"/>
-              </a:spcAft>
-              <a:buSzPct val="100000"/>
-              <a:buChar char="•"/>
-            </a:pPr>
-            <a:r>
-              <a:rPr lang="en-US" sz="4000" dirty="0">
-                <a:solidFill>
-                  <a:srgbClr val="111111"/>
-                </a:solidFill>
-                <a:latin typeface="Times New Roman" pitchFamily="34" charset="0"/>
-                <a:ea typeface="Times New Roman" pitchFamily="34" charset="-122"/>
-                <a:cs typeface="Times New Roman" pitchFamily="34" charset="-120"/>
-              </a:rPr>
-              <a:t>Wars kill more men than women.</a:t>
-            </a:r>
-            <a:endParaRPr lang="en-US" sz="4000" dirty="0"/>
+              <a:t>Illustration: a classroom</a:t>
+            </a:r>
+            <a:endParaRPr lang="en-US" sz="1600" dirty="0"/>
           </a:p>
         </p:txBody>
       </p:sp>
@@ -17469,170 +17660,9 @@
           </a:p>
         </p:txBody>
       </p:sp>
-      <p:sp>
-        <p:nvSpPr>
-          <p:cNvPr id="3" name="Text 1"/>
-          <p:cNvSpPr/>
-          <p:nvPr/>
-        </p:nvSpPr>
-        <p:spPr>
-          <a:xfrm>
-            <a:off x="365760" y="1005840"/>
-            <a:ext cx="11460175" cy="731520"/>
-          </a:xfrm>
-          <a:prstGeom prst="rect">
-            <a:avLst/>
-          </a:prstGeom>
-          <a:noFill/>
-          <a:ln/>
-        </p:spPr>
-        <p:txBody>
-          <a:bodyPr wrap="square" lIns="0" tIns="0" rIns="0" bIns="0" rtlCol="0" anchor="ctr">
-            <a:normAutofit/>
-          </a:bodyPr>
-          <a:lstStyle/>
-          <a:p>
-            <a:pPr algn="ctr" indent="0" marL="0">
-              <a:buNone/>
-            </a:pPr>
-            <a:r>
-              <a:rPr lang="en-US" sz="3600" b="1" dirty="0">
-                <a:solidFill>
-                  <a:srgbClr val="990011"/>
-                </a:solidFill>
-                <a:latin typeface="Times New Roman" pitchFamily="34" charset="0"/>
-                <a:ea typeface="Times New Roman" pitchFamily="34" charset="-122"/>
-                <a:cs typeface="Times New Roman" pitchFamily="34" charset="-120"/>
-              </a:rPr>
-              <a:t>2. Global Patterns</a:t>
-            </a:r>
-            <a:endParaRPr lang="en-US" sz="3600" dirty="0"/>
-          </a:p>
-        </p:txBody>
-      </p:sp>
-      <p:sp>
-        <p:nvSpPr>
-          <p:cNvPr id="4" name="Text 2"/>
-          <p:cNvSpPr/>
-          <p:nvPr/>
-        </p:nvSpPr>
-        <p:spPr>
-          <a:xfrm>
-            <a:off x="365760" y="1737360"/>
-            <a:ext cx="5120640" cy="457200"/>
-          </a:xfrm>
-          <a:prstGeom prst="rect">
-            <a:avLst/>
-          </a:prstGeom>
-          <a:noFill/>
-          <a:ln/>
-        </p:spPr>
-        <p:txBody>
-          <a:bodyPr wrap="square" lIns="0" tIns="0" rIns="0" bIns="0" rtlCol="0" anchor="ctr">
-            <a:normAutofit/>
-          </a:bodyPr>
-          <a:lstStyle/>
-          <a:p>
-            <a:pPr algn="l" indent="0" marL="0">
-              <a:buNone/>
-            </a:pPr>
-            <a:r>
-              <a:rPr lang="en-US" sz="3000" b="1" dirty="0">
-                <a:solidFill>
-                  <a:srgbClr val="990011"/>
-                </a:solidFill>
-                <a:latin typeface="Times New Roman" pitchFamily="34" charset="0"/>
-                <a:ea typeface="Times New Roman" pitchFamily="34" charset="-122"/>
-                <a:cs typeface="Times New Roman" pitchFamily="34" charset="-120"/>
-              </a:rPr>
-              <a:t>A) The Youthful Population</a:t>
-            </a:r>
-            <a:endParaRPr lang="en-US" sz="3000" dirty="0"/>
-          </a:p>
-        </p:txBody>
-      </p:sp>
-      <p:sp>
-        <p:nvSpPr>
-          <p:cNvPr id="5" name="Text 3"/>
-          <p:cNvSpPr/>
-          <p:nvPr/>
-        </p:nvSpPr>
-        <p:spPr>
-          <a:xfrm>
-            <a:off x="365760" y="2240280"/>
-            <a:ext cx="4846320" cy="4160520"/>
-          </a:xfrm>
-          <a:prstGeom prst="rect">
-            <a:avLst/>
-          </a:prstGeom>
-          <a:noFill/>
-          <a:ln/>
-        </p:spPr>
-        <p:txBody>
-          <a:bodyPr wrap="square" lIns="0" tIns="0" rIns="0" bIns="0" rtlCol="0" anchor="t"/>
-          <a:lstStyle/>
-          <a:p>
-            <a:pPr algn="l" indent="0" marL="0">
-              <a:spcAft>
-                <a:spcPts val="800"/>
-              </a:spcAft>
-              <a:buNone/>
-            </a:pPr>
-            <a:r>
-              <a:rPr lang="en-US" sz="3000" i="1" dirty="0">
-                <a:solidFill>
-                  <a:srgbClr val="111111"/>
-                </a:solidFill>
-                <a:latin typeface="Times New Roman" pitchFamily="34" charset="0"/>
-                <a:ea typeface="Times New Roman" pitchFamily="34" charset="-122"/>
-                <a:cs typeface="Times New Roman" pitchFamily="34" charset="-120"/>
-              </a:rPr>
-              <a:t>The youthful population has the following characteristics:</a:t>
-            </a:r>
-            <a:endParaRPr lang="en-US" sz="3000" dirty="0"/>
-          </a:p>
-          <a:p>
-            <a:pPr algn="l" indent="0" marL="0">
-              <a:spcAft>
-                <a:spcPts val="800"/>
-              </a:spcAft>
-              <a:buNone/>
-            </a:pPr>
-            <a:r>
-              <a:rPr lang="en-US" sz="3000" b="1" dirty="0">
-                <a:solidFill>
-                  <a:srgbClr val="111111"/>
-                </a:solidFill>
-                <a:latin typeface="Times New Roman" pitchFamily="34" charset="0"/>
-                <a:ea typeface="Times New Roman" pitchFamily="34" charset="-122"/>
-                <a:cs typeface="Times New Roman" pitchFamily="34" charset="-120"/>
-              </a:rPr>
-              <a:t>Characteristics: </a:t>
-            </a:r>
-            <a:pPr algn="l" indent="0" marL="0">
-              <a:spcAft>
-                <a:spcPts val="800"/>
-              </a:spcAft>
-              <a:buNone/>
-            </a:pPr>
-            <a:r>
-              <a:rPr lang="en-US" sz="3000" dirty="0">
-                <a:solidFill>
-                  <a:srgbClr val="111111"/>
-                </a:solidFill>
-                <a:latin typeface="Times New Roman" pitchFamily="34" charset="0"/>
-                <a:ea typeface="Times New Roman" pitchFamily="34" charset="-122"/>
-                <a:cs typeface="Times New Roman" pitchFamily="34" charset="-120"/>
-              </a:rPr>
-              <a:t>More than 40 % of the people are under 15 and fewer than 5 % are 65 or over, as in Niger, Nigeria and the DR Congo.</a:t>
-            </a:r>
-            <a:endParaRPr lang="en-US" sz="3000" dirty="0"/>
-          </a:p>
-        </p:txBody>
-      </p:sp>
       <p:pic>
         <p:nvPicPr>
-          <p:cNvPr id="6" name="Image 0" descr="/home/claude/f4/img/v2/youth_ageing_big.png">    </p:cNvPr>
+          <p:cNvPr id="3" name="Image 0" descr="/home/claude/f4/img/minesec_sheet.png">    </p:cNvPr>
           <p:cNvPicPr>
             <a:picLocks noChangeAspect="1"/>
           </p:cNvPicPr>
@@ -17646,8 +17676,8 @@
         </p:blipFill>
         <p:spPr>
           <a:xfrm>
-            <a:off x="5349240" y="2461422"/>
-            <a:ext cx="6659575" cy="2913564"/>
+            <a:off x="0" y="658368"/>
+            <a:ext cx="5120640" cy="5833872"/>
           </a:xfrm>
           <a:prstGeom prst="rect">
             <a:avLst/>
@@ -17656,14 +17686,14 @@
       </p:pic>
       <p:sp>
         <p:nvSpPr>
-          <p:cNvPr id="7" name="Text 4"/>
+          <p:cNvPr id="4" name="Text 1"/>
           <p:cNvSpPr/>
           <p:nvPr/>
         </p:nvSpPr>
         <p:spPr>
           <a:xfrm>
-            <a:off x="5349240" y="6089904"/>
-            <a:ext cx="6659575" cy="347472"/>
+            <a:off x="5349240" y="1005840"/>
+            <a:ext cx="6522415" cy="731520"/>
           </a:xfrm>
           <a:prstGeom prst="rect">
             <a:avLst/>
@@ -17672,24 +17702,124 @@
           <a:ln/>
         </p:spPr>
         <p:txBody>
-          <a:bodyPr wrap="square" lIns="0" tIns="0" rIns="0" bIns="0" rtlCol="0" anchor="ctr"/>
+          <a:bodyPr wrap="square" lIns="0" tIns="0" rIns="0" bIns="0" rtlCol="0" anchor="ctr">
+            <a:normAutofit/>
+          </a:bodyPr>
           <a:lstStyle/>
           <a:p>
             <a:pPr algn="ctr" indent="0" marL="0">
               <a:buNone/>
             </a:pPr>
             <a:r>
-              <a:rPr lang="en-US" sz="1600" i="1" dirty="0">
-                <a:solidFill>
-                  <a:srgbClr val="555555"/>
+              <a:rPr lang="en-US" sz="3600" b="1" dirty="0">
+                <a:solidFill>
+                  <a:srgbClr val="990011"/>
                 </a:solidFill>
                 <a:latin typeface="Times New Roman" pitchFamily="34" charset="0"/>
                 <a:ea typeface="Times New Roman" pitchFamily="34" charset="-122"/>
                 <a:cs typeface="Times New Roman" pitchFamily="34" charset="-120"/>
               </a:rPr>
-              <a:t>Illustration: young and old people</a:t>
-            </a:r>
-            <a:endParaRPr lang="en-US" sz="1600" dirty="0"/>
+              <a:t>2. Global Patterns</a:t>
+            </a:r>
+            <a:endParaRPr lang="en-US" sz="3600" dirty="0"/>
+          </a:p>
+        </p:txBody>
+      </p:sp>
+      <p:sp>
+        <p:nvSpPr>
+          <p:cNvPr id="5" name="Text 2"/>
+          <p:cNvSpPr/>
+          <p:nvPr/>
+        </p:nvSpPr>
+        <p:spPr>
+          <a:xfrm>
+            <a:off x="5349240" y="1737360"/>
+            <a:ext cx="6522415" cy="457200"/>
+          </a:xfrm>
+          <a:prstGeom prst="rect">
+            <a:avLst/>
+          </a:prstGeom>
+          <a:noFill/>
+          <a:ln/>
+        </p:spPr>
+        <p:txBody>
+          <a:bodyPr wrap="square" lIns="0" tIns="0" rIns="0" bIns="0" rtlCol="0" anchor="ctr"/>
+          <a:lstStyle/>
+          <a:p>
+            <a:pPr algn="l" indent="0" marL="0">
+              <a:buNone/>
+            </a:pPr>
+            <a:r>
+              <a:rPr lang="en-US" sz="2500" b="1" dirty="0">
+                <a:solidFill>
+                  <a:srgbClr val="990011"/>
+                </a:solidFill>
+                <a:latin typeface="Times New Roman" pitchFamily="34" charset="0"/>
+                <a:ea typeface="Times New Roman" pitchFamily="34" charset="-122"/>
+                <a:cs typeface="Times New Roman" pitchFamily="34" charset="-120"/>
+              </a:rPr>
+              <a:t>B) Consequences of a Youthful Population</a:t>
+            </a:r>
+            <a:endParaRPr lang="en-US" sz="2500" dirty="0"/>
+          </a:p>
+        </p:txBody>
+      </p:sp>
+      <p:sp>
+        <p:nvSpPr>
+          <p:cNvPr id="6" name="Text 3"/>
+          <p:cNvSpPr/>
+          <p:nvPr/>
+        </p:nvSpPr>
+        <p:spPr>
+          <a:xfrm>
+            <a:off x="5349240" y="2240280"/>
+            <a:ext cx="6522415" cy="4206240"/>
+          </a:xfrm>
+          <a:prstGeom prst="rect">
+            <a:avLst/>
+          </a:prstGeom>
+          <a:noFill/>
+          <a:ln/>
+        </p:spPr>
+        <p:txBody>
+          <a:bodyPr wrap="square" lIns="0" tIns="0" rIns="0" bIns="0" rtlCol="0" anchor="t"/>
+          <a:lstStyle/>
+          <a:p>
+            <a:pPr algn="l" indent="0" marL="0">
+              <a:spcAft>
+                <a:spcPts val="800"/>
+              </a:spcAft>
+              <a:buNone/>
+            </a:pPr>
+            <a:r>
+              <a:rPr lang="en-US" sz="4000" b="1" dirty="0">
+                <a:solidFill>
+                  <a:srgbClr val="111111"/>
+                </a:solidFill>
+                <a:latin typeface="Times New Roman" pitchFamily="34" charset="0"/>
+                <a:ea typeface="Times New Roman" pitchFamily="34" charset="-122"/>
+                <a:cs typeface="Times New Roman" pitchFamily="34" charset="-120"/>
+              </a:rPr>
+              <a:t>Unemployment: </a:t>
+            </a:r>
+            <a:pPr algn="l" indent="0" marL="0">
+              <a:spcAft>
+                <a:spcPts val="800"/>
+              </a:spcAft>
+              <a:buNone/>
+            </a:pPr>
+            <a:r>
+              <a:rPr lang="en-US" sz="4000" dirty="0">
+                <a:solidFill>
+                  <a:srgbClr val="111111"/>
+                </a:solidFill>
+                <a:latin typeface="Times New Roman" pitchFamily="34" charset="0"/>
+                <a:ea typeface="Times New Roman" pitchFamily="34" charset="-122"/>
+                <a:cs typeface="Times New Roman" pitchFamily="34" charset="-120"/>
+              </a:rPr>
+              <a:t>Many young people enter the job market each year, but jobs are too few. This causes unemployment and may lead to social unrest.</a:t>
+            </a:r>
+            <a:endParaRPr lang="en-US" sz="4000" dirty="0"/>
           </a:p>
         </p:txBody>
       </p:sp>
@@ -17805,150 +17935,9 @@
           </a:p>
         </p:txBody>
       </p:sp>
-      <p:sp>
-        <p:nvSpPr>
-          <p:cNvPr id="3" name="Text 1"/>
-          <p:cNvSpPr/>
-          <p:nvPr/>
-        </p:nvSpPr>
-        <p:spPr>
-          <a:xfrm>
-            <a:off x="365760" y="1005840"/>
-            <a:ext cx="11460175" cy="731520"/>
-          </a:xfrm>
-          <a:prstGeom prst="rect">
-            <a:avLst/>
-          </a:prstGeom>
-          <a:noFill/>
-          <a:ln/>
-        </p:spPr>
-        <p:txBody>
-          <a:bodyPr wrap="square" lIns="0" tIns="0" rIns="0" bIns="0" rtlCol="0" anchor="ctr">
-            <a:normAutofit/>
-          </a:bodyPr>
-          <a:lstStyle/>
-          <a:p>
-            <a:pPr algn="ctr" indent="0" marL="0">
-              <a:buNone/>
-            </a:pPr>
-            <a:r>
-              <a:rPr lang="en-US" sz="3600" b="1" dirty="0">
-                <a:solidFill>
-                  <a:srgbClr val="990011"/>
-                </a:solidFill>
-                <a:latin typeface="Times New Roman" pitchFamily="34" charset="0"/>
-                <a:ea typeface="Times New Roman" pitchFamily="34" charset="-122"/>
-                <a:cs typeface="Times New Roman" pitchFamily="34" charset="-120"/>
-              </a:rPr>
-              <a:t>2. Global Patterns</a:t>
-            </a:r>
-            <a:endParaRPr lang="en-US" sz="3600" dirty="0"/>
-          </a:p>
-        </p:txBody>
-      </p:sp>
-      <p:sp>
-        <p:nvSpPr>
-          <p:cNvPr id="4" name="Text 2"/>
-          <p:cNvSpPr/>
-          <p:nvPr/>
-        </p:nvSpPr>
-        <p:spPr>
-          <a:xfrm>
-            <a:off x="365760" y="1737360"/>
-            <a:ext cx="5120640" cy="457200"/>
-          </a:xfrm>
-          <a:prstGeom prst="rect">
-            <a:avLst/>
-          </a:prstGeom>
-          <a:noFill/>
-          <a:ln/>
-        </p:spPr>
-        <p:txBody>
-          <a:bodyPr wrap="square" lIns="0" tIns="0" rIns="0" bIns="0" rtlCol="0" anchor="ctr">
-            <a:normAutofit/>
-          </a:bodyPr>
-          <a:lstStyle/>
-          <a:p>
-            <a:pPr algn="l" indent="0" marL="0">
-              <a:buNone/>
-            </a:pPr>
-            <a:r>
-              <a:rPr lang="en-US" sz="3000" b="1" dirty="0">
-                <a:solidFill>
-                  <a:srgbClr val="990011"/>
-                </a:solidFill>
-                <a:latin typeface="Times New Roman" pitchFamily="34" charset="0"/>
-                <a:ea typeface="Times New Roman" pitchFamily="34" charset="-122"/>
-                <a:cs typeface="Times New Roman" pitchFamily="34" charset="-120"/>
-              </a:rPr>
-              <a:t>A) The Youthful Population</a:t>
-            </a:r>
-            <a:endParaRPr lang="en-US" sz="3000" dirty="0"/>
-          </a:p>
-        </p:txBody>
-      </p:sp>
-      <p:sp>
-        <p:nvSpPr>
-          <p:cNvPr id="5" name="Text 3"/>
-          <p:cNvSpPr/>
-          <p:nvPr/>
-        </p:nvSpPr>
-        <p:spPr>
-          <a:xfrm>
-            <a:off x="365760" y="2240280"/>
-            <a:ext cx="4846320" cy="4160520"/>
-          </a:xfrm>
-          <a:prstGeom prst="rect">
-            <a:avLst/>
-          </a:prstGeom>
-          <a:noFill/>
-          <a:ln/>
-        </p:spPr>
-        <p:txBody>
-          <a:bodyPr wrap="square" lIns="0" tIns="0" rIns="0" bIns="0" rtlCol="0" anchor="t"/>
-          <a:lstStyle/>
-          <a:p>
-            <a:pPr algn="l" indent="0" marL="0">
-              <a:spcAft>
-                <a:spcPts val="800"/>
-              </a:spcAft>
-              <a:buNone/>
-            </a:pPr>
-            <a:r>
-              <a:rPr lang="en-US" sz="3600" b="1" dirty="0">
-                <a:solidFill>
-                  <a:srgbClr val="111111"/>
-                </a:solidFill>
-                <a:latin typeface="Times New Roman" pitchFamily="34" charset="0"/>
-                <a:ea typeface="Times New Roman" pitchFamily="34" charset="-122"/>
-                <a:cs typeface="Times New Roman" pitchFamily="34" charset="-120"/>
-              </a:rPr>
-              <a:t>Example of Cameroon: </a:t>
-            </a:r>
-            <a:pPr algn="l" indent="0" marL="0">
-              <a:spcAft>
-                <a:spcPts val="800"/>
-              </a:spcAft>
-              <a:buNone/>
-            </a:pPr>
-            <a:r>
-              <a:rPr lang="en-US" sz="3600" dirty="0">
-                <a:solidFill>
-                  <a:srgbClr val="111111"/>
-                </a:solidFill>
-                <a:latin typeface="Times New Roman" pitchFamily="34" charset="0"/>
-                <a:ea typeface="Times New Roman" pitchFamily="34" charset="-122"/>
-                <a:cs typeface="Times New Roman" pitchFamily="34" charset="-120"/>
-              </a:rPr>
-              <a:t>About 42 % of Cameroonians are under 15 and only about 3 % are 65 or over.</a:t>
-            </a:r>
-            <a:endParaRPr lang="en-US" sz="3600" dirty="0"/>
-          </a:p>
-        </p:txBody>
-      </p:sp>
       <p:pic>
         <p:nvPicPr>
-          <p:cNvPr id="6" name="Image 0" descr="/home/claude/f4/img/v2/pyramid_cameroon_big.png">    </p:cNvPr>
+          <p:cNvPr id="3" name="Image 0" descr="/home/claude/f4/img/minesec_sheet.png">    </p:cNvPr>
           <p:cNvPicPr>
             <a:picLocks noChangeAspect="1"/>
           </p:cNvPicPr>
@@ -17962,8 +17951,8 @@
         </p:blipFill>
         <p:spPr>
           <a:xfrm>
-            <a:off x="5349240" y="2409394"/>
-            <a:ext cx="6659575" cy="3017620"/>
+            <a:off x="0" y="658368"/>
+            <a:ext cx="2468880" cy="5833872"/>
           </a:xfrm>
           <a:prstGeom prst="rect">
             <a:avLst/>
@@ -17972,14 +17961,14 @@
       </p:pic>
       <p:sp>
         <p:nvSpPr>
-          <p:cNvPr id="7" name="Text 4"/>
+          <p:cNvPr id="4" name="Text 1"/>
           <p:cNvSpPr/>
           <p:nvPr/>
         </p:nvSpPr>
         <p:spPr>
           <a:xfrm>
-            <a:off x="5349240" y="6089904"/>
-            <a:ext cx="6659575" cy="347472"/>
+            <a:off x="2697480" y="1005840"/>
+            <a:ext cx="9174175" cy="731520"/>
           </a:xfrm>
           <a:prstGeom prst="rect">
             <a:avLst/>
@@ -17988,24 +17977,124 @@
           <a:ln/>
         </p:spPr>
         <p:txBody>
-          <a:bodyPr wrap="square" lIns="0" tIns="0" rIns="0" bIns="0" rtlCol="0" anchor="ctr"/>
+          <a:bodyPr wrap="square" lIns="0" tIns="0" rIns="0" bIns="0" rtlCol="0" anchor="ctr">
+            <a:normAutofit/>
+          </a:bodyPr>
           <a:lstStyle/>
           <a:p>
             <a:pPr algn="ctr" indent="0" marL="0">
               <a:buNone/>
             </a:pPr>
             <a:r>
-              <a:rPr lang="en-US" sz="1600" i="1" dirty="0">
-                <a:solidFill>
-                  <a:srgbClr val="555555"/>
+              <a:rPr lang="en-US" sz="3600" b="1" dirty="0">
+                <a:solidFill>
+                  <a:srgbClr val="990011"/>
                 </a:solidFill>
                 <a:latin typeface="Times New Roman" pitchFamily="34" charset="0"/>
                 <a:ea typeface="Times New Roman" pitchFamily="34" charset="-122"/>
                 <a:cs typeface="Times New Roman" pitchFamily="34" charset="-120"/>
               </a:rPr>
-              <a:t>Illustration: the pyramid of Cameroon</a:t>
-            </a:r>
-            <a:endParaRPr lang="en-US" sz="1600" dirty="0"/>
+              <a:t>2. Global Patterns</a:t>
+            </a:r>
+            <a:endParaRPr lang="en-US" sz="3600" dirty="0"/>
+          </a:p>
+        </p:txBody>
+      </p:sp>
+      <p:sp>
+        <p:nvSpPr>
+          <p:cNvPr id="5" name="Text 2"/>
+          <p:cNvSpPr/>
+          <p:nvPr/>
+        </p:nvSpPr>
+        <p:spPr>
+          <a:xfrm>
+            <a:off x="2697480" y="1737360"/>
+            <a:ext cx="9174175" cy="457200"/>
+          </a:xfrm>
+          <a:prstGeom prst="rect">
+            <a:avLst/>
+          </a:prstGeom>
+          <a:noFill/>
+          <a:ln/>
+        </p:spPr>
+        <p:txBody>
+          <a:bodyPr wrap="square" lIns="0" tIns="0" rIns="0" bIns="0" rtlCol="0" anchor="ctr"/>
+          <a:lstStyle/>
+          <a:p>
+            <a:pPr algn="l" indent="0" marL="0">
+              <a:buNone/>
+            </a:pPr>
+            <a:r>
+              <a:rPr lang="en-US" sz="3200" b="1" dirty="0">
+                <a:solidFill>
+                  <a:srgbClr val="990011"/>
+                </a:solidFill>
+                <a:latin typeface="Times New Roman" pitchFamily="34" charset="0"/>
+                <a:ea typeface="Times New Roman" pitchFamily="34" charset="-122"/>
+                <a:cs typeface="Times New Roman" pitchFamily="34" charset="-120"/>
+              </a:rPr>
+              <a:t>B) Consequences of a Youthful Population</a:t>
+            </a:r>
+            <a:endParaRPr lang="en-US" sz="3200" dirty="0"/>
+          </a:p>
+        </p:txBody>
+      </p:sp>
+      <p:sp>
+        <p:nvSpPr>
+          <p:cNvPr id="6" name="Text 3"/>
+          <p:cNvSpPr/>
+          <p:nvPr/>
+        </p:nvSpPr>
+        <p:spPr>
+          <a:xfrm>
+            <a:off x="2697480" y="2240280"/>
+            <a:ext cx="9174175" cy="4206240"/>
+          </a:xfrm>
+          <a:prstGeom prst="rect">
+            <a:avLst/>
+          </a:prstGeom>
+          <a:noFill/>
+          <a:ln/>
+        </p:spPr>
+        <p:txBody>
+          <a:bodyPr wrap="square" lIns="0" tIns="0" rIns="0" bIns="0" rtlCol="0" anchor="t"/>
+          <a:lstStyle/>
+          <a:p>
+            <a:pPr algn="l" indent="0" marL="0">
+              <a:spcAft>
+                <a:spcPts val="800"/>
+              </a:spcAft>
+              <a:buNone/>
+            </a:pPr>
+            <a:r>
+              <a:rPr lang="en-US" sz="4000" b="1" dirty="0">
+                <a:solidFill>
+                  <a:srgbClr val="111111"/>
+                </a:solidFill>
+                <a:latin typeface="Times New Roman" pitchFamily="34" charset="0"/>
+                <a:ea typeface="Times New Roman" pitchFamily="34" charset="-122"/>
+                <a:cs typeface="Times New Roman" pitchFamily="34" charset="-120"/>
+              </a:rPr>
+              <a:t>A future labour force: </a:t>
+            </a:r>
+            <a:pPr algn="l" indent="0" marL="0">
+              <a:spcAft>
+                <a:spcPts val="800"/>
+              </a:spcAft>
+              <a:buNone/>
+            </a:pPr>
+            <a:r>
+              <a:rPr lang="en-US" sz="4000" dirty="0">
+                <a:solidFill>
+                  <a:srgbClr val="111111"/>
+                </a:solidFill>
+                <a:latin typeface="Times New Roman" pitchFamily="34" charset="0"/>
+                <a:ea typeface="Times New Roman" pitchFamily="34" charset="-122"/>
+                <a:cs typeface="Times New Roman" pitchFamily="34" charset="-120"/>
+              </a:rPr>
+              <a:t>The many young people will soon have children, so the population will keep growing fast. If they are educated and employed, they can become a large workforce that boosts growth.</a:t>
+            </a:r>
+            <a:endParaRPr lang="en-US" sz="4000" dirty="0"/>
           </a:p>
         </p:txBody>
       </p:sp>
@@ -18121,9 +18210,170 @@
           </a:p>
         </p:txBody>
       </p:sp>
+      <p:sp>
+        <p:nvSpPr>
+          <p:cNvPr id="3" name="Text 1"/>
+          <p:cNvSpPr/>
+          <p:nvPr/>
+        </p:nvSpPr>
+        <p:spPr>
+          <a:xfrm>
+            <a:off x="365760" y="1005840"/>
+            <a:ext cx="11460175" cy="731520"/>
+          </a:xfrm>
+          <a:prstGeom prst="rect">
+            <a:avLst/>
+          </a:prstGeom>
+          <a:noFill/>
+          <a:ln/>
+        </p:spPr>
+        <p:txBody>
+          <a:bodyPr wrap="square" lIns="0" tIns="0" rIns="0" bIns="0" rtlCol="0" anchor="ctr">
+            <a:normAutofit/>
+          </a:bodyPr>
+          <a:lstStyle/>
+          <a:p>
+            <a:pPr algn="ctr" indent="0" marL="0">
+              <a:buNone/>
+            </a:pPr>
+            <a:r>
+              <a:rPr lang="en-US" sz="3600" b="1" dirty="0">
+                <a:solidFill>
+                  <a:srgbClr val="990011"/>
+                </a:solidFill>
+                <a:latin typeface="Times New Roman" pitchFamily="34" charset="0"/>
+                <a:ea typeface="Times New Roman" pitchFamily="34" charset="-122"/>
+                <a:cs typeface="Times New Roman" pitchFamily="34" charset="-120"/>
+              </a:rPr>
+              <a:t>2. Global Patterns</a:t>
+            </a:r>
+            <a:endParaRPr lang="en-US" sz="3600" dirty="0"/>
+          </a:p>
+        </p:txBody>
+      </p:sp>
+      <p:sp>
+        <p:nvSpPr>
+          <p:cNvPr id="4" name="Text 2"/>
+          <p:cNvSpPr/>
+          <p:nvPr/>
+        </p:nvSpPr>
+        <p:spPr>
+          <a:xfrm>
+            <a:off x="365760" y="1737360"/>
+            <a:ext cx="6035040" cy="457200"/>
+          </a:xfrm>
+          <a:prstGeom prst="rect">
+            <a:avLst/>
+          </a:prstGeom>
+          <a:noFill/>
+          <a:ln/>
+        </p:spPr>
+        <p:txBody>
+          <a:bodyPr wrap="square" lIns="0" tIns="0" rIns="0" bIns="0" rtlCol="0" anchor="ctr">
+            <a:normAutofit/>
+          </a:bodyPr>
+          <a:lstStyle/>
+          <a:p>
+            <a:pPr algn="l" indent="0" marL="0">
+              <a:buNone/>
+            </a:pPr>
+            <a:r>
+              <a:rPr lang="en-US" sz="3000" b="1" dirty="0">
+                <a:solidFill>
+                  <a:srgbClr val="990011"/>
+                </a:solidFill>
+                <a:latin typeface="Times New Roman" pitchFamily="34" charset="0"/>
+                <a:ea typeface="Times New Roman" pitchFamily="34" charset="-122"/>
+                <a:cs typeface="Times New Roman" pitchFamily="34" charset="-120"/>
+              </a:rPr>
+              <a:t>C) The Ageing Population</a:t>
+            </a:r>
+            <a:endParaRPr lang="en-US" sz="3000" dirty="0"/>
+          </a:p>
+        </p:txBody>
+      </p:sp>
+      <p:sp>
+        <p:nvSpPr>
+          <p:cNvPr id="5" name="Text 3"/>
+          <p:cNvSpPr/>
+          <p:nvPr/>
+        </p:nvSpPr>
+        <p:spPr>
+          <a:xfrm>
+            <a:off x="365760" y="2240280"/>
+            <a:ext cx="6035040" cy="4160520"/>
+          </a:xfrm>
+          <a:prstGeom prst="rect">
+            <a:avLst/>
+          </a:prstGeom>
+          <a:noFill/>
+          <a:ln/>
+        </p:spPr>
+        <p:txBody>
+          <a:bodyPr wrap="square" lIns="0" tIns="0" rIns="0" bIns="0" rtlCol="0" anchor="t"/>
+          <a:lstStyle/>
+          <a:p>
+            <a:pPr algn="l" indent="0" marL="0">
+              <a:spcAft>
+                <a:spcPts val="800"/>
+              </a:spcAft>
+              <a:buNone/>
+            </a:pPr>
+            <a:r>
+              <a:rPr lang="en-US" sz="2800" i="1" dirty="0">
+                <a:solidFill>
+                  <a:srgbClr val="111111"/>
+                </a:solidFill>
+                <a:latin typeface="Times New Roman" pitchFamily="34" charset="0"/>
+                <a:ea typeface="Times New Roman" pitchFamily="34" charset="-122"/>
+                <a:cs typeface="Times New Roman" pitchFamily="34" charset="-120"/>
+              </a:rPr>
+              <a:t>The ageing population has the following characteristics:</a:t>
+            </a:r>
+            <a:endParaRPr lang="en-US" sz="2800" dirty="0"/>
+          </a:p>
+          <a:p>
+            <a:pPr algn="l" indent="0" marL="0">
+              <a:spcAft>
+                <a:spcPts val="800"/>
+              </a:spcAft>
+              <a:buNone/>
+            </a:pPr>
+            <a:r>
+              <a:rPr lang="en-US" sz="2800" b="1" dirty="0">
+                <a:solidFill>
+                  <a:srgbClr val="111111"/>
+                </a:solidFill>
+                <a:latin typeface="Times New Roman" pitchFamily="34" charset="0"/>
+                <a:ea typeface="Times New Roman" pitchFamily="34" charset="-122"/>
+                <a:cs typeface="Times New Roman" pitchFamily="34" charset="-120"/>
+              </a:rPr>
+              <a:t>Characteristics: </a:t>
+            </a:r>
+            <a:pPr algn="l" indent="0" marL="0">
+              <a:spcAft>
+                <a:spcPts val="800"/>
+              </a:spcAft>
+              <a:buNone/>
+            </a:pPr>
+            <a:r>
+              <a:rPr lang="en-US" sz="2800" dirty="0">
+                <a:solidFill>
+                  <a:srgbClr val="111111"/>
+                </a:solidFill>
+                <a:latin typeface="Times New Roman" pitchFamily="34" charset="0"/>
+                <a:ea typeface="Times New Roman" pitchFamily="34" charset="-122"/>
+                <a:cs typeface="Times New Roman" pitchFamily="34" charset="-120"/>
+              </a:rPr>
+              <a:t>More than 15 % of the people are 65 or over and fewer than 20 % are under 15. It is found in developed countries, such as Japan, Germany and Italy, where birth rates are low and people live long.</a:t>
+            </a:r>
+            <a:endParaRPr lang="en-US" sz="2800" dirty="0"/>
+          </a:p>
+        </p:txBody>
+      </p:sp>
       <p:pic>
         <p:nvPicPr>
-          <p:cNvPr id="3" name="Image 0" descr="/home/claude/f4/img/minesec_sheet.png">    </p:cNvPr>
+          <p:cNvPr id="6" name="Image 0" descr="/home/claude/f4/img/v2/pyramid_japan_big.png">    </p:cNvPr>
           <p:cNvPicPr>
             <a:picLocks noChangeAspect="1"/>
           </p:cNvPicPr>
@@ -18137,8 +18387,8 @@
         </p:blipFill>
         <p:spPr>
           <a:xfrm>
-            <a:off x="0" y="658368"/>
-            <a:ext cx="5120640" cy="5833872"/>
+            <a:off x="6537960" y="2678713"/>
+            <a:ext cx="5470855" cy="2478981"/>
           </a:xfrm>
           <a:prstGeom prst="rect">
             <a:avLst/>
@@ -18147,14 +18397,14 @@
       </p:pic>
       <p:sp>
         <p:nvSpPr>
-          <p:cNvPr id="4" name="Text 1"/>
+          <p:cNvPr id="7" name="Text 4"/>
           <p:cNvSpPr/>
           <p:nvPr/>
         </p:nvSpPr>
         <p:spPr>
           <a:xfrm>
-            <a:off x="5349240" y="1005840"/>
-            <a:ext cx="6522415" cy="731520"/>
+            <a:off x="6537960" y="6089904"/>
+            <a:ext cx="5470855" cy="347472"/>
           </a:xfrm>
           <a:prstGeom prst="rect">
             <a:avLst/>
@@ -18163,124 +18413,24 @@
           <a:ln/>
         </p:spPr>
         <p:txBody>
-          <a:bodyPr wrap="square" lIns="0" tIns="0" rIns="0" bIns="0" rtlCol="0" anchor="ctr">
-            <a:normAutofit/>
-          </a:bodyPr>
+          <a:bodyPr wrap="square" lIns="0" tIns="0" rIns="0" bIns="0" rtlCol="0" anchor="ctr"/>
           <a:lstStyle/>
           <a:p>
             <a:pPr algn="ctr" indent="0" marL="0">
               <a:buNone/>
             </a:pPr>
             <a:r>
-              <a:rPr lang="en-US" sz="3600" b="1" dirty="0">
-                <a:solidFill>
-                  <a:srgbClr val="990011"/>
+              <a:rPr lang="en-US" sz="1600" i="1" dirty="0">
+                <a:solidFill>
+                  <a:srgbClr val="555555"/>
                 </a:solidFill>
                 <a:latin typeface="Times New Roman" pitchFamily="34" charset="0"/>
                 <a:ea typeface="Times New Roman" pitchFamily="34" charset="-122"/>
                 <a:cs typeface="Times New Roman" pitchFamily="34" charset="-120"/>
               </a:rPr>
-              <a:t>2. Global Patterns</a:t>
-            </a:r>
-            <a:endParaRPr lang="en-US" sz="3600" dirty="0"/>
-          </a:p>
-        </p:txBody>
-      </p:sp>
-      <p:sp>
-        <p:nvSpPr>
-          <p:cNvPr id="5" name="Text 2"/>
-          <p:cNvSpPr/>
-          <p:nvPr/>
-        </p:nvSpPr>
-        <p:spPr>
-          <a:xfrm>
-            <a:off x="5349240" y="1737360"/>
-            <a:ext cx="6522415" cy="457200"/>
-          </a:xfrm>
-          <a:prstGeom prst="rect">
-            <a:avLst/>
-          </a:prstGeom>
-          <a:noFill/>
-          <a:ln/>
-        </p:spPr>
-        <p:txBody>
-          <a:bodyPr wrap="square" lIns="0" tIns="0" rIns="0" bIns="0" rtlCol="0" anchor="ctr"/>
-          <a:lstStyle/>
-          <a:p>
-            <a:pPr algn="l" indent="0" marL="0">
-              <a:buNone/>
-            </a:pPr>
-            <a:r>
-              <a:rPr lang="en-US" sz="3200" b="1" dirty="0">
-                <a:solidFill>
-                  <a:srgbClr val="990011"/>
-                </a:solidFill>
-                <a:latin typeface="Times New Roman" pitchFamily="34" charset="0"/>
-                <a:ea typeface="Times New Roman" pitchFamily="34" charset="-122"/>
-                <a:cs typeface="Times New Roman" pitchFamily="34" charset="-120"/>
-              </a:rPr>
-              <a:t>A) The Youthful Population</a:t>
-            </a:r>
-            <a:endParaRPr lang="en-US" sz="3200" dirty="0"/>
-          </a:p>
-        </p:txBody>
-      </p:sp>
-      <p:sp>
-        <p:nvSpPr>
-          <p:cNvPr id="6" name="Text 3"/>
-          <p:cNvSpPr/>
-          <p:nvPr/>
-        </p:nvSpPr>
-        <p:spPr>
-          <a:xfrm>
-            <a:off x="5349240" y="2240280"/>
-            <a:ext cx="6522415" cy="4206240"/>
-          </a:xfrm>
-          <a:prstGeom prst="rect">
-            <a:avLst/>
-          </a:prstGeom>
-          <a:noFill/>
-          <a:ln/>
-        </p:spPr>
-        <p:txBody>
-          <a:bodyPr wrap="square" lIns="0" tIns="0" rIns="0" bIns="0" rtlCol="0" anchor="t"/>
-          <a:lstStyle/>
-          <a:p>
-            <a:pPr algn="l" indent="0" marL="0">
-              <a:spcAft>
-                <a:spcPts val="800"/>
-              </a:spcAft>
-              <a:buNone/>
-            </a:pPr>
-            <a:r>
-              <a:rPr lang="en-US" sz="4000" b="1" dirty="0">
-                <a:solidFill>
-                  <a:srgbClr val="111111"/>
-                </a:solidFill>
-                <a:latin typeface="Times New Roman" pitchFamily="34" charset="0"/>
-                <a:ea typeface="Times New Roman" pitchFamily="34" charset="-122"/>
-                <a:cs typeface="Times New Roman" pitchFamily="34" charset="-120"/>
-              </a:rPr>
-              <a:t>High dependency: </a:t>
-            </a:r>
-            <a:pPr algn="l" indent="0" marL="0">
-              <a:spcAft>
-                <a:spcPts val="800"/>
-              </a:spcAft>
-              <a:buNone/>
-            </a:pPr>
-            <a:r>
-              <a:rPr lang="en-US" sz="4000" dirty="0">
-                <a:solidFill>
-                  <a:srgbClr val="111111"/>
-                </a:solidFill>
-                <a:latin typeface="Times New Roman" pitchFamily="34" charset="0"/>
-                <a:ea typeface="Times New Roman" pitchFamily="34" charset="-122"/>
-                <a:cs typeface="Times New Roman" pitchFamily="34" charset="-120"/>
-              </a:rPr>
-              <a:t>Few workers support many children, so savings and investment are low.</a:t>
-            </a:r>
-            <a:endParaRPr lang="en-US" sz="4000" dirty="0"/>
+              <a:t>Illustration: the pyramid of Japan</a:t>
+            </a:r>
+            <a:endParaRPr lang="en-US" sz="1600" dirty="0"/>
           </a:p>
         </p:txBody>
       </p:sp>
@@ -18396,150 +18546,9 @@
           </a:p>
         </p:txBody>
       </p:sp>
-      <p:sp>
-        <p:nvSpPr>
-          <p:cNvPr id="3" name="Text 1"/>
-          <p:cNvSpPr/>
-          <p:nvPr/>
-        </p:nvSpPr>
-        <p:spPr>
-          <a:xfrm>
-            <a:off x="365760" y="1005840"/>
-            <a:ext cx="11460175" cy="731520"/>
-          </a:xfrm>
-          <a:prstGeom prst="rect">
-            <a:avLst/>
-          </a:prstGeom>
-          <a:noFill/>
-          <a:ln/>
-        </p:spPr>
-        <p:txBody>
-          <a:bodyPr wrap="square" lIns="0" tIns="0" rIns="0" bIns="0" rtlCol="0" anchor="ctr">
-            <a:normAutofit/>
-          </a:bodyPr>
-          <a:lstStyle/>
-          <a:p>
-            <a:pPr algn="ctr" indent="0" marL="0">
-              <a:buNone/>
-            </a:pPr>
-            <a:r>
-              <a:rPr lang="en-US" sz="3600" b="1" dirty="0">
-                <a:solidFill>
-                  <a:srgbClr val="990011"/>
-                </a:solidFill>
-                <a:latin typeface="Times New Roman" pitchFamily="34" charset="0"/>
-                <a:ea typeface="Times New Roman" pitchFamily="34" charset="-122"/>
-                <a:cs typeface="Times New Roman" pitchFamily="34" charset="-120"/>
-              </a:rPr>
-              <a:t>2. Global Patterns</a:t>
-            </a:r>
-            <a:endParaRPr lang="en-US" sz="3600" dirty="0"/>
-          </a:p>
-        </p:txBody>
-      </p:sp>
-      <p:sp>
-        <p:nvSpPr>
-          <p:cNvPr id="4" name="Text 2"/>
-          <p:cNvSpPr/>
-          <p:nvPr/>
-        </p:nvSpPr>
-        <p:spPr>
-          <a:xfrm>
-            <a:off x="365760" y="1737360"/>
-            <a:ext cx="5120640" cy="457200"/>
-          </a:xfrm>
-          <a:prstGeom prst="rect">
-            <a:avLst/>
-          </a:prstGeom>
-          <a:noFill/>
-          <a:ln/>
-        </p:spPr>
-        <p:txBody>
-          <a:bodyPr wrap="square" lIns="0" tIns="0" rIns="0" bIns="0" rtlCol="0" anchor="ctr">
-            <a:normAutofit/>
-          </a:bodyPr>
-          <a:lstStyle/>
-          <a:p>
-            <a:pPr algn="l" indent="0" marL="0">
-              <a:buNone/>
-            </a:pPr>
-            <a:r>
-              <a:rPr lang="en-US" sz="3000" b="1" dirty="0">
-                <a:solidFill>
-                  <a:srgbClr val="990011"/>
-                </a:solidFill>
-                <a:latin typeface="Times New Roman" pitchFamily="34" charset="0"/>
-                <a:ea typeface="Times New Roman" pitchFamily="34" charset="-122"/>
-                <a:cs typeface="Times New Roman" pitchFamily="34" charset="-120"/>
-              </a:rPr>
-              <a:t>A) The Youthful Population</a:t>
-            </a:r>
-            <a:endParaRPr lang="en-US" sz="3000" dirty="0"/>
-          </a:p>
-        </p:txBody>
-      </p:sp>
-      <p:sp>
-        <p:nvSpPr>
-          <p:cNvPr id="5" name="Text 3"/>
-          <p:cNvSpPr/>
-          <p:nvPr/>
-        </p:nvSpPr>
-        <p:spPr>
-          <a:xfrm>
-            <a:off x="365760" y="2240280"/>
-            <a:ext cx="4846320" cy="4160520"/>
-          </a:xfrm>
-          <a:prstGeom prst="rect">
-            <a:avLst/>
-          </a:prstGeom>
-          <a:noFill/>
-          <a:ln/>
-        </p:spPr>
-        <p:txBody>
-          <a:bodyPr wrap="square" lIns="0" tIns="0" rIns="0" bIns="0" rtlCol="0" anchor="t"/>
-          <a:lstStyle/>
-          <a:p>
-            <a:pPr algn="l" indent="0" marL="0">
-              <a:spcAft>
-                <a:spcPts val="800"/>
-              </a:spcAft>
-              <a:buNone/>
-            </a:pPr>
-            <a:r>
-              <a:rPr lang="en-US" sz="3600" b="1" dirty="0">
-                <a:solidFill>
-                  <a:srgbClr val="111111"/>
-                </a:solidFill>
-                <a:latin typeface="Times New Roman" pitchFamily="34" charset="0"/>
-                <a:ea typeface="Times New Roman" pitchFamily="34" charset="-122"/>
-                <a:cs typeface="Times New Roman" pitchFamily="34" charset="-120"/>
-              </a:rPr>
-              <a:t>Pressure on services: </a:t>
-            </a:r>
-            <a:pPr algn="l" indent="0" marL="0">
-              <a:spcAft>
-                <a:spcPts val="800"/>
-              </a:spcAft>
-              <a:buNone/>
-            </a:pPr>
-            <a:r>
-              <a:rPr lang="en-US" sz="3600" dirty="0">
-                <a:solidFill>
-                  <a:srgbClr val="111111"/>
-                </a:solidFill>
-                <a:latin typeface="Times New Roman" pitchFamily="34" charset="0"/>
-                <a:ea typeface="Times New Roman" pitchFamily="34" charset="-122"/>
-                <a:cs typeface="Times New Roman" pitchFamily="34" charset="-120"/>
-              </a:rPr>
-              <a:t>There is a huge demand for schools, maternity wards and basic health care.</a:t>
-            </a:r>
-            <a:endParaRPr lang="en-US" sz="3600" dirty="0"/>
-          </a:p>
-        </p:txBody>
-      </p:sp>
       <p:pic>
         <p:nvPicPr>
-          <p:cNvPr id="6" name="Image 0" descr="/home/claude/f4/img/v2/f2t_classroom.jpg">    </p:cNvPr>
+          <p:cNvPr id="3" name="Image 0" descr="/home/claude/f4/img/minesec_sheet.png">    </p:cNvPr>
           <p:cNvPicPr>
             <a:picLocks noChangeAspect="1"/>
           </p:cNvPicPr>
@@ -18553,8 +18562,8 @@
         </p:blipFill>
         <p:spPr>
           <a:xfrm>
-            <a:off x="5349240" y="2071212"/>
-            <a:ext cx="6659575" cy="3693983"/>
+            <a:off x="0" y="658368"/>
+            <a:ext cx="5120640" cy="5833872"/>
           </a:xfrm>
           <a:prstGeom prst="rect">
             <a:avLst/>
@@ -18563,14 +18572,14 @@
       </p:pic>
       <p:sp>
         <p:nvSpPr>
-          <p:cNvPr id="7" name="Text 4"/>
+          <p:cNvPr id="4" name="Text 1"/>
           <p:cNvSpPr/>
           <p:nvPr/>
         </p:nvSpPr>
         <p:spPr>
           <a:xfrm>
-            <a:off x="5349240" y="6089904"/>
-            <a:ext cx="6659575" cy="347472"/>
+            <a:off x="5349240" y="1005840"/>
+            <a:ext cx="6522415" cy="731520"/>
           </a:xfrm>
           <a:prstGeom prst="rect">
             <a:avLst/>
@@ -18579,24 +18588,124 @@
           <a:ln/>
         </p:spPr>
         <p:txBody>
-          <a:bodyPr wrap="square" lIns="0" tIns="0" rIns="0" bIns="0" rtlCol="0" anchor="ctr"/>
+          <a:bodyPr wrap="square" lIns="0" tIns="0" rIns="0" bIns="0" rtlCol="0" anchor="ctr">
+            <a:normAutofit/>
+          </a:bodyPr>
           <a:lstStyle/>
           <a:p>
             <a:pPr algn="ctr" indent="0" marL="0">
               <a:buNone/>
             </a:pPr>
             <a:r>
-              <a:rPr lang="en-US" sz="1600" i="1" dirty="0">
-                <a:solidFill>
-                  <a:srgbClr val="555555"/>
+              <a:rPr lang="en-US" sz="3600" b="1" dirty="0">
+                <a:solidFill>
+                  <a:srgbClr val="990011"/>
                 </a:solidFill>
                 <a:latin typeface="Times New Roman" pitchFamily="34" charset="0"/>
                 <a:ea typeface="Times New Roman" pitchFamily="34" charset="-122"/>
                 <a:cs typeface="Times New Roman" pitchFamily="34" charset="-120"/>
               </a:rPr>
-              <a:t>Illustration: a crowded classroom</a:t>
-            </a:r>
-            <a:endParaRPr lang="en-US" sz="1600" dirty="0"/>
+              <a:t>2. Global Patterns</a:t>
+            </a:r>
+            <a:endParaRPr lang="en-US" sz="3600" dirty="0"/>
+          </a:p>
+        </p:txBody>
+      </p:sp>
+      <p:sp>
+        <p:nvSpPr>
+          <p:cNvPr id="5" name="Text 2"/>
+          <p:cNvSpPr/>
+          <p:nvPr/>
+        </p:nvSpPr>
+        <p:spPr>
+          <a:xfrm>
+            <a:off x="5349240" y="1737360"/>
+            <a:ext cx="6522415" cy="457200"/>
+          </a:xfrm>
+          <a:prstGeom prst="rect">
+            <a:avLst/>
+          </a:prstGeom>
+          <a:noFill/>
+          <a:ln/>
+        </p:spPr>
+        <p:txBody>
+          <a:bodyPr wrap="square" lIns="0" tIns="0" rIns="0" bIns="0" rtlCol="0" anchor="ctr"/>
+          <a:lstStyle/>
+          <a:p>
+            <a:pPr algn="l" indent="0" marL="0">
+              <a:buNone/>
+            </a:pPr>
+            <a:r>
+              <a:rPr lang="en-US" sz="3200" b="1" dirty="0">
+                <a:solidFill>
+                  <a:srgbClr val="990011"/>
+                </a:solidFill>
+                <a:latin typeface="Times New Roman" pitchFamily="34" charset="0"/>
+                <a:ea typeface="Times New Roman" pitchFamily="34" charset="-122"/>
+                <a:cs typeface="Times New Roman" pitchFamily="34" charset="-120"/>
+              </a:rPr>
+              <a:t>C) The Ageing Population</a:t>
+            </a:r>
+            <a:endParaRPr lang="en-US" sz="3200" dirty="0"/>
+          </a:p>
+        </p:txBody>
+      </p:sp>
+      <p:sp>
+        <p:nvSpPr>
+          <p:cNvPr id="6" name="Text 3"/>
+          <p:cNvSpPr/>
+          <p:nvPr/>
+        </p:nvSpPr>
+        <p:spPr>
+          <a:xfrm>
+            <a:off x="5349240" y="2240280"/>
+            <a:ext cx="6522415" cy="4206240"/>
+          </a:xfrm>
+          <a:prstGeom prst="rect">
+            <a:avLst/>
+          </a:prstGeom>
+          <a:noFill/>
+          <a:ln/>
+        </p:spPr>
+        <p:txBody>
+          <a:bodyPr wrap="square" lIns="0" tIns="0" rIns="0" bIns="0" rtlCol="0" anchor="t"/>
+          <a:lstStyle/>
+          <a:p>
+            <a:pPr algn="l" indent="0" marL="0">
+              <a:spcAft>
+                <a:spcPts val="800"/>
+              </a:spcAft>
+              <a:buNone/>
+            </a:pPr>
+            <a:r>
+              <a:rPr lang="en-US" sz="4000" b="1" dirty="0">
+                <a:solidFill>
+                  <a:srgbClr val="111111"/>
+                </a:solidFill>
+                <a:latin typeface="Times New Roman" pitchFamily="34" charset="0"/>
+                <a:ea typeface="Times New Roman" pitchFamily="34" charset="-122"/>
+                <a:cs typeface="Times New Roman" pitchFamily="34" charset="-120"/>
+              </a:rPr>
+              <a:t>Example of Japan: </a:t>
+            </a:r>
+            <a:pPr algn="l" indent="0" marL="0">
+              <a:spcAft>
+                <a:spcPts val="800"/>
+              </a:spcAft>
+              <a:buNone/>
+            </a:pPr>
+            <a:r>
+              <a:rPr lang="en-US" sz="4000" dirty="0">
+                <a:solidFill>
+                  <a:srgbClr val="111111"/>
+                </a:solidFill>
+                <a:latin typeface="Times New Roman" pitchFamily="34" charset="0"/>
+                <a:ea typeface="Times New Roman" pitchFamily="34" charset="-122"/>
+                <a:cs typeface="Times New Roman" pitchFamily="34" charset="-120"/>
+              </a:rPr>
+              <a:t>About 29 % of Japanese are 65 or over, one of the highest shares in the world. Its population has been falling since about 2010.</a:t>
+            </a:r>
+            <a:endParaRPr lang="en-US" sz="4000" dirty="0"/>
           </a:p>
         </p:txBody>
       </p:sp>
@@ -18729,7 +18838,7 @@
         <p:spPr>
           <a:xfrm>
             <a:off x="0" y="658368"/>
-            <a:ext cx="1463040" cy="5833872"/>
+            <a:ext cx="2468880" cy="5833872"/>
           </a:xfrm>
           <a:prstGeom prst="rect">
             <a:avLst/>
@@ -18744,8 +18853,8 @@
         </p:nvSpPr>
         <p:spPr>
           <a:xfrm>
-            <a:off x="1691640" y="1005840"/>
-            <a:ext cx="10180015" cy="731520"/>
+            <a:off x="2697480" y="1005840"/>
+            <a:ext cx="9174175" cy="731520"/>
           </a:xfrm>
           <a:prstGeom prst="rect">
             <a:avLst/>
@@ -18785,8 +18894,8 @@
         </p:nvSpPr>
         <p:spPr>
           <a:xfrm>
-            <a:off x="1691640" y="1737360"/>
-            <a:ext cx="10180015" cy="457200"/>
+            <a:off x="2697480" y="1737360"/>
+            <a:ext cx="9174175" cy="457200"/>
           </a:xfrm>
           <a:prstGeom prst="rect">
             <a:avLst/>
@@ -18810,7 +18919,7 @@
                 <a:ea typeface="Times New Roman" pitchFamily="34" charset="-122"/>
                 <a:cs typeface="Times New Roman" pitchFamily="34" charset="-120"/>
               </a:rPr>
-              <a:t>A) The Youthful Population</a:t>
+              <a:t>D) Consequences of an Ageing Population</a:t>
             </a:r>
             <a:endParaRPr lang="en-US" sz="3200" dirty="0"/>
           </a:p>
@@ -18824,8 +18933,8 @@
         </p:nvSpPr>
         <p:spPr>
           <a:xfrm>
-            <a:off x="1691640" y="2240280"/>
-            <a:ext cx="10180015" cy="4206240"/>
+            <a:off x="2697480" y="2240280"/>
+            <a:ext cx="9174175" cy="4206240"/>
           </a:xfrm>
           <a:prstGeom prst="rect">
             <a:avLst/>
@@ -18844,7 +18953,7 @@
               <a:buNone/>
             </a:pPr>
             <a:r>
-              <a:rPr lang="en-US" sz="4000" b="1" dirty="0">
+              <a:rPr lang="en-US" sz="4000" i="1" dirty="0">
                 <a:solidFill>
                   <a:srgbClr val="111111"/>
                 </a:solidFill>
@@ -18852,8 +18961,11 @@
                 <a:ea typeface="Times New Roman" pitchFamily="34" charset="-122"/>
                 <a:cs typeface="Times New Roman" pitchFamily="34" charset="-120"/>
               </a:rPr>
-              <a:t>Unemployment: </a:t>
-            </a:r>
+              <a:t>An ageing population has the following socio-economic consequences:</a:t>
+            </a:r>
+            <a:endParaRPr lang="en-US" sz="4000" dirty="0"/>
+          </a:p>
+          <a:p>
             <a:pPr algn="l" indent="0" marL="0">
               <a:spcAft>
                 <a:spcPts val="800"/>
@@ -18861,7 +18973,7 @@
               <a:buNone/>
             </a:pPr>
             <a:r>
-              <a:rPr lang="en-US" sz="4000" dirty="0">
+              <a:rPr lang="en-US" sz="4000" b="1" dirty="0">
                 <a:solidFill>
                   <a:srgbClr val="111111"/>
                 </a:solidFill>
@@ -18869,11 +18981,8 @@
                 <a:ea typeface="Times New Roman" pitchFamily="34" charset="-122"/>
                 <a:cs typeface="Times New Roman" pitchFamily="34" charset="-120"/>
               </a:rPr>
-              <a:t>Many young people enter the job market each year, which causes unemployment and may cause social unrest.</a:t>
-            </a:r>
-            <a:endParaRPr lang="en-US" sz="4000" dirty="0"/>
-          </a:p>
-          <a:p>
+              <a:t>A shrinking workforce: </a:t>
+            </a:r>
             <a:pPr algn="l" indent="0" marL="0">
               <a:spcAft>
                 <a:spcPts val="800"/>
@@ -18881,7 +18990,7 @@
               <a:buNone/>
             </a:pPr>
             <a:r>
-              <a:rPr lang="en-US" sz="4000" b="1" dirty="0">
+              <a:rPr lang="en-US" sz="4000" dirty="0">
                 <a:solidFill>
                   <a:srgbClr val="111111"/>
                 </a:solidFill>
@@ -18889,24 +18998,7 @@
                 <a:ea typeface="Times New Roman" pitchFamily="34" charset="-122"/>
                 <a:cs typeface="Times New Roman" pitchFamily="34" charset="-120"/>
               </a:rPr>
-              <a:t>Population momentum: </a:t>
-            </a:r>
-            <a:pPr algn="l" indent="0" marL="0">
-              <a:spcAft>
-                <a:spcPts val="800"/>
-              </a:spcAft>
-              <a:buNone/>
-            </a:pPr>
-            <a:r>
-              <a:rPr lang="en-US" sz="4000" dirty="0">
-                <a:solidFill>
-                  <a:srgbClr val="111111"/>
-                </a:solidFill>
-                <a:latin typeface="Times New Roman" pitchFamily="34" charset="0"/>
-                <a:ea typeface="Times New Roman" pitchFamily="34" charset="-122"/>
-                <a:cs typeface="Times New Roman" pitchFamily="34" charset="-120"/>
-              </a:rPr>
-              <a:t>The many young people will soon have children, so the population will keep growing fast.</a:t>
+              <a:t>There are fewer young people to replace the workers who retire. Labour shortages appear, which lowers production.</a:t>
             </a:r>
             <a:endParaRPr lang="en-US" sz="4000" dirty="0"/>
           </a:p>
@@ -19293,7 +19385,7 @@
         <p:spPr>
           <a:xfrm>
             <a:off x="365760" y="1737360"/>
-            <a:ext cx="5120640" cy="457200"/>
+            <a:ext cx="6035040" cy="457200"/>
           </a:xfrm>
           <a:prstGeom prst="rect">
             <a:avLst/>
@@ -19319,7 +19411,7 @@
                 <a:ea typeface="Times New Roman" pitchFamily="34" charset="-122"/>
                 <a:cs typeface="Times New Roman" pitchFamily="34" charset="-120"/>
               </a:rPr>
-              <a:t>B) The Ageing Population</a:t>
+              <a:t>D) Consequences of an Ageing Population</a:t>
             </a:r>
             <a:endParaRPr lang="en-US" sz="3000" dirty="0"/>
           </a:p>
@@ -19334,7 +19426,7 @@
         <p:spPr>
           <a:xfrm>
             <a:off x="365760" y="2240280"/>
-            <a:ext cx="4846320" cy="4160520"/>
+            <a:ext cx="6035040" cy="4160520"/>
           </a:xfrm>
           <a:prstGeom prst="rect">
             <a:avLst/>
@@ -19353,7 +19445,7 @@
               <a:buNone/>
             </a:pPr>
             <a:r>
-              <a:rPr lang="en-US" sz="3200" i="1" dirty="0">
+              <a:rPr lang="en-US" sz="3600" b="1" dirty="0">
                 <a:solidFill>
                   <a:srgbClr val="111111"/>
                 </a:solidFill>
@@ -19361,11 +19453,8 @@
                 <a:ea typeface="Times New Roman" pitchFamily="34" charset="-122"/>
                 <a:cs typeface="Times New Roman" pitchFamily="34" charset="-120"/>
               </a:rPr>
-              <a:t>The ageing population has the following characteristics:</a:t>
-            </a:r>
-            <a:endParaRPr lang="en-US" sz="3200" dirty="0"/>
-          </a:p>
-          <a:p>
+              <a:t>High state spending: </a:t>
+            </a:r>
             <a:pPr algn="l" indent="0" marL="0">
               <a:spcAft>
                 <a:spcPts val="800"/>
@@ -19373,7 +19462,7 @@
               <a:buNone/>
             </a:pPr>
             <a:r>
-              <a:rPr lang="en-US" sz="3200" b="1" dirty="0">
+              <a:rPr lang="en-US" sz="3600" dirty="0">
                 <a:solidFill>
                   <a:srgbClr val="111111"/>
                 </a:solidFill>
@@ -19381,32 +19470,15 @@
                 <a:ea typeface="Times New Roman" pitchFamily="34" charset="-122"/>
                 <a:cs typeface="Times New Roman" pitchFamily="34" charset="-120"/>
               </a:rPr>
-              <a:t>Characteristics: </a:t>
-            </a:r>
-            <a:pPr algn="l" indent="0" marL="0">
-              <a:spcAft>
-                <a:spcPts val="800"/>
-              </a:spcAft>
-              <a:buNone/>
-            </a:pPr>
-            <a:r>
-              <a:rPr lang="en-US" sz="3200" dirty="0">
-                <a:solidFill>
-                  <a:srgbClr val="111111"/>
-                </a:solidFill>
-                <a:latin typeface="Times New Roman" pitchFamily="34" charset="0"/>
-                <a:ea typeface="Times New Roman" pitchFamily="34" charset="-122"/>
-                <a:cs typeface="Times New Roman" pitchFamily="34" charset="-120"/>
-              </a:rPr>
-              <a:t>More than 15 % of the people are 65 or over and fewer than 20 % are under 15, as in Japan, Germany and Italy.</a:t>
-            </a:r>
-            <a:endParaRPr lang="en-US" sz="3200" dirty="0"/>
+              <a:t>Governments spend a lot on pensions, hospitals and care for the elderly. Fewer workers must pay taxes to support them.</a:t>
+            </a:r>
+            <a:endParaRPr lang="en-US" sz="3600" dirty="0"/>
           </a:p>
         </p:txBody>
       </p:sp>
       <p:pic>
         <p:nvPicPr>
-          <p:cNvPr id="6" name="Image 0" descr="/home/claude/f4/img/v2/pyramid_japan_big.png">    </p:cNvPr>
+          <p:cNvPr id="6" name="Image 0" descr="/home/claude/f4/img/v2/f2t_doctor.jpg">    </p:cNvPr>
           <p:cNvPicPr>
             <a:picLocks noChangeAspect="1"/>
           </p:cNvPicPr>
@@ -19420,8 +19492,8 @@
         </p:blipFill>
         <p:spPr>
           <a:xfrm>
-            <a:off x="5349240" y="2409394"/>
-            <a:ext cx="6659575" cy="3017620"/>
+            <a:off x="6537960" y="2400897"/>
+            <a:ext cx="5470855" cy="3034615"/>
           </a:xfrm>
           <a:prstGeom prst="rect">
             <a:avLst/>
@@ -19436,8 +19508,8 @@
         </p:nvSpPr>
         <p:spPr>
           <a:xfrm>
-            <a:off x="5349240" y="6089904"/>
-            <a:ext cx="6659575" cy="347472"/>
+            <a:off x="6537960" y="6089904"/>
+            <a:ext cx="5470855" cy="347472"/>
           </a:xfrm>
           <a:prstGeom prst="rect">
             <a:avLst/>
@@ -19461,7 +19533,7 @@
                 <a:ea typeface="Times New Roman" pitchFamily="34" charset="-122"/>
                 <a:cs typeface="Times New Roman" pitchFamily="34" charset="-120"/>
               </a:rPr>
-              <a:t>Illustration: the pyramid of Japan</a:t>
+              <a:t>Illustration: health care</a:t>
             </a:r>
             <a:endParaRPr lang="en-US" sz="1600" dirty="0"/>
           </a:p>
@@ -19596,7 +19668,7 @@
         <p:spPr>
           <a:xfrm>
             <a:off x="0" y="658368"/>
-            <a:ext cx="3840480" cy="5833872"/>
+            <a:ext cx="5120640" cy="5833872"/>
           </a:xfrm>
           <a:prstGeom prst="rect">
             <a:avLst/>
@@ -19611,8 +19683,8 @@
         </p:nvSpPr>
         <p:spPr>
           <a:xfrm>
-            <a:off x="4069080" y="1005840"/>
-            <a:ext cx="7802575" cy="731520"/>
+            <a:off x="5349240" y="1005840"/>
+            <a:ext cx="6522415" cy="731520"/>
           </a:xfrm>
           <a:prstGeom prst="rect">
             <a:avLst/>
@@ -19652,8 +19724,8 @@
         </p:nvSpPr>
         <p:spPr>
           <a:xfrm>
-            <a:off x="4069080" y="1737360"/>
-            <a:ext cx="7802575" cy="457200"/>
+            <a:off x="5349240" y="1737360"/>
+            <a:ext cx="6522415" cy="457200"/>
           </a:xfrm>
           <a:prstGeom prst="rect">
             <a:avLst/>
@@ -19669,7 +19741,7 @@
               <a:buNone/>
             </a:pPr>
             <a:r>
-              <a:rPr lang="en-US" sz="3200" b="1" dirty="0">
+              <a:rPr lang="en-US" sz="2600" b="1" dirty="0">
                 <a:solidFill>
                   <a:srgbClr val="990011"/>
                 </a:solidFill>
@@ -19677,9 +19749,9 @@
                 <a:ea typeface="Times New Roman" pitchFamily="34" charset="-122"/>
                 <a:cs typeface="Times New Roman" pitchFamily="34" charset="-120"/>
               </a:rPr>
-              <a:t>B) The Ageing Population</a:t>
-            </a:r>
-            <a:endParaRPr lang="en-US" sz="3200" dirty="0"/>
+              <a:t>D) Consequences of an Ageing Population</a:t>
+            </a:r>
+            <a:endParaRPr lang="en-US" sz="2600" dirty="0"/>
           </a:p>
         </p:txBody>
       </p:sp>
@@ -19691,8 +19763,8 @@
         </p:nvSpPr>
         <p:spPr>
           <a:xfrm>
-            <a:off x="4069080" y="2240280"/>
-            <a:ext cx="7802575" cy="4206240"/>
+            <a:off x="5349240" y="2240280"/>
+            <a:ext cx="6522415" cy="4206240"/>
           </a:xfrm>
           <a:prstGeom prst="rect">
             <a:avLst/>
@@ -19719,7 +19791,7 @@
                 <a:ea typeface="Times New Roman" pitchFamily="34" charset="-122"/>
                 <a:cs typeface="Times New Roman" pitchFamily="34" charset="-120"/>
               </a:rPr>
-              <a:t>Example of Japan: </a:t>
+              <a:t>Closure of services: </a:t>
             </a:r>
             <a:pPr algn="l" indent="0" marL="0">
               <a:spcAft>
@@ -19736,44 +19808,7 @@
                 <a:ea typeface="Times New Roman" pitchFamily="34" charset="-122"/>
                 <a:cs typeface="Times New Roman" pitchFamily="34" charset="-120"/>
               </a:rPr>
-              <a:t>About 29 % of Japanese are 65 or over, one of the highest shares in the world.</a:t>
-            </a:r>
-            <a:endParaRPr lang="en-US" sz="4000" dirty="0"/>
-          </a:p>
-          <a:p>
-            <a:pPr algn="l" indent="0" marL="0">
-              <a:spcAft>
-                <a:spcPts val="800"/>
-              </a:spcAft>
-              <a:buNone/>
-            </a:pPr>
-            <a:r>
-              <a:rPr lang="en-US" sz="4000" b="1" dirty="0">
-                <a:solidFill>
-                  <a:srgbClr val="111111"/>
-                </a:solidFill>
-                <a:latin typeface="Times New Roman" pitchFamily="34" charset="0"/>
-                <a:ea typeface="Times New Roman" pitchFamily="34" charset="-122"/>
-                <a:cs typeface="Times New Roman" pitchFamily="34" charset="-120"/>
-              </a:rPr>
-              <a:t>Shrinking workforce: </a:t>
-            </a:r>
-            <a:pPr algn="l" indent="0" marL="0">
-              <a:spcAft>
-                <a:spcPts val="800"/>
-              </a:spcAft>
-              <a:buNone/>
-            </a:pPr>
-            <a:r>
-              <a:rPr lang="en-US" sz="4000" dirty="0">
-                <a:solidFill>
-                  <a:srgbClr val="111111"/>
-                </a:solidFill>
-                <a:latin typeface="Times New Roman" pitchFamily="34" charset="0"/>
-                <a:ea typeface="Times New Roman" pitchFamily="34" charset="-122"/>
-                <a:cs typeface="Times New Roman" pitchFamily="34" charset="-120"/>
-              </a:rPr>
-              <a:t>Labour shortages appear, which lowers production.</a:t>
+              <a:t>Schools and maternity wards close because there are fewer children. Some villages lose their young people and die out.</a:t>
             </a:r>
             <a:endParaRPr lang="en-US" sz="4000" dirty="0"/>
           </a:p>
@@ -19891,150 +19926,9 @@
           </a:p>
         </p:txBody>
       </p:sp>
-      <p:sp>
-        <p:nvSpPr>
-          <p:cNvPr id="3" name="Text 1"/>
-          <p:cNvSpPr/>
-          <p:nvPr/>
-        </p:nvSpPr>
-        <p:spPr>
-          <a:xfrm>
-            <a:off x="365760" y="1005840"/>
-            <a:ext cx="11460175" cy="731520"/>
-          </a:xfrm>
-          <a:prstGeom prst="rect">
-            <a:avLst/>
-          </a:prstGeom>
-          <a:noFill/>
-          <a:ln/>
-        </p:spPr>
-        <p:txBody>
-          <a:bodyPr wrap="square" lIns="0" tIns="0" rIns="0" bIns="0" rtlCol="0" anchor="ctr">
-            <a:normAutofit/>
-          </a:bodyPr>
-          <a:lstStyle/>
-          <a:p>
-            <a:pPr algn="ctr" indent="0" marL="0">
-              <a:buNone/>
-            </a:pPr>
-            <a:r>
-              <a:rPr lang="en-US" sz="3600" b="1" dirty="0">
-                <a:solidFill>
-                  <a:srgbClr val="990011"/>
-                </a:solidFill>
-                <a:latin typeface="Times New Roman" pitchFamily="34" charset="0"/>
-                <a:ea typeface="Times New Roman" pitchFamily="34" charset="-122"/>
-                <a:cs typeface="Times New Roman" pitchFamily="34" charset="-120"/>
-              </a:rPr>
-              <a:t>2. Global Patterns</a:t>
-            </a:r>
-            <a:endParaRPr lang="en-US" sz="3600" dirty="0"/>
-          </a:p>
-        </p:txBody>
-      </p:sp>
-      <p:sp>
-        <p:nvSpPr>
-          <p:cNvPr id="4" name="Text 2"/>
-          <p:cNvSpPr/>
-          <p:nvPr/>
-        </p:nvSpPr>
-        <p:spPr>
-          <a:xfrm>
-            <a:off x="365760" y="1737360"/>
-            <a:ext cx="5120640" cy="457200"/>
-          </a:xfrm>
-          <a:prstGeom prst="rect">
-            <a:avLst/>
-          </a:prstGeom>
-          <a:noFill/>
-          <a:ln/>
-        </p:spPr>
-        <p:txBody>
-          <a:bodyPr wrap="square" lIns="0" tIns="0" rIns="0" bIns="0" rtlCol="0" anchor="ctr">
-            <a:normAutofit/>
-          </a:bodyPr>
-          <a:lstStyle/>
-          <a:p>
-            <a:pPr algn="l" indent="0" marL="0">
-              <a:buNone/>
-            </a:pPr>
-            <a:r>
-              <a:rPr lang="en-US" sz="3000" b="1" dirty="0">
-                <a:solidFill>
-                  <a:srgbClr val="990011"/>
-                </a:solidFill>
-                <a:latin typeface="Times New Roman" pitchFamily="34" charset="0"/>
-                <a:ea typeface="Times New Roman" pitchFamily="34" charset="-122"/>
-                <a:cs typeface="Times New Roman" pitchFamily="34" charset="-120"/>
-              </a:rPr>
-              <a:t>B) The Ageing Population</a:t>
-            </a:r>
-            <a:endParaRPr lang="en-US" sz="3000" dirty="0"/>
-          </a:p>
-        </p:txBody>
-      </p:sp>
-      <p:sp>
-        <p:nvSpPr>
-          <p:cNvPr id="5" name="Text 3"/>
-          <p:cNvSpPr/>
-          <p:nvPr/>
-        </p:nvSpPr>
-        <p:spPr>
-          <a:xfrm>
-            <a:off x="365760" y="2240280"/>
-            <a:ext cx="4846320" cy="4160520"/>
-          </a:xfrm>
-          <a:prstGeom prst="rect">
-            <a:avLst/>
-          </a:prstGeom>
-          <a:noFill/>
-          <a:ln/>
-        </p:spPr>
-        <p:txBody>
-          <a:bodyPr wrap="square" lIns="0" tIns="0" rIns="0" bIns="0" rtlCol="0" anchor="t"/>
-          <a:lstStyle/>
-          <a:p>
-            <a:pPr algn="l" indent="0" marL="0">
-              <a:spcAft>
-                <a:spcPts val="800"/>
-              </a:spcAft>
-              <a:buNone/>
-            </a:pPr>
-            <a:r>
-              <a:rPr lang="en-US" sz="3600" b="1" dirty="0">
-                <a:solidFill>
-                  <a:srgbClr val="111111"/>
-                </a:solidFill>
-                <a:latin typeface="Times New Roman" pitchFamily="34" charset="0"/>
-                <a:ea typeface="Times New Roman" pitchFamily="34" charset="-122"/>
-                <a:cs typeface="Times New Roman" pitchFamily="34" charset="-120"/>
-              </a:rPr>
-              <a:t>High State spending: </a:t>
-            </a:r>
-            <a:pPr algn="l" indent="0" marL="0">
-              <a:spcAft>
-                <a:spcPts val="800"/>
-              </a:spcAft>
-              <a:buNone/>
-            </a:pPr>
-            <a:r>
-              <a:rPr lang="en-US" sz="3600" dirty="0">
-                <a:solidFill>
-                  <a:srgbClr val="111111"/>
-                </a:solidFill>
-                <a:latin typeface="Times New Roman" pitchFamily="34" charset="0"/>
-                <a:ea typeface="Times New Roman" pitchFamily="34" charset="-122"/>
-                <a:cs typeface="Times New Roman" pitchFamily="34" charset="-120"/>
-              </a:rPr>
-              <a:t>Governments spend a lot on pensions, hospitals and care for the elderly.</a:t>
-            </a:r>
-            <a:endParaRPr lang="en-US" sz="3600" dirty="0"/>
-          </a:p>
-        </p:txBody>
-      </p:sp>
       <p:pic>
         <p:nvPicPr>
-          <p:cNvPr id="6" name="Image 0" descr="/home/claude/f4/img/v2/f2t_doctor.jpg">    </p:cNvPr>
+          <p:cNvPr id="3" name="Image 0" descr="/home/claude/f4/img/minesec_sheet.png">    </p:cNvPr>
           <p:cNvPicPr>
             <a:picLocks noChangeAspect="1"/>
           </p:cNvPicPr>
@@ -20048,8 +19942,8 @@
         </p:blipFill>
         <p:spPr>
           <a:xfrm>
-            <a:off x="5349240" y="2071212"/>
-            <a:ext cx="6659575" cy="3693983"/>
+            <a:off x="0" y="658368"/>
+            <a:ext cx="3840480" cy="5833872"/>
           </a:xfrm>
           <a:prstGeom prst="rect">
             <a:avLst/>
@@ -20058,14 +19952,14 @@
       </p:pic>
       <p:sp>
         <p:nvSpPr>
-          <p:cNvPr id="7" name="Text 4"/>
+          <p:cNvPr id="4" name="Text 1"/>
           <p:cNvSpPr/>
           <p:nvPr/>
         </p:nvSpPr>
         <p:spPr>
           <a:xfrm>
-            <a:off x="5349240" y="6089904"/>
-            <a:ext cx="6659575" cy="347472"/>
+            <a:off x="4069080" y="1005840"/>
+            <a:ext cx="7802575" cy="731520"/>
           </a:xfrm>
           <a:prstGeom prst="rect">
             <a:avLst/>
@@ -20074,24 +19968,124 @@
           <a:ln/>
         </p:spPr>
         <p:txBody>
-          <a:bodyPr wrap="square" lIns="0" tIns="0" rIns="0" bIns="0" rtlCol="0" anchor="ctr"/>
+          <a:bodyPr wrap="square" lIns="0" tIns="0" rIns="0" bIns="0" rtlCol="0" anchor="ctr">
+            <a:normAutofit/>
+          </a:bodyPr>
           <a:lstStyle/>
           <a:p>
             <a:pPr algn="ctr" indent="0" marL="0">
               <a:buNone/>
             </a:pPr>
             <a:r>
-              <a:rPr lang="en-US" sz="1600" i="1" dirty="0">
-                <a:solidFill>
-                  <a:srgbClr val="555555"/>
+              <a:rPr lang="en-US" sz="3600" b="1" dirty="0">
+                <a:solidFill>
+                  <a:srgbClr val="990011"/>
                 </a:solidFill>
                 <a:latin typeface="Times New Roman" pitchFamily="34" charset="0"/>
                 <a:ea typeface="Times New Roman" pitchFamily="34" charset="-122"/>
                 <a:cs typeface="Times New Roman" pitchFamily="34" charset="-120"/>
               </a:rPr>
-              <a:t>Illustration: health care</a:t>
-            </a:r>
-            <a:endParaRPr lang="en-US" sz="1600" dirty="0"/>
+              <a:t>2. Global Patterns</a:t>
+            </a:r>
+            <a:endParaRPr lang="en-US" sz="3600" dirty="0"/>
+          </a:p>
+        </p:txBody>
+      </p:sp>
+      <p:sp>
+        <p:nvSpPr>
+          <p:cNvPr id="5" name="Text 2"/>
+          <p:cNvSpPr/>
+          <p:nvPr/>
+        </p:nvSpPr>
+        <p:spPr>
+          <a:xfrm>
+            <a:off x="4069080" y="1737360"/>
+            <a:ext cx="7802575" cy="457200"/>
+          </a:xfrm>
+          <a:prstGeom prst="rect">
+            <a:avLst/>
+          </a:prstGeom>
+          <a:noFill/>
+          <a:ln/>
+        </p:spPr>
+        <p:txBody>
+          <a:bodyPr wrap="square" lIns="0" tIns="0" rIns="0" bIns="0" rtlCol="0" anchor="ctr"/>
+          <a:lstStyle/>
+          <a:p>
+            <a:pPr algn="l" indent="0" marL="0">
+              <a:buNone/>
+            </a:pPr>
+            <a:r>
+              <a:rPr lang="en-US" sz="3100" b="1" dirty="0">
+                <a:solidFill>
+                  <a:srgbClr val="990011"/>
+                </a:solidFill>
+                <a:latin typeface="Times New Roman" pitchFamily="34" charset="0"/>
+                <a:ea typeface="Times New Roman" pitchFamily="34" charset="-122"/>
+                <a:cs typeface="Times New Roman" pitchFamily="34" charset="-120"/>
+              </a:rPr>
+              <a:t>D) Consequences of an Ageing Population</a:t>
+            </a:r>
+            <a:endParaRPr lang="en-US" sz="3100" dirty="0"/>
+          </a:p>
+        </p:txBody>
+      </p:sp>
+      <p:sp>
+        <p:nvSpPr>
+          <p:cNvPr id="6" name="Text 3"/>
+          <p:cNvSpPr/>
+          <p:nvPr/>
+        </p:nvSpPr>
+        <p:spPr>
+          <a:xfrm>
+            <a:off x="4069080" y="2240280"/>
+            <a:ext cx="7802575" cy="4206240"/>
+          </a:xfrm>
+          <a:prstGeom prst="rect">
+            <a:avLst/>
+          </a:prstGeom>
+          <a:noFill/>
+          <a:ln/>
+        </p:spPr>
+        <p:txBody>
+          <a:bodyPr wrap="square" lIns="0" tIns="0" rIns="0" bIns="0" rtlCol="0" anchor="t"/>
+          <a:lstStyle/>
+          <a:p>
+            <a:pPr algn="l" indent="0" marL="0">
+              <a:spcAft>
+                <a:spcPts val="800"/>
+              </a:spcAft>
+              <a:buNone/>
+            </a:pPr>
+            <a:r>
+              <a:rPr lang="en-US" sz="4000" b="1" dirty="0">
+                <a:solidFill>
+                  <a:srgbClr val="111111"/>
+                </a:solidFill>
+                <a:latin typeface="Times New Roman" pitchFamily="34" charset="0"/>
+                <a:ea typeface="Times New Roman" pitchFamily="34" charset="-122"/>
+                <a:cs typeface="Times New Roman" pitchFamily="34" charset="-120"/>
+              </a:rPr>
+              <a:t>Government responses: </a:t>
+            </a:r>
+            <a:pPr algn="l" indent="0" marL="0">
+              <a:spcAft>
+                <a:spcPts val="800"/>
+              </a:spcAft>
+              <a:buNone/>
+            </a:pPr>
+            <a:r>
+              <a:rPr lang="en-US" sz="4000" dirty="0">
+                <a:solidFill>
+                  <a:srgbClr val="111111"/>
+                </a:solidFill>
+                <a:latin typeface="Times New Roman" pitchFamily="34" charset="0"/>
+                <a:ea typeface="Times New Roman" pitchFamily="34" charset="-122"/>
+                <a:cs typeface="Times New Roman" pitchFamily="34" charset="-120"/>
+              </a:rPr>
+              <a:t>Governments raise the retirement age and encourage births with family allowances. They also accept immigrant workers to fill labour shortages.</a:t>
+            </a:r>
+            <a:endParaRPr lang="en-US" sz="4000" dirty="0"/>
           </a:p>
         </p:txBody>
       </p:sp>
@@ -20201,7 +20195,7 @@
                 <a:ea typeface="Calibri" pitchFamily="34" charset="-122"/>
                 <a:cs typeface="Calibri" pitchFamily="34" charset="-120"/>
               </a:rPr>
-              <a:t>BOARD SUMMARY</a:t>
+              <a:t>FORMATIVE EVALUATION</a:t>
             </a:r>
             <a:endParaRPr lang="en-US" sz="1400" dirty="0"/>
           </a:p>
@@ -20224,7 +20218,7 @@
         <p:spPr>
           <a:xfrm>
             <a:off x="0" y="658368"/>
-            <a:ext cx="3840480" cy="5833872"/>
+            <a:ext cx="5120640" cy="5833872"/>
           </a:xfrm>
           <a:prstGeom prst="rect">
             <a:avLst/>
@@ -20239,8 +20233,8 @@
         </p:nvSpPr>
         <p:spPr>
           <a:xfrm>
-            <a:off x="4069080" y="1005840"/>
-            <a:ext cx="7802575" cy="731520"/>
+            <a:off x="5349240" y="1005840"/>
+            <a:ext cx="6522415" cy="731520"/>
           </a:xfrm>
           <a:prstGeom prst="rect">
             <a:avLst/>
@@ -20266,7 +20260,7 @@
                 <a:ea typeface="Times New Roman" pitchFamily="34" charset="-122"/>
                 <a:cs typeface="Times New Roman" pitchFamily="34" charset="-120"/>
               </a:rPr>
-              <a:t>2. Global Patterns</a:t>
+              <a:t>Evaluation 1</a:t>
             </a:r>
             <a:endParaRPr lang="en-US" sz="3600" dirty="0"/>
           </a:p>
@@ -20280,47 +20274,8 @@
         </p:nvSpPr>
         <p:spPr>
           <a:xfrm>
-            <a:off x="4069080" y="1737360"/>
-            <a:ext cx="7802575" cy="457200"/>
-          </a:xfrm>
-          <a:prstGeom prst="rect">
-            <a:avLst/>
-          </a:prstGeom>
-          <a:noFill/>
-          <a:ln/>
-        </p:spPr>
-        <p:txBody>
-          <a:bodyPr wrap="square" lIns="0" tIns="0" rIns="0" bIns="0" rtlCol="0" anchor="ctr"/>
-          <a:lstStyle/>
-          <a:p>
-            <a:pPr algn="l" indent="0" marL="0">
-              <a:buNone/>
-            </a:pPr>
-            <a:r>
-              <a:rPr lang="en-US" sz="3200" b="1" dirty="0">
-                <a:solidFill>
-                  <a:srgbClr val="990011"/>
-                </a:solidFill>
-                <a:latin typeface="Times New Roman" pitchFamily="34" charset="0"/>
-                <a:ea typeface="Times New Roman" pitchFamily="34" charset="-122"/>
-                <a:cs typeface="Times New Roman" pitchFamily="34" charset="-120"/>
-              </a:rPr>
-              <a:t>B) The Ageing Population</a:t>
-            </a:r>
-            <a:endParaRPr lang="en-US" sz="3200" dirty="0"/>
-          </a:p>
-        </p:txBody>
-      </p:sp>
-      <p:sp>
-        <p:nvSpPr>
-          <p:cNvPr id="6" name="Text 3"/>
-          <p:cNvSpPr/>
-          <p:nvPr/>
-        </p:nvSpPr>
-        <p:spPr>
-          <a:xfrm>
-            <a:off x="4069080" y="2240280"/>
-            <a:ext cx="7802575" cy="4206240"/>
+            <a:off x="5349240" y="1783080"/>
+            <a:ext cx="6522415" cy="4663440"/>
           </a:xfrm>
           <a:prstGeom prst="rect">
             <a:avLst/>
@@ -20339,7 +20294,7 @@
               <a:buNone/>
             </a:pPr>
             <a:r>
-              <a:rPr lang="en-US" sz="4000" b="1" dirty="0">
+              <a:rPr lang="en-US" sz="4000" dirty="0">
                 <a:solidFill>
                   <a:srgbClr val="111111"/>
                 </a:solidFill>
@@ -20347,61 +20302,7 @@
                 <a:ea typeface="Times New Roman" pitchFamily="34" charset="-122"/>
                 <a:cs typeface="Times New Roman" pitchFamily="34" charset="-120"/>
               </a:rPr>
-              <a:t>Closure of services: </a:t>
-            </a:r>
-            <a:pPr algn="l" indent="0" marL="0">
-              <a:spcAft>
-                <a:spcPts val="800"/>
-              </a:spcAft>
-              <a:buNone/>
-            </a:pPr>
-            <a:r>
-              <a:rPr lang="en-US" sz="4000" dirty="0">
-                <a:solidFill>
-                  <a:srgbClr val="111111"/>
-                </a:solidFill>
-                <a:latin typeface="Times New Roman" pitchFamily="34" charset="0"/>
-                <a:ea typeface="Times New Roman" pitchFamily="34" charset="-122"/>
-                <a:cs typeface="Times New Roman" pitchFamily="34" charset="-120"/>
-              </a:rPr>
-              <a:t>Schools and maternity wards close because there are fewer children.</a:t>
-            </a:r>
-            <a:endParaRPr lang="en-US" sz="4000" dirty="0"/>
-          </a:p>
-          <a:p>
-            <a:pPr algn="l" indent="0" marL="0">
-              <a:spcAft>
-                <a:spcPts val="800"/>
-              </a:spcAft>
-              <a:buNone/>
-            </a:pPr>
-            <a:r>
-              <a:rPr lang="en-US" sz="4000" b="1" dirty="0">
-                <a:solidFill>
-                  <a:srgbClr val="111111"/>
-                </a:solidFill>
-                <a:latin typeface="Times New Roman" pitchFamily="34" charset="0"/>
-                <a:ea typeface="Times New Roman" pitchFamily="34" charset="-122"/>
-                <a:cs typeface="Times New Roman" pitchFamily="34" charset="-120"/>
-              </a:rPr>
-              <a:t>Policies: </a:t>
-            </a:r>
-            <a:pPr algn="l" indent="0" marL="0">
-              <a:spcAft>
-                <a:spcPts val="800"/>
-              </a:spcAft>
-              <a:buNone/>
-            </a:pPr>
-            <a:r>
-              <a:rPr lang="en-US" sz="4000" dirty="0">
-                <a:solidFill>
-                  <a:srgbClr val="111111"/>
-                </a:solidFill>
-                <a:latin typeface="Times New Roman" pitchFamily="34" charset="0"/>
-                <a:ea typeface="Times New Roman" pitchFamily="34" charset="-122"/>
-                <a:cs typeface="Times New Roman" pitchFamily="34" charset="-120"/>
-              </a:rPr>
-              <a:t>Governments raise the retirement age, encourage births and accept immigrant workers.</a:t>
+              <a:t>Give two characteristics of a youthful population.</a:t>
             </a:r>
             <a:endParaRPr lang="en-US" sz="4000" dirty="0"/>
           </a:p>
@@ -20578,7 +20479,7 @@
                 <a:ea typeface="Times New Roman" pitchFamily="34" charset="-122"/>
                 <a:cs typeface="Times New Roman" pitchFamily="34" charset="-120"/>
               </a:rPr>
-              <a:t>Evaluation 1</a:t>
+              <a:t>Expected Answer</a:t>
             </a:r>
             <a:endParaRPr lang="en-US" sz="3600" dirty="0"/>
           </a:p>
@@ -20620,7 +20521,7 @@
                 <a:ea typeface="Times New Roman" pitchFamily="34" charset="-122"/>
                 <a:cs typeface="Times New Roman" pitchFamily="34" charset="-120"/>
               </a:rPr>
-              <a:t>Give two characteristics of a youthful population.</a:t>
+              <a:t>Over 40 % of people under 15 and fewer than 5 % aged 65 or over; high birth rates.</a:t>
             </a:r>
             <a:endParaRPr lang="en-US" sz="4000" dirty="0"/>
           </a:p>
@@ -20797,7 +20698,7 @@
                 <a:ea typeface="Times New Roman" pitchFamily="34" charset="-122"/>
                 <a:cs typeface="Times New Roman" pitchFamily="34" charset="-120"/>
               </a:rPr>
-              <a:t>Expected Answer</a:t>
+              <a:t>Evaluation 2</a:t>
             </a:r>
             <a:endParaRPr lang="en-US" sz="3600" dirty="0"/>
           </a:p>
@@ -20839,7 +20740,7 @@
                 <a:ea typeface="Times New Roman" pitchFamily="34" charset="-122"/>
                 <a:cs typeface="Times New Roman" pitchFamily="34" charset="-120"/>
               </a:rPr>
-              <a:t>Over 40 % of people under 15 and fewer than 5 % aged 65 or over; high birth rates.</a:t>
+              <a:t>Give two consequences of an ageing population.</a:t>
             </a:r>
             <a:endParaRPr lang="en-US" sz="4000" dirty="0"/>
           </a:p>
@@ -21016,7 +20917,7 @@
                 <a:ea typeface="Times New Roman" pitchFamily="34" charset="-122"/>
                 <a:cs typeface="Times New Roman" pitchFamily="34" charset="-120"/>
               </a:rPr>
-              <a:t>Evaluation 2</a:t>
+              <a:t>Expected Answer</a:t>
             </a:r>
             <a:endParaRPr lang="en-US" sz="3600" dirty="0"/>
           </a:p>
@@ -21058,7 +20959,7 @@
                 <a:ea typeface="Times New Roman" pitchFamily="34" charset="-122"/>
                 <a:cs typeface="Times New Roman" pitchFamily="34" charset="-120"/>
               </a:rPr>
-              <a:t>Give two consequences of an ageing population.</a:t>
+              <a:t>Labour shortages and high spending on pensions and health care (also school closures).</a:t>
             </a:r>
             <a:endParaRPr lang="en-US" sz="4000" dirty="0"/>
           </a:p>
@@ -21170,7 +21071,7 @@
                 <a:ea typeface="Calibri" pitchFamily="34" charset="-122"/>
                 <a:cs typeface="Calibri" pitchFamily="34" charset="-120"/>
               </a:rPr>
-              <a:t>FORMATIVE EVALUATION</a:t>
+              <a:t>REMEDIATION</a:t>
             </a:r>
             <a:endParaRPr lang="en-US" sz="1400" dirty="0"/>
           </a:p>
@@ -21193,7 +21094,7 @@
         <p:spPr>
           <a:xfrm>
             <a:off x="0" y="658368"/>
-            <a:ext cx="5120640" cy="5833872"/>
+            <a:ext cx="3840480" cy="5833872"/>
           </a:xfrm>
           <a:prstGeom prst="rect">
             <a:avLst/>
@@ -21208,8 +21109,8 @@
         </p:nvSpPr>
         <p:spPr>
           <a:xfrm>
-            <a:off x="5349240" y="1005840"/>
-            <a:ext cx="6522415" cy="731520"/>
+            <a:off x="4069080" y="1005840"/>
+            <a:ext cx="7802575" cy="731520"/>
           </a:xfrm>
           <a:prstGeom prst="rect">
             <a:avLst/>
@@ -21235,7 +21136,7 @@
                 <a:ea typeface="Times New Roman" pitchFamily="34" charset="-122"/>
                 <a:cs typeface="Times New Roman" pitchFamily="34" charset="-120"/>
               </a:rPr>
-              <a:t>Expected Answer</a:t>
+              <a:t>Remediation</a:t>
             </a:r>
             <a:endParaRPr lang="en-US" sz="3600" dirty="0"/>
           </a:p>
@@ -21249,8 +21150,8 @@
         </p:nvSpPr>
         <p:spPr>
           <a:xfrm>
-            <a:off x="5349240" y="1783080"/>
-            <a:ext cx="6522415" cy="4663440"/>
+            <a:off x="4069080" y="1783080"/>
+            <a:ext cx="7802575" cy="4663440"/>
           </a:xfrm>
           <a:prstGeom prst="rect">
             <a:avLst/>
@@ -21269,7 +21170,7 @@
               <a:buNone/>
             </a:pPr>
             <a:r>
-              <a:rPr lang="en-US" sz="4000" dirty="0">
+              <a:rPr lang="en-US" sz="4000" b="1" dirty="0">
                 <a:solidFill>
                   <a:srgbClr val="111111"/>
                 </a:solidFill>
@@ -21277,7 +21178,73 @@
                 <a:ea typeface="Times New Roman" pitchFamily="34" charset="-122"/>
                 <a:cs typeface="Times New Roman" pitchFamily="34" charset="-120"/>
               </a:rPr>
-              <a:t>Labour shortages and high spending on pensions and health care (also school closures).</a:t>
+              <a:t>Fill in the blanks:</a:t>
+            </a:r>
+            <a:endParaRPr lang="en-US" sz="4000" dirty="0"/>
+          </a:p>
+          <a:p>
+            <a:pPr algn="l" marL="342900" indent="-342900">
+              <a:spcAft>
+                <a:spcPts val="800"/>
+              </a:spcAft>
+              <a:buSzPct val="100000"/>
+              <a:buFont typeface="+mj-lt"/>
+              <a:buAutoNum type="arabicPeriod" startAt="1"/>
+            </a:pPr>
+            <a:r>
+              <a:rPr lang="en-US" sz="4000" dirty="0">
+                <a:solidFill>
+                  <a:srgbClr val="111111"/>
+                </a:solidFill>
+                <a:latin typeface="Times New Roman" pitchFamily="34" charset="0"/>
+                <a:ea typeface="Times New Roman" pitchFamily="34" charset="-122"/>
+                <a:cs typeface="Times New Roman" pitchFamily="34" charset="-120"/>
+              </a:rPr>
+              <a:t>The number of males per 100 females is the ______.</a:t>
+            </a:r>
+            <a:endParaRPr lang="en-US" sz="4000" dirty="0"/>
+          </a:p>
+          <a:p>
+            <a:pPr algn="l" marL="342900" indent="-342900">
+              <a:spcAft>
+                <a:spcPts val="800"/>
+              </a:spcAft>
+              <a:buSzPct val="100000"/>
+              <a:buFont typeface="+mj-lt"/>
+              <a:buAutoNum type="arabicPeriod" startAt="1"/>
+            </a:pPr>
+            <a:r>
+              <a:rPr lang="en-US" sz="4000" dirty="0">
+                <a:solidFill>
+                  <a:srgbClr val="111111"/>
+                </a:solidFill>
+                <a:latin typeface="Times New Roman" pitchFamily="34" charset="0"/>
+                <a:ea typeface="Times New Roman" pitchFamily="34" charset="-122"/>
+                <a:cs typeface="Times New Roman" pitchFamily="34" charset="-120"/>
+              </a:rPr>
+              <a:t>A population with over 40 % under 15 is ______.</a:t>
+            </a:r>
+            <a:endParaRPr lang="en-US" sz="4000" dirty="0"/>
+          </a:p>
+          <a:p>
+            <a:pPr algn="l" marL="342900" indent="-342900">
+              <a:spcAft>
+                <a:spcPts val="800"/>
+              </a:spcAft>
+              <a:buSzPct val="100000"/>
+              <a:buFont typeface="+mj-lt"/>
+              <a:buAutoNum type="arabicPeriod" startAt="1"/>
+            </a:pPr>
+            <a:r>
+              <a:rPr lang="en-US" sz="4000" dirty="0">
+                <a:solidFill>
+                  <a:srgbClr val="111111"/>
+                </a:solidFill>
+                <a:latin typeface="Times New Roman" pitchFamily="34" charset="0"/>
+                <a:ea typeface="Times New Roman" pitchFamily="34" charset="-122"/>
+                <a:cs typeface="Times New Roman" pitchFamily="34" charset="-120"/>
+              </a:rPr>
+              <a:t>Japan has an ______ population.</a:t>
             </a:r>
             <a:endParaRPr lang="en-US" sz="4000" dirty="0"/>
           </a:p>
@@ -21389,7 +21356,7 @@
                 <a:ea typeface="Calibri" pitchFamily="34" charset="-122"/>
                 <a:cs typeface="Calibri" pitchFamily="34" charset="-120"/>
               </a:rPr>
-              <a:t>REMEDIATION</a:t>
+              <a:t>HOMEWORK</a:t>
             </a:r>
             <a:endParaRPr lang="en-US" sz="1400" dirty="0"/>
           </a:p>
@@ -21412,7 +21379,7 @@
         <p:spPr>
           <a:xfrm>
             <a:off x="0" y="658368"/>
-            <a:ext cx="3840480" cy="5833872"/>
+            <a:ext cx="5120640" cy="5833872"/>
           </a:xfrm>
           <a:prstGeom prst="rect">
             <a:avLst/>
@@ -21427,8 +21394,8 @@
         </p:nvSpPr>
         <p:spPr>
           <a:xfrm>
-            <a:off x="4069080" y="1005840"/>
-            <a:ext cx="7802575" cy="731520"/>
+            <a:off x="5349240" y="1005840"/>
+            <a:ext cx="6522415" cy="731520"/>
           </a:xfrm>
           <a:prstGeom prst="rect">
             <a:avLst/>
@@ -21454,7 +21421,7 @@
                 <a:ea typeface="Times New Roman" pitchFamily="34" charset="-122"/>
                 <a:cs typeface="Times New Roman" pitchFamily="34" charset="-120"/>
               </a:rPr>
-              <a:t>Remediation</a:t>
+              <a:t>Homework</a:t>
             </a:r>
             <a:endParaRPr lang="en-US" sz="3600" dirty="0"/>
           </a:p>
@@ -21468,8 +21435,8 @@
         </p:nvSpPr>
         <p:spPr>
           <a:xfrm>
-            <a:off x="4069080" y="1783080"/>
-            <a:ext cx="7802575" cy="4663440"/>
+            <a:off x="5349240" y="1783080"/>
+            <a:ext cx="6522415" cy="4663440"/>
           </a:xfrm>
           <a:prstGeom prst="rect">
             <a:avLst/>
@@ -21488,7 +21455,7 @@
               <a:buNone/>
             </a:pPr>
             <a:r>
-              <a:rPr lang="en-US" sz="4000" b="1" dirty="0">
+              <a:rPr lang="en-US" sz="4000" dirty="0">
                 <a:solidFill>
                   <a:srgbClr val="111111"/>
                 </a:solidFill>
@@ -21496,73 +21463,7 @@
                 <a:ea typeface="Times New Roman" pitchFamily="34" charset="-122"/>
                 <a:cs typeface="Times New Roman" pitchFamily="34" charset="-120"/>
               </a:rPr>
-              <a:t>Fill in the blanks:</a:t>
-            </a:r>
-            <a:endParaRPr lang="en-US" sz="4000" dirty="0"/>
-          </a:p>
-          <a:p>
-            <a:pPr algn="l" marL="342900" indent="-342900">
-              <a:spcAft>
-                <a:spcPts val="800"/>
-              </a:spcAft>
-              <a:buSzPct val="100000"/>
-              <a:buFont typeface="+mj-lt"/>
-              <a:buAutoNum type="arabicPeriod" startAt="1"/>
-            </a:pPr>
-            <a:r>
-              <a:rPr lang="en-US" sz="4000" dirty="0">
-                <a:solidFill>
-                  <a:srgbClr val="111111"/>
-                </a:solidFill>
-                <a:latin typeface="Times New Roman" pitchFamily="34" charset="0"/>
-                <a:ea typeface="Times New Roman" pitchFamily="34" charset="-122"/>
-                <a:cs typeface="Times New Roman" pitchFamily="34" charset="-120"/>
-              </a:rPr>
-              <a:t>The number of males per 100 females is the ______.</a:t>
-            </a:r>
-            <a:endParaRPr lang="en-US" sz="4000" dirty="0"/>
-          </a:p>
-          <a:p>
-            <a:pPr algn="l" marL="342900" indent="-342900">
-              <a:spcAft>
-                <a:spcPts val="800"/>
-              </a:spcAft>
-              <a:buSzPct val="100000"/>
-              <a:buFont typeface="+mj-lt"/>
-              <a:buAutoNum type="arabicPeriod" startAt="1"/>
-            </a:pPr>
-            <a:r>
-              <a:rPr lang="en-US" sz="4000" dirty="0">
-                <a:solidFill>
-                  <a:srgbClr val="111111"/>
-                </a:solidFill>
-                <a:latin typeface="Times New Roman" pitchFamily="34" charset="0"/>
-                <a:ea typeface="Times New Roman" pitchFamily="34" charset="-122"/>
-                <a:cs typeface="Times New Roman" pitchFamily="34" charset="-120"/>
-              </a:rPr>
-              <a:t>A population with over 40 % under 15 is ______.</a:t>
-            </a:r>
-            <a:endParaRPr lang="en-US" sz="4000" dirty="0"/>
-          </a:p>
-          <a:p>
-            <a:pPr algn="l" marL="342900" indent="-342900">
-              <a:spcAft>
-                <a:spcPts val="800"/>
-              </a:spcAft>
-              <a:buSzPct val="100000"/>
-              <a:buFont typeface="+mj-lt"/>
-              <a:buAutoNum type="arabicPeriod" startAt="1"/>
-            </a:pPr>
-            <a:r>
-              <a:rPr lang="en-US" sz="4000" dirty="0">
-                <a:solidFill>
-                  <a:srgbClr val="111111"/>
-                </a:solidFill>
-                <a:latin typeface="Times New Roman" pitchFamily="34" charset="0"/>
-                <a:ea typeface="Times New Roman" pitchFamily="34" charset="-122"/>
-                <a:cs typeface="Times New Roman" pitchFamily="34" charset="-120"/>
-              </a:rPr>
-              <a:t>Japan has an ______ population.</a:t>
+              <a:t>State what the base of a population pyramid represents.</a:t>
             </a:r>
             <a:endParaRPr lang="en-US" sz="4000" dirty="0"/>
           </a:p>
@@ -21674,7 +21575,7 @@
                 <a:ea typeface="Calibri" pitchFamily="34" charset="-122"/>
                 <a:cs typeface="Calibri" pitchFamily="34" charset="-120"/>
               </a:rPr>
-              <a:t>HOMEWORK</a:t>
+              <a:t>NEXT LESSON</a:t>
             </a:r>
             <a:endParaRPr lang="en-US" sz="1400" dirty="0"/>
           </a:p>
@@ -21739,7 +21640,7 @@
                 <a:ea typeface="Times New Roman" pitchFamily="34" charset="-122"/>
                 <a:cs typeface="Times New Roman" pitchFamily="34" charset="-120"/>
               </a:rPr>
-              <a:t>Homework</a:t>
+              <a:t>Next Lesson</a:t>
             </a:r>
             <a:endParaRPr lang="en-US" sz="3600" dirty="0"/>
           </a:p>
@@ -21763,17 +21664,17 @@
           <a:ln/>
         </p:spPr>
         <p:txBody>
-          <a:bodyPr wrap="square" lIns="0" tIns="0" rIns="0" bIns="0" rtlCol="0" anchor="t"/>
-          <a:lstStyle/>
-          <a:p>
-            <a:pPr algn="l" indent="0" marL="0">
+          <a:bodyPr wrap="square" lIns="0" tIns="0" rIns="0" bIns="0" rtlCol="0" anchor="ctr"/>
+          <a:lstStyle/>
+          <a:p>
+            <a:pPr algn="ctr" indent="0" marL="0">
               <a:spcAft>
                 <a:spcPts val="800"/>
               </a:spcAft>
               <a:buNone/>
             </a:pPr>
             <a:r>
-              <a:rPr lang="en-US" sz="4000" dirty="0">
+              <a:rPr lang="en-US" sz="4000" b="1" dirty="0">
                 <a:solidFill>
                   <a:srgbClr val="111111"/>
                 </a:solidFill>
@@ -21781,7 +21682,27 @@
                 <a:ea typeface="Times New Roman" pitchFamily="34" charset="-122"/>
                 <a:cs typeface="Times New Roman" pitchFamily="34" charset="-120"/>
               </a:rPr>
-              <a:t>State what the base of a population pyramid represents.</a:t>
+              <a:t>Our next lesson will be on:</a:t>
+            </a:r>
+            <a:endParaRPr lang="en-US" sz="4000" dirty="0"/>
+          </a:p>
+          <a:p>
+            <a:pPr algn="ctr" indent="0" marL="0">
+              <a:spcAft>
+                <a:spcPts val="800"/>
+              </a:spcAft>
+              <a:buNone/>
+            </a:pPr>
+            <a:r>
+              <a:rPr lang="en-US" sz="4000" b="1" dirty="0">
+                <a:solidFill>
+                  <a:srgbClr val="990011"/>
+                </a:solidFill>
+                <a:latin typeface="Times New Roman" pitchFamily="34" charset="0"/>
+                <a:ea typeface="Times New Roman" pitchFamily="34" charset="-122"/>
+                <a:cs typeface="Times New Roman" pitchFamily="34" charset="-120"/>
+              </a:rPr>
+              <a:t>Lesson 7: Population Pyramids</a:t>
             </a:r>
             <a:endParaRPr lang="en-US" sz="4000" dirty="0"/>
           </a:p>
@@ -22224,46 +22145,22 @@
                 <a:ea typeface="Calibri" pitchFamily="34" charset="-122"/>
                 <a:cs typeface="Calibri" pitchFamily="34" charset="-120"/>
               </a:rPr>
-              <a:t>NEXT LESSON</a:t>
+              <a:t>BILINGUAL GAME</a:t>
             </a:r>
             <a:endParaRPr lang="en-US" sz="1400" dirty="0"/>
           </a:p>
         </p:txBody>
       </p:sp>
-      <p:pic>
-        <p:nvPicPr>
-          <p:cNvPr id="3" name="Image 0" descr="/home/claude/f4/img/minesec_sheet.png">    </p:cNvPr>
-          <p:cNvPicPr>
-            <a:picLocks noChangeAspect="1"/>
-          </p:cNvPicPr>
-          <p:nvPr/>
-        </p:nvPicPr>
-        <p:blipFill>
-          <a:blip r:embed="rId1"/>
-          <a:stretch>
-            <a:fillRect/>
-          </a:stretch>
-        </p:blipFill>
-        <p:spPr>
-          <a:xfrm>
-            <a:off x="0" y="658368"/>
-            <a:ext cx="5120640" cy="5833872"/>
-          </a:xfrm>
-          <a:prstGeom prst="rect">
-            <a:avLst/>
-          </a:prstGeom>
-        </p:spPr>
-      </p:pic>
-      <p:sp>
-        <p:nvSpPr>
-          <p:cNvPr id="4" name="Text 1"/>
+      <p:sp>
+        <p:nvSpPr>
+          <p:cNvPr id="3" name="Text 1"/>
           <p:cNvSpPr/>
           <p:nvPr/>
         </p:nvSpPr>
         <p:spPr>
           <a:xfrm>
-            <a:off x="5349240" y="1005840"/>
-            <a:ext cx="6522415" cy="731520"/>
+            <a:off x="457200" y="1005840"/>
+            <a:ext cx="11277295" cy="731520"/>
           </a:xfrm>
           <a:prstGeom prst="rect">
             <a:avLst/>
@@ -22272,9 +22169,7 @@
           <a:ln/>
         </p:spPr>
         <p:txBody>
-          <a:bodyPr wrap="square" lIns="0" tIns="0" rIns="0" bIns="0" rtlCol="0" anchor="ctr">
-            <a:normAutofit/>
-          </a:bodyPr>
+          <a:bodyPr wrap="square" lIns="0" tIns="0" rIns="0" bIns="0" rtlCol="0" anchor="ctr"/>
           <a:lstStyle/>
           <a:p>
             <a:pPr algn="ctr" indent="0" marL="0">
@@ -22289,219 +22184,6 @@
                 <a:ea typeface="Times New Roman" pitchFamily="34" charset="-122"/>
                 <a:cs typeface="Times New Roman" pitchFamily="34" charset="-120"/>
               </a:rPr>
-              <a:t>Next Lesson</a:t>
-            </a:r>
-            <a:endParaRPr lang="en-US" sz="3600" dirty="0"/>
-          </a:p>
-        </p:txBody>
-      </p:sp>
-      <p:sp>
-        <p:nvSpPr>
-          <p:cNvPr id="5" name="Text 2"/>
-          <p:cNvSpPr/>
-          <p:nvPr/>
-        </p:nvSpPr>
-        <p:spPr>
-          <a:xfrm>
-            <a:off x="5349240" y="1783080"/>
-            <a:ext cx="6522415" cy="4663440"/>
-          </a:xfrm>
-          <a:prstGeom prst="rect">
-            <a:avLst/>
-          </a:prstGeom>
-          <a:noFill/>
-          <a:ln/>
-        </p:spPr>
-        <p:txBody>
-          <a:bodyPr wrap="square" lIns="0" tIns="0" rIns="0" bIns="0" rtlCol="0" anchor="ctr"/>
-          <a:lstStyle/>
-          <a:p>
-            <a:pPr algn="ctr" indent="0" marL="0">
-              <a:spcAft>
-                <a:spcPts val="800"/>
-              </a:spcAft>
-              <a:buNone/>
-            </a:pPr>
-            <a:r>
-              <a:rPr lang="en-US" sz="4000" b="1" dirty="0">
-                <a:solidFill>
-                  <a:srgbClr val="111111"/>
-                </a:solidFill>
-                <a:latin typeface="Times New Roman" pitchFamily="34" charset="0"/>
-                <a:ea typeface="Times New Roman" pitchFamily="34" charset="-122"/>
-                <a:cs typeface="Times New Roman" pitchFamily="34" charset="-120"/>
-              </a:rPr>
-              <a:t>Our next lesson will be on:</a:t>
-            </a:r>
-            <a:endParaRPr lang="en-US" sz="4000" dirty="0"/>
-          </a:p>
-          <a:p>
-            <a:pPr algn="ctr" indent="0" marL="0">
-              <a:spcAft>
-                <a:spcPts val="800"/>
-              </a:spcAft>
-              <a:buNone/>
-            </a:pPr>
-            <a:r>
-              <a:rPr lang="en-US" sz="4000" b="1" dirty="0">
-                <a:solidFill>
-                  <a:srgbClr val="990011"/>
-                </a:solidFill>
-                <a:latin typeface="Times New Roman" pitchFamily="34" charset="0"/>
-                <a:ea typeface="Times New Roman" pitchFamily="34" charset="-122"/>
-                <a:cs typeface="Times New Roman" pitchFamily="34" charset="-120"/>
-              </a:rPr>
-              <a:t>Lesson 7: Population Pyramids</a:t>
-            </a:r>
-            <a:endParaRPr lang="en-US" sz="4000" dirty="0"/>
-          </a:p>
-        </p:txBody>
-      </p:sp>
-      <p:sp>
-        <p:nvSpPr>
-          <p:cNvPr id="25" name="Slide Number Placeholder 0"/>
-          <p:cNvSpPr>
-            <a:spLocks noGrp="1"/>
-          </p:cNvSpPr>
-          <p:nvPr>
-            <p:ph type="sldNum" sz="quarter" idx="4294967295"/>
-          </p:nvPr>
-        </p:nvSpPr>
-        <p:spPr>
-          <a:xfrm>
-            <a:off x="27432" y="91440"/>
-            <a:ext cx="585216" cy="475488"/>
-          </a:xfrm>
-          <a:prstGeom prst="rect">
-            <a:avLst/>
-          </a:prstGeom>
-          <a:extLst>
-            <a:ext uri="{C572A759-6A51-4108-AA02-DFA0A04FC94B}">
-              <ma14:wrappingTextBoxFlag xmlns:ma14="http://schemas.microsoft.com/office/mac/drawingml/2011/main" val="0"/>
-            </a:ext>
-          </a:extLst>
-        </p:spPr>
-        <p:txBody>
-          <a:bodyPr/>
-          <a:lstStyle>
-            <a:lvl1pPr>
-              <a:defRPr sz="2000">
-                <a:solidFill>
-                  <a:srgbClr val="FFFFFF"/>
-                </a:solidFill>
-                <a:latin typeface="Calibri"/>
-                <a:ea typeface="Calibri"/>
-                <a:cs typeface="Calibri"/>
-              </a:defRPr>
-            </a:lvl1pPr>
-          </a:lstStyle>
-          <a:p>
-            <a:pPr algn="ctr"/>
-            <a:fld id="{F7021451-1387-4CA6-816F-3879F97B5CBC}" type="slidenum">
-              <a:rPr b="1" lang="en-US"/>
-              <a:t>60</a:t>
-            </a:fld>
-            <a:endParaRPr lang="en-US"/>
-          </a:p>
-        </p:txBody>
-      </p:sp>
-    </p:spTree>
-  </p:cSld>
-  <p:clrMapOvr>
-    <a:masterClrMapping/>
-  </p:clrMapOvr>
-</p:sld>
-</file>
-
-<file path=ppt/slides/slide61.xml><?xml version="1.0" encoding="utf-8"?>
-<p:sld xmlns:a="http://schemas.openxmlformats.org/drawingml/2006/main" xmlns:r="http://schemas.openxmlformats.org/officeDocument/2006/relationships" xmlns:p="http://schemas.openxmlformats.org/presentationml/2006/main">
-  <p:cSld name="Slide 61">
-    <p:spTree>
-      <p:nvGrpSpPr>
-        <p:cNvPr id="1" name=""/>
-        <p:cNvGrpSpPr/>
-        <p:nvPr/>
-      </p:nvGrpSpPr>
-      <p:grpSpPr>
-        <a:xfrm>
-          <a:off x="0" y="0"/>
-          <a:ext cx="0" cy="0"/>
-          <a:chOff x="0" y="0"/>
-          <a:chExt cx="0" cy="0"/>
-        </a:xfrm>
-      </p:grpSpPr>
-      <p:sp>
-        <p:nvSpPr>
-          <p:cNvPr id="2" name="Text 0"/>
-          <p:cNvSpPr/>
-          <p:nvPr/>
-        </p:nvSpPr>
-        <p:spPr>
-          <a:xfrm>
-            <a:off x="457200" y="713232"/>
-            <a:ext cx="11368735" cy="274320"/>
-          </a:xfrm>
-          <a:prstGeom prst="rect">
-            <a:avLst/>
-          </a:prstGeom>
-          <a:noFill/>
-          <a:ln/>
-        </p:spPr>
-        <p:txBody>
-          <a:bodyPr wrap="square" lIns="0" tIns="0" rIns="0" bIns="0" rtlCol="0" anchor="ctr"/>
-          <a:lstStyle/>
-          <a:p>
-            <a:pPr algn="r" indent="0" marL="0">
-              <a:buNone/>
-            </a:pPr>
-            <a:r>
-              <a:rPr lang="en-US" sz="1400" b="1" dirty="0">
-                <a:solidFill>
-                  <a:srgbClr val="1C3F6E"/>
-                </a:solidFill>
-                <a:latin typeface="Calibri" pitchFamily="34" charset="0"/>
-                <a:ea typeface="Calibri" pitchFamily="34" charset="-122"/>
-                <a:cs typeface="Calibri" pitchFamily="34" charset="-120"/>
-              </a:rPr>
-              <a:t>BILINGUAL GAME</a:t>
-            </a:r>
-            <a:endParaRPr lang="en-US" sz="1400" dirty="0"/>
-          </a:p>
-        </p:txBody>
-      </p:sp>
-      <p:sp>
-        <p:nvSpPr>
-          <p:cNvPr id="3" name="Text 1"/>
-          <p:cNvSpPr/>
-          <p:nvPr/>
-        </p:nvSpPr>
-        <p:spPr>
-          <a:xfrm>
-            <a:off x="457200" y="1005840"/>
-            <a:ext cx="11277295" cy="731520"/>
-          </a:xfrm>
-          <a:prstGeom prst="rect">
-            <a:avLst/>
-          </a:prstGeom>
-          <a:noFill/>
-          <a:ln/>
-        </p:spPr>
-        <p:txBody>
-          <a:bodyPr wrap="square" lIns="0" tIns="0" rIns="0" bIns="0" rtlCol="0" anchor="ctr"/>
-          <a:lstStyle/>
-          <a:p>
-            <a:pPr algn="ctr" indent="0" marL="0">
-              <a:buNone/>
-            </a:pPr>
-            <a:r>
-              <a:rPr lang="en-US" sz="3600" b="1" dirty="0">
-                <a:solidFill>
-                  <a:srgbClr val="990011"/>
-                </a:solidFill>
-                <a:latin typeface="Times New Roman" pitchFamily="34" charset="0"/>
-                <a:ea typeface="Times New Roman" pitchFamily="34" charset="-122"/>
-                <a:cs typeface="Times New Roman" pitchFamily="34" charset="-120"/>
-              </a:rPr>
               <a:t>Bilingual Game (Jeu Bilingue)</a:t>
             </a:r>
             <a:endParaRPr lang="en-US" sz="3600" dirty="0"/>
@@ -22510,7 +22192,7 @@
       </p:sp>
       <p:graphicFrame>
         <p:nvGraphicFramePr>
-          <p:cNvPr id="62" name="Table 0"/>
+          <p:cNvPr id="61" name="Table 0"/>
           <p:cNvGraphicFramePr>
             <a:graphicFrameLocks noGrp="1"/>
           </p:cNvGraphicFramePr>
@@ -23546,7 +23228,7 @@
             <a:pPr algn="ctr"/>
             <a:fld id="{F7021451-1387-4CA6-816F-3879F97B5CBC}" type="slidenum">
               <a:rPr b="1" lang="en-US"/>
-              <a:t>61</a:t>
+              <a:t>60</a:t>
             </a:fld>
             <a:endParaRPr lang="en-US"/>
           </a:p>
@@ -23560,9 +23242,9 @@
 </p:sld>
 </file>
 
-<file path=ppt/slides/slide62.xml><?xml version="1.0" encoding="utf-8"?>
+<file path=ppt/slides/slide61.xml><?xml version="1.0" encoding="utf-8"?>
 <p:sld xmlns:a="http://schemas.openxmlformats.org/drawingml/2006/main" xmlns:r="http://schemas.openxmlformats.org/officeDocument/2006/relationships" xmlns:p="http://schemas.openxmlformats.org/presentationml/2006/main">
-  <p:cSld name="Slide 62">
+  <p:cSld name="Slide 61">
     <p:spTree>
       <p:nvGrpSpPr>
         <p:cNvPr id="1" name=""/>
@@ -23657,7 +23339,7 @@
       </p:sp>
       <p:graphicFrame>
         <p:nvGraphicFramePr>
-          <p:cNvPr id="63" name="Table 0"/>
+          <p:cNvPr id="62" name="Table 0"/>
           <p:cNvGraphicFramePr>
             <a:graphicFrameLocks noGrp="1"/>
           </p:cNvGraphicFramePr>
@@ -24279,7 +23961,7 @@
             <a:pPr algn="ctr"/>
             <a:fld id="{F7021451-1387-4CA6-816F-3879F97B5CBC}" type="slidenum">
               <a:rPr b="1" lang="en-US"/>
-              <a:t>62</a:t>
+              <a:t>61</a:t>
             </a:fld>
             <a:endParaRPr lang="en-US"/>
           </a:p>
@@ -24293,9 +23975,9 @@
 </p:sld>
 </file>
 
-<file path=ppt/slides/slide63.xml><?xml version="1.0" encoding="utf-8"?>
+<file path=ppt/slides/slide62.xml><?xml version="1.0" encoding="utf-8"?>
 <p:sld xmlns:a="http://schemas.openxmlformats.org/drawingml/2006/main" xmlns:r="http://schemas.openxmlformats.org/officeDocument/2006/relationships" xmlns:p="http://schemas.openxmlformats.org/presentationml/2006/main">
-  <p:cSld name="Slide 63">
+  <p:cSld name="Slide 62">
     <p:spTree>
       <p:nvGrpSpPr>
         <p:cNvPr id="1" name=""/>
@@ -24390,7 +24072,7 @@
       </p:sp>
       <p:graphicFrame>
         <p:nvGraphicFramePr>
-          <p:cNvPr id="64" name="Table 0"/>
+          <p:cNvPr id="63" name="Table 0"/>
           <p:cNvGraphicFramePr>
             <a:graphicFrameLocks noGrp="1"/>
           </p:cNvGraphicFramePr>
@@ -24500,7 +24182,7 @@
                           <a:ea typeface="Calibri" pitchFamily="34" charset="-122"/>
                           <a:cs typeface="Calibri" pitchFamily="34" charset="-120"/>
                         </a:rPr>
-                        <a:t>DEFINITIONS; Meaning of Age and Sex Composition; The Youthful Population; The Ageing Population.</a:t>
+                        <a:t>DEFINITIONS; Meaning of Age and Sex Composition; The Youthful Population; Consequences of a Youthful Population; The Ageing Population; Consequences of an Ageing Population.</a:t>
                       </a:r>
                       <a:endParaRPr lang="en-US" sz="1600" dirty="0">
                         <a:latin typeface="Calibri" charset="0"/>
@@ -25150,6 +24832,331 @@
             <a:pPr algn="ctr"/>
             <a:fld id="{F7021451-1387-4CA6-816F-3879F97B5CBC}" type="slidenum">
               <a:rPr b="1" lang="en-US"/>
+              <a:t>62</a:t>
+            </a:fld>
+            <a:endParaRPr lang="en-US"/>
+          </a:p>
+        </p:txBody>
+      </p:sp>
+    </p:spTree>
+  </p:cSld>
+  <p:clrMapOvr>
+    <a:masterClrMapping/>
+  </p:clrMapOvr>
+</p:sld>
+</file>
+
+<file path=ppt/slides/slide63.xml><?xml version="1.0" encoding="utf-8"?>
+<p:sld xmlns:a="http://schemas.openxmlformats.org/drawingml/2006/main" xmlns:r="http://schemas.openxmlformats.org/officeDocument/2006/relationships" xmlns:p="http://schemas.openxmlformats.org/presentationml/2006/main">
+  <p:cSld name="Slide 63">
+    <p:spTree>
+      <p:nvGrpSpPr>
+        <p:cNvPr id="1" name=""/>
+        <p:cNvGrpSpPr/>
+        <p:nvPr/>
+      </p:nvGrpSpPr>
+      <p:grpSpPr>
+        <a:xfrm>
+          <a:off x="0" y="0"/>
+          <a:ext cx="0" cy="0"/>
+          <a:chOff x="0" y="0"/>
+          <a:chExt cx="0" cy="0"/>
+        </a:xfrm>
+      </p:grpSpPr>
+      <p:sp>
+        <p:nvSpPr>
+          <p:cNvPr id="2" name="Text 0"/>
+          <p:cNvSpPr/>
+          <p:nvPr/>
+        </p:nvSpPr>
+        <p:spPr>
+          <a:xfrm>
+            <a:off x="457200" y="713232"/>
+            <a:ext cx="11368735" cy="274320"/>
+          </a:xfrm>
+          <a:prstGeom prst="rect">
+            <a:avLst/>
+          </a:prstGeom>
+          <a:noFill/>
+          <a:ln/>
+        </p:spPr>
+        <p:txBody>
+          <a:bodyPr wrap="square" lIns="0" tIns="0" rIns="0" bIns="0" rtlCol="0" anchor="ctr"/>
+          <a:lstStyle/>
+          <a:p>
+            <a:pPr algn="r" indent="0" marL="0">
+              <a:buNone/>
+            </a:pPr>
+            <a:r>
+              <a:rPr lang="en-US" sz="1400" b="1" dirty="0">
+                <a:solidFill>
+                  <a:srgbClr val="1C3F6E"/>
+                </a:solidFill>
+                <a:latin typeface="Calibri" pitchFamily="34" charset="0"/>
+                <a:ea typeface="Calibri" pitchFamily="34" charset="-122"/>
+                <a:cs typeface="Calibri" pitchFamily="34" charset="-120"/>
+              </a:rPr>
+              <a:t>TEACHER'S NOTE</a:t>
+            </a:r>
+            <a:endParaRPr lang="en-US" sz="1400" dirty="0"/>
+          </a:p>
+        </p:txBody>
+      </p:sp>
+      <p:pic>
+        <p:nvPicPr>
+          <p:cNvPr id="3" name="Image 0" descr="/home/claude/f4/img/minesec_sheet.png">    </p:cNvPr>
+          <p:cNvPicPr>
+            <a:picLocks noChangeAspect="1"/>
+          </p:cNvPicPr>
+          <p:nvPr/>
+        </p:nvPicPr>
+        <p:blipFill>
+          <a:blip r:embed="rId1"/>
+          <a:stretch>
+            <a:fillRect/>
+          </a:stretch>
+        </p:blipFill>
+        <p:spPr>
+          <a:xfrm>
+            <a:off x="0" y="658368"/>
+            <a:ext cx="3840480" cy="5833872"/>
+          </a:xfrm>
+          <a:prstGeom prst="rect">
+            <a:avLst/>
+          </a:prstGeom>
+        </p:spPr>
+      </p:pic>
+      <p:sp>
+        <p:nvSpPr>
+          <p:cNvPr id="4" name="Text 1"/>
+          <p:cNvSpPr/>
+          <p:nvPr/>
+        </p:nvSpPr>
+        <p:spPr>
+          <a:xfrm>
+            <a:off x="4069080" y="1005840"/>
+            <a:ext cx="7802575" cy="731520"/>
+          </a:xfrm>
+          <a:prstGeom prst="rect">
+            <a:avLst/>
+          </a:prstGeom>
+          <a:noFill/>
+          <a:ln/>
+        </p:spPr>
+        <p:txBody>
+          <a:bodyPr wrap="square" lIns="0" tIns="0" rIns="0" bIns="0" rtlCol="0" anchor="ctr">
+            <a:normAutofit/>
+          </a:bodyPr>
+          <a:lstStyle/>
+          <a:p>
+            <a:pPr algn="ctr" indent="0" marL="0">
+              <a:buNone/>
+            </a:pPr>
+            <a:r>
+              <a:rPr lang="en-US" sz="3600" b="1" dirty="0">
+                <a:solidFill>
+                  <a:srgbClr val="990011"/>
+                </a:solidFill>
+                <a:latin typeface="Times New Roman" pitchFamily="34" charset="0"/>
+                <a:ea typeface="Times New Roman" pitchFamily="34" charset="-122"/>
+                <a:cs typeface="Times New Roman" pitchFamily="34" charset="-120"/>
+              </a:rPr>
+              <a:t>Teacher's Note</a:t>
+            </a:r>
+            <a:endParaRPr lang="en-US" sz="3600" dirty="0"/>
+          </a:p>
+        </p:txBody>
+      </p:sp>
+      <p:sp>
+        <p:nvSpPr>
+          <p:cNvPr id="5" name="Text 2"/>
+          <p:cNvSpPr/>
+          <p:nvPr/>
+        </p:nvSpPr>
+        <p:spPr>
+          <a:xfrm>
+            <a:off x="4069080" y="1783080"/>
+            <a:ext cx="7802575" cy="4663440"/>
+          </a:xfrm>
+          <a:prstGeom prst="rect">
+            <a:avLst/>
+          </a:prstGeom>
+          <a:noFill/>
+          <a:ln/>
+        </p:spPr>
+        <p:txBody>
+          <a:bodyPr wrap="square" lIns="0" tIns="0" rIns="0" bIns="0" rtlCol="0" anchor="t"/>
+          <a:lstStyle/>
+          <a:p>
+            <a:pPr algn="l" marL="342900" indent="-342900">
+              <a:spcAft>
+                <a:spcPts val="800"/>
+              </a:spcAft>
+              <a:buSzPct val="100000"/>
+              <a:buChar char="•"/>
+            </a:pPr>
+            <a:r>
+              <a:rPr lang="en-US" sz="2000" dirty="0">
+                <a:solidFill>
+                  <a:srgbClr val="111111"/>
+                </a:solidFill>
+                <a:latin typeface="Calibri" pitchFamily="34" charset="0"/>
+                <a:ea typeface="Calibri" pitchFamily="34" charset="-122"/>
+                <a:cs typeface="Calibri" pitchFamily="34" charset="-120"/>
+              </a:rPr>
+              <a:t>Timing: Homework correction, plan, objectives 8 min | Recall, situation, action 10 min | 5 activities 30 min | Board summary (copying) 30 min | Evaluation, remediation 10 min | Homework, next lesson 5 min | Logbook 7 min</a:t>
+            </a:r>
+            <a:endParaRPr lang="en-US" sz="2000" dirty="0"/>
+          </a:p>
+          <a:p>
+            <a:pPr algn="l" marL="342900" indent="-342900">
+              <a:spcAft>
+                <a:spcPts val="800"/>
+              </a:spcAft>
+              <a:buSzPct val="100000"/>
+              <a:buChar char="•"/>
+            </a:pPr>
+            <a:r>
+              <a:rPr lang="en-US" sz="2000" dirty="0">
+                <a:solidFill>
+                  <a:srgbClr val="111111"/>
+                </a:solidFill>
+                <a:latin typeface="Calibri" pitchFamily="34" charset="0"/>
+                <a:ea typeface="Calibri" pitchFamily="34" charset="-122"/>
+                <a:cs typeface="Calibri" pitchFamily="34" charset="-120"/>
+              </a:rPr>
+              <a:t>Without the projector (Activity 1): count boys and girls in the class and calculate the ratio.</a:t>
+            </a:r>
+            <a:endParaRPr lang="en-US" sz="2000" dirty="0"/>
+          </a:p>
+          <a:p>
+            <a:pPr algn="l" marL="342900" indent="-342900">
+              <a:spcAft>
+                <a:spcPts val="800"/>
+              </a:spcAft>
+              <a:buSzPct val="100000"/>
+              <a:buChar char="•"/>
+            </a:pPr>
+            <a:r>
+              <a:rPr lang="en-US" sz="2000" dirty="0">
+                <a:solidFill>
+                  <a:srgbClr val="111111"/>
+                </a:solidFill>
+                <a:latin typeface="Calibri" pitchFamily="34" charset="0"/>
+                <a:ea typeface="Calibri" pitchFamily="34" charset="-122"/>
+                <a:cs typeface="Calibri" pitchFamily="34" charset="-120"/>
+              </a:rPr>
+              <a:t>Without the projector (Activity 2): write the figures of Niger, Cameroon and Japan on the board.</a:t>
+            </a:r>
+            <a:endParaRPr lang="en-US" sz="2000" dirty="0"/>
+          </a:p>
+          <a:p>
+            <a:pPr algn="l" marL="342900" indent="-342900">
+              <a:spcAft>
+                <a:spcPts val="800"/>
+              </a:spcAft>
+              <a:buSzPct val="100000"/>
+              <a:buChar char="•"/>
+            </a:pPr>
+            <a:r>
+              <a:rPr lang="en-US" sz="2000" dirty="0">
+                <a:solidFill>
+                  <a:srgbClr val="111111"/>
+                </a:solidFill>
+                <a:latin typeface="Calibri" pitchFamily="34" charset="0"/>
+                <a:ea typeface="Calibri" pitchFamily="34" charset="-122"/>
+                <a:cs typeface="Calibri" pitchFamily="34" charset="-120"/>
+              </a:rPr>
+              <a:t>Without the projector (Activity 3): count the pupils of the class.</a:t>
+            </a:r>
+            <a:endParaRPr lang="en-US" sz="2000" dirty="0"/>
+          </a:p>
+          <a:p>
+            <a:pPr algn="l" marL="342900" indent="-342900">
+              <a:spcAft>
+                <a:spcPts val="800"/>
+              </a:spcAft>
+              <a:buSzPct val="100000"/>
+              <a:buChar char="•"/>
+            </a:pPr>
+            <a:r>
+              <a:rPr lang="en-US" sz="2000" dirty="0">
+                <a:solidFill>
+                  <a:srgbClr val="111111"/>
+                </a:solidFill>
+                <a:latin typeface="Calibri" pitchFamily="34" charset="0"/>
+                <a:ea typeface="Calibri" pitchFamily="34" charset="-122"/>
+                <a:cs typeface="Calibri" pitchFamily="34" charset="-120"/>
+              </a:rPr>
+              <a:t>Without the projector (Activity 4): draw a narrow-based pyramid.</a:t>
+            </a:r>
+            <a:endParaRPr lang="en-US" sz="2000" dirty="0"/>
+          </a:p>
+          <a:p>
+            <a:pPr algn="l" marL="342900" indent="-342900">
+              <a:spcAft>
+                <a:spcPts val="800"/>
+              </a:spcAft>
+              <a:buSzPct val="100000"/>
+              <a:buChar char="•"/>
+            </a:pPr>
+            <a:r>
+              <a:rPr lang="en-US" sz="2000" dirty="0">
+                <a:solidFill>
+                  <a:srgbClr val="111111"/>
+                </a:solidFill>
+                <a:latin typeface="Calibri" pitchFamily="34" charset="0"/>
+                <a:ea typeface="Calibri" pitchFamily="34" charset="-122"/>
+                <a:cs typeface="Calibri" pitchFamily="34" charset="-120"/>
+              </a:rPr>
+              <a:t>Without the projector (Activity 5): describe the care of old people.</a:t>
+            </a:r>
+            <a:endParaRPr lang="en-US" sz="2000" dirty="0"/>
+          </a:p>
+        </p:txBody>
+      </p:sp>
+      <p:sp>
+        <p:nvSpPr>
+          <p:cNvPr id="25" name="Slide Number Placeholder 0"/>
+          <p:cNvSpPr>
+            <a:spLocks noGrp="1"/>
+          </p:cNvSpPr>
+          <p:nvPr>
+            <p:ph type="sldNum" sz="quarter" idx="4294967295"/>
+          </p:nvPr>
+        </p:nvSpPr>
+        <p:spPr>
+          <a:xfrm>
+            <a:off x="27432" y="91440"/>
+            <a:ext cx="585216" cy="475488"/>
+          </a:xfrm>
+          <a:prstGeom prst="rect">
+            <a:avLst/>
+          </a:prstGeom>
+          <a:extLst>
+            <a:ext uri="{C572A759-6A51-4108-AA02-DFA0A04FC94B}">
+              <ma14:wrappingTextBoxFlag xmlns:ma14="http://schemas.microsoft.com/office/mac/drawingml/2011/main" val="0"/>
+            </a:ext>
+          </a:extLst>
+        </p:spPr>
+        <p:txBody>
+          <a:bodyPr/>
+          <a:lstStyle>
+            <a:lvl1pPr>
+              <a:defRPr sz="2000">
+                <a:solidFill>
+                  <a:srgbClr val="FFFFFF"/>
+                </a:solidFill>
+                <a:latin typeface="Calibri"/>
+                <a:ea typeface="Calibri"/>
+                <a:cs typeface="Calibri"/>
+              </a:defRPr>
+            </a:lvl1pPr>
+          </a:lstStyle>
+          <a:p>
+            <a:pPr algn="ctr"/>
+            <a:fld id="{F7021451-1387-4CA6-816F-3879F97B5CBC}" type="slidenum">
+              <a:rPr b="1" lang="en-US"/>
               <a:t>63</a:t>
             </a:fld>
             <a:endParaRPr lang="en-US"/>
@@ -25214,7 +25221,7 @@
                 <a:ea typeface="Calibri" pitchFamily="34" charset="-122"/>
                 <a:cs typeface="Calibri" pitchFamily="34" charset="-120"/>
               </a:rPr>
-              <a:t>TEACHER'S NOTE</a:t>
+              <a:t>REFERENCES</a:t>
             </a:r>
             <a:endParaRPr lang="en-US" sz="1400" dirty="0"/>
           </a:p>
@@ -25237,7 +25244,7 @@
         <p:spPr>
           <a:xfrm>
             <a:off x="0" y="658368"/>
-            <a:ext cx="3840480" cy="5833872"/>
+            <a:ext cx="5120640" cy="5833872"/>
           </a:xfrm>
           <a:prstGeom prst="rect">
             <a:avLst/>
@@ -25252,8 +25259,8 @@
         </p:nvSpPr>
         <p:spPr>
           <a:xfrm>
-            <a:off x="4069080" y="1005840"/>
-            <a:ext cx="7802575" cy="731520"/>
+            <a:off x="5349240" y="1005840"/>
+            <a:ext cx="6522415" cy="731520"/>
           </a:xfrm>
           <a:prstGeom prst="rect">
             <a:avLst/>
@@ -25279,7 +25286,7 @@
                 <a:ea typeface="Times New Roman" pitchFamily="34" charset="-122"/>
                 <a:cs typeface="Times New Roman" pitchFamily="34" charset="-120"/>
               </a:rPr>
-              <a:t>Teacher's Note</a:t>
+              <a:t>References</a:t>
             </a:r>
             <a:endParaRPr lang="en-US" sz="3600" dirty="0"/>
           </a:p>
@@ -25293,8 +25300,8 @@
         </p:nvSpPr>
         <p:spPr>
           <a:xfrm>
-            <a:off x="4069080" y="1783080"/>
-            <a:ext cx="7802575" cy="4663440"/>
+            <a:off x="5349240" y="1783080"/>
+            <a:ext cx="6522415" cy="4663440"/>
           </a:xfrm>
           <a:prstGeom prst="rect">
             <a:avLst/>
@@ -25314,7 +25321,7 @@
               <a:buChar char="•"/>
             </a:pPr>
             <a:r>
-              <a:rPr lang="en-US" sz="2000" dirty="0">
+              <a:rPr lang="en-US" sz="1800" dirty="0">
                 <a:solidFill>
                   <a:srgbClr val="111111"/>
                 </a:solidFill>
@@ -25322,9 +25329,9 @@
                 <a:ea typeface="Calibri" pitchFamily="34" charset="-122"/>
                 <a:cs typeface="Calibri" pitchFamily="34" charset="-120"/>
               </a:rPr>
-              <a:t>Timing: Homework correction, plan, objectives 8 min | Recall, situation, action 10 min | 5 activities 30 min | Board summary (copying) 30 min | Evaluation, remediation 10 min | Homework, next lesson 5 min | Logbook 7 min</a:t>
-            </a:r>
-            <a:endParaRPr lang="en-US" sz="2000" dirty="0"/>
+              <a:t>Geography Syllabus for Sixth Forms (Lower and Upper Sixth), MINESEC, 2019 — Module 4 (Population Geography).</a:t>
+            </a:r>
+            <a:endParaRPr lang="en-US" sz="1800" dirty="0"/>
           </a:p>
           <a:p>
             <a:pPr algn="l" marL="342900" indent="-342900">
@@ -25335,7 +25342,7 @@
               <a:buChar char="•"/>
             </a:pPr>
             <a:r>
-              <a:rPr lang="en-US" sz="2000" dirty="0">
+              <a:rPr lang="en-US" sz="1800" dirty="0">
                 <a:solidFill>
                   <a:srgbClr val="111111"/>
                 </a:solidFill>
@@ -25343,9 +25350,9 @@
                 <a:ea typeface="Calibri" pitchFamily="34" charset="-122"/>
                 <a:cs typeface="Calibri" pitchFamily="34" charset="-120"/>
               </a:rPr>
-              <a:t>Without the projector (Activity 1): count boys and girls in the class and calculate the ratio.</a:t>
-            </a:r>
-            <a:endParaRPr lang="en-US" sz="2000" dirty="0"/>
+              <a:t>Teacher's course notes: Mr KAMDEM E., Population Geography (USA), GBHS Garoua, 2026.</a:t>
+            </a:r>
+            <a:endParaRPr lang="en-US" sz="1800" dirty="0"/>
           </a:p>
           <a:p>
             <a:pPr algn="l" marL="342900" indent="-342900">
@@ -25356,7 +25363,7 @@
               <a:buChar char="•"/>
             </a:pPr>
             <a:r>
-              <a:rPr lang="en-US" sz="2000" dirty="0">
+              <a:rPr lang="en-US" sz="1800" dirty="0">
                 <a:solidFill>
                   <a:srgbClr val="111111"/>
                 </a:solidFill>
@@ -25364,9 +25371,9 @@
                 <a:ea typeface="Calibri" pitchFamily="34" charset="-122"/>
                 <a:cs typeface="Calibri" pitchFamily="34" charset="-120"/>
               </a:rPr>
-              <a:t>Without the projector (Activity 2): write the figures of Niger, Cameroon and Japan on the board.</a:t>
-            </a:r>
-            <a:endParaRPr lang="en-US" sz="2000" dirty="0"/>
+              <a:t>United Nations, World Population Prospects 2024.</a:t>
+            </a:r>
+            <a:endParaRPr lang="en-US" sz="1800" dirty="0"/>
           </a:p>
           <a:p>
             <a:pPr algn="l" marL="342900" indent="-342900">
@@ -25377,7 +25384,7 @@
               <a:buChar char="•"/>
             </a:pPr>
             <a:r>
-              <a:rPr lang="en-US" sz="2000" dirty="0">
+              <a:rPr lang="en-US" sz="1800" dirty="0">
                 <a:solidFill>
                   <a:srgbClr val="111111"/>
                 </a:solidFill>
@@ -25385,9 +25392,9 @@
                 <a:ea typeface="Calibri" pitchFamily="34" charset="-122"/>
                 <a:cs typeface="Calibri" pitchFamily="34" charset="-120"/>
               </a:rPr>
-              <a:t>Without the projector (Activity 3): count the pupils of the class.</a:t>
-            </a:r>
-            <a:endParaRPr lang="en-US" sz="2000" dirty="0"/>
+              <a:t>Photo, Activity 3: “Class” by WABC Certified Business Coach • Counselor, CC BY 2.0, via Flickr (https://www.flickr.com/photos/43919827@N00/3617014360)</a:t>
+            </a:r>
+            <a:endParaRPr lang="en-US" sz="1800" dirty="0"/>
           </a:p>
           <a:p>
             <a:pPr algn="l" marL="342900" indent="-342900">
@@ -25398,7 +25405,7 @@
               <a:buChar char="•"/>
             </a:pPr>
             <a:r>
-              <a:rPr lang="en-US" sz="2000" dirty="0">
+              <a:rPr lang="en-US" sz="1800" dirty="0">
                 <a:solidFill>
                   <a:srgbClr val="111111"/>
                 </a:solidFill>
@@ -25406,9 +25413,9 @@
                 <a:ea typeface="Calibri" pitchFamily="34" charset="-122"/>
                 <a:cs typeface="Calibri" pitchFamily="34" charset="-120"/>
               </a:rPr>
-              <a:t>Without the projector (Activity 4): draw a narrow-based pyramid.</a:t>
-            </a:r>
-            <a:endParaRPr lang="en-US" sz="2000" dirty="0"/>
+              <a:t>Photo, Activity 5: “Medical Readiness and Training Exercise 15-3” by US Army Africa, CC BY 2.0, via Flickr (https://www.flickr.com/photos/36281822@N08/16958932197)</a:t>
+            </a:r>
+            <a:endParaRPr lang="en-US" sz="1800" dirty="0"/>
           </a:p>
           <a:p>
             <a:pPr algn="l" marL="342900" indent="-342900">
@@ -25419,7 +25426,7 @@
               <a:buChar char="•"/>
             </a:pPr>
             <a:r>
-              <a:rPr lang="en-US" sz="2000" dirty="0">
+              <a:rPr lang="en-US" sz="1800" dirty="0">
                 <a:solidFill>
                   <a:srgbClr val="111111"/>
                 </a:solidFill>
@@ -25427,9 +25434,9 @@
                 <a:ea typeface="Calibri" pitchFamily="34" charset="-122"/>
                 <a:cs typeface="Calibri" pitchFamily="34" charset="-120"/>
               </a:rPr>
-              <a:t>Without the projector (Activity 5): describe the care of old people.</a:t>
-            </a:r>
-            <a:endParaRPr lang="en-US" sz="2000" dirty="0"/>
+              <a:t>Diagrams and animations: drawn for this lesson (Geography Department).</a:t>
+            </a:r>
+            <a:endParaRPr lang="en-US" sz="1800" dirty="0"/>
           </a:p>
         </p:txBody>
       </p:sp>
@@ -25476,331 +25483,6 @@
             <a:fld id="{F7021451-1387-4CA6-816F-3879F97B5CBC}" type="slidenum">
               <a:rPr b="1" lang="en-US"/>
               <a:t>64</a:t>
-            </a:fld>
-            <a:endParaRPr lang="en-US"/>
-          </a:p>
-        </p:txBody>
-      </p:sp>
-    </p:spTree>
-  </p:cSld>
-  <p:clrMapOvr>
-    <a:masterClrMapping/>
-  </p:clrMapOvr>
-</p:sld>
-</file>
-
-<file path=ppt/slides/slide65.xml><?xml version="1.0" encoding="utf-8"?>
-<p:sld xmlns:a="http://schemas.openxmlformats.org/drawingml/2006/main" xmlns:r="http://schemas.openxmlformats.org/officeDocument/2006/relationships" xmlns:p="http://schemas.openxmlformats.org/presentationml/2006/main">
-  <p:cSld name="Slide 65">
-    <p:spTree>
-      <p:nvGrpSpPr>
-        <p:cNvPr id="1" name=""/>
-        <p:cNvGrpSpPr/>
-        <p:nvPr/>
-      </p:nvGrpSpPr>
-      <p:grpSpPr>
-        <a:xfrm>
-          <a:off x="0" y="0"/>
-          <a:ext cx="0" cy="0"/>
-          <a:chOff x="0" y="0"/>
-          <a:chExt cx="0" cy="0"/>
-        </a:xfrm>
-      </p:grpSpPr>
-      <p:sp>
-        <p:nvSpPr>
-          <p:cNvPr id="2" name="Text 0"/>
-          <p:cNvSpPr/>
-          <p:nvPr/>
-        </p:nvSpPr>
-        <p:spPr>
-          <a:xfrm>
-            <a:off x="457200" y="713232"/>
-            <a:ext cx="11368735" cy="274320"/>
-          </a:xfrm>
-          <a:prstGeom prst="rect">
-            <a:avLst/>
-          </a:prstGeom>
-          <a:noFill/>
-          <a:ln/>
-        </p:spPr>
-        <p:txBody>
-          <a:bodyPr wrap="square" lIns="0" tIns="0" rIns="0" bIns="0" rtlCol="0" anchor="ctr"/>
-          <a:lstStyle/>
-          <a:p>
-            <a:pPr algn="r" indent="0" marL="0">
-              <a:buNone/>
-            </a:pPr>
-            <a:r>
-              <a:rPr lang="en-US" sz="1400" b="1" dirty="0">
-                <a:solidFill>
-                  <a:srgbClr val="1C3F6E"/>
-                </a:solidFill>
-                <a:latin typeface="Calibri" pitchFamily="34" charset="0"/>
-                <a:ea typeface="Calibri" pitchFamily="34" charset="-122"/>
-                <a:cs typeface="Calibri" pitchFamily="34" charset="-120"/>
-              </a:rPr>
-              <a:t>REFERENCES</a:t>
-            </a:r>
-            <a:endParaRPr lang="en-US" sz="1400" dirty="0"/>
-          </a:p>
-        </p:txBody>
-      </p:sp>
-      <p:pic>
-        <p:nvPicPr>
-          <p:cNvPr id="3" name="Image 0" descr="/home/claude/f4/img/minesec_sheet.png">    </p:cNvPr>
-          <p:cNvPicPr>
-            <a:picLocks noChangeAspect="1"/>
-          </p:cNvPicPr>
-          <p:nvPr/>
-        </p:nvPicPr>
-        <p:blipFill>
-          <a:blip r:embed="rId1"/>
-          <a:stretch>
-            <a:fillRect/>
-          </a:stretch>
-        </p:blipFill>
-        <p:spPr>
-          <a:xfrm>
-            <a:off x="0" y="658368"/>
-            <a:ext cx="5120640" cy="5833872"/>
-          </a:xfrm>
-          <a:prstGeom prst="rect">
-            <a:avLst/>
-          </a:prstGeom>
-        </p:spPr>
-      </p:pic>
-      <p:sp>
-        <p:nvSpPr>
-          <p:cNvPr id="4" name="Text 1"/>
-          <p:cNvSpPr/>
-          <p:nvPr/>
-        </p:nvSpPr>
-        <p:spPr>
-          <a:xfrm>
-            <a:off x="5349240" y="1005840"/>
-            <a:ext cx="6522415" cy="731520"/>
-          </a:xfrm>
-          <a:prstGeom prst="rect">
-            <a:avLst/>
-          </a:prstGeom>
-          <a:noFill/>
-          <a:ln/>
-        </p:spPr>
-        <p:txBody>
-          <a:bodyPr wrap="square" lIns="0" tIns="0" rIns="0" bIns="0" rtlCol="0" anchor="ctr">
-            <a:normAutofit/>
-          </a:bodyPr>
-          <a:lstStyle/>
-          <a:p>
-            <a:pPr algn="ctr" indent="0" marL="0">
-              <a:buNone/>
-            </a:pPr>
-            <a:r>
-              <a:rPr lang="en-US" sz="3600" b="1" dirty="0">
-                <a:solidFill>
-                  <a:srgbClr val="990011"/>
-                </a:solidFill>
-                <a:latin typeface="Times New Roman" pitchFamily="34" charset="0"/>
-                <a:ea typeface="Times New Roman" pitchFamily="34" charset="-122"/>
-                <a:cs typeface="Times New Roman" pitchFamily="34" charset="-120"/>
-              </a:rPr>
-              <a:t>References</a:t>
-            </a:r>
-            <a:endParaRPr lang="en-US" sz="3600" dirty="0"/>
-          </a:p>
-        </p:txBody>
-      </p:sp>
-      <p:sp>
-        <p:nvSpPr>
-          <p:cNvPr id="5" name="Text 2"/>
-          <p:cNvSpPr/>
-          <p:nvPr/>
-        </p:nvSpPr>
-        <p:spPr>
-          <a:xfrm>
-            <a:off x="5349240" y="1783080"/>
-            <a:ext cx="6522415" cy="4663440"/>
-          </a:xfrm>
-          <a:prstGeom prst="rect">
-            <a:avLst/>
-          </a:prstGeom>
-          <a:noFill/>
-          <a:ln/>
-        </p:spPr>
-        <p:txBody>
-          <a:bodyPr wrap="square" lIns="0" tIns="0" rIns="0" bIns="0" rtlCol="0" anchor="t"/>
-          <a:lstStyle/>
-          <a:p>
-            <a:pPr algn="l" marL="342900" indent="-342900">
-              <a:spcAft>
-                <a:spcPts val="800"/>
-              </a:spcAft>
-              <a:buSzPct val="100000"/>
-              <a:buChar char="•"/>
-            </a:pPr>
-            <a:r>
-              <a:rPr lang="en-US" sz="1800" dirty="0">
-                <a:solidFill>
-                  <a:srgbClr val="111111"/>
-                </a:solidFill>
-                <a:latin typeface="Calibri" pitchFamily="34" charset="0"/>
-                <a:ea typeface="Calibri" pitchFamily="34" charset="-122"/>
-                <a:cs typeface="Calibri" pitchFamily="34" charset="-120"/>
-              </a:rPr>
-              <a:t>Geography Syllabus for Sixth Forms (Lower and Upper Sixth), MINESEC, 2019 — Module 4 (Population Geography).</a:t>
-            </a:r>
-            <a:endParaRPr lang="en-US" sz="1800" dirty="0"/>
-          </a:p>
-          <a:p>
-            <a:pPr algn="l" marL="342900" indent="-342900">
-              <a:spcAft>
-                <a:spcPts val="800"/>
-              </a:spcAft>
-              <a:buSzPct val="100000"/>
-              <a:buChar char="•"/>
-            </a:pPr>
-            <a:r>
-              <a:rPr lang="en-US" sz="1800" dirty="0">
-                <a:solidFill>
-                  <a:srgbClr val="111111"/>
-                </a:solidFill>
-                <a:latin typeface="Calibri" pitchFamily="34" charset="0"/>
-                <a:ea typeface="Calibri" pitchFamily="34" charset="-122"/>
-                <a:cs typeface="Calibri" pitchFamily="34" charset="-120"/>
-              </a:rPr>
-              <a:t>Teacher's course notes: Mr KAMDEM E., Population Geography (USA), GBHS Garoua, 2026.</a:t>
-            </a:r>
-            <a:endParaRPr lang="en-US" sz="1800" dirty="0"/>
-          </a:p>
-          <a:p>
-            <a:pPr algn="l" marL="342900" indent="-342900">
-              <a:spcAft>
-                <a:spcPts val="800"/>
-              </a:spcAft>
-              <a:buSzPct val="100000"/>
-              <a:buChar char="•"/>
-            </a:pPr>
-            <a:r>
-              <a:rPr lang="en-US" sz="1800" dirty="0">
-                <a:solidFill>
-                  <a:srgbClr val="111111"/>
-                </a:solidFill>
-                <a:latin typeface="Calibri" pitchFamily="34" charset="0"/>
-                <a:ea typeface="Calibri" pitchFamily="34" charset="-122"/>
-                <a:cs typeface="Calibri" pitchFamily="34" charset="-120"/>
-              </a:rPr>
-              <a:t>United Nations, World Population Prospects 2024.</a:t>
-            </a:r>
-            <a:endParaRPr lang="en-US" sz="1800" dirty="0"/>
-          </a:p>
-          <a:p>
-            <a:pPr algn="l" marL="342900" indent="-342900">
-              <a:spcAft>
-                <a:spcPts val="800"/>
-              </a:spcAft>
-              <a:buSzPct val="100000"/>
-              <a:buChar char="•"/>
-            </a:pPr>
-            <a:r>
-              <a:rPr lang="en-US" sz="1800" dirty="0">
-                <a:solidFill>
-                  <a:srgbClr val="111111"/>
-                </a:solidFill>
-                <a:latin typeface="Calibri" pitchFamily="34" charset="0"/>
-                <a:ea typeface="Calibri" pitchFamily="34" charset="-122"/>
-                <a:cs typeface="Calibri" pitchFamily="34" charset="-120"/>
-              </a:rPr>
-              <a:t>Photo, Activity 3: “Class” by WABC Certified Business Coach • Counselor, CC BY 2.0, via Flickr (https://www.flickr.com/photos/43919827@N00/3617014360)</a:t>
-            </a:r>
-            <a:endParaRPr lang="en-US" sz="1800" dirty="0"/>
-          </a:p>
-          <a:p>
-            <a:pPr algn="l" marL="342900" indent="-342900">
-              <a:spcAft>
-                <a:spcPts val="800"/>
-              </a:spcAft>
-              <a:buSzPct val="100000"/>
-              <a:buChar char="•"/>
-            </a:pPr>
-            <a:r>
-              <a:rPr lang="en-US" sz="1800" dirty="0">
-                <a:solidFill>
-                  <a:srgbClr val="111111"/>
-                </a:solidFill>
-                <a:latin typeface="Calibri" pitchFamily="34" charset="0"/>
-                <a:ea typeface="Calibri" pitchFamily="34" charset="-122"/>
-                <a:cs typeface="Calibri" pitchFamily="34" charset="-120"/>
-              </a:rPr>
-              <a:t>Photo, Activity 5: “Medical Readiness and Training Exercise 15-3” by US Army Africa, CC BY 2.0, via Flickr (https://www.flickr.com/photos/36281822@N08/16958932197)</a:t>
-            </a:r>
-            <a:endParaRPr lang="en-US" sz="1800" dirty="0"/>
-          </a:p>
-          <a:p>
-            <a:pPr algn="l" marL="342900" indent="-342900">
-              <a:spcAft>
-                <a:spcPts val="800"/>
-              </a:spcAft>
-              <a:buSzPct val="100000"/>
-              <a:buChar char="•"/>
-            </a:pPr>
-            <a:r>
-              <a:rPr lang="en-US" sz="1800" dirty="0">
-                <a:solidFill>
-                  <a:srgbClr val="111111"/>
-                </a:solidFill>
-                <a:latin typeface="Calibri" pitchFamily="34" charset="0"/>
-                <a:ea typeface="Calibri" pitchFamily="34" charset="-122"/>
-                <a:cs typeface="Calibri" pitchFamily="34" charset="-120"/>
-              </a:rPr>
-              <a:t>Diagrams and animations: drawn for this lesson (Geography Department).</a:t>
-            </a:r>
-            <a:endParaRPr lang="en-US" sz="1800" dirty="0"/>
-          </a:p>
-        </p:txBody>
-      </p:sp>
-      <p:sp>
-        <p:nvSpPr>
-          <p:cNvPr id="25" name="Slide Number Placeholder 0"/>
-          <p:cNvSpPr>
-            <a:spLocks noGrp="1"/>
-          </p:cNvSpPr>
-          <p:nvPr>
-            <p:ph type="sldNum" sz="quarter" idx="4294967295"/>
-          </p:nvPr>
-        </p:nvSpPr>
-        <p:spPr>
-          <a:xfrm>
-            <a:off x="27432" y="91440"/>
-            <a:ext cx="585216" cy="475488"/>
-          </a:xfrm>
-          <a:prstGeom prst="rect">
-            <a:avLst/>
-          </a:prstGeom>
-          <a:extLst>
-            <a:ext uri="{C572A759-6A51-4108-AA02-DFA0A04FC94B}">
-              <ma14:wrappingTextBoxFlag xmlns:ma14="http://schemas.microsoft.com/office/mac/drawingml/2011/main" val="0"/>
-            </a:ext>
-          </a:extLst>
-        </p:spPr>
-        <p:txBody>
-          <a:bodyPr/>
-          <a:lstStyle>
-            <a:lvl1pPr>
-              <a:defRPr sz="2000">
-                <a:solidFill>
-                  <a:srgbClr val="FFFFFF"/>
-                </a:solidFill>
-                <a:latin typeface="Calibri"/>
-                <a:ea typeface="Calibri"/>
-                <a:cs typeface="Calibri"/>
-              </a:defRPr>
-            </a:lvl1pPr>
-          </a:lstStyle>
-          <a:p>
-            <a:pPr algn="ctr"/>
-            <a:fld id="{F7021451-1387-4CA6-816F-3879F97B5CBC}" type="slidenum">
-              <a:rPr b="1" lang="en-US"/>
-              <a:t>65</a:t>
             </a:fld>
             <a:endParaRPr lang="en-US"/>
           </a:p>

--- a/lecons/USA/Population Geography/08_USA_POP_L06_Age_and_Sex_Composition.pptx
+++ b/lecons/USA/Population Geography/08_USA_POP_L06_Age_and_Sex_Composition.pptx
@@ -69,9 +69,15 @@
     <p:sldId id="317" r:id="rId63"/>
     <p:sldId id="318" r:id="rId64"/>
     <p:sldId id="319" r:id="rId65"/>
+    <p:sldId id="320" r:id="rId66"/>
+    <p:sldId id="321" r:id="rId67"/>
+    <p:sldId id="322" r:id="rId68"/>
+    <p:sldId id="323" r:id="rId69"/>
+    <p:sldId id="324" r:id="rId70"/>
+    <p:sldId id="325" r:id="rId71"/>
   </p:sldIdLst>
   <p:notesMasterIdLst>
-    <p:notesMasterId r:id="rId66"/>
+    <p:notesMasterId r:id="rId72"/>
   </p:notesMasterIdLst>
   <p:sldSz cx="12192000" cy="6858000"/>
   <p:notesSz cx="6858000" cy="12192000"/>
@@ -3293,7 +3299,7 @@
           <a:p>
             <a:r>
               <a:rPr lang="en-US" dirty="0"/>
-              <a:t>Let us copy Meaning of Age and Sex Composition. Age and sex composition is explained as follows. Copy the point on Age groups: write the key term first, then its explanation.</a:t>
+              <a:t>Let us copy Age Groups and Sex Ratio. Age and sex composition is explained as follows. Copy the point on Age groups: write the key term first, then its explanation.</a:t>
             </a:r>
             <a:endParaRPr lang="en-US" dirty="0"/>
           </a:p>
@@ -3557,7 +3563,7 @@
           <a:p>
             <a:r>
               <a:rPr lang="en-US" dirty="0"/>
-              <a:t>We continue with Meaning of Age and Sex Composition. Copy the point on Factors of the sex ratio: write the key term first, then its explanation.</a:t>
+              <a:t>Let us copy Factors of the Sex Ratio. The sex ratio varies because of the following factors. Copy the point on More boys at birth: write the key term first, then its explanation.</a:t>
             </a:r>
             <a:endParaRPr lang="en-US" dirty="0"/>
           </a:p>
@@ -3645,7 +3651,7 @@
           <a:p>
             <a:r>
               <a:rPr lang="en-US" dirty="0"/>
-              <a:t>Let us copy The Youthful Population. The youthful population has the following characteristics. Copy the point on Characteristics on the left, then draw the diagram on the right: youthful and ageing populations. Give it a title and label it clearly.</a:t>
+              <a:t>We continue with Factors of the Sex Ratio. Copy the point on More women in old age: write the key term first, then its explanation.</a:t>
             </a:r>
             <a:endParaRPr lang="en-US" dirty="0"/>
           </a:p>
@@ -3733,7 +3739,7 @@
           <a:p>
             <a:r>
               <a:rPr lang="en-US" dirty="0"/>
-              <a:t>Copy the point on Example of Cameroon on the left, then draw the diagram on the right: the pyramid of Cameroon. Give it a title and label it clearly.</a:t>
+              <a:t>We continue with Factors of the Sex Ratio. Copy the point on More men in towns and mining areas: write the key term first, then its explanation.</a:t>
             </a:r>
             <a:endParaRPr lang="en-US" dirty="0"/>
           </a:p>
@@ -3821,7 +3827,7 @@
           <a:p>
             <a:r>
               <a:rPr lang="en-US" dirty="0"/>
-              <a:t>Let us copy Consequences of a Youthful Population. A youthful population has the following socio-economic consequences. Copy the point on High dependency: write the key term first, then its explanation.</a:t>
+              <a:t>Let us copy The Youthful Population. The youthful population has the following characteristics. Copy the point on Many young people on the left, then draw the diagram on the right: youthful and ageing populations. Give it a title and label it clearly.</a:t>
             </a:r>
             <a:endParaRPr lang="en-US" dirty="0"/>
           </a:p>
@@ -3909,7 +3915,7 @@
           <a:p>
             <a:r>
               <a:rPr lang="en-US" dirty="0"/>
-              <a:t>Copy the point on Pressure on services on the left, then draw the diagram on the right: a classroom. Give it a title and label it clearly.</a:t>
+              <a:t>We continue with The Youthful Population. Copy the point on Few old people: write the key term first, then its explanation.</a:t>
             </a:r>
             <a:endParaRPr lang="en-US" dirty="0"/>
           </a:p>
@@ -3997,7 +4003,7 @@
           <a:p>
             <a:r>
               <a:rPr lang="en-US" dirty="0"/>
-              <a:t>We continue with Consequences of a Youthful Population. Copy the point on Unemployment: write the key term first, then its explanation.</a:t>
+              <a:t>We continue with The Youthful Population. Copy the point on Location: write the key term first, then its explanation.</a:t>
             </a:r>
             <a:endParaRPr lang="en-US" dirty="0"/>
           </a:p>
@@ -4085,7 +4091,7 @@
           <a:p>
             <a:r>
               <a:rPr lang="en-US" dirty="0"/>
-              <a:t>We continue with Consequences of a Youthful Population. Copy the point on A future labour force: write the key term first, then its explanation.</a:t>
+              <a:t>Copy the point on Example of Cameroon on the left, then draw the diagram on the right: the pyramid of Cameroon. Give it a title and label it clearly.</a:t>
             </a:r>
             <a:endParaRPr lang="en-US" dirty="0"/>
           </a:p>
@@ -4173,7 +4179,7 @@
           <a:p>
             <a:r>
               <a:rPr lang="en-US" dirty="0"/>
-              <a:t>Let us copy The Ageing Population. The ageing population has the following characteristics. Copy the point on Characteristics on the left, then draw the diagram on the right: the pyramid of Japan. Give it a title and label it clearly.</a:t>
+              <a:t>Let us copy Consequences of a Youthful Population. A youthful population has the following socio-economic consequences. Copy the point on High dependency: write the key term first, then its explanation.</a:t>
             </a:r>
             <a:endParaRPr lang="en-US" dirty="0"/>
           </a:p>
@@ -4261,7 +4267,7 @@
           <a:p>
             <a:r>
               <a:rPr lang="en-US" dirty="0"/>
-              <a:t>We continue with The Ageing Population. Copy the point on Example of Japan: write the key term first, then its explanation.</a:t>
+              <a:t>Copy the point on Pressure on services on the left, then draw the diagram on the right: a classroom. Give it a title and label it clearly.</a:t>
             </a:r>
             <a:endParaRPr lang="en-US" dirty="0"/>
           </a:p>
@@ -4349,7 +4355,7 @@
           <a:p>
             <a:r>
               <a:rPr lang="en-US" dirty="0"/>
-              <a:t>Let us copy Consequences of an Ageing Population. An ageing population has the following socio-economic consequences. Copy the point on A shrinking workforce: write the key term first, then its explanation.</a:t>
+              <a:t>We continue with Consequences of a Youthful Population. Copy the point on Unemployment: write the key term first, then its explanation.</a:t>
             </a:r>
             <a:endParaRPr lang="en-US" dirty="0"/>
           </a:p>
@@ -4525,7 +4531,7 @@
           <a:p>
             <a:r>
               <a:rPr lang="en-US" dirty="0"/>
-              <a:t>Copy the point on High state spending on the left, then draw the diagram on the right: health care. Give it a title and label it clearly.</a:t>
+              <a:t>We continue with Consequences of a Youthful Population. Copy the point on A future labour force: write the key term first, then its explanation.</a:t>
             </a:r>
             <a:endParaRPr lang="en-US" dirty="0"/>
           </a:p>
@@ -4613,7 +4619,7 @@
           <a:p>
             <a:r>
               <a:rPr lang="en-US" dirty="0"/>
-              <a:t>We continue with Consequences of an Ageing Population. Copy the point on Closure of services: write the key term first, then its explanation.</a:t>
+              <a:t>Let us copy The Ageing Population. The ageing population has the following characteristics. Copy the point on Many old people on the left, then draw the diagram on the right: the pyramid of Japan. Give it a title and label it clearly.</a:t>
             </a:r>
             <a:endParaRPr lang="en-US" dirty="0"/>
           </a:p>
@@ -4701,7 +4707,7 @@
           <a:p>
             <a:r>
               <a:rPr lang="en-US" dirty="0"/>
-              <a:t>We continue with Consequences of an Ageing Population. Copy the point on Government responses: write the key term first, then its explanation.</a:t>
+              <a:t>We continue with The Ageing Population. Copy the point on Few young people: write the key term first, then its explanation.</a:t>
             </a:r>
             <a:endParaRPr lang="en-US" dirty="0"/>
           </a:p>
@@ -4789,7 +4795,7 @@
           <a:p>
             <a:r>
               <a:rPr lang="en-US" dirty="0"/>
-              <a:t>Now let us check what you have understood. Question 1: Give two characteristics of a youthful population. Answer in your exercise book.</a:t>
+              <a:t>We continue with The Ageing Population. Copy the point on Location: write the key term first, then its explanation.</a:t>
             </a:r>
             <a:endParaRPr lang="en-US" dirty="0"/>
           </a:p>
@@ -4877,7 +4883,7 @@
           <a:p>
             <a:r>
               <a:rPr lang="en-US" dirty="0"/>
-              <a:t>The expected answer is: over 40 % of people under 15 and fewer than 5 % aged 65 or over; high birth rates. If you got it right, well done.</a:t>
+              <a:t>We continue with The Ageing Population. Copy the point on Example of Japan: write the key term first, then its explanation.</a:t>
             </a:r>
             <a:endParaRPr lang="en-US" dirty="0"/>
           </a:p>
@@ -4965,7 +4971,7 @@
           <a:p>
             <a:r>
               <a:rPr lang="en-US" dirty="0"/>
-              <a:t>Now let us check what you have understood. Question 2: Give two consequences of an ageing population. Answer in your exercise book.</a:t>
+              <a:t>Let us copy Consequences of an Ageing Population. An ageing population has the following socio-economic consequences. Copy the point on A shrinking workforce: write the key term first, then its explanation.</a:t>
             </a:r>
             <a:endParaRPr lang="en-US" dirty="0"/>
           </a:p>
@@ -5053,7 +5059,7 @@
           <a:p>
             <a:r>
               <a:rPr lang="en-US" dirty="0"/>
-              <a:t>The expected answer is: labour shortages and high spending on pensions and health care (also school closures). If you got it right, well done.</a:t>
+              <a:t>Copy the point on High state spending on the left, then draw the diagram on the right: health care. Give it a title and label it clearly.</a:t>
             </a:r>
             <a:endParaRPr lang="en-US" dirty="0"/>
           </a:p>
@@ -5141,7 +5147,7 @@
           <a:p>
             <a:r>
               <a:rPr lang="en-US" dirty="0"/>
-              <a:t>For those who need more practice, fill in the blanks in your exercise book. The answers are: number 1, sex ratio; number 2, youthful; number 3, ageing.</a:t>
+              <a:t>We continue with Consequences of an Ageing Population. Copy the point on Closure of services: write the key term first, then its explanation.</a:t>
             </a:r>
             <a:endParaRPr lang="en-US" dirty="0"/>
           </a:p>
@@ -5229,7 +5235,7 @@
           <a:p>
             <a:r>
               <a:rPr lang="en-US" dirty="0"/>
-              <a:t>For your homework: State what the base of a population pyramid represents. We shall correct it at the beginning of our next lesson.</a:t>
+              <a:t>We continue with Consequences of an Ageing Population. Copy the point on Government responses: write the key term first, then its explanation.</a:t>
             </a:r>
             <a:endParaRPr lang="en-US" dirty="0"/>
           </a:p>
@@ -5317,7 +5323,7 @@
           <a:p>
             <a:r>
               <a:rPr lang="en-US" dirty="0"/>
-              <a:t>Our next lesson will be on Lesson 7: Population Pyramids. Thank you for your attention, and see you next time.</a:t>
+              <a:t>Now let us check what you have understood. Question 1: Give two characteristics of a youthful population. Answer in your exercise book.</a:t>
             </a:r>
             <a:endParaRPr lang="en-US" dirty="0"/>
           </a:p>
@@ -5493,7 +5499,7 @@
           <a:p>
             <a:r>
               <a:rPr lang="en-US" dirty="0"/>
-              <a:t>Let us play the bilingual game. I say a word in English, and you give me the French word. Then we do the reverse.</a:t>
+              <a:t>The expected answer is: over 40 % of people under 15 and fewer than 5 % aged 65 or over; high birth rates. If you got it right, well done.</a:t>
             </a:r>
             <a:endParaRPr lang="en-US" dirty="0"/>
           </a:p>
@@ -5581,7 +5587,7 @@
           <a:p>
             <a:r>
               <a:rPr lang="en-US" dirty="0"/>
-              <a:t>I record this information in the official logbook of the class after the lesson.</a:t>
+              <a:t>Now let us check what you have understood. Question 2: Give two consequences of an ageing population. Answer in your exercise book.</a:t>
             </a:r>
             <a:endParaRPr lang="en-US" dirty="0"/>
           </a:p>
@@ -5669,7 +5675,7 @@
           <a:p>
             <a:r>
               <a:rPr lang="en-US" dirty="0"/>
-              <a:t>I complete the second page of the logbook: the matter taught, the evaluation, the homework and the attendance.</a:t>
+              <a:t>The expected answer is: labour shortages and high spending on pensions and health care (also school closures). If you got it right, well done.</a:t>
             </a:r>
             <a:endParaRPr lang="en-US" dirty="0"/>
           </a:p>
@@ -5757,7 +5763,7 @@
           <a:p>
             <a:r>
               <a:rPr lang="en-US" dirty="0"/>
-              <a:t>This slide is for me, the teacher: it gives the timing of the lesson and what to do if the projector is not available.</a:t>
+              <a:t>For those who need more practice, fill in the blanks in your exercise book. The answers are: number 1, sex ratio; number 2, youthful; number 3, ageing.</a:t>
             </a:r>
             <a:endParaRPr lang="en-US" dirty="0"/>
           </a:p>
@@ -5845,7 +5851,7 @@
           <a:p>
             <a:r>
               <a:rPr lang="en-US" dirty="0"/>
-              <a:t>These are the references and picture credits used to prepare this lesson.</a:t>
+              <a:t>For your homework: State what the base of a population pyramid represents. We shall correct it at the beginning of our next lesson.</a:t>
             </a:r>
             <a:endParaRPr lang="en-US" dirty="0"/>
           </a:p>
@@ -5869,6 +5875,446 @@
             <a:fld id="{F7021451-1387-4CA6-816F-3879F97B5CBC}" type="slidenum">
               <a:rPr lang="en-US"/>
               <a:t>64</a:t>
+            </a:fld>
+            <a:endParaRPr lang="en-US"/>
+          </a:p>
+        </p:txBody>
+      </p:sp>
+    </p:spTree>
+    <p:extLst>
+      <p:ext uri="{BB962C8B-B14F-4D97-AF65-F5344CB8AC3E}">
+        <p14:creationId xmlns:p14="http://schemas.microsoft.com/office/powerpoint/2010/main" val="1024086991"/>
+      </p:ext>
+    </p:extLst>
+  </p:cSld>
+  <p:clrMapOvr>
+    <a:masterClrMapping/>
+  </p:clrMapOvr>
+</p:notes>
+</file>
+
+<file path=ppt/notesSlides/notesSlide65.xml><?xml version="1.0" encoding="utf-8"?>
+<p:notes xmlns:a="http://schemas.openxmlformats.org/drawingml/2006/main" xmlns:r="http://schemas.openxmlformats.org/officeDocument/2006/relationships" xmlns:p="http://schemas.openxmlformats.org/presentationml/2006/main">
+  <p:cSld>
+    <p:spTree>
+      <p:nvGrpSpPr>
+        <p:cNvPr id="1" name=""/>
+        <p:cNvGrpSpPr/>
+        <p:nvPr/>
+      </p:nvGrpSpPr>
+      <p:grpSpPr>
+        <a:xfrm>
+          <a:off x="0" y="0"/>
+          <a:ext cx="0" cy="0"/>
+          <a:chOff x="0" y="0"/>
+          <a:chExt cx="0" cy="0"/>
+        </a:xfrm>
+      </p:grpSpPr>
+      <p:sp>
+        <p:nvSpPr>
+          <p:cNvPr id="2" name="Slide Image Placeholder 1"/>
+          <p:cNvSpPr>
+            <a:spLocks noGrp="1" noRot="1" noChangeAspect="1"/>
+          </p:cNvSpPr>
+          <p:nvPr>
+            <p:ph type="sldImg"/>
+          </p:nvPr>
+        </p:nvSpPr>
+        <p:spPr/>
+      </p:sp>
+      <p:sp>
+        <p:nvSpPr>
+          <p:cNvPr id="3" name="Notes Placeholder 2"/>
+          <p:cNvSpPr>
+            <a:spLocks noGrp="1"/>
+          </p:cNvSpPr>
+          <p:nvPr>
+            <p:ph type="body" idx="1"/>
+          </p:nvPr>
+        </p:nvSpPr>
+        <p:spPr/>
+        <p:txBody>
+          <a:bodyPr/>
+          <a:lstStyle/>
+          <a:p>
+            <a:r>
+              <a:rPr lang="en-US" dirty="0"/>
+              <a:t>Our next lesson will be on Lesson 7: Population Pyramids. Thank you for your attention, and see you next time.</a:t>
+            </a:r>
+            <a:endParaRPr lang="en-US" dirty="0"/>
+          </a:p>
+        </p:txBody>
+      </p:sp>
+      <p:sp>
+        <p:nvSpPr>
+          <p:cNvPr id="4" name="Slide Number Placeholder 3"/>
+          <p:cNvSpPr>
+            <a:spLocks noGrp="1"/>
+          </p:cNvSpPr>
+          <p:nvPr>
+            <p:ph type="sldNum" sz="quarter" idx="10"/>
+          </p:nvPr>
+        </p:nvSpPr>
+        <p:spPr/>
+        <p:txBody>
+          <a:bodyPr/>
+          <a:lstStyle/>
+          <a:p>
+            <a:fld id="{F7021451-1387-4CA6-816F-3879F97B5CBC}" type="slidenum">
+              <a:rPr lang="en-US"/>
+              <a:t>65</a:t>
+            </a:fld>
+            <a:endParaRPr lang="en-US"/>
+          </a:p>
+        </p:txBody>
+      </p:sp>
+    </p:spTree>
+    <p:extLst>
+      <p:ext uri="{BB962C8B-B14F-4D97-AF65-F5344CB8AC3E}">
+        <p14:creationId xmlns:p14="http://schemas.microsoft.com/office/powerpoint/2010/main" val="1024086991"/>
+      </p:ext>
+    </p:extLst>
+  </p:cSld>
+  <p:clrMapOvr>
+    <a:masterClrMapping/>
+  </p:clrMapOvr>
+</p:notes>
+</file>
+
+<file path=ppt/notesSlides/notesSlide66.xml><?xml version="1.0" encoding="utf-8"?>
+<p:notes xmlns:a="http://schemas.openxmlformats.org/drawingml/2006/main" xmlns:r="http://schemas.openxmlformats.org/officeDocument/2006/relationships" xmlns:p="http://schemas.openxmlformats.org/presentationml/2006/main">
+  <p:cSld>
+    <p:spTree>
+      <p:nvGrpSpPr>
+        <p:cNvPr id="1" name=""/>
+        <p:cNvGrpSpPr/>
+        <p:nvPr/>
+      </p:nvGrpSpPr>
+      <p:grpSpPr>
+        <a:xfrm>
+          <a:off x="0" y="0"/>
+          <a:ext cx="0" cy="0"/>
+          <a:chOff x="0" y="0"/>
+          <a:chExt cx="0" cy="0"/>
+        </a:xfrm>
+      </p:grpSpPr>
+      <p:sp>
+        <p:nvSpPr>
+          <p:cNvPr id="2" name="Slide Image Placeholder 1"/>
+          <p:cNvSpPr>
+            <a:spLocks noGrp="1" noRot="1" noChangeAspect="1"/>
+          </p:cNvSpPr>
+          <p:nvPr>
+            <p:ph type="sldImg"/>
+          </p:nvPr>
+        </p:nvSpPr>
+        <p:spPr/>
+      </p:sp>
+      <p:sp>
+        <p:nvSpPr>
+          <p:cNvPr id="3" name="Notes Placeholder 2"/>
+          <p:cNvSpPr>
+            <a:spLocks noGrp="1"/>
+          </p:cNvSpPr>
+          <p:nvPr>
+            <p:ph type="body" idx="1"/>
+          </p:nvPr>
+        </p:nvSpPr>
+        <p:spPr/>
+        <p:txBody>
+          <a:bodyPr/>
+          <a:lstStyle/>
+          <a:p>
+            <a:r>
+              <a:rPr lang="en-US" dirty="0"/>
+              <a:t>Let us play the bilingual game. I say a word in English, and you give me the French word. Then we do the reverse.</a:t>
+            </a:r>
+            <a:endParaRPr lang="en-US" dirty="0"/>
+          </a:p>
+        </p:txBody>
+      </p:sp>
+      <p:sp>
+        <p:nvSpPr>
+          <p:cNvPr id="4" name="Slide Number Placeholder 3"/>
+          <p:cNvSpPr>
+            <a:spLocks noGrp="1"/>
+          </p:cNvSpPr>
+          <p:nvPr>
+            <p:ph type="sldNum" sz="quarter" idx="10"/>
+          </p:nvPr>
+        </p:nvSpPr>
+        <p:spPr/>
+        <p:txBody>
+          <a:bodyPr/>
+          <a:lstStyle/>
+          <a:p>
+            <a:fld id="{F7021451-1387-4CA6-816F-3879F97B5CBC}" type="slidenum">
+              <a:rPr lang="en-US"/>
+              <a:t>66</a:t>
+            </a:fld>
+            <a:endParaRPr lang="en-US"/>
+          </a:p>
+        </p:txBody>
+      </p:sp>
+    </p:spTree>
+    <p:extLst>
+      <p:ext uri="{BB962C8B-B14F-4D97-AF65-F5344CB8AC3E}">
+        <p14:creationId xmlns:p14="http://schemas.microsoft.com/office/powerpoint/2010/main" val="1024086991"/>
+      </p:ext>
+    </p:extLst>
+  </p:cSld>
+  <p:clrMapOvr>
+    <a:masterClrMapping/>
+  </p:clrMapOvr>
+</p:notes>
+</file>
+
+<file path=ppt/notesSlides/notesSlide67.xml><?xml version="1.0" encoding="utf-8"?>
+<p:notes xmlns:a="http://schemas.openxmlformats.org/drawingml/2006/main" xmlns:r="http://schemas.openxmlformats.org/officeDocument/2006/relationships" xmlns:p="http://schemas.openxmlformats.org/presentationml/2006/main">
+  <p:cSld>
+    <p:spTree>
+      <p:nvGrpSpPr>
+        <p:cNvPr id="1" name=""/>
+        <p:cNvGrpSpPr/>
+        <p:nvPr/>
+      </p:nvGrpSpPr>
+      <p:grpSpPr>
+        <a:xfrm>
+          <a:off x="0" y="0"/>
+          <a:ext cx="0" cy="0"/>
+          <a:chOff x="0" y="0"/>
+          <a:chExt cx="0" cy="0"/>
+        </a:xfrm>
+      </p:grpSpPr>
+      <p:sp>
+        <p:nvSpPr>
+          <p:cNvPr id="2" name="Slide Image Placeholder 1"/>
+          <p:cNvSpPr>
+            <a:spLocks noGrp="1" noRot="1" noChangeAspect="1"/>
+          </p:cNvSpPr>
+          <p:nvPr>
+            <p:ph type="sldImg"/>
+          </p:nvPr>
+        </p:nvSpPr>
+        <p:spPr/>
+      </p:sp>
+      <p:sp>
+        <p:nvSpPr>
+          <p:cNvPr id="3" name="Notes Placeholder 2"/>
+          <p:cNvSpPr>
+            <a:spLocks noGrp="1"/>
+          </p:cNvSpPr>
+          <p:nvPr>
+            <p:ph type="body" idx="1"/>
+          </p:nvPr>
+        </p:nvSpPr>
+        <p:spPr/>
+        <p:txBody>
+          <a:bodyPr/>
+          <a:lstStyle/>
+          <a:p>
+            <a:r>
+              <a:rPr lang="en-US" dirty="0"/>
+              <a:t>I record this information in the official logbook of the class after the lesson.</a:t>
+            </a:r>
+            <a:endParaRPr lang="en-US" dirty="0"/>
+          </a:p>
+        </p:txBody>
+      </p:sp>
+      <p:sp>
+        <p:nvSpPr>
+          <p:cNvPr id="4" name="Slide Number Placeholder 3"/>
+          <p:cNvSpPr>
+            <a:spLocks noGrp="1"/>
+          </p:cNvSpPr>
+          <p:nvPr>
+            <p:ph type="sldNum" sz="quarter" idx="10"/>
+          </p:nvPr>
+        </p:nvSpPr>
+        <p:spPr/>
+        <p:txBody>
+          <a:bodyPr/>
+          <a:lstStyle/>
+          <a:p>
+            <a:fld id="{F7021451-1387-4CA6-816F-3879F97B5CBC}" type="slidenum">
+              <a:rPr lang="en-US"/>
+              <a:t>67</a:t>
+            </a:fld>
+            <a:endParaRPr lang="en-US"/>
+          </a:p>
+        </p:txBody>
+      </p:sp>
+    </p:spTree>
+    <p:extLst>
+      <p:ext uri="{BB962C8B-B14F-4D97-AF65-F5344CB8AC3E}">
+        <p14:creationId xmlns:p14="http://schemas.microsoft.com/office/powerpoint/2010/main" val="1024086991"/>
+      </p:ext>
+    </p:extLst>
+  </p:cSld>
+  <p:clrMapOvr>
+    <a:masterClrMapping/>
+  </p:clrMapOvr>
+</p:notes>
+</file>
+
+<file path=ppt/notesSlides/notesSlide68.xml><?xml version="1.0" encoding="utf-8"?>
+<p:notes xmlns:a="http://schemas.openxmlformats.org/drawingml/2006/main" xmlns:r="http://schemas.openxmlformats.org/officeDocument/2006/relationships" xmlns:p="http://schemas.openxmlformats.org/presentationml/2006/main">
+  <p:cSld>
+    <p:spTree>
+      <p:nvGrpSpPr>
+        <p:cNvPr id="1" name=""/>
+        <p:cNvGrpSpPr/>
+        <p:nvPr/>
+      </p:nvGrpSpPr>
+      <p:grpSpPr>
+        <a:xfrm>
+          <a:off x="0" y="0"/>
+          <a:ext cx="0" cy="0"/>
+          <a:chOff x="0" y="0"/>
+          <a:chExt cx="0" cy="0"/>
+        </a:xfrm>
+      </p:grpSpPr>
+      <p:sp>
+        <p:nvSpPr>
+          <p:cNvPr id="2" name="Slide Image Placeholder 1"/>
+          <p:cNvSpPr>
+            <a:spLocks noGrp="1" noRot="1" noChangeAspect="1"/>
+          </p:cNvSpPr>
+          <p:nvPr>
+            <p:ph type="sldImg"/>
+          </p:nvPr>
+        </p:nvSpPr>
+        <p:spPr/>
+      </p:sp>
+      <p:sp>
+        <p:nvSpPr>
+          <p:cNvPr id="3" name="Notes Placeholder 2"/>
+          <p:cNvSpPr>
+            <a:spLocks noGrp="1"/>
+          </p:cNvSpPr>
+          <p:nvPr>
+            <p:ph type="body" idx="1"/>
+          </p:nvPr>
+        </p:nvSpPr>
+        <p:spPr/>
+        <p:txBody>
+          <a:bodyPr/>
+          <a:lstStyle/>
+          <a:p>
+            <a:r>
+              <a:rPr lang="en-US" dirty="0"/>
+              <a:t>I complete the second page of the logbook: the matter taught, the evaluation, the homework and the attendance.</a:t>
+            </a:r>
+            <a:endParaRPr lang="en-US" dirty="0"/>
+          </a:p>
+        </p:txBody>
+      </p:sp>
+      <p:sp>
+        <p:nvSpPr>
+          <p:cNvPr id="4" name="Slide Number Placeholder 3"/>
+          <p:cNvSpPr>
+            <a:spLocks noGrp="1"/>
+          </p:cNvSpPr>
+          <p:nvPr>
+            <p:ph type="sldNum" sz="quarter" idx="10"/>
+          </p:nvPr>
+        </p:nvSpPr>
+        <p:spPr/>
+        <p:txBody>
+          <a:bodyPr/>
+          <a:lstStyle/>
+          <a:p>
+            <a:fld id="{F7021451-1387-4CA6-816F-3879F97B5CBC}" type="slidenum">
+              <a:rPr lang="en-US"/>
+              <a:t>68</a:t>
+            </a:fld>
+            <a:endParaRPr lang="en-US"/>
+          </a:p>
+        </p:txBody>
+      </p:sp>
+    </p:spTree>
+    <p:extLst>
+      <p:ext uri="{BB962C8B-B14F-4D97-AF65-F5344CB8AC3E}">
+        <p14:creationId xmlns:p14="http://schemas.microsoft.com/office/powerpoint/2010/main" val="1024086991"/>
+      </p:ext>
+    </p:extLst>
+  </p:cSld>
+  <p:clrMapOvr>
+    <a:masterClrMapping/>
+  </p:clrMapOvr>
+</p:notes>
+</file>
+
+<file path=ppt/notesSlides/notesSlide69.xml><?xml version="1.0" encoding="utf-8"?>
+<p:notes xmlns:a="http://schemas.openxmlformats.org/drawingml/2006/main" xmlns:r="http://schemas.openxmlformats.org/officeDocument/2006/relationships" xmlns:p="http://schemas.openxmlformats.org/presentationml/2006/main">
+  <p:cSld>
+    <p:spTree>
+      <p:nvGrpSpPr>
+        <p:cNvPr id="1" name=""/>
+        <p:cNvGrpSpPr/>
+        <p:nvPr/>
+      </p:nvGrpSpPr>
+      <p:grpSpPr>
+        <a:xfrm>
+          <a:off x="0" y="0"/>
+          <a:ext cx="0" cy="0"/>
+          <a:chOff x="0" y="0"/>
+          <a:chExt cx="0" cy="0"/>
+        </a:xfrm>
+      </p:grpSpPr>
+      <p:sp>
+        <p:nvSpPr>
+          <p:cNvPr id="2" name="Slide Image Placeholder 1"/>
+          <p:cNvSpPr>
+            <a:spLocks noGrp="1" noRot="1" noChangeAspect="1"/>
+          </p:cNvSpPr>
+          <p:nvPr>
+            <p:ph type="sldImg"/>
+          </p:nvPr>
+        </p:nvSpPr>
+        <p:spPr/>
+      </p:sp>
+      <p:sp>
+        <p:nvSpPr>
+          <p:cNvPr id="3" name="Notes Placeholder 2"/>
+          <p:cNvSpPr>
+            <a:spLocks noGrp="1"/>
+          </p:cNvSpPr>
+          <p:nvPr>
+            <p:ph type="body" idx="1"/>
+          </p:nvPr>
+        </p:nvSpPr>
+        <p:spPr/>
+        <p:txBody>
+          <a:bodyPr/>
+          <a:lstStyle/>
+          <a:p>
+            <a:r>
+              <a:rPr lang="en-US" dirty="0"/>
+              <a:t>This slide is for me, the teacher: it gives the timing of the lesson and what to do if the projector is not available.</a:t>
+            </a:r>
+            <a:endParaRPr lang="en-US" dirty="0"/>
+          </a:p>
+        </p:txBody>
+      </p:sp>
+      <p:sp>
+        <p:nvSpPr>
+          <p:cNvPr id="4" name="Slide Number Placeholder 3"/>
+          <p:cNvSpPr>
+            <a:spLocks noGrp="1"/>
+          </p:cNvSpPr>
+          <p:nvPr>
+            <p:ph type="sldNum" sz="quarter" idx="10"/>
+          </p:nvPr>
+        </p:nvSpPr>
+        <p:spPr/>
+        <p:txBody>
+          <a:bodyPr/>
+          <a:lstStyle/>
+          <a:p>
+            <a:fld id="{F7021451-1387-4CA6-816F-3879F97B5CBC}" type="slidenum">
+              <a:rPr lang="en-US"/>
+              <a:t>69</a:t>
             </a:fld>
             <a:endParaRPr lang="en-US"/>
           </a:p>
@@ -5957,6 +6403,94 @@
             <a:fld id="{F7021451-1387-4CA6-816F-3879F97B5CBC}" type="slidenum">
               <a:rPr lang="en-US"/>
               <a:t>7</a:t>
+            </a:fld>
+            <a:endParaRPr lang="en-US"/>
+          </a:p>
+        </p:txBody>
+      </p:sp>
+    </p:spTree>
+    <p:extLst>
+      <p:ext uri="{BB962C8B-B14F-4D97-AF65-F5344CB8AC3E}">
+        <p14:creationId xmlns:p14="http://schemas.microsoft.com/office/powerpoint/2010/main" val="1024086991"/>
+      </p:ext>
+    </p:extLst>
+  </p:cSld>
+  <p:clrMapOvr>
+    <a:masterClrMapping/>
+  </p:clrMapOvr>
+</p:notes>
+</file>
+
+<file path=ppt/notesSlides/notesSlide70.xml><?xml version="1.0" encoding="utf-8"?>
+<p:notes xmlns:a="http://schemas.openxmlformats.org/drawingml/2006/main" xmlns:r="http://schemas.openxmlformats.org/officeDocument/2006/relationships" xmlns:p="http://schemas.openxmlformats.org/presentationml/2006/main">
+  <p:cSld>
+    <p:spTree>
+      <p:nvGrpSpPr>
+        <p:cNvPr id="1" name=""/>
+        <p:cNvGrpSpPr/>
+        <p:nvPr/>
+      </p:nvGrpSpPr>
+      <p:grpSpPr>
+        <a:xfrm>
+          <a:off x="0" y="0"/>
+          <a:ext cx="0" cy="0"/>
+          <a:chOff x="0" y="0"/>
+          <a:chExt cx="0" cy="0"/>
+        </a:xfrm>
+      </p:grpSpPr>
+      <p:sp>
+        <p:nvSpPr>
+          <p:cNvPr id="2" name="Slide Image Placeholder 1"/>
+          <p:cNvSpPr>
+            <a:spLocks noGrp="1" noRot="1" noChangeAspect="1"/>
+          </p:cNvSpPr>
+          <p:nvPr>
+            <p:ph type="sldImg"/>
+          </p:nvPr>
+        </p:nvSpPr>
+        <p:spPr/>
+      </p:sp>
+      <p:sp>
+        <p:nvSpPr>
+          <p:cNvPr id="3" name="Notes Placeholder 2"/>
+          <p:cNvSpPr>
+            <a:spLocks noGrp="1"/>
+          </p:cNvSpPr>
+          <p:nvPr>
+            <p:ph type="body" idx="1"/>
+          </p:nvPr>
+        </p:nvSpPr>
+        <p:spPr/>
+        <p:txBody>
+          <a:bodyPr/>
+          <a:lstStyle/>
+          <a:p>
+            <a:r>
+              <a:rPr lang="en-US" dirty="0"/>
+              <a:t>These are the references and picture credits used to prepare this lesson.</a:t>
+            </a:r>
+            <a:endParaRPr lang="en-US" dirty="0"/>
+          </a:p>
+        </p:txBody>
+      </p:sp>
+      <p:sp>
+        <p:nvSpPr>
+          <p:cNvPr id="4" name="Slide Number Placeholder 3"/>
+          <p:cNvSpPr>
+            <a:spLocks noGrp="1"/>
+          </p:cNvSpPr>
+          <p:nvPr>
+            <p:ph type="sldNum" sz="quarter" idx="10"/>
+          </p:nvPr>
+        </p:nvSpPr>
+        <p:spPr/>
+        <p:txBody>
+          <a:bodyPr/>
+          <a:lstStyle/>
+          <a:p>
+            <a:fld id="{F7021451-1387-4CA6-816F-3879F97B5CBC}" type="slidenum">
+              <a:rPr lang="en-US"/>
+              <a:t>70</a:t>
             </a:fld>
             <a:endParaRPr lang="en-US"/>
           </a:p>
@@ -15408,7 +15942,7 @@
         <p:spPr>
           <a:xfrm>
             <a:off x="0" y="658368"/>
-            <a:ext cx="2468880" cy="5833872"/>
+            <a:ext cx="1463040" cy="5833872"/>
           </a:xfrm>
           <a:prstGeom prst="rect">
             <a:avLst/>
@@ -15423,8 +15957,8 @@
         </p:nvSpPr>
         <p:spPr>
           <a:xfrm>
-            <a:off x="2697480" y="1005840"/>
-            <a:ext cx="9174175" cy="731520"/>
+            <a:off x="1691640" y="1005840"/>
+            <a:ext cx="10180015" cy="731520"/>
           </a:xfrm>
           <a:prstGeom prst="rect">
             <a:avLst/>
@@ -15464,8 +15998,47 @@
         </p:nvSpPr>
         <p:spPr>
           <a:xfrm>
-            <a:off x="2697480" y="1783080"/>
-            <a:ext cx="9174175" cy="4663440"/>
+            <a:off x="1691640" y="1737360"/>
+            <a:ext cx="10180015" cy="457200"/>
+          </a:xfrm>
+          <a:prstGeom prst="rect">
+            <a:avLst/>
+          </a:prstGeom>
+          <a:noFill/>
+          <a:ln/>
+        </p:spPr>
+        <p:txBody>
+          <a:bodyPr wrap="square" lIns="0" tIns="0" rIns="0" bIns="0" rtlCol="0" anchor="ctr"/>
+          <a:lstStyle/>
+          <a:p>
+            <a:pPr algn="l" indent="0" marL="0">
+              <a:buNone/>
+            </a:pPr>
+            <a:r>
+              <a:rPr lang="en-US" sz="3200" b="1" dirty="0">
+                <a:solidFill>
+                  <a:srgbClr val="990011"/>
+                </a:solidFill>
+                <a:latin typeface="Times New Roman" pitchFamily="34" charset="0"/>
+                <a:ea typeface="Times New Roman" pitchFamily="34" charset="-122"/>
+                <a:cs typeface="Times New Roman" pitchFamily="34" charset="-120"/>
+              </a:rPr>
+              <a:t>A) Age Groups and Sex Ratio</a:t>
+            </a:r>
+            <a:endParaRPr lang="en-US" sz="3200" dirty="0"/>
+          </a:p>
+        </p:txBody>
+      </p:sp>
+      <p:sp>
+        <p:nvSpPr>
+          <p:cNvPr id="6" name="Text 3"/>
+          <p:cNvSpPr/>
+          <p:nvPr/>
+        </p:nvSpPr>
+        <p:spPr>
+          <a:xfrm>
+            <a:off x="1691640" y="2240280"/>
+            <a:ext cx="10180015" cy="4206240"/>
           </a:xfrm>
           <a:prstGeom prst="rect">
             <a:avLst/>
@@ -15696,8 +16269,49 @@
         </p:nvSpPr>
         <p:spPr>
           <a:xfrm>
-            <a:off x="365760" y="1783080"/>
-            <a:ext cx="6035040" cy="4617720"/>
+            <a:off x="365760" y="1737360"/>
+            <a:ext cx="6035040" cy="457200"/>
+          </a:xfrm>
+          <a:prstGeom prst="rect">
+            <a:avLst/>
+          </a:prstGeom>
+          <a:noFill/>
+          <a:ln/>
+        </p:spPr>
+        <p:txBody>
+          <a:bodyPr wrap="square" lIns="0" tIns="0" rIns="0" bIns="0" rtlCol="0" anchor="ctr">
+            <a:normAutofit/>
+          </a:bodyPr>
+          <a:lstStyle/>
+          <a:p>
+            <a:pPr algn="l" indent="0" marL="0">
+              <a:buNone/>
+            </a:pPr>
+            <a:r>
+              <a:rPr lang="en-US" sz="3000" b="1" dirty="0">
+                <a:solidFill>
+                  <a:srgbClr val="990011"/>
+                </a:solidFill>
+                <a:latin typeface="Times New Roman" pitchFamily="34" charset="0"/>
+                <a:ea typeface="Times New Roman" pitchFamily="34" charset="-122"/>
+                <a:cs typeface="Times New Roman" pitchFamily="34" charset="-120"/>
+              </a:rPr>
+              <a:t>A) Age Groups and Sex Ratio</a:t>
+            </a:r>
+            <a:endParaRPr lang="en-US" sz="3000" dirty="0"/>
+          </a:p>
+        </p:txBody>
+      </p:sp>
+      <p:sp>
+        <p:nvSpPr>
+          <p:cNvPr id="5" name="Text 3"/>
+          <p:cNvSpPr/>
+          <p:nvPr/>
+        </p:nvSpPr>
+        <p:spPr>
+          <a:xfrm>
+            <a:off x="365760" y="2240280"/>
+            <a:ext cx="6035040" cy="4160520"/>
           </a:xfrm>
           <a:prstGeom prst="rect">
             <a:avLst/>
@@ -15749,7 +16363,7 @@
       </p:sp>
       <p:pic>
         <p:nvPicPr>
-          <p:cNvPr id="5" name="Image 0" descr="/home/claude/f4/img/v2/pop2_sexratio.png">    </p:cNvPr>
+          <p:cNvPr id="6" name="Image 0" descr="/home/claude/f4/img/v2/pop2_sexratio.png">    </p:cNvPr>
           <p:cNvPicPr>
             <a:picLocks noChangeAspect="1"/>
           </p:cNvPicPr>
@@ -15773,7 +16387,7 @@
       </p:pic>
       <p:sp>
         <p:nvSpPr>
-          <p:cNvPr id="6" name="Text 3"/>
+          <p:cNvPr id="7" name="Text 4"/>
           <p:cNvSpPr/>
           <p:nvPr/>
         </p:nvSpPr>
@@ -16234,8 +16848,47 @@
         </p:nvSpPr>
         <p:spPr>
           <a:xfrm>
-            <a:off x="4069080" y="1783080"/>
-            <a:ext cx="7802575" cy="4663440"/>
+            <a:off x="4069080" y="1737360"/>
+            <a:ext cx="7802575" cy="457200"/>
+          </a:xfrm>
+          <a:prstGeom prst="rect">
+            <a:avLst/>
+          </a:prstGeom>
+          <a:noFill/>
+          <a:ln/>
+        </p:spPr>
+        <p:txBody>
+          <a:bodyPr wrap="square" lIns="0" tIns="0" rIns="0" bIns="0" rtlCol="0" anchor="ctr"/>
+          <a:lstStyle/>
+          <a:p>
+            <a:pPr algn="l" indent="0" marL="0">
+              <a:buNone/>
+            </a:pPr>
+            <a:r>
+              <a:rPr lang="en-US" sz="3200" b="1" dirty="0">
+                <a:solidFill>
+                  <a:srgbClr val="990011"/>
+                </a:solidFill>
+                <a:latin typeface="Times New Roman" pitchFamily="34" charset="0"/>
+                <a:ea typeface="Times New Roman" pitchFamily="34" charset="-122"/>
+                <a:cs typeface="Times New Roman" pitchFamily="34" charset="-120"/>
+              </a:rPr>
+              <a:t>B) Factors of the Sex Ratio</a:t>
+            </a:r>
+            <a:endParaRPr lang="en-US" sz="3200" dirty="0"/>
+          </a:p>
+        </p:txBody>
+      </p:sp>
+      <p:sp>
+        <p:nvSpPr>
+          <p:cNvPr id="6" name="Text 3"/>
+          <p:cNvSpPr/>
+          <p:nvPr/>
+        </p:nvSpPr>
+        <p:spPr>
+          <a:xfrm>
+            <a:off x="4069080" y="2240280"/>
+            <a:ext cx="7802575" cy="4206240"/>
           </a:xfrm>
           <a:prstGeom prst="rect">
             <a:avLst/>
@@ -16254,7 +16907,7 @@
               <a:buNone/>
             </a:pPr>
             <a:r>
-              <a:rPr lang="en-US" sz="4000" b="1" dirty="0">
+              <a:rPr lang="en-US" sz="4000" i="1" dirty="0">
                 <a:solidFill>
                   <a:srgbClr val="111111"/>
                 </a:solidFill>
@@ -16262,8 +16915,11 @@
                 <a:ea typeface="Times New Roman" pitchFamily="34" charset="-122"/>
                 <a:cs typeface="Times New Roman" pitchFamily="34" charset="-120"/>
               </a:rPr>
-              <a:t>Factors of the sex ratio: </a:t>
-            </a:r>
+              <a:t>The sex ratio varies because of the following factors:</a:t>
+            </a:r>
+            <a:endParaRPr lang="en-US" sz="4000" dirty="0"/>
+          </a:p>
+          <a:p>
             <a:pPr algn="l" indent="0" marL="0">
               <a:spcAft>
                 <a:spcPts val="800"/>
@@ -16271,7 +16927,7 @@
               <a:buNone/>
             </a:pPr>
             <a:r>
-              <a:rPr lang="en-US" sz="4000" dirty="0">
+              <a:rPr lang="en-US" sz="4000" b="1" dirty="0">
                 <a:solidFill>
                   <a:srgbClr val="111111"/>
                 </a:solidFill>
@@ -16279,7 +16935,24 @@
                 <a:ea typeface="Times New Roman" pitchFamily="34" charset="-122"/>
                 <a:cs typeface="Times New Roman" pitchFamily="34" charset="-120"/>
               </a:rPr>
-              <a:t>About 105 boys are born for every 100 girls, but women live longer, so old people are mostly women. Men migrate more for work and are killed more in wars, so towns and mining areas have more men.</a:t>
+              <a:t>More boys at birth: </a:t>
+            </a:r>
+            <a:pPr algn="l" indent="0" marL="0">
+              <a:spcAft>
+                <a:spcPts val="800"/>
+              </a:spcAft>
+              <a:buNone/>
+            </a:pPr>
+            <a:r>
+              <a:rPr lang="en-US" sz="4000" dirty="0">
+                <a:solidFill>
+                  <a:srgbClr val="111111"/>
+                </a:solidFill>
+                <a:latin typeface="Times New Roman" pitchFamily="34" charset="0"/>
+                <a:ea typeface="Times New Roman" pitchFamily="34" charset="-122"/>
+                <a:cs typeface="Times New Roman" pitchFamily="34" charset="-120"/>
+              </a:rPr>
+              <a:t>About 105 boys are born for every 100 girls. The sex ratio of young children is therefore slightly above 100.</a:t>
             </a:r>
             <a:endParaRPr lang="en-US" sz="4000" dirty="0"/>
           </a:p>
@@ -16397,170 +17070,9 @@
           </a:p>
         </p:txBody>
       </p:sp>
-      <p:sp>
-        <p:nvSpPr>
-          <p:cNvPr id="3" name="Text 1"/>
-          <p:cNvSpPr/>
-          <p:nvPr/>
-        </p:nvSpPr>
-        <p:spPr>
-          <a:xfrm>
-            <a:off x="365760" y="1005840"/>
-            <a:ext cx="11460175" cy="731520"/>
-          </a:xfrm>
-          <a:prstGeom prst="rect">
-            <a:avLst/>
-          </a:prstGeom>
-          <a:noFill/>
-          <a:ln/>
-        </p:spPr>
-        <p:txBody>
-          <a:bodyPr wrap="square" lIns="0" tIns="0" rIns="0" bIns="0" rtlCol="0" anchor="ctr">
-            <a:normAutofit/>
-          </a:bodyPr>
-          <a:lstStyle/>
-          <a:p>
-            <a:pPr algn="ctr" indent="0" marL="0">
-              <a:buNone/>
-            </a:pPr>
-            <a:r>
-              <a:rPr lang="en-US" sz="3600" b="1" dirty="0">
-                <a:solidFill>
-                  <a:srgbClr val="990011"/>
-                </a:solidFill>
-                <a:latin typeface="Times New Roman" pitchFamily="34" charset="0"/>
-                <a:ea typeface="Times New Roman" pitchFamily="34" charset="-122"/>
-                <a:cs typeface="Times New Roman" pitchFamily="34" charset="-120"/>
-              </a:rPr>
-              <a:t>2. Global Patterns</a:t>
-            </a:r>
-            <a:endParaRPr lang="en-US" sz="3600" dirty="0"/>
-          </a:p>
-        </p:txBody>
-      </p:sp>
-      <p:sp>
-        <p:nvSpPr>
-          <p:cNvPr id="4" name="Text 2"/>
-          <p:cNvSpPr/>
-          <p:nvPr/>
-        </p:nvSpPr>
-        <p:spPr>
-          <a:xfrm>
-            <a:off x="365760" y="1737360"/>
-            <a:ext cx="6035040" cy="457200"/>
-          </a:xfrm>
-          <a:prstGeom prst="rect">
-            <a:avLst/>
-          </a:prstGeom>
-          <a:noFill/>
-          <a:ln/>
-        </p:spPr>
-        <p:txBody>
-          <a:bodyPr wrap="square" lIns="0" tIns="0" rIns="0" bIns="0" rtlCol="0" anchor="ctr">
-            <a:normAutofit/>
-          </a:bodyPr>
-          <a:lstStyle/>
-          <a:p>
-            <a:pPr algn="l" indent="0" marL="0">
-              <a:buNone/>
-            </a:pPr>
-            <a:r>
-              <a:rPr lang="en-US" sz="3000" b="1" dirty="0">
-                <a:solidFill>
-                  <a:srgbClr val="990011"/>
-                </a:solidFill>
-                <a:latin typeface="Times New Roman" pitchFamily="34" charset="0"/>
-                <a:ea typeface="Times New Roman" pitchFamily="34" charset="-122"/>
-                <a:cs typeface="Times New Roman" pitchFamily="34" charset="-120"/>
-              </a:rPr>
-              <a:t>A) The Youthful Population</a:t>
-            </a:r>
-            <a:endParaRPr lang="en-US" sz="3000" dirty="0"/>
-          </a:p>
-        </p:txBody>
-      </p:sp>
-      <p:sp>
-        <p:nvSpPr>
-          <p:cNvPr id="5" name="Text 3"/>
-          <p:cNvSpPr/>
-          <p:nvPr/>
-        </p:nvSpPr>
-        <p:spPr>
-          <a:xfrm>
-            <a:off x="365760" y="2240280"/>
-            <a:ext cx="6035040" cy="4160520"/>
-          </a:xfrm>
-          <a:prstGeom prst="rect">
-            <a:avLst/>
-          </a:prstGeom>
-          <a:noFill/>
-          <a:ln/>
-        </p:spPr>
-        <p:txBody>
-          <a:bodyPr wrap="square" lIns="0" tIns="0" rIns="0" bIns="0" rtlCol="0" anchor="t"/>
-          <a:lstStyle/>
-          <a:p>
-            <a:pPr algn="l" indent="0" marL="0">
-              <a:spcAft>
-                <a:spcPts val="800"/>
-              </a:spcAft>
-              <a:buNone/>
-            </a:pPr>
-            <a:r>
-              <a:rPr lang="en-US" sz="3000" i="1" dirty="0">
-                <a:solidFill>
-                  <a:srgbClr val="111111"/>
-                </a:solidFill>
-                <a:latin typeface="Times New Roman" pitchFamily="34" charset="0"/>
-                <a:ea typeface="Times New Roman" pitchFamily="34" charset="-122"/>
-                <a:cs typeface="Times New Roman" pitchFamily="34" charset="-120"/>
-              </a:rPr>
-              <a:t>The youthful population has the following characteristics:</a:t>
-            </a:r>
-            <a:endParaRPr lang="en-US" sz="3000" dirty="0"/>
-          </a:p>
-          <a:p>
-            <a:pPr algn="l" indent="0" marL="0">
-              <a:spcAft>
-                <a:spcPts val="800"/>
-              </a:spcAft>
-              <a:buNone/>
-            </a:pPr>
-            <a:r>
-              <a:rPr lang="en-US" sz="3000" b="1" dirty="0">
-                <a:solidFill>
-                  <a:srgbClr val="111111"/>
-                </a:solidFill>
-                <a:latin typeface="Times New Roman" pitchFamily="34" charset="0"/>
-                <a:ea typeface="Times New Roman" pitchFamily="34" charset="-122"/>
-                <a:cs typeface="Times New Roman" pitchFamily="34" charset="-120"/>
-              </a:rPr>
-              <a:t>Characteristics: </a:t>
-            </a:r>
-            <a:pPr algn="l" indent="0" marL="0">
-              <a:spcAft>
-                <a:spcPts val="800"/>
-              </a:spcAft>
-              <a:buNone/>
-            </a:pPr>
-            <a:r>
-              <a:rPr lang="en-US" sz="3000" dirty="0">
-                <a:solidFill>
-                  <a:srgbClr val="111111"/>
-                </a:solidFill>
-                <a:latin typeface="Times New Roman" pitchFamily="34" charset="0"/>
-                <a:ea typeface="Times New Roman" pitchFamily="34" charset="-122"/>
-                <a:cs typeface="Times New Roman" pitchFamily="34" charset="-120"/>
-              </a:rPr>
-              <a:t>More than 40 % of the people are under 15 and fewer than 5 % are 65 or over. It is found in developing countries, such as Niger, Nigeria and the DR Congo, where birth rates are high.</a:t>
-            </a:r>
-            <a:endParaRPr lang="en-US" sz="3000" dirty="0"/>
-          </a:p>
-        </p:txBody>
-      </p:sp>
       <p:pic>
         <p:nvPicPr>
-          <p:cNvPr id="6" name="Image 0" descr="/home/claude/f4/img/v2/youth_ageing_big.png">    </p:cNvPr>
+          <p:cNvPr id="3" name="Image 0" descr="/home/claude/f4/img/minesec_sheet.png">    </p:cNvPr>
           <p:cNvPicPr>
             <a:picLocks noChangeAspect="1"/>
           </p:cNvPicPr>
@@ -16574,8 +17086,8 @@
         </p:blipFill>
         <p:spPr>
           <a:xfrm>
-            <a:off x="6537960" y="2721454"/>
-            <a:ext cx="5470855" cy="2393499"/>
+            <a:off x="0" y="658368"/>
+            <a:ext cx="5120640" cy="5833872"/>
           </a:xfrm>
           <a:prstGeom prst="rect">
             <a:avLst/>
@@ -16584,14 +17096,14 @@
       </p:pic>
       <p:sp>
         <p:nvSpPr>
-          <p:cNvPr id="7" name="Text 4"/>
+          <p:cNvPr id="4" name="Text 1"/>
           <p:cNvSpPr/>
           <p:nvPr/>
         </p:nvSpPr>
         <p:spPr>
           <a:xfrm>
-            <a:off x="6537960" y="6089904"/>
-            <a:ext cx="5470855" cy="347472"/>
+            <a:off x="5349240" y="1005840"/>
+            <a:ext cx="6522415" cy="731520"/>
           </a:xfrm>
           <a:prstGeom prst="rect">
             <a:avLst/>
@@ -16600,24 +17112,124 @@
           <a:ln/>
         </p:spPr>
         <p:txBody>
-          <a:bodyPr wrap="square" lIns="0" tIns="0" rIns="0" bIns="0" rtlCol="0" anchor="ctr"/>
+          <a:bodyPr wrap="square" lIns="0" tIns="0" rIns="0" bIns="0" rtlCol="0" anchor="ctr">
+            <a:normAutofit/>
+          </a:bodyPr>
           <a:lstStyle/>
           <a:p>
             <a:pPr algn="ctr" indent="0" marL="0">
               <a:buNone/>
             </a:pPr>
             <a:r>
-              <a:rPr lang="en-US" sz="1600" i="1" dirty="0">
-                <a:solidFill>
-                  <a:srgbClr val="555555"/>
+              <a:rPr lang="en-US" sz="3600" b="1" dirty="0">
+                <a:solidFill>
+                  <a:srgbClr val="990011"/>
                 </a:solidFill>
                 <a:latin typeface="Times New Roman" pitchFamily="34" charset="0"/>
                 <a:ea typeface="Times New Roman" pitchFamily="34" charset="-122"/>
                 <a:cs typeface="Times New Roman" pitchFamily="34" charset="-120"/>
               </a:rPr>
-              <a:t>Illustration: youthful and ageing populations</a:t>
-            </a:r>
-            <a:endParaRPr lang="en-US" sz="1600" dirty="0"/>
+              <a:t>1. Meaning of Age and Sex Composition</a:t>
+            </a:r>
+            <a:endParaRPr lang="en-US" sz="3600" dirty="0"/>
+          </a:p>
+        </p:txBody>
+      </p:sp>
+      <p:sp>
+        <p:nvSpPr>
+          <p:cNvPr id="5" name="Text 2"/>
+          <p:cNvSpPr/>
+          <p:nvPr/>
+        </p:nvSpPr>
+        <p:spPr>
+          <a:xfrm>
+            <a:off x="5349240" y="1737360"/>
+            <a:ext cx="6522415" cy="457200"/>
+          </a:xfrm>
+          <a:prstGeom prst="rect">
+            <a:avLst/>
+          </a:prstGeom>
+          <a:noFill/>
+          <a:ln/>
+        </p:spPr>
+        <p:txBody>
+          <a:bodyPr wrap="square" lIns="0" tIns="0" rIns="0" bIns="0" rtlCol="0" anchor="ctr"/>
+          <a:lstStyle/>
+          <a:p>
+            <a:pPr algn="l" indent="0" marL="0">
+              <a:buNone/>
+            </a:pPr>
+            <a:r>
+              <a:rPr lang="en-US" sz="3200" b="1" dirty="0">
+                <a:solidFill>
+                  <a:srgbClr val="990011"/>
+                </a:solidFill>
+                <a:latin typeface="Times New Roman" pitchFamily="34" charset="0"/>
+                <a:ea typeface="Times New Roman" pitchFamily="34" charset="-122"/>
+                <a:cs typeface="Times New Roman" pitchFamily="34" charset="-120"/>
+              </a:rPr>
+              <a:t>B) Factors of the Sex Ratio</a:t>
+            </a:r>
+            <a:endParaRPr lang="en-US" sz="3200" dirty="0"/>
+          </a:p>
+        </p:txBody>
+      </p:sp>
+      <p:sp>
+        <p:nvSpPr>
+          <p:cNvPr id="6" name="Text 3"/>
+          <p:cNvSpPr/>
+          <p:nvPr/>
+        </p:nvSpPr>
+        <p:spPr>
+          <a:xfrm>
+            <a:off x="5349240" y="2240280"/>
+            <a:ext cx="6522415" cy="4206240"/>
+          </a:xfrm>
+          <a:prstGeom prst="rect">
+            <a:avLst/>
+          </a:prstGeom>
+          <a:noFill/>
+          <a:ln/>
+        </p:spPr>
+        <p:txBody>
+          <a:bodyPr wrap="square" lIns="0" tIns="0" rIns="0" bIns="0" rtlCol="0" anchor="t"/>
+          <a:lstStyle/>
+          <a:p>
+            <a:pPr algn="l" indent="0" marL="0">
+              <a:spcAft>
+                <a:spcPts val="800"/>
+              </a:spcAft>
+              <a:buNone/>
+            </a:pPr>
+            <a:r>
+              <a:rPr lang="en-US" sz="4000" b="1" dirty="0">
+                <a:solidFill>
+                  <a:srgbClr val="111111"/>
+                </a:solidFill>
+                <a:latin typeface="Times New Roman" pitchFamily="34" charset="0"/>
+                <a:ea typeface="Times New Roman" pitchFamily="34" charset="-122"/>
+                <a:cs typeface="Times New Roman" pitchFamily="34" charset="-120"/>
+              </a:rPr>
+              <a:t>More women in old age: </a:t>
+            </a:r>
+            <a:pPr algn="l" indent="0" marL="0">
+              <a:spcAft>
+                <a:spcPts val="800"/>
+              </a:spcAft>
+              <a:buNone/>
+            </a:pPr>
+            <a:r>
+              <a:rPr lang="en-US" sz="4000" dirty="0">
+                <a:solidFill>
+                  <a:srgbClr val="111111"/>
+                </a:solidFill>
+                <a:latin typeface="Times New Roman" pitchFamily="34" charset="0"/>
+                <a:ea typeface="Times New Roman" pitchFamily="34" charset="-122"/>
+                <a:cs typeface="Times New Roman" pitchFamily="34" charset="-120"/>
+              </a:rPr>
+              <a:t>Women live longer than men on average. Old age groups therefore contain more women than men.</a:t>
+            </a:r>
+            <a:endParaRPr lang="en-US" sz="4000" dirty="0"/>
           </a:p>
         </p:txBody>
       </p:sp>
@@ -16733,150 +17345,9 @@
           </a:p>
         </p:txBody>
       </p:sp>
-      <p:sp>
-        <p:nvSpPr>
-          <p:cNvPr id="3" name="Text 1"/>
-          <p:cNvSpPr/>
-          <p:nvPr/>
-        </p:nvSpPr>
-        <p:spPr>
-          <a:xfrm>
-            <a:off x="365760" y="1005840"/>
-            <a:ext cx="11460175" cy="731520"/>
-          </a:xfrm>
-          <a:prstGeom prst="rect">
-            <a:avLst/>
-          </a:prstGeom>
-          <a:noFill/>
-          <a:ln/>
-        </p:spPr>
-        <p:txBody>
-          <a:bodyPr wrap="square" lIns="0" tIns="0" rIns="0" bIns="0" rtlCol="0" anchor="ctr">
-            <a:normAutofit/>
-          </a:bodyPr>
-          <a:lstStyle/>
-          <a:p>
-            <a:pPr algn="ctr" indent="0" marL="0">
-              <a:buNone/>
-            </a:pPr>
-            <a:r>
-              <a:rPr lang="en-US" sz="3600" b="1" dirty="0">
-                <a:solidFill>
-                  <a:srgbClr val="990011"/>
-                </a:solidFill>
-                <a:latin typeface="Times New Roman" pitchFamily="34" charset="0"/>
-                <a:ea typeface="Times New Roman" pitchFamily="34" charset="-122"/>
-                <a:cs typeface="Times New Roman" pitchFamily="34" charset="-120"/>
-              </a:rPr>
-              <a:t>2. Global Patterns</a:t>
-            </a:r>
-            <a:endParaRPr lang="en-US" sz="3600" dirty="0"/>
-          </a:p>
-        </p:txBody>
-      </p:sp>
-      <p:sp>
-        <p:nvSpPr>
-          <p:cNvPr id="4" name="Text 2"/>
-          <p:cNvSpPr/>
-          <p:nvPr/>
-        </p:nvSpPr>
-        <p:spPr>
-          <a:xfrm>
-            <a:off x="365760" y="1737360"/>
-            <a:ext cx="6035040" cy="457200"/>
-          </a:xfrm>
-          <a:prstGeom prst="rect">
-            <a:avLst/>
-          </a:prstGeom>
-          <a:noFill/>
-          <a:ln/>
-        </p:spPr>
-        <p:txBody>
-          <a:bodyPr wrap="square" lIns="0" tIns="0" rIns="0" bIns="0" rtlCol="0" anchor="ctr">
-            <a:normAutofit/>
-          </a:bodyPr>
-          <a:lstStyle/>
-          <a:p>
-            <a:pPr algn="l" indent="0" marL="0">
-              <a:buNone/>
-            </a:pPr>
-            <a:r>
-              <a:rPr lang="en-US" sz="3000" b="1" dirty="0">
-                <a:solidFill>
-                  <a:srgbClr val="990011"/>
-                </a:solidFill>
-                <a:latin typeface="Times New Roman" pitchFamily="34" charset="0"/>
-                <a:ea typeface="Times New Roman" pitchFamily="34" charset="-122"/>
-                <a:cs typeface="Times New Roman" pitchFamily="34" charset="-120"/>
-              </a:rPr>
-              <a:t>A) The Youthful Population</a:t>
-            </a:r>
-            <a:endParaRPr lang="en-US" sz="3000" dirty="0"/>
-          </a:p>
-        </p:txBody>
-      </p:sp>
-      <p:sp>
-        <p:nvSpPr>
-          <p:cNvPr id="5" name="Text 3"/>
-          <p:cNvSpPr/>
-          <p:nvPr/>
-        </p:nvSpPr>
-        <p:spPr>
-          <a:xfrm>
-            <a:off x="365760" y="2240280"/>
-            <a:ext cx="6035040" cy="4160520"/>
-          </a:xfrm>
-          <a:prstGeom prst="rect">
-            <a:avLst/>
-          </a:prstGeom>
-          <a:noFill/>
-          <a:ln/>
-        </p:spPr>
-        <p:txBody>
-          <a:bodyPr wrap="square" lIns="0" tIns="0" rIns="0" bIns="0" rtlCol="0" anchor="t"/>
-          <a:lstStyle/>
-          <a:p>
-            <a:pPr algn="l" indent="0" marL="0">
-              <a:spcAft>
-                <a:spcPts val="800"/>
-              </a:spcAft>
-              <a:buNone/>
-            </a:pPr>
-            <a:r>
-              <a:rPr lang="en-US" sz="3600" b="1" dirty="0">
-                <a:solidFill>
-                  <a:srgbClr val="111111"/>
-                </a:solidFill>
-                <a:latin typeface="Times New Roman" pitchFamily="34" charset="0"/>
-                <a:ea typeface="Times New Roman" pitchFamily="34" charset="-122"/>
-                <a:cs typeface="Times New Roman" pitchFamily="34" charset="-120"/>
-              </a:rPr>
-              <a:t>Example of Cameroon: </a:t>
-            </a:r>
-            <a:pPr algn="l" indent="0" marL="0">
-              <a:spcAft>
-                <a:spcPts val="800"/>
-              </a:spcAft>
-              <a:buNone/>
-            </a:pPr>
-            <a:r>
-              <a:rPr lang="en-US" sz="3600" dirty="0">
-                <a:solidFill>
-                  <a:srgbClr val="111111"/>
-                </a:solidFill>
-                <a:latin typeface="Times New Roman" pitchFamily="34" charset="0"/>
-                <a:ea typeface="Times New Roman" pitchFamily="34" charset="-122"/>
-                <a:cs typeface="Times New Roman" pitchFamily="34" charset="-120"/>
-              </a:rPr>
-              <a:t>About 42 % of Cameroonians are under 15 and only about 3 % are 65 or over. Cameroon therefore has a youthful population.</a:t>
-            </a:r>
-            <a:endParaRPr lang="en-US" sz="3600" dirty="0"/>
-          </a:p>
-        </p:txBody>
-      </p:sp>
       <p:pic>
         <p:nvPicPr>
-          <p:cNvPr id="6" name="Image 0" descr="/home/claude/f4/img/v2/pyramid_cameroon_big.png">    </p:cNvPr>
+          <p:cNvPr id="3" name="Image 0" descr="/home/claude/f4/img/minesec_sheet.png">    </p:cNvPr>
           <p:cNvPicPr>
             <a:picLocks noChangeAspect="1"/>
           </p:cNvPicPr>
@@ -16890,8 +17361,8 @@
         </p:blipFill>
         <p:spPr>
           <a:xfrm>
-            <a:off x="6537960" y="2678713"/>
-            <a:ext cx="5470855" cy="2478981"/>
+            <a:off x="0" y="658368"/>
+            <a:ext cx="3840480" cy="5833872"/>
           </a:xfrm>
           <a:prstGeom prst="rect">
             <a:avLst/>
@@ -16900,14 +17371,14 @@
       </p:pic>
       <p:sp>
         <p:nvSpPr>
-          <p:cNvPr id="7" name="Text 4"/>
+          <p:cNvPr id="4" name="Text 1"/>
           <p:cNvSpPr/>
           <p:nvPr/>
         </p:nvSpPr>
         <p:spPr>
           <a:xfrm>
-            <a:off x="6537960" y="6089904"/>
-            <a:ext cx="5470855" cy="347472"/>
+            <a:off x="4069080" y="1005840"/>
+            <a:ext cx="7802575" cy="731520"/>
           </a:xfrm>
           <a:prstGeom prst="rect">
             <a:avLst/>
@@ -16916,24 +17387,124 @@
           <a:ln/>
         </p:spPr>
         <p:txBody>
-          <a:bodyPr wrap="square" lIns="0" tIns="0" rIns="0" bIns="0" rtlCol="0" anchor="ctr"/>
+          <a:bodyPr wrap="square" lIns="0" tIns="0" rIns="0" bIns="0" rtlCol="0" anchor="ctr">
+            <a:normAutofit/>
+          </a:bodyPr>
           <a:lstStyle/>
           <a:p>
             <a:pPr algn="ctr" indent="0" marL="0">
               <a:buNone/>
             </a:pPr>
             <a:r>
-              <a:rPr lang="en-US" sz="1600" i="1" dirty="0">
-                <a:solidFill>
-                  <a:srgbClr val="555555"/>
+              <a:rPr lang="en-US" sz="3600" b="1" dirty="0">
+                <a:solidFill>
+                  <a:srgbClr val="990011"/>
                 </a:solidFill>
                 <a:latin typeface="Times New Roman" pitchFamily="34" charset="0"/>
                 <a:ea typeface="Times New Roman" pitchFamily="34" charset="-122"/>
                 <a:cs typeface="Times New Roman" pitchFamily="34" charset="-120"/>
               </a:rPr>
-              <a:t>Illustration: the pyramid of Cameroon</a:t>
-            </a:r>
-            <a:endParaRPr lang="en-US" sz="1600" dirty="0"/>
+              <a:t>1. Meaning of Age and Sex Composition</a:t>
+            </a:r>
+            <a:endParaRPr lang="en-US" sz="3600" dirty="0"/>
+          </a:p>
+        </p:txBody>
+      </p:sp>
+      <p:sp>
+        <p:nvSpPr>
+          <p:cNvPr id="5" name="Text 2"/>
+          <p:cNvSpPr/>
+          <p:nvPr/>
+        </p:nvSpPr>
+        <p:spPr>
+          <a:xfrm>
+            <a:off x="4069080" y="1737360"/>
+            <a:ext cx="7802575" cy="457200"/>
+          </a:xfrm>
+          <a:prstGeom prst="rect">
+            <a:avLst/>
+          </a:prstGeom>
+          <a:noFill/>
+          <a:ln/>
+        </p:spPr>
+        <p:txBody>
+          <a:bodyPr wrap="square" lIns="0" tIns="0" rIns="0" bIns="0" rtlCol="0" anchor="ctr"/>
+          <a:lstStyle/>
+          <a:p>
+            <a:pPr algn="l" indent="0" marL="0">
+              <a:buNone/>
+            </a:pPr>
+            <a:r>
+              <a:rPr lang="en-US" sz="3200" b="1" dirty="0">
+                <a:solidFill>
+                  <a:srgbClr val="990011"/>
+                </a:solidFill>
+                <a:latin typeface="Times New Roman" pitchFamily="34" charset="0"/>
+                <a:ea typeface="Times New Roman" pitchFamily="34" charset="-122"/>
+                <a:cs typeface="Times New Roman" pitchFamily="34" charset="-120"/>
+              </a:rPr>
+              <a:t>B) Factors of the Sex Ratio</a:t>
+            </a:r>
+            <a:endParaRPr lang="en-US" sz="3200" dirty="0"/>
+          </a:p>
+        </p:txBody>
+      </p:sp>
+      <p:sp>
+        <p:nvSpPr>
+          <p:cNvPr id="6" name="Text 3"/>
+          <p:cNvSpPr/>
+          <p:nvPr/>
+        </p:nvSpPr>
+        <p:spPr>
+          <a:xfrm>
+            <a:off x="4069080" y="2240280"/>
+            <a:ext cx="7802575" cy="4206240"/>
+          </a:xfrm>
+          <a:prstGeom prst="rect">
+            <a:avLst/>
+          </a:prstGeom>
+          <a:noFill/>
+          <a:ln/>
+        </p:spPr>
+        <p:txBody>
+          <a:bodyPr wrap="square" lIns="0" tIns="0" rIns="0" bIns="0" rtlCol="0" anchor="t"/>
+          <a:lstStyle/>
+          <a:p>
+            <a:pPr algn="l" indent="0" marL="0">
+              <a:spcAft>
+                <a:spcPts val="800"/>
+              </a:spcAft>
+              <a:buNone/>
+            </a:pPr>
+            <a:r>
+              <a:rPr lang="en-US" sz="4000" b="1" dirty="0">
+                <a:solidFill>
+                  <a:srgbClr val="111111"/>
+                </a:solidFill>
+                <a:latin typeface="Times New Roman" pitchFamily="34" charset="0"/>
+                <a:ea typeface="Times New Roman" pitchFamily="34" charset="-122"/>
+                <a:cs typeface="Times New Roman" pitchFamily="34" charset="-120"/>
+              </a:rPr>
+              <a:t>More men in towns and mining areas: </a:t>
+            </a:r>
+            <a:pPr algn="l" indent="0" marL="0">
+              <a:spcAft>
+                <a:spcPts val="800"/>
+              </a:spcAft>
+              <a:buNone/>
+            </a:pPr>
+            <a:r>
+              <a:rPr lang="en-US" sz="4000" dirty="0">
+                <a:solidFill>
+                  <a:srgbClr val="111111"/>
+                </a:solidFill>
+                <a:latin typeface="Times New Roman" pitchFamily="34" charset="0"/>
+                <a:ea typeface="Times New Roman" pitchFamily="34" charset="-122"/>
+                <a:cs typeface="Times New Roman" pitchFamily="34" charset="-120"/>
+              </a:rPr>
+              <a:t>Men migrate more for work, so towns and mining areas have more men than women. Wars kill more men, which lowers the sex ratio of the adult population.</a:t>
+            </a:r>
+            <a:endParaRPr lang="en-US" sz="4000" dirty="0"/>
           </a:p>
         </p:txBody>
       </p:sp>
@@ -17049,9 +17620,170 @@
           </a:p>
         </p:txBody>
       </p:sp>
+      <p:sp>
+        <p:nvSpPr>
+          <p:cNvPr id="3" name="Text 1"/>
+          <p:cNvSpPr/>
+          <p:nvPr/>
+        </p:nvSpPr>
+        <p:spPr>
+          <a:xfrm>
+            <a:off x="365760" y="1005840"/>
+            <a:ext cx="11460175" cy="731520"/>
+          </a:xfrm>
+          <a:prstGeom prst="rect">
+            <a:avLst/>
+          </a:prstGeom>
+          <a:noFill/>
+          <a:ln/>
+        </p:spPr>
+        <p:txBody>
+          <a:bodyPr wrap="square" lIns="0" tIns="0" rIns="0" bIns="0" rtlCol="0" anchor="ctr">
+            <a:normAutofit/>
+          </a:bodyPr>
+          <a:lstStyle/>
+          <a:p>
+            <a:pPr algn="ctr" indent="0" marL="0">
+              <a:buNone/>
+            </a:pPr>
+            <a:r>
+              <a:rPr lang="en-US" sz="3600" b="1" dirty="0">
+                <a:solidFill>
+                  <a:srgbClr val="990011"/>
+                </a:solidFill>
+                <a:latin typeface="Times New Roman" pitchFamily="34" charset="0"/>
+                <a:ea typeface="Times New Roman" pitchFamily="34" charset="-122"/>
+                <a:cs typeface="Times New Roman" pitchFamily="34" charset="-120"/>
+              </a:rPr>
+              <a:t>2. Global Patterns</a:t>
+            </a:r>
+            <a:endParaRPr lang="en-US" sz="3600" dirty="0"/>
+          </a:p>
+        </p:txBody>
+      </p:sp>
+      <p:sp>
+        <p:nvSpPr>
+          <p:cNvPr id="4" name="Text 2"/>
+          <p:cNvSpPr/>
+          <p:nvPr/>
+        </p:nvSpPr>
+        <p:spPr>
+          <a:xfrm>
+            <a:off x="365760" y="1737360"/>
+            <a:ext cx="6035040" cy="457200"/>
+          </a:xfrm>
+          <a:prstGeom prst="rect">
+            <a:avLst/>
+          </a:prstGeom>
+          <a:noFill/>
+          <a:ln/>
+        </p:spPr>
+        <p:txBody>
+          <a:bodyPr wrap="square" lIns="0" tIns="0" rIns="0" bIns="0" rtlCol="0" anchor="ctr">
+            <a:normAutofit/>
+          </a:bodyPr>
+          <a:lstStyle/>
+          <a:p>
+            <a:pPr algn="l" indent="0" marL="0">
+              <a:buNone/>
+            </a:pPr>
+            <a:r>
+              <a:rPr lang="en-US" sz="3000" b="1" dirty="0">
+                <a:solidFill>
+                  <a:srgbClr val="990011"/>
+                </a:solidFill>
+                <a:latin typeface="Times New Roman" pitchFamily="34" charset="0"/>
+                <a:ea typeface="Times New Roman" pitchFamily="34" charset="-122"/>
+                <a:cs typeface="Times New Roman" pitchFamily="34" charset="-120"/>
+              </a:rPr>
+              <a:t>A) The Youthful Population</a:t>
+            </a:r>
+            <a:endParaRPr lang="en-US" sz="3000" dirty="0"/>
+          </a:p>
+        </p:txBody>
+      </p:sp>
+      <p:sp>
+        <p:nvSpPr>
+          <p:cNvPr id="5" name="Text 3"/>
+          <p:cNvSpPr/>
+          <p:nvPr/>
+        </p:nvSpPr>
+        <p:spPr>
+          <a:xfrm>
+            <a:off x="365760" y="2240280"/>
+            <a:ext cx="6035040" cy="4160520"/>
+          </a:xfrm>
+          <a:prstGeom prst="rect">
+            <a:avLst/>
+          </a:prstGeom>
+          <a:noFill/>
+          <a:ln/>
+        </p:spPr>
+        <p:txBody>
+          <a:bodyPr wrap="square" lIns="0" tIns="0" rIns="0" bIns="0" rtlCol="0" anchor="t"/>
+          <a:lstStyle/>
+          <a:p>
+            <a:pPr algn="l" indent="0" marL="0">
+              <a:spcAft>
+                <a:spcPts val="800"/>
+              </a:spcAft>
+              <a:buNone/>
+            </a:pPr>
+            <a:r>
+              <a:rPr lang="en-US" sz="3600" i="1" dirty="0">
+                <a:solidFill>
+                  <a:srgbClr val="111111"/>
+                </a:solidFill>
+                <a:latin typeface="Times New Roman" pitchFamily="34" charset="0"/>
+                <a:ea typeface="Times New Roman" pitchFamily="34" charset="-122"/>
+                <a:cs typeface="Times New Roman" pitchFamily="34" charset="-120"/>
+              </a:rPr>
+              <a:t>The youthful population has the following characteristics:</a:t>
+            </a:r>
+            <a:endParaRPr lang="en-US" sz="3600" dirty="0"/>
+          </a:p>
+          <a:p>
+            <a:pPr algn="l" indent="0" marL="0">
+              <a:spcAft>
+                <a:spcPts val="800"/>
+              </a:spcAft>
+              <a:buNone/>
+            </a:pPr>
+            <a:r>
+              <a:rPr lang="en-US" sz="3600" b="1" dirty="0">
+                <a:solidFill>
+                  <a:srgbClr val="111111"/>
+                </a:solidFill>
+                <a:latin typeface="Times New Roman" pitchFamily="34" charset="0"/>
+                <a:ea typeface="Times New Roman" pitchFamily="34" charset="-122"/>
+                <a:cs typeface="Times New Roman" pitchFamily="34" charset="-120"/>
+              </a:rPr>
+              <a:t>Many young people: </a:t>
+            </a:r>
+            <a:pPr algn="l" indent="0" marL="0">
+              <a:spcAft>
+                <a:spcPts val="800"/>
+              </a:spcAft>
+              <a:buNone/>
+            </a:pPr>
+            <a:r>
+              <a:rPr lang="en-US" sz="3600" dirty="0">
+                <a:solidFill>
+                  <a:srgbClr val="111111"/>
+                </a:solidFill>
+                <a:latin typeface="Times New Roman" pitchFamily="34" charset="0"/>
+                <a:ea typeface="Times New Roman" pitchFamily="34" charset="-122"/>
+                <a:cs typeface="Times New Roman" pitchFamily="34" charset="-120"/>
+              </a:rPr>
+              <a:t>More than 40 % of the people are under 15 years old. This is because birth rates are high.</a:t>
+            </a:r>
+            <a:endParaRPr lang="en-US" sz="3600" dirty="0"/>
+          </a:p>
+        </p:txBody>
+      </p:sp>
       <p:pic>
         <p:nvPicPr>
-          <p:cNvPr id="3" name="Image 0" descr="/home/claude/f4/img/minesec_sheet.png">    </p:cNvPr>
+          <p:cNvPr id="6" name="Image 0" descr="/home/claude/f4/img/v2/youth_ageing_big.png">    </p:cNvPr>
           <p:cNvPicPr>
             <a:picLocks noChangeAspect="1"/>
           </p:cNvPicPr>
@@ -17065,8 +17797,8 @@
         </p:blipFill>
         <p:spPr>
           <a:xfrm>
-            <a:off x="0" y="658368"/>
-            <a:ext cx="2468880" cy="5833872"/>
+            <a:off x="6537960" y="2721454"/>
+            <a:ext cx="5470855" cy="2393499"/>
           </a:xfrm>
           <a:prstGeom prst="rect">
             <a:avLst/>
@@ -17075,14 +17807,14 @@
       </p:pic>
       <p:sp>
         <p:nvSpPr>
-          <p:cNvPr id="4" name="Text 1"/>
+          <p:cNvPr id="7" name="Text 4"/>
           <p:cNvSpPr/>
           <p:nvPr/>
         </p:nvSpPr>
         <p:spPr>
           <a:xfrm>
-            <a:off x="2697480" y="1005840"/>
-            <a:ext cx="9174175" cy="731520"/>
+            <a:off x="6537960" y="6089904"/>
+            <a:ext cx="5470855" cy="347472"/>
           </a:xfrm>
           <a:prstGeom prst="rect">
             <a:avLst/>
@@ -17091,144 +17823,24 @@
           <a:ln/>
         </p:spPr>
         <p:txBody>
-          <a:bodyPr wrap="square" lIns="0" tIns="0" rIns="0" bIns="0" rtlCol="0" anchor="ctr">
-            <a:normAutofit/>
-          </a:bodyPr>
+          <a:bodyPr wrap="square" lIns="0" tIns="0" rIns="0" bIns="0" rtlCol="0" anchor="ctr"/>
           <a:lstStyle/>
           <a:p>
             <a:pPr algn="ctr" indent="0" marL="0">
               <a:buNone/>
             </a:pPr>
             <a:r>
-              <a:rPr lang="en-US" sz="3600" b="1" dirty="0">
-                <a:solidFill>
-                  <a:srgbClr val="990011"/>
+              <a:rPr lang="en-US" sz="1600" i="1" dirty="0">
+                <a:solidFill>
+                  <a:srgbClr val="555555"/>
                 </a:solidFill>
                 <a:latin typeface="Times New Roman" pitchFamily="34" charset="0"/>
                 <a:ea typeface="Times New Roman" pitchFamily="34" charset="-122"/>
                 <a:cs typeface="Times New Roman" pitchFamily="34" charset="-120"/>
               </a:rPr>
-              <a:t>2. Global Patterns</a:t>
-            </a:r>
-            <a:endParaRPr lang="en-US" sz="3600" dirty="0"/>
-          </a:p>
-        </p:txBody>
-      </p:sp>
-      <p:sp>
-        <p:nvSpPr>
-          <p:cNvPr id="5" name="Text 2"/>
-          <p:cNvSpPr/>
-          <p:nvPr/>
-        </p:nvSpPr>
-        <p:spPr>
-          <a:xfrm>
-            <a:off x="2697480" y="1737360"/>
-            <a:ext cx="9174175" cy="457200"/>
-          </a:xfrm>
-          <a:prstGeom prst="rect">
-            <a:avLst/>
-          </a:prstGeom>
-          <a:noFill/>
-          <a:ln/>
-        </p:spPr>
-        <p:txBody>
-          <a:bodyPr wrap="square" lIns="0" tIns="0" rIns="0" bIns="0" rtlCol="0" anchor="ctr"/>
-          <a:lstStyle/>
-          <a:p>
-            <a:pPr algn="l" indent="0" marL="0">
-              <a:buNone/>
-            </a:pPr>
-            <a:r>
-              <a:rPr lang="en-US" sz="3200" b="1" dirty="0">
-                <a:solidFill>
-                  <a:srgbClr val="990011"/>
-                </a:solidFill>
-                <a:latin typeface="Times New Roman" pitchFamily="34" charset="0"/>
-                <a:ea typeface="Times New Roman" pitchFamily="34" charset="-122"/>
-                <a:cs typeface="Times New Roman" pitchFamily="34" charset="-120"/>
-              </a:rPr>
-              <a:t>B) Consequences of a Youthful Population</a:t>
-            </a:r>
-            <a:endParaRPr lang="en-US" sz="3200" dirty="0"/>
-          </a:p>
-        </p:txBody>
-      </p:sp>
-      <p:sp>
-        <p:nvSpPr>
-          <p:cNvPr id="6" name="Text 3"/>
-          <p:cNvSpPr/>
-          <p:nvPr/>
-        </p:nvSpPr>
-        <p:spPr>
-          <a:xfrm>
-            <a:off x="2697480" y="2240280"/>
-            <a:ext cx="9174175" cy="4206240"/>
-          </a:xfrm>
-          <a:prstGeom prst="rect">
-            <a:avLst/>
-          </a:prstGeom>
-          <a:noFill/>
-          <a:ln/>
-        </p:spPr>
-        <p:txBody>
-          <a:bodyPr wrap="square" lIns="0" tIns="0" rIns="0" bIns="0" rtlCol="0" anchor="t"/>
-          <a:lstStyle/>
-          <a:p>
-            <a:pPr algn="l" indent="0" marL="0">
-              <a:spcAft>
-                <a:spcPts val="800"/>
-              </a:spcAft>
-              <a:buNone/>
-            </a:pPr>
-            <a:r>
-              <a:rPr lang="en-US" sz="4000" i="1" dirty="0">
-                <a:solidFill>
-                  <a:srgbClr val="111111"/>
-                </a:solidFill>
-                <a:latin typeface="Times New Roman" pitchFamily="34" charset="0"/>
-                <a:ea typeface="Times New Roman" pitchFamily="34" charset="-122"/>
-                <a:cs typeface="Times New Roman" pitchFamily="34" charset="-120"/>
-              </a:rPr>
-              <a:t>A youthful population has the following socio-economic consequences:</a:t>
-            </a:r>
-            <a:endParaRPr lang="en-US" sz="4000" dirty="0"/>
-          </a:p>
-          <a:p>
-            <a:pPr algn="l" indent="0" marL="0">
-              <a:spcAft>
-                <a:spcPts val="800"/>
-              </a:spcAft>
-              <a:buNone/>
-            </a:pPr>
-            <a:r>
-              <a:rPr lang="en-US" sz="4000" b="1" dirty="0">
-                <a:solidFill>
-                  <a:srgbClr val="111111"/>
-                </a:solidFill>
-                <a:latin typeface="Times New Roman" pitchFamily="34" charset="0"/>
-                <a:ea typeface="Times New Roman" pitchFamily="34" charset="-122"/>
-                <a:cs typeface="Times New Roman" pitchFamily="34" charset="-120"/>
-              </a:rPr>
-              <a:t>High dependency: </a:t>
-            </a:r>
-            <a:pPr algn="l" indent="0" marL="0">
-              <a:spcAft>
-                <a:spcPts val="800"/>
-              </a:spcAft>
-              <a:buNone/>
-            </a:pPr>
-            <a:r>
-              <a:rPr lang="en-US" sz="4000" dirty="0">
-                <a:solidFill>
-                  <a:srgbClr val="111111"/>
-                </a:solidFill>
-                <a:latin typeface="Times New Roman" pitchFamily="34" charset="0"/>
-                <a:ea typeface="Times New Roman" pitchFamily="34" charset="-122"/>
-                <a:cs typeface="Times New Roman" pitchFamily="34" charset="-120"/>
-              </a:rPr>
-              <a:t>Few workers must support many children. As a result, families and the state save and invest little.</a:t>
-            </a:r>
-            <a:endParaRPr lang="en-US" sz="4000" dirty="0"/>
+              <a:t>Illustration: youthful and ageing populations</a:t>
+            </a:r>
+            <a:endParaRPr lang="en-US" sz="1600" dirty="0"/>
           </a:p>
         </p:txBody>
       </p:sp>
@@ -17344,150 +17956,9 @@
           </a:p>
         </p:txBody>
       </p:sp>
-      <p:sp>
-        <p:nvSpPr>
-          <p:cNvPr id="3" name="Text 1"/>
-          <p:cNvSpPr/>
-          <p:nvPr/>
-        </p:nvSpPr>
-        <p:spPr>
-          <a:xfrm>
-            <a:off x="365760" y="1005840"/>
-            <a:ext cx="11460175" cy="731520"/>
-          </a:xfrm>
-          <a:prstGeom prst="rect">
-            <a:avLst/>
-          </a:prstGeom>
-          <a:noFill/>
-          <a:ln/>
-        </p:spPr>
-        <p:txBody>
-          <a:bodyPr wrap="square" lIns="0" tIns="0" rIns="0" bIns="0" rtlCol="0" anchor="ctr">
-            <a:normAutofit/>
-          </a:bodyPr>
-          <a:lstStyle/>
-          <a:p>
-            <a:pPr algn="ctr" indent="0" marL="0">
-              <a:buNone/>
-            </a:pPr>
-            <a:r>
-              <a:rPr lang="en-US" sz="3600" b="1" dirty="0">
-                <a:solidFill>
-                  <a:srgbClr val="990011"/>
-                </a:solidFill>
-                <a:latin typeface="Times New Roman" pitchFamily="34" charset="0"/>
-                <a:ea typeface="Times New Roman" pitchFamily="34" charset="-122"/>
-                <a:cs typeface="Times New Roman" pitchFamily="34" charset="-120"/>
-              </a:rPr>
-              <a:t>2. Global Patterns</a:t>
-            </a:r>
-            <a:endParaRPr lang="en-US" sz="3600" dirty="0"/>
-          </a:p>
-        </p:txBody>
-      </p:sp>
-      <p:sp>
-        <p:nvSpPr>
-          <p:cNvPr id="4" name="Text 2"/>
-          <p:cNvSpPr/>
-          <p:nvPr/>
-        </p:nvSpPr>
-        <p:spPr>
-          <a:xfrm>
-            <a:off x="365760" y="1737360"/>
-            <a:ext cx="6035040" cy="457200"/>
-          </a:xfrm>
-          <a:prstGeom prst="rect">
-            <a:avLst/>
-          </a:prstGeom>
-          <a:noFill/>
-          <a:ln/>
-        </p:spPr>
-        <p:txBody>
-          <a:bodyPr wrap="square" lIns="0" tIns="0" rIns="0" bIns="0" rtlCol="0" anchor="ctr">
-            <a:normAutofit/>
-          </a:bodyPr>
-          <a:lstStyle/>
-          <a:p>
-            <a:pPr algn="l" indent="0" marL="0">
-              <a:buNone/>
-            </a:pPr>
-            <a:r>
-              <a:rPr lang="en-US" sz="3000" b="1" dirty="0">
-                <a:solidFill>
-                  <a:srgbClr val="990011"/>
-                </a:solidFill>
-                <a:latin typeface="Times New Roman" pitchFamily="34" charset="0"/>
-                <a:ea typeface="Times New Roman" pitchFamily="34" charset="-122"/>
-                <a:cs typeface="Times New Roman" pitchFamily="34" charset="-120"/>
-              </a:rPr>
-              <a:t>B) Consequences of a Youthful Population</a:t>
-            </a:r>
-            <a:endParaRPr lang="en-US" sz="3000" dirty="0"/>
-          </a:p>
-        </p:txBody>
-      </p:sp>
-      <p:sp>
-        <p:nvSpPr>
-          <p:cNvPr id="5" name="Text 3"/>
-          <p:cNvSpPr/>
-          <p:nvPr/>
-        </p:nvSpPr>
-        <p:spPr>
-          <a:xfrm>
-            <a:off x="365760" y="2240280"/>
-            <a:ext cx="6035040" cy="4160520"/>
-          </a:xfrm>
-          <a:prstGeom prst="rect">
-            <a:avLst/>
-          </a:prstGeom>
-          <a:noFill/>
-          <a:ln/>
-        </p:spPr>
-        <p:txBody>
-          <a:bodyPr wrap="square" lIns="0" tIns="0" rIns="0" bIns="0" rtlCol="0" anchor="t"/>
-          <a:lstStyle/>
-          <a:p>
-            <a:pPr algn="l" indent="0" marL="0">
-              <a:spcAft>
-                <a:spcPts val="800"/>
-              </a:spcAft>
-              <a:buNone/>
-            </a:pPr>
-            <a:r>
-              <a:rPr lang="en-US" sz="3600" b="1" dirty="0">
-                <a:solidFill>
-                  <a:srgbClr val="111111"/>
-                </a:solidFill>
-                <a:latin typeface="Times New Roman" pitchFamily="34" charset="0"/>
-                <a:ea typeface="Times New Roman" pitchFamily="34" charset="-122"/>
-                <a:cs typeface="Times New Roman" pitchFamily="34" charset="-120"/>
-              </a:rPr>
-              <a:t>Pressure on services: </a:t>
-            </a:r>
-            <a:pPr algn="l" indent="0" marL="0">
-              <a:spcAft>
-                <a:spcPts val="800"/>
-              </a:spcAft>
-              <a:buNone/>
-            </a:pPr>
-            <a:r>
-              <a:rPr lang="en-US" sz="3600" dirty="0">
-                <a:solidFill>
-                  <a:srgbClr val="111111"/>
-                </a:solidFill>
-                <a:latin typeface="Times New Roman" pitchFamily="34" charset="0"/>
-                <a:ea typeface="Times New Roman" pitchFamily="34" charset="-122"/>
-                <a:cs typeface="Times New Roman" pitchFamily="34" charset="-120"/>
-              </a:rPr>
-              <a:t>There is a huge demand for schools, maternity wards and basic health care. Classrooms are overcrowded, as in many schools of Garoua.</a:t>
-            </a:r>
-            <a:endParaRPr lang="en-US" sz="3600" dirty="0"/>
-          </a:p>
-        </p:txBody>
-      </p:sp>
       <p:pic>
         <p:nvPicPr>
-          <p:cNvPr id="6" name="Image 0" descr="/home/claude/f4/img/v2/f2t_classroom.jpg">    </p:cNvPr>
+          <p:cNvPr id="3" name="Image 0" descr="/home/claude/f4/img/minesec_sheet.png">    </p:cNvPr>
           <p:cNvPicPr>
             <a:picLocks noChangeAspect="1"/>
           </p:cNvPicPr>
@@ -17501,8 +17972,8 @@
         </p:blipFill>
         <p:spPr>
           <a:xfrm>
-            <a:off x="6537960" y="2400897"/>
-            <a:ext cx="5470855" cy="3034615"/>
+            <a:off x="0" y="658368"/>
+            <a:ext cx="5120640" cy="5833872"/>
           </a:xfrm>
           <a:prstGeom prst="rect">
             <a:avLst/>
@@ -17511,14 +17982,14 @@
       </p:pic>
       <p:sp>
         <p:nvSpPr>
-          <p:cNvPr id="7" name="Text 4"/>
+          <p:cNvPr id="4" name="Text 1"/>
           <p:cNvSpPr/>
           <p:nvPr/>
         </p:nvSpPr>
         <p:spPr>
           <a:xfrm>
-            <a:off x="6537960" y="6089904"/>
-            <a:ext cx="5470855" cy="347472"/>
+            <a:off x="5349240" y="1005840"/>
+            <a:ext cx="6522415" cy="731520"/>
           </a:xfrm>
           <a:prstGeom prst="rect">
             <a:avLst/>
@@ -17527,24 +17998,124 @@
           <a:ln/>
         </p:spPr>
         <p:txBody>
-          <a:bodyPr wrap="square" lIns="0" tIns="0" rIns="0" bIns="0" rtlCol="0" anchor="ctr"/>
+          <a:bodyPr wrap="square" lIns="0" tIns="0" rIns="0" bIns="0" rtlCol="0" anchor="ctr">
+            <a:normAutofit/>
+          </a:bodyPr>
           <a:lstStyle/>
           <a:p>
             <a:pPr algn="ctr" indent="0" marL="0">
               <a:buNone/>
             </a:pPr>
             <a:r>
-              <a:rPr lang="en-US" sz="1600" i="1" dirty="0">
-                <a:solidFill>
-                  <a:srgbClr val="555555"/>
+              <a:rPr lang="en-US" sz="3600" b="1" dirty="0">
+                <a:solidFill>
+                  <a:srgbClr val="990011"/>
                 </a:solidFill>
                 <a:latin typeface="Times New Roman" pitchFamily="34" charset="0"/>
                 <a:ea typeface="Times New Roman" pitchFamily="34" charset="-122"/>
                 <a:cs typeface="Times New Roman" pitchFamily="34" charset="-120"/>
               </a:rPr>
-              <a:t>Illustration: a classroom</a:t>
-            </a:r>
-            <a:endParaRPr lang="en-US" sz="1600" dirty="0"/>
+              <a:t>2. Global Patterns</a:t>
+            </a:r>
+            <a:endParaRPr lang="en-US" sz="3600" dirty="0"/>
+          </a:p>
+        </p:txBody>
+      </p:sp>
+      <p:sp>
+        <p:nvSpPr>
+          <p:cNvPr id="5" name="Text 2"/>
+          <p:cNvSpPr/>
+          <p:nvPr/>
+        </p:nvSpPr>
+        <p:spPr>
+          <a:xfrm>
+            <a:off x="5349240" y="1737360"/>
+            <a:ext cx="6522415" cy="457200"/>
+          </a:xfrm>
+          <a:prstGeom prst="rect">
+            <a:avLst/>
+          </a:prstGeom>
+          <a:noFill/>
+          <a:ln/>
+        </p:spPr>
+        <p:txBody>
+          <a:bodyPr wrap="square" lIns="0" tIns="0" rIns="0" bIns="0" rtlCol="0" anchor="ctr"/>
+          <a:lstStyle/>
+          <a:p>
+            <a:pPr algn="l" indent="0" marL="0">
+              <a:buNone/>
+            </a:pPr>
+            <a:r>
+              <a:rPr lang="en-US" sz="3200" b="1" dirty="0">
+                <a:solidFill>
+                  <a:srgbClr val="990011"/>
+                </a:solidFill>
+                <a:latin typeface="Times New Roman" pitchFamily="34" charset="0"/>
+                <a:ea typeface="Times New Roman" pitchFamily="34" charset="-122"/>
+                <a:cs typeface="Times New Roman" pitchFamily="34" charset="-120"/>
+              </a:rPr>
+              <a:t>A) The Youthful Population</a:t>
+            </a:r>
+            <a:endParaRPr lang="en-US" sz="3200" dirty="0"/>
+          </a:p>
+        </p:txBody>
+      </p:sp>
+      <p:sp>
+        <p:nvSpPr>
+          <p:cNvPr id="6" name="Text 3"/>
+          <p:cNvSpPr/>
+          <p:nvPr/>
+        </p:nvSpPr>
+        <p:spPr>
+          <a:xfrm>
+            <a:off x="5349240" y="2240280"/>
+            <a:ext cx="6522415" cy="4206240"/>
+          </a:xfrm>
+          <a:prstGeom prst="rect">
+            <a:avLst/>
+          </a:prstGeom>
+          <a:noFill/>
+          <a:ln/>
+        </p:spPr>
+        <p:txBody>
+          <a:bodyPr wrap="square" lIns="0" tIns="0" rIns="0" bIns="0" rtlCol="0" anchor="t"/>
+          <a:lstStyle/>
+          <a:p>
+            <a:pPr algn="l" indent="0" marL="0">
+              <a:spcAft>
+                <a:spcPts val="800"/>
+              </a:spcAft>
+              <a:buNone/>
+            </a:pPr>
+            <a:r>
+              <a:rPr lang="en-US" sz="4000" b="1" dirty="0">
+                <a:solidFill>
+                  <a:srgbClr val="111111"/>
+                </a:solidFill>
+                <a:latin typeface="Times New Roman" pitchFamily="34" charset="0"/>
+                <a:ea typeface="Times New Roman" pitchFamily="34" charset="-122"/>
+                <a:cs typeface="Times New Roman" pitchFamily="34" charset="-120"/>
+              </a:rPr>
+              <a:t>Few old people: </a:t>
+            </a:r>
+            <a:pPr algn="l" indent="0" marL="0">
+              <a:spcAft>
+                <a:spcPts val="800"/>
+              </a:spcAft>
+              <a:buNone/>
+            </a:pPr>
+            <a:r>
+              <a:rPr lang="en-US" sz="4000" dirty="0">
+                <a:solidFill>
+                  <a:srgbClr val="111111"/>
+                </a:solidFill>
+                <a:latin typeface="Times New Roman" pitchFamily="34" charset="0"/>
+                <a:ea typeface="Times New Roman" pitchFamily="34" charset="-122"/>
+                <a:cs typeface="Times New Roman" pitchFamily="34" charset="-120"/>
+              </a:rPr>
+              <a:t>Fewer than 5 % of the people are 65 or over. Life expectancy is still low because of poverty and diseases.</a:t>
+            </a:r>
+            <a:endParaRPr lang="en-US" sz="4000" dirty="0"/>
           </a:p>
         </p:txBody>
       </p:sp>
@@ -17750,7 +18321,7 @@
               <a:buNone/>
             </a:pPr>
             <a:r>
-              <a:rPr lang="en-US" sz="2500" b="1" dirty="0">
+              <a:rPr lang="en-US" sz="3200" b="1" dirty="0">
                 <a:solidFill>
                   <a:srgbClr val="990011"/>
                 </a:solidFill>
@@ -17758,9 +18329,9 @@
                 <a:ea typeface="Times New Roman" pitchFamily="34" charset="-122"/>
                 <a:cs typeface="Times New Roman" pitchFamily="34" charset="-120"/>
               </a:rPr>
-              <a:t>B) Consequences of a Youthful Population</a:t>
-            </a:r>
-            <a:endParaRPr lang="en-US" sz="2500" dirty="0"/>
+              <a:t>A) The Youthful Population</a:t>
+            </a:r>
+            <a:endParaRPr lang="en-US" sz="3200" dirty="0"/>
           </a:p>
         </p:txBody>
       </p:sp>
@@ -17800,7 +18371,7 @@
                 <a:ea typeface="Times New Roman" pitchFamily="34" charset="-122"/>
                 <a:cs typeface="Times New Roman" pitchFamily="34" charset="-120"/>
               </a:rPr>
-              <a:t>Unemployment: </a:t>
+              <a:t>Location: </a:t>
             </a:r>
             <a:pPr algn="l" indent="0" marL="0">
               <a:spcAft>
@@ -17817,7 +18388,7 @@
                 <a:ea typeface="Times New Roman" pitchFamily="34" charset="-122"/>
                 <a:cs typeface="Times New Roman" pitchFamily="34" charset="-120"/>
               </a:rPr>
-              <a:t>Many young people enter the job market each year, but jobs are too few. This causes unemployment and may lead to social unrest.</a:t>
+              <a:t>Youthful populations are found in developing countries, such as Niger, Nigeria and the DR Congo. Most of them are in sub-Saharan Africa.</a:t>
             </a:r>
             <a:endParaRPr lang="en-US" sz="4000" dirty="0"/>
           </a:p>
@@ -17935,9 +18506,150 @@
           </a:p>
         </p:txBody>
       </p:sp>
+      <p:sp>
+        <p:nvSpPr>
+          <p:cNvPr id="3" name="Text 1"/>
+          <p:cNvSpPr/>
+          <p:nvPr/>
+        </p:nvSpPr>
+        <p:spPr>
+          <a:xfrm>
+            <a:off x="365760" y="1005840"/>
+            <a:ext cx="11460175" cy="731520"/>
+          </a:xfrm>
+          <a:prstGeom prst="rect">
+            <a:avLst/>
+          </a:prstGeom>
+          <a:noFill/>
+          <a:ln/>
+        </p:spPr>
+        <p:txBody>
+          <a:bodyPr wrap="square" lIns="0" tIns="0" rIns="0" bIns="0" rtlCol="0" anchor="ctr">
+            <a:normAutofit/>
+          </a:bodyPr>
+          <a:lstStyle/>
+          <a:p>
+            <a:pPr algn="ctr" indent="0" marL="0">
+              <a:buNone/>
+            </a:pPr>
+            <a:r>
+              <a:rPr lang="en-US" sz="3600" b="1" dirty="0">
+                <a:solidFill>
+                  <a:srgbClr val="990011"/>
+                </a:solidFill>
+                <a:latin typeface="Times New Roman" pitchFamily="34" charset="0"/>
+                <a:ea typeface="Times New Roman" pitchFamily="34" charset="-122"/>
+                <a:cs typeface="Times New Roman" pitchFamily="34" charset="-120"/>
+              </a:rPr>
+              <a:t>2. Global Patterns</a:t>
+            </a:r>
+            <a:endParaRPr lang="en-US" sz="3600" dirty="0"/>
+          </a:p>
+        </p:txBody>
+      </p:sp>
+      <p:sp>
+        <p:nvSpPr>
+          <p:cNvPr id="4" name="Text 2"/>
+          <p:cNvSpPr/>
+          <p:nvPr/>
+        </p:nvSpPr>
+        <p:spPr>
+          <a:xfrm>
+            <a:off x="365760" y="1737360"/>
+            <a:ext cx="6035040" cy="457200"/>
+          </a:xfrm>
+          <a:prstGeom prst="rect">
+            <a:avLst/>
+          </a:prstGeom>
+          <a:noFill/>
+          <a:ln/>
+        </p:spPr>
+        <p:txBody>
+          <a:bodyPr wrap="square" lIns="0" tIns="0" rIns="0" bIns="0" rtlCol="0" anchor="ctr">
+            <a:normAutofit/>
+          </a:bodyPr>
+          <a:lstStyle/>
+          <a:p>
+            <a:pPr algn="l" indent="0" marL="0">
+              <a:buNone/>
+            </a:pPr>
+            <a:r>
+              <a:rPr lang="en-US" sz="3000" b="1" dirty="0">
+                <a:solidFill>
+                  <a:srgbClr val="990011"/>
+                </a:solidFill>
+                <a:latin typeface="Times New Roman" pitchFamily="34" charset="0"/>
+                <a:ea typeface="Times New Roman" pitchFamily="34" charset="-122"/>
+                <a:cs typeface="Times New Roman" pitchFamily="34" charset="-120"/>
+              </a:rPr>
+              <a:t>A) The Youthful Population</a:t>
+            </a:r>
+            <a:endParaRPr lang="en-US" sz="3000" dirty="0"/>
+          </a:p>
+        </p:txBody>
+      </p:sp>
+      <p:sp>
+        <p:nvSpPr>
+          <p:cNvPr id="5" name="Text 3"/>
+          <p:cNvSpPr/>
+          <p:nvPr/>
+        </p:nvSpPr>
+        <p:spPr>
+          <a:xfrm>
+            <a:off x="365760" y="2240280"/>
+            <a:ext cx="6035040" cy="4160520"/>
+          </a:xfrm>
+          <a:prstGeom prst="rect">
+            <a:avLst/>
+          </a:prstGeom>
+          <a:noFill/>
+          <a:ln/>
+        </p:spPr>
+        <p:txBody>
+          <a:bodyPr wrap="square" lIns="0" tIns="0" rIns="0" bIns="0" rtlCol="0" anchor="t"/>
+          <a:lstStyle/>
+          <a:p>
+            <a:pPr algn="l" indent="0" marL="0">
+              <a:spcAft>
+                <a:spcPts val="800"/>
+              </a:spcAft>
+              <a:buNone/>
+            </a:pPr>
+            <a:r>
+              <a:rPr lang="en-US" sz="3600" b="1" dirty="0">
+                <a:solidFill>
+                  <a:srgbClr val="111111"/>
+                </a:solidFill>
+                <a:latin typeface="Times New Roman" pitchFamily="34" charset="0"/>
+                <a:ea typeface="Times New Roman" pitchFamily="34" charset="-122"/>
+                <a:cs typeface="Times New Roman" pitchFamily="34" charset="-120"/>
+              </a:rPr>
+              <a:t>Example of Cameroon: </a:t>
+            </a:r>
+            <a:pPr algn="l" indent="0" marL="0">
+              <a:spcAft>
+                <a:spcPts val="800"/>
+              </a:spcAft>
+              <a:buNone/>
+            </a:pPr>
+            <a:r>
+              <a:rPr lang="en-US" sz="3600" dirty="0">
+                <a:solidFill>
+                  <a:srgbClr val="111111"/>
+                </a:solidFill>
+                <a:latin typeface="Times New Roman" pitchFamily="34" charset="0"/>
+                <a:ea typeface="Times New Roman" pitchFamily="34" charset="-122"/>
+                <a:cs typeface="Times New Roman" pitchFamily="34" charset="-120"/>
+              </a:rPr>
+              <a:t>About 42 % of Cameroonians are under 15 and only about 3 % are 65 or over. Cameroon therefore has a youthful population.</a:t>
+            </a:r>
+            <a:endParaRPr lang="en-US" sz="3600" dirty="0"/>
+          </a:p>
+        </p:txBody>
+      </p:sp>
       <p:pic>
         <p:nvPicPr>
-          <p:cNvPr id="3" name="Image 0" descr="/home/claude/f4/img/minesec_sheet.png">    </p:cNvPr>
+          <p:cNvPr id="6" name="Image 0" descr="/home/claude/f4/img/v2/pyramid_cameroon_big.png">    </p:cNvPr>
           <p:cNvPicPr>
             <a:picLocks noChangeAspect="1"/>
           </p:cNvPicPr>
@@ -17951,8 +18663,8 @@
         </p:blipFill>
         <p:spPr>
           <a:xfrm>
-            <a:off x="0" y="658368"/>
-            <a:ext cx="2468880" cy="5833872"/>
+            <a:off x="6537960" y="2678713"/>
+            <a:ext cx="5470855" cy="2478981"/>
           </a:xfrm>
           <a:prstGeom prst="rect">
             <a:avLst/>
@@ -17961,14 +18673,14 @@
       </p:pic>
       <p:sp>
         <p:nvSpPr>
-          <p:cNvPr id="4" name="Text 1"/>
+          <p:cNvPr id="7" name="Text 4"/>
           <p:cNvSpPr/>
           <p:nvPr/>
         </p:nvSpPr>
         <p:spPr>
           <a:xfrm>
-            <a:off x="2697480" y="1005840"/>
-            <a:ext cx="9174175" cy="731520"/>
+            <a:off x="6537960" y="6089904"/>
+            <a:ext cx="5470855" cy="347472"/>
           </a:xfrm>
           <a:prstGeom prst="rect">
             <a:avLst/>
@@ -17977,124 +18689,24 @@
           <a:ln/>
         </p:spPr>
         <p:txBody>
-          <a:bodyPr wrap="square" lIns="0" tIns="0" rIns="0" bIns="0" rtlCol="0" anchor="ctr">
-            <a:normAutofit/>
-          </a:bodyPr>
+          <a:bodyPr wrap="square" lIns="0" tIns="0" rIns="0" bIns="0" rtlCol="0" anchor="ctr"/>
           <a:lstStyle/>
           <a:p>
             <a:pPr algn="ctr" indent="0" marL="0">
               <a:buNone/>
             </a:pPr>
             <a:r>
-              <a:rPr lang="en-US" sz="3600" b="1" dirty="0">
-                <a:solidFill>
-                  <a:srgbClr val="990011"/>
+              <a:rPr lang="en-US" sz="1600" i="1" dirty="0">
+                <a:solidFill>
+                  <a:srgbClr val="555555"/>
                 </a:solidFill>
                 <a:latin typeface="Times New Roman" pitchFamily="34" charset="0"/>
                 <a:ea typeface="Times New Roman" pitchFamily="34" charset="-122"/>
                 <a:cs typeface="Times New Roman" pitchFamily="34" charset="-120"/>
               </a:rPr>
-              <a:t>2. Global Patterns</a:t>
-            </a:r>
-            <a:endParaRPr lang="en-US" sz="3600" dirty="0"/>
-          </a:p>
-        </p:txBody>
-      </p:sp>
-      <p:sp>
-        <p:nvSpPr>
-          <p:cNvPr id="5" name="Text 2"/>
-          <p:cNvSpPr/>
-          <p:nvPr/>
-        </p:nvSpPr>
-        <p:spPr>
-          <a:xfrm>
-            <a:off x="2697480" y="1737360"/>
-            <a:ext cx="9174175" cy="457200"/>
-          </a:xfrm>
-          <a:prstGeom prst="rect">
-            <a:avLst/>
-          </a:prstGeom>
-          <a:noFill/>
-          <a:ln/>
-        </p:spPr>
-        <p:txBody>
-          <a:bodyPr wrap="square" lIns="0" tIns="0" rIns="0" bIns="0" rtlCol="0" anchor="ctr"/>
-          <a:lstStyle/>
-          <a:p>
-            <a:pPr algn="l" indent="0" marL="0">
-              <a:buNone/>
-            </a:pPr>
-            <a:r>
-              <a:rPr lang="en-US" sz="3200" b="1" dirty="0">
-                <a:solidFill>
-                  <a:srgbClr val="990011"/>
-                </a:solidFill>
-                <a:latin typeface="Times New Roman" pitchFamily="34" charset="0"/>
-                <a:ea typeface="Times New Roman" pitchFamily="34" charset="-122"/>
-                <a:cs typeface="Times New Roman" pitchFamily="34" charset="-120"/>
-              </a:rPr>
-              <a:t>B) Consequences of a Youthful Population</a:t>
-            </a:r>
-            <a:endParaRPr lang="en-US" sz="3200" dirty="0"/>
-          </a:p>
-        </p:txBody>
-      </p:sp>
-      <p:sp>
-        <p:nvSpPr>
-          <p:cNvPr id="6" name="Text 3"/>
-          <p:cNvSpPr/>
-          <p:nvPr/>
-        </p:nvSpPr>
-        <p:spPr>
-          <a:xfrm>
-            <a:off x="2697480" y="2240280"/>
-            <a:ext cx="9174175" cy="4206240"/>
-          </a:xfrm>
-          <a:prstGeom prst="rect">
-            <a:avLst/>
-          </a:prstGeom>
-          <a:noFill/>
-          <a:ln/>
-        </p:spPr>
-        <p:txBody>
-          <a:bodyPr wrap="square" lIns="0" tIns="0" rIns="0" bIns="0" rtlCol="0" anchor="t"/>
-          <a:lstStyle/>
-          <a:p>
-            <a:pPr algn="l" indent="0" marL="0">
-              <a:spcAft>
-                <a:spcPts val="800"/>
-              </a:spcAft>
-              <a:buNone/>
-            </a:pPr>
-            <a:r>
-              <a:rPr lang="en-US" sz="4000" b="1" dirty="0">
-                <a:solidFill>
-                  <a:srgbClr val="111111"/>
-                </a:solidFill>
-                <a:latin typeface="Times New Roman" pitchFamily="34" charset="0"/>
-                <a:ea typeface="Times New Roman" pitchFamily="34" charset="-122"/>
-                <a:cs typeface="Times New Roman" pitchFamily="34" charset="-120"/>
-              </a:rPr>
-              <a:t>A future labour force: </a:t>
-            </a:r>
-            <a:pPr algn="l" indent="0" marL="0">
-              <a:spcAft>
-                <a:spcPts val="800"/>
-              </a:spcAft>
-              <a:buNone/>
-            </a:pPr>
-            <a:r>
-              <a:rPr lang="en-US" sz="4000" dirty="0">
-                <a:solidFill>
-                  <a:srgbClr val="111111"/>
-                </a:solidFill>
-                <a:latin typeface="Times New Roman" pitchFamily="34" charset="0"/>
-                <a:ea typeface="Times New Roman" pitchFamily="34" charset="-122"/>
-                <a:cs typeface="Times New Roman" pitchFamily="34" charset="-120"/>
-              </a:rPr>
-              <a:t>The many young people will soon have children, so the population will keep growing fast. If they are educated and employed, they can become a large workforce that boosts growth.</a:t>
-            </a:r>
-            <a:endParaRPr lang="en-US" sz="4000" dirty="0"/>
+              <a:t>Illustration: the pyramid of Cameroon</a:t>
+            </a:r>
+            <a:endParaRPr lang="en-US" sz="1600" dirty="0"/>
           </a:p>
         </p:txBody>
       </p:sp>
@@ -18210,170 +18822,9 @@
           </a:p>
         </p:txBody>
       </p:sp>
-      <p:sp>
-        <p:nvSpPr>
-          <p:cNvPr id="3" name="Text 1"/>
-          <p:cNvSpPr/>
-          <p:nvPr/>
-        </p:nvSpPr>
-        <p:spPr>
-          <a:xfrm>
-            <a:off x="365760" y="1005840"/>
-            <a:ext cx="11460175" cy="731520"/>
-          </a:xfrm>
-          <a:prstGeom prst="rect">
-            <a:avLst/>
-          </a:prstGeom>
-          <a:noFill/>
-          <a:ln/>
-        </p:spPr>
-        <p:txBody>
-          <a:bodyPr wrap="square" lIns="0" tIns="0" rIns="0" bIns="0" rtlCol="0" anchor="ctr">
-            <a:normAutofit/>
-          </a:bodyPr>
-          <a:lstStyle/>
-          <a:p>
-            <a:pPr algn="ctr" indent="0" marL="0">
-              <a:buNone/>
-            </a:pPr>
-            <a:r>
-              <a:rPr lang="en-US" sz="3600" b="1" dirty="0">
-                <a:solidFill>
-                  <a:srgbClr val="990011"/>
-                </a:solidFill>
-                <a:latin typeface="Times New Roman" pitchFamily="34" charset="0"/>
-                <a:ea typeface="Times New Roman" pitchFamily="34" charset="-122"/>
-                <a:cs typeface="Times New Roman" pitchFamily="34" charset="-120"/>
-              </a:rPr>
-              <a:t>2. Global Patterns</a:t>
-            </a:r>
-            <a:endParaRPr lang="en-US" sz="3600" dirty="0"/>
-          </a:p>
-        </p:txBody>
-      </p:sp>
-      <p:sp>
-        <p:nvSpPr>
-          <p:cNvPr id="4" name="Text 2"/>
-          <p:cNvSpPr/>
-          <p:nvPr/>
-        </p:nvSpPr>
-        <p:spPr>
-          <a:xfrm>
-            <a:off x="365760" y="1737360"/>
-            <a:ext cx="6035040" cy="457200"/>
-          </a:xfrm>
-          <a:prstGeom prst="rect">
-            <a:avLst/>
-          </a:prstGeom>
-          <a:noFill/>
-          <a:ln/>
-        </p:spPr>
-        <p:txBody>
-          <a:bodyPr wrap="square" lIns="0" tIns="0" rIns="0" bIns="0" rtlCol="0" anchor="ctr">
-            <a:normAutofit/>
-          </a:bodyPr>
-          <a:lstStyle/>
-          <a:p>
-            <a:pPr algn="l" indent="0" marL="0">
-              <a:buNone/>
-            </a:pPr>
-            <a:r>
-              <a:rPr lang="en-US" sz="3000" b="1" dirty="0">
-                <a:solidFill>
-                  <a:srgbClr val="990011"/>
-                </a:solidFill>
-                <a:latin typeface="Times New Roman" pitchFamily="34" charset="0"/>
-                <a:ea typeface="Times New Roman" pitchFamily="34" charset="-122"/>
-                <a:cs typeface="Times New Roman" pitchFamily="34" charset="-120"/>
-              </a:rPr>
-              <a:t>C) The Ageing Population</a:t>
-            </a:r>
-            <a:endParaRPr lang="en-US" sz="3000" dirty="0"/>
-          </a:p>
-        </p:txBody>
-      </p:sp>
-      <p:sp>
-        <p:nvSpPr>
-          <p:cNvPr id="5" name="Text 3"/>
-          <p:cNvSpPr/>
-          <p:nvPr/>
-        </p:nvSpPr>
-        <p:spPr>
-          <a:xfrm>
-            <a:off x="365760" y="2240280"/>
-            <a:ext cx="6035040" cy="4160520"/>
-          </a:xfrm>
-          <a:prstGeom prst="rect">
-            <a:avLst/>
-          </a:prstGeom>
-          <a:noFill/>
-          <a:ln/>
-        </p:spPr>
-        <p:txBody>
-          <a:bodyPr wrap="square" lIns="0" tIns="0" rIns="0" bIns="0" rtlCol="0" anchor="t"/>
-          <a:lstStyle/>
-          <a:p>
-            <a:pPr algn="l" indent="0" marL="0">
-              <a:spcAft>
-                <a:spcPts val="800"/>
-              </a:spcAft>
-              <a:buNone/>
-            </a:pPr>
-            <a:r>
-              <a:rPr lang="en-US" sz="2800" i="1" dirty="0">
-                <a:solidFill>
-                  <a:srgbClr val="111111"/>
-                </a:solidFill>
-                <a:latin typeface="Times New Roman" pitchFamily="34" charset="0"/>
-                <a:ea typeface="Times New Roman" pitchFamily="34" charset="-122"/>
-                <a:cs typeface="Times New Roman" pitchFamily="34" charset="-120"/>
-              </a:rPr>
-              <a:t>The ageing population has the following characteristics:</a:t>
-            </a:r>
-            <a:endParaRPr lang="en-US" sz="2800" dirty="0"/>
-          </a:p>
-          <a:p>
-            <a:pPr algn="l" indent="0" marL="0">
-              <a:spcAft>
-                <a:spcPts val="800"/>
-              </a:spcAft>
-              <a:buNone/>
-            </a:pPr>
-            <a:r>
-              <a:rPr lang="en-US" sz="2800" b="1" dirty="0">
-                <a:solidFill>
-                  <a:srgbClr val="111111"/>
-                </a:solidFill>
-                <a:latin typeface="Times New Roman" pitchFamily="34" charset="0"/>
-                <a:ea typeface="Times New Roman" pitchFamily="34" charset="-122"/>
-                <a:cs typeface="Times New Roman" pitchFamily="34" charset="-120"/>
-              </a:rPr>
-              <a:t>Characteristics: </a:t>
-            </a:r>
-            <a:pPr algn="l" indent="0" marL="0">
-              <a:spcAft>
-                <a:spcPts val="800"/>
-              </a:spcAft>
-              <a:buNone/>
-            </a:pPr>
-            <a:r>
-              <a:rPr lang="en-US" sz="2800" dirty="0">
-                <a:solidFill>
-                  <a:srgbClr val="111111"/>
-                </a:solidFill>
-                <a:latin typeface="Times New Roman" pitchFamily="34" charset="0"/>
-                <a:ea typeface="Times New Roman" pitchFamily="34" charset="-122"/>
-                <a:cs typeface="Times New Roman" pitchFamily="34" charset="-120"/>
-              </a:rPr>
-              <a:t>More than 15 % of the people are 65 or over and fewer than 20 % are under 15. It is found in developed countries, such as Japan, Germany and Italy, where birth rates are low and people live long.</a:t>
-            </a:r>
-            <a:endParaRPr lang="en-US" sz="2800" dirty="0"/>
-          </a:p>
-        </p:txBody>
-      </p:sp>
       <p:pic>
         <p:nvPicPr>
-          <p:cNvPr id="6" name="Image 0" descr="/home/claude/f4/img/v2/pyramid_japan_big.png">    </p:cNvPr>
+          <p:cNvPr id="3" name="Image 0" descr="/home/claude/f4/img/minesec_sheet.png">    </p:cNvPr>
           <p:cNvPicPr>
             <a:picLocks noChangeAspect="1"/>
           </p:cNvPicPr>
@@ -18387,8 +18838,8 @@
         </p:blipFill>
         <p:spPr>
           <a:xfrm>
-            <a:off x="6537960" y="2678713"/>
-            <a:ext cx="5470855" cy="2478981"/>
+            <a:off x="0" y="658368"/>
+            <a:ext cx="2468880" cy="5833872"/>
           </a:xfrm>
           <a:prstGeom prst="rect">
             <a:avLst/>
@@ -18397,14 +18848,14 @@
       </p:pic>
       <p:sp>
         <p:nvSpPr>
-          <p:cNvPr id="7" name="Text 4"/>
+          <p:cNvPr id="4" name="Text 1"/>
           <p:cNvSpPr/>
           <p:nvPr/>
         </p:nvSpPr>
         <p:spPr>
           <a:xfrm>
-            <a:off x="6537960" y="6089904"/>
-            <a:ext cx="5470855" cy="347472"/>
+            <a:off x="2697480" y="1005840"/>
+            <a:ext cx="9174175" cy="731520"/>
           </a:xfrm>
           <a:prstGeom prst="rect">
             <a:avLst/>
@@ -18413,24 +18864,144 @@
           <a:ln/>
         </p:spPr>
         <p:txBody>
-          <a:bodyPr wrap="square" lIns="0" tIns="0" rIns="0" bIns="0" rtlCol="0" anchor="ctr"/>
+          <a:bodyPr wrap="square" lIns="0" tIns="0" rIns="0" bIns="0" rtlCol="0" anchor="ctr">
+            <a:normAutofit/>
+          </a:bodyPr>
           <a:lstStyle/>
           <a:p>
             <a:pPr algn="ctr" indent="0" marL="0">
               <a:buNone/>
             </a:pPr>
             <a:r>
-              <a:rPr lang="en-US" sz="1600" i="1" dirty="0">
-                <a:solidFill>
-                  <a:srgbClr val="555555"/>
+              <a:rPr lang="en-US" sz="3600" b="1" dirty="0">
+                <a:solidFill>
+                  <a:srgbClr val="990011"/>
                 </a:solidFill>
                 <a:latin typeface="Times New Roman" pitchFamily="34" charset="0"/>
                 <a:ea typeface="Times New Roman" pitchFamily="34" charset="-122"/>
                 <a:cs typeface="Times New Roman" pitchFamily="34" charset="-120"/>
               </a:rPr>
-              <a:t>Illustration: the pyramid of Japan</a:t>
-            </a:r>
-            <a:endParaRPr lang="en-US" sz="1600" dirty="0"/>
+              <a:t>2. Global Patterns</a:t>
+            </a:r>
+            <a:endParaRPr lang="en-US" sz="3600" dirty="0"/>
+          </a:p>
+        </p:txBody>
+      </p:sp>
+      <p:sp>
+        <p:nvSpPr>
+          <p:cNvPr id="5" name="Text 2"/>
+          <p:cNvSpPr/>
+          <p:nvPr/>
+        </p:nvSpPr>
+        <p:spPr>
+          <a:xfrm>
+            <a:off x="2697480" y="1737360"/>
+            <a:ext cx="9174175" cy="457200"/>
+          </a:xfrm>
+          <a:prstGeom prst="rect">
+            <a:avLst/>
+          </a:prstGeom>
+          <a:noFill/>
+          <a:ln/>
+        </p:spPr>
+        <p:txBody>
+          <a:bodyPr wrap="square" lIns="0" tIns="0" rIns="0" bIns="0" rtlCol="0" anchor="ctr"/>
+          <a:lstStyle/>
+          <a:p>
+            <a:pPr algn="l" indent="0" marL="0">
+              <a:buNone/>
+            </a:pPr>
+            <a:r>
+              <a:rPr lang="en-US" sz="3200" b="1" dirty="0">
+                <a:solidFill>
+                  <a:srgbClr val="990011"/>
+                </a:solidFill>
+                <a:latin typeface="Times New Roman" pitchFamily="34" charset="0"/>
+                <a:ea typeface="Times New Roman" pitchFamily="34" charset="-122"/>
+                <a:cs typeface="Times New Roman" pitchFamily="34" charset="-120"/>
+              </a:rPr>
+              <a:t>B) Consequences of a Youthful Population</a:t>
+            </a:r>
+            <a:endParaRPr lang="en-US" sz="3200" dirty="0"/>
+          </a:p>
+        </p:txBody>
+      </p:sp>
+      <p:sp>
+        <p:nvSpPr>
+          <p:cNvPr id="6" name="Text 3"/>
+          <p:cNvSpPr/>
+          <p:nvPr/>
+        </p:nvSpPr>
+        <p:spPr>
+          <a:xfrm>
+            <a:off x="2697480" y="2240280"/>
+            <a:ext cx="9174175" cy="4206240"/>
+          </a:xfrm>
+          <a:prstGeom prst="rect">
+            <a:avLst/>
+          </a:prstGeom>
+          <a:noFill/>
+          <a:ln/>
+        </p:spPr>
+        <p:txBody>
+          <a:bodyPr wrap="square" lIns="0" tIns="0" rIns="0" bIns="0" rtlCol="0" anchor="t"/>
+          <a:lstStyle/>
+          <a:p>
+            <a:pPr algn="l" indent="0" marL="0">
+              <a:spcAft>
+                <a:spcPts val="800"/>
+              </a:spcAft>
+              <a:buNone/>
+            </a:pPr>
+            <a:r>
+              <a:rPr lang="en-US" sz="4000" i="1" dirty="0">
+                <a:solidFill>
+                  <a:srgbClr val="111111"/>
+                </a:solidFill>
+                <a:latin typeface="Times New Roman" pitchFamily="34" charset="0"/>
+                <a:ea typeface="Times New Roman" pitchFamily="34" charset="-122"/>
+                <a:cs typeface="Times New Roman" pitchFamily="34" charset="-120"/>
+              </a:rPr>
+              <a:t>A youthful population has the following socio-economic consequences:</a:t>
+            </a:r>
+            <a:endParaRPr lang="en-US" sz="4000" dirty="0"/>
+          </a:p>
+          <a:p>
+            <a:pPr algn="l" indent="0" marL="0">
+              <a:spcAft>
+                <a:spcPts val="800"/>
+              </a:spcAft>
+              <a:buNone/>
+            </a:pPr>
+            <a:r>
+              <a:rPr lang="en-US" sz="4000" b="1" dirty="0">
+                <a:solidFill>
+                  <a:srgbClr val="111111"/>
+                </a:solidFill>
+                <a:latin typeface="Times New Roman" pitchFamily="34" charset="0"/>
+                <a:ea typeface="Times New Roman" pitchFamily="34" charset="-122"/>
+                <a:cs typeface="Times New Roman" pitchFamily="34" charset="-120"/>
+              </a:rPr>
+              <a:t>High dependency: </a:t>
+            </a:r>
+            <a:pPr algn="l" indent="0" marL="0">
+              <a:spcAft>
+                <a:spcPts val="800"/>
+              </a:spcAft>
+              <a:buNone/>
+            </a:pPr>
+            <a:r>
+              <a:rPr lang="en-US" sz="4000" dirty="0">
+                <a:solidFill>
+                  <a:srgbClr val="111111"/>
+                </a:solidFill>
+                <a:latin typeface="Times New Roman" pitchFamily="34" charset="0"/>
+                <a:ea typeface="Times New Roman" pitchFamily="34" charset="-122"/>
+                <a:cs typeface="Times New Roman" pitchFamily="34" charset="-120"/>
+              </a:rPr>
+              <a:t>Few workers must support many children. As a result, families and the state save and invest little.</a:t>
+            </a:r>
+            <a:endParaRPr lang="en-US" sz="4000" dirty="0"/>
           </a:p>
         </p:txBody>
       </p:sp>
@@ -18546,9 +19117,150 @@
           </a:p>
         </p:txBody>
       </p:sp>
+      <p:sp>
+        <p:nvSpPr>
+          <p:cNvPr id="3" name="Text 1"/>
+          <p:cNvSpPr/>
+          <p:nvPr/>
+        </p:nvSpPr>
+        <p:spPr>
+          <a:xfrm>
+            <a:off x="365760" y="1005840"/>
+            <a:ext cx="11460175" cy="731520"/>
+          </a:xfrm>
+          <a:prstGeom prst="rect">
+            <a:avLst/>
+          </a:prstGeom>
+          <a:noFill/>
+          <a:ln/>
+        </p:spPr>
+        <p:txBody>
+          <a:bodyPr wrap="square" lIns="0" tIns="0" rIns="0" bIns="0" rtlCol="0" anchor="ctr">
+            <a:normAutofit/>
+          </a:bodyPr>
+          <a:lstStyle/>
+          <a:p>
+            <a:pPr algn="ctr" indent="0" marL="0">
+              <a:buNone/>
+            </a:pPr>
+            <a:r>
+              <a:rPr lang="en-US" sz="3600" b="1" dirty="0">
+                <a:solidFill>
+                  <a:srgbClr val="990011"/>
+                </a:solidFill>
+                <a:latin typeface="Times New Roman" pitchFamily="34" charset="0"/>
+                <a:ea typeface="Times New Roman" pitchFamily="34" charset="-122"/>
+                <a:cs typeface="Times New Roman" pitchFamily="34" charset="-120"/>
+              </a:rPr>
+              <a:t>2. Global Patterns</a:t>
+            </a:r>
+            <a:endParaRPr lang="en-US" sz="3600" dirty="0"/>
+          </a:p>
+        </p:txBody>
+      </p:sp>
+      <p:sp>
+        <p:nvSpPr>
+          <p:cNvPr id="4" name="Text 2"/>
+          <p:cNvSpPr/>
+          <p:nvPr/>
+        </p:nvSpPr>
+        <p:spPr>
+          <a:xfrm>
+            <a:off x="365760" y="1737360"/>
+            <a:ext cx="6035040" cy="457200"/>
+          </a:xfrm>
+          <a:prstGeom prst="rect">
+            <a:avLst/>
+          </a:prstGeom>
+          <a:noFill/>
+          <a:ln/>
+        </p:spPr>
+        <p:txBody>
+          <a:bodyPr wrap="square" lIns="0" tIns="0" rIns="0" bIns="0" rtlCol="0" anchor="ctr">
+            <a:normAutofit/>
+          </a:bodyPr>
+          <a:lstStyle/>
+          <a:p>
+            <a:pPr algn="l" indent="0" marL="0">
+              <a:buNone/>
+            </a:pPr>
+            <a:r>
+              <a:rPr lang="en-US" sz="3000" b="1" dirty="0">
+                <a:solidFill>
+                  <a:srgbClr val="990011"/>
+                </a:solidFill>
+                <a:latin typeface="Times New Roman" pitchFamily="34" charset="0"/>
+                <a:ea typeface="Times New Roman" pitchFamily="34" charset="-122"/>
+                <a:cs typeface="Times New Roman" pitchFamily="34" charset="-120"/>
+              </a:rPr>
+              <a:t>B) Consequences of a Youthful Population</a:t>
+            </a:r>
+            <a:endParaRPr lang="en-US" sz="3000" dirty="0"/>
+          </a:p>
+        </p:txBody>
+      </p:sp>
+      <p:sp>
+        <p:nvSpPr>
+          <p:cNvPr id="5" name="Text 3"/>
+          <p:cNvSpPr/>
+          <p:nvPr/>
+        </p:nvSpPr>
+        <p:spPr>
+          <a:xfrm>
+            <a:off x="365760" y="2240280"/>
+            <a:ext cx="6035040" cy="4160520"/>
+          </a:xfrm>
+          <a:prstGeom prst="rect">
+            <a:avLst/>
+          </a:prstGeom>
+          <a:noFill/>
+          <a:ln/>
+        </p:spPr>
+        <p:txBody>
+          <a:bodyPr wrap="square" lIns="0" tIns="0" rIns="0" bIns="0" rtlCol="0" anchor="t"/>
+          <a:lstStyle/>
+          <a:p>
+            <a:pPr algn="l" indent="0" marL="0">
+              <a:spcAft>
+                <a:spcPts val="800"/>
+              </a:spcAft>
+              <a:buNone/>
+            </a:pPr>
+            <a:r>
+              <a:rPr lang="en-US" sz="3600" b="1" dirty="0">
+                <a:solidFill>
+                  <a:srgbClr val="111111"/>
+                </a:solidFill>
+                <a:latin typeface="Times New Roman" pitchFamily="34" charset="0"/>
+                <a:ea typeface="Times New Roman" pitchFamily="34" charset="-122"/>
+                <a:cs typeface="Times New Roman" pitchFamily="34" charset="-120"/>
+              </a:rPr>
+              <a:t>Pressure on services: </a:t>
+            </a:r>
+            <a:pPr algn="l" indent="0" marL="0">
+              <a:spcAft>
+                <a:spcPts val="800"/>
+              </a:spcAft>
+              <a:buNone/>
+            </a:pPr>
+            <a:r>
+              <a:rPr lang="en-US" sz="3600" dirty="0">
+                <a:solidFill>
+                  <a:srgbClr val="111111"/>
+                </a:solidFill>
+                <a:latin typeface="Times New Roman" pitchFamily="34" charset="0"/>
+                <a:ea typeface="Times New Roman" pitchFamily="34" charset="-122"/>
+                <a:cs typeface="Times New Roman" pitchFamily="34" charset="-120"/>
+              </a:rPr>
+              <a:t>There is a huge demand for schools, maternity wards and basic health care. Classrooms are overcrowded, as in many schools of Garoua.</a:t>
+            </a:r>
+            <a:endParaRPr lang="en-US" sz="3600" dirty="0"/>
+          </a:p>
+        </p:txBody>
+      </p:sp>
       <p:pic>
         <p:nvPicPr>
-          <p:cNvPr id="3" name="Image 0" descr="/home/claude/f4/img/minesec_sheet.png">    </p:cNvPr>
+          <p:cNvPr id="6" name="Image 0" descr="/home/claude/f4/img/v2/f2t_classroom.jpg">    </p:cNvPr>
           <p:cNvPicPr>
             <a:picLocks noChangeAspect="1"/>
           </p:cNvPicPr>
@@ -18562,8 +19274,8 @@
         </p:blipFill>
         <p:spPr>
           <a:xfrm>
-            <a:off x="0" y="658368"/>
-            <a:ext cx="5120640" cy="5833872"/>
+            <a:off x="6537960" y="2400897"/>
+            <a:ext cx="5470855" cy="3034615"/>
           </a:xfrm>
           <a:prstGeom prst="rect">
             <a:avLst/>
@@ -18572,14 +19284,14 @@
       </p:pic>
       <p:sp>
         <p:nvSpPr>
-          <p:cNvPr id="4" name="Text 1"/>
+          <p:cNvPr id="7" name="Text 4"/>
           <p:cNvSpPr/>
           <p:nvPr/>
         </p:nvSpPr>
         <p:spPr>
           <a:xfrm>
-            <a:off x="5349240" y="1005840"/>
-            <a:ext cx="6522415" cy="731520"/>
+            <a:off x="6537960" y="6089904"/>
+            <a:ext cx="5470855" cy="347472"/>
           </a:xfrm>
           <a:prstGeom prst="rect">
             <a:avLst/>
@@ -18588,124 +19300,24 @@
           <a:ln/>
         </p:spPr>
         <p:txBody>
-          <a:bodyPr wrap="square" lIns="0" tIns="0" rIns="0" bIns="0" rtlCol="0" anchor="ctr">
-            <a:normAutofit/>
-          </a:bodyPr>
+          <a:bodyPr wrap="square" lIns="0" tIns="0" rIns="0" bIns="0" rtlCol="0" anchor="ctr"/>
           <a:lstStyle/>
           <a:p>
             <a:pPr algn="ctr" indent="0" marL="0">
               <a:buNone/>
             </a:pPr>
             <a:r>
-              <a:rPr lang="en-US" sz="3600" b="1" dirty="0">
-                <a:solidFill>
-                  <a:srgbClr val="990011"/>
+              <a:rPr lang="en-US" sz="1600" i="1" dirty="0">
+                <a:solidFill>
+                  <a:srgbClr val="555555"/>
                 </a:solidFill>
                 <a:latin typeface="Times New Roman" pitchFamily="34" charset="0"/>
                 <a:ea typeface="Times New Roman" pitchFamily="34" charset="-122"/>
                 <a:cs typeface="Times New Roman" pitchFamily="34" charset="-120"/>
               </a:rPr>
-              <a:t>2. Global Patterns</a:t>
-            </a:r>
-            <a:endParaRPr lang="en-US" sz="3600" dirty="0"/>
-          </a:p>
-        </p:txBody>
-      </p:sp>
-      <p:sp>
-        <p:nvSpPr>
-          <p:cNvPr id="5" name="Text 2"/>
-          <p:cNvSpPr/>
-          <p:nvPr/>
-        </p:nvSpPr>
-        <p:spPr>
-          <a:xfrm>
-            <a:off x="5349240" y="1737360"/>
-            <a:ext cx="6522415" cy="457200"/>
-          </a:xfrm>
-          <a:prstGeom prst="rect">
-            <a:avLst/>
-          </a:prstGeom>
-          <a:noFill/>
-          <a:ln/>
-        </p:spPr>
-        <p:txBody>
-          <a:bodyPr wrap="square" lIns="0" tIns="0" rIns="0" bIns="0" rtlCol="0" anchor="ctr"/>
-          <a:lstStyle/>
-          <a:p>
-            <a:pPr algn="l" indent="0" marL="0">
-              <a:buNone/>
-            </a:pPr>
-            <a:r>
-              <a:rPr lang="en-US" sz="3200" b="1" dirty="0">
-                <a:solidFill>
-                  <a:srgbClr val="990011"/>
-                </a:solidFill>
-                <a:latin typeface="Times New Roman" pitchFamily="34" charset="0"/>
-                <a:ea typeface="Times New Roman" pitchFamily="34" charset="-122"/>
-                <a:cs typeface="Times New Roman" pitchFamily="34" charset="-120"/>
-              </a:rPr>
-              <a:t>C) The Ageing Population</a:t>
-            </a:r>
-            <a:endParaRPr lang="en-US" sz="3200" dirty="0"/>
-          </a:p>
-        </p:txBody>
-      </p:sp>
-      <p:sp>
-        <p:nvSpPr>
-          <p:cNvPr id="6" name="Text 3"/>
-          <p:cNvSpPr/>
-          <p:nvPr/>
-        </p:nvSpPr>
-        <p:spPr>
-          <a:xfrm>
-            <a:off x="5349240" y="2240280"/>
-            <a:ext cx="6522415" cy="4206240"/>
-          </a:xfrm>
-          <a:prstGeom prst="rect">
-            <a:avLst/>
-          </a:prstGeom>
-          <a:noFill/>
-          <a:ln/>
-        </p:spPr>
-        <p:txBody>
-          <a:bodyPr wrap="square" lIns="0" tIns="0" rIns="0" bIns="0" rtlCol="0" anchor="t"/>
-          <a:lstStyle/>
-          <a:p>
-            <a:pPr algn="l" indent="0" marL="0">
-              <a:spcAft>
-                <a:spcPts val="800"/>
-              </a:spcAft>
-              <a:buNone/>
-            </a:pPr>
-            <a:r>
-              <a:rPr lang="en-US" sz="4000" b="1" dirty="0">
-                <a:solidFill>
-                  <a:srgbClr val="111111"/>
-                </a:solidFill>
-                <a:latin typeface="Times New Roman" pitchFamily="34" charset="0"/>
-                <a:ea typeface="Times New Roman" pitchFamily="34" charset="-122"/>
-                <a:cs typeface="Times New Roman" pitchFamily="34" charset="-120"/>
-              </a:rPr>
-              <a:t>Example of Japan: </a:t>
-            </a:r>
-            <a:pPr algn="l" indent="0" marL="0">
-              <a:spcAft>
-                <a:spcPts val="800"/>
-              </a:spcAft>
-              <a:buNone/>
-            </a:pPr>
-            <a:r>
-              <a:rPr lang="en-US" sz="4000" dirty="0">
-                <a:solidFill>
-                  <a:srgbClr val="111111"/>
-                </a:solidFill>
-                <a:latin typeface="Times New Roman" pitchFamily="34" charset="0"/>
-                <a:ea typeface="Times New Roman" pitchFamily="34" charset="-122"/>
-                <a:cs typeface="Times New Roman" pitchFamily="34" charset="-120"/>
-              </a:rPr>
-              <a:t>About 29 % of Japanese are 65 or over, one of the highest shares in the world. Its population has been falling since about 2010.</a:t>
-            </a:r>
-            <a:endParaRPr lang="en-US" sz="4000" dirty="0"/>
+              <a:t>Illustration: a classroom</a:t>
+            </a:r>
+            <a:endParaRPr lang="en-US" sz="1600" dirty="0"/>
           </a:p>
         </p:txBody>
       </p:sp>
@@ -18838,7 +19450,7 @@
         <p:spPr>
           <a:xfrm>
             <a:off x="0" y="658368"/>
-            <a:ext cx="2468880" cy="5833872"/>
+            <a:ext cx="5120640" cy="5833872"/>
           </a:xfrm>
           <a:prstGeom prst="rect">
             <a:avLst/>
@@ -18853,8 +19465,8 @@
         </p:nvSpPr>
         <p:spPr>
           <a:xfrm>
-            <a:off x="2697480" y="1005840"/>
-            <a:ext cx="9174175" cy="731520"/>
+            <a:off x="5349240" y="1005840"/>
+            <a:ext cx="6522415" cy="731520"/>
           </a:xfrm>
           <a:prstGeom prst="rect">
             <a:avLst/>
@@ -18894,8 +19506,8 @@
         </p:nvSpPr>
         <p:spPr>
           <a:xfrm>
-            <a:off x="2697480" y="1737360"/>
-            <a:ext cx="9174175" cy="457200"/>
+            <a:off x="5349240" y="1737360"/>
+            <a:ext cx="6522415" cy="457200"/>
           </a:xfrm>
           <a:prstGeom prst="rect">
             <a:avLst/>
@@ -18911,7 +19523,7 @@
               <a:buNone/>
             </a:pPr>
             <a:r>
-              <a:rPr lang="en-US" sz="3200" b="1" dirty="0">
+              <a:rPr lang="en-US" sz="2500" b="1" dirty="0">
                 <a:solidFill>
                   <a:srgbClr val="990011"/>
                 </a:solidFill>
@@ -18919,9 +19531,9 @@
                 <a:ea typeface="Times New Roman" pitchFamily="34" charset="-122"/>
                 <a:cs typeface="Times New Roman" pitchFamily="34" charset="-120"/>
               </a:rPr>
-              <a:t>D) Consequences of an Ageing Population</a:t>
-            </a:r>
-            <a:endParaRPr lang="en-US" sz="3200" dirty="0"/>
+              <a:t>B) Consequences of a Youthful Population</a:t>
+            </a:r>
+            <a:endParaRPr lang="en-US" sz="2500" dirty="0"/>
           </a:p>
         </p:txBody>
       </p:sp>
@@ -18933,8 +19545,8 @@
         </p:nvSpPr>
         <p:spPr>
           <a:xfrm>
-            <a:off x="2697480" y="2240280"/>
-            <a:ext cx="9174175" cy="4206240"/>
+            <a:off x="5349240" y="2240280"/>
+            <a:ext cx="6522415" cy="4206240"/>
           </a:xfrm>
           <a:prstGeom prst="rect">
             <a:avLst/>
@@ -18953,7 +19565,7 @@
               <a:buNone/>
             </a:pPr>
             <a:r>
-              <a:rPr lang="en-US" sz="4000" i="1" dirty="0">
+              <a:rPr lang="en-US" sz="4000" b="1" dirty="0">
                 <a:solidFill>
                   <a:srgbClr val="111111"/>
                 </a:solidFill>
@@ -18961,11 +19573,8 @@
                 <a:ea typeface="Times New Roman" pitchFamily="34" charset="-122"/>
                 <a:cs typeface="Times New Roman" pitchFamily="34" charset="-120"/>
               </a:rPr>
-              <a:t>An ageing population has the following socio-economic consequences:</a:t>
-            </a:r>
-            <a:endParaRPr lang="en-US" sz="4000" dirty="0"/>
-          </a:p>
-          <a:p>
+              <a:t>Unemployment: </a:t>
+            </a:r>
             <a:pPr algn="l" indent="0" marL="0">
               <a:spcAft>
                 <a:spcPts val="800"/>
@@ -18973,7 +19582,7 @@
               <a:buNone/>
             </a:pPr>
             <a:r>
-              <a:rPr lang="en-US" sz="4000" b="1" dirty="0">
+              <a:rPr lang="en-US" sz="4000" dirty="0">
                 <a:solidFill>
                   <a:srgbClr val="111111"/>
                 </a:solidFill>
@@ -18981,24 +19590,7 @@
                 <a:ea typeface="Times New Roman" pitchFamily="34" charset="-122"/>
                 <a:cs typeface="Times New Roman" pitchFamily="34" charset="-120"/>
               </a:rPr>
-              <a:t>A shrinking workforce: </a:t>
-            </a:r>
-            <a:pPr algn="l" indent="0" marL="0">
-              <a:spcAft>
-                <a:spcPts val="800"/>
-              </a:spcAft>
-              <a:buNone/>
-            </a:pPr>
-            <a:r>
-              <a:rPr lang="en-US" sz="4000" dirty="0">
-                <a:solidFill>
-                  <a:srgbClr val="111111"/>
-                </a:solidFill>
-                <a:latin typeface="Times New Roman" pitchFamily="34" charset="0"/>
-                <a:ea typeface="Times New Roman" pitchFamily="34" charset="-122"/>
-                <a:cs typeface="Times New Roman" pitchFamily="34" charset="-120"/>
-              </a:rPr>
-              <a:t>There are fewer young people to replace the workers who retire. Labour shortages appear, which lowers production.</a:t>
+              <a:t>Many young people enter the job market each year, but jobs are too few. This causes unemployment and may lead to social unrest.</a:t>
             </a:r>
             <a:endParaRPr lang="en-US" sz="4000" dirty="0"/>
           </a:p>
@@ -19335,150 +19927,9 @@
           </a:p>
         </p:txBody>
       </p:sp>
-      <p:sp>
-        <p:nvSpPr>
-          <p:cNvPr id="3" name="Text 1"/>
-          <p:cNvSpPr/>
-          <p:nvPr/>
-        </p:nvSpPr>
-        <p:spPr>
-          <a:xfrm>
-            <a:off x="365760" y="1005840"/>
-            <a:ext cx="11460175" cy="731520"/>
-          </a:xfrm>
-          <a:prstGeom prst="rect">
-            <a:avLst/>
-          </a:prstGeom>
-          <a:noFill/>
-          <a:ln/>
-        </p:spPr>
-        <p:txBody>
-          <a:bodyPr wrap="square" lIns="0" tIns="0" rIns="0" bIns="0" rtlCol="0" anchor="ctr">
-            <a:normAutofit/>
-          </a:bodyPr>
-          <a:lstStyle/>
-          <a:p>
-            <a:pPr algn="ctr" indent="0" marL="0">
-              <a:buNone/>
-            </a:pPr>
-            <a:r>
-              <a:rPr lang="en-US" sz="3600" b="1" dirty="0">
-                <a:solidFill>
-                  <a:srgbClr val="990011"/>
-                </a:solidFill>
-                <a:latin typeface="Times New Roman" pitchFamily="34" charset="0"/>
-                <a:ea typeface="Times New Roman" pitchFamily="34" charset="-122"/>
-                <a:cs typeface="Times New Roman" pitchFamily="34" charset="-120"/>
-              </a:rPr>
-              <a:t>2. Global Patterns</a:t>
-            </a:r>
-            <a:endParaRPr lang="en-US" sz="3600" dirty="0"/>
-          </a:p>
-        </p:txBody>
-      </p:sp>
-      <p:sp>
-        <p:nvSpPr>
-          <p:cNvPr id="4" name="Text 2"/>
-          <p:cNvSpPr/>
-          <p:nvPr/>
-        </p:nvSpPr>
-        <p:spPr>
-          <a:xfrm>
-            <a:off x="365760" y="1737360"/>
-            <a:ext cx="6035040" cy="457200"/>
-          </a:xfrm>
-          <a:prstGeom prst="rect">
-            <a:avLst/>
-          </a:prstGeom>
-          <a:noFill/>
-          <a:ln/>
-        </p:spPr>
-        <p:txBody>
-          <a:bodyPr wrap="square" lIns="0" tIns="0" rIns="0" bIns="0" rtlCol="0" anchor="ctr">
-            <a:normAutofit/>
-          </a:bodyPr>
-          <a:lstStyle/>
-          <a:p>
-            <a:pPr algn="l" indent="0" marL="0">
-              <a:buNone/>
-            </a:pPr>
-            <a:r>
-              <a:rPr lang="en-US" sz="3000" b="1" dirty="0">
-                <a:solidFill>
-                  <a:srgbClr val="990011"/>
-                </a:solidFill>
-                <a:latin typeface="Times New Roman" pitchFamily="34" charset="0"/>
-                <a:ea typeface="Times New Roman" pitchFamily="34" charset="-122"/>
-                <a:cs typeface="Times New Roman" pitchFamily="34" charset="-120"/>
-              </a:rPr>
-              <a:t>D) Consequences of an Ageing Population</a:t>
-            </a:r>
-            <a:endParaRPr lang="en-US" sz="3000" dirty="0"/>
-          </a:p>
-        </p:txBody>
-      </p:sp>
-      <p:sp>
-        <p:nvSpPr>
-          <p:cNvPr id="5" name="Text 3"/>
-          <p:cNvSpPr/>
-          <p:nvPr/>
-        </p:nvSpPr>
-        <p:spPr>
-          <a:xfrm>
-            <a:off x="365760" y="2240280"/>
-            <a:ext cx="6035040" cy="4160520"/>
-          </a:xfrm>
-          <a:prstGeom prst="rect">
-            <a:avLst/>
-          </a:prstGeom>
-          <a:noFill/>
-          <a:ln/>
-        </p:spPr>
-        <p:txBody>
-          <a:bodyPr wrap="square" lIns="0" tIns="0" rIns="0" bIns="0" rtlCol="0" anchor="t"/>
-          <a:lstStyle/>
-          <a:p>
-            <a:pPr algn="l" indent="0" marL="0">
-              <a:spcAft>
-                <a:spcPts val="800"/>
-              </a:spcAft>
-              <a:buNone/>
-            </a:pPr>
-            <a:r>
-              <a:rPr lang="en-US" sz="3600" b="1" dirty="0">
-                <a:solidFill>
-                  <a:srgbClr val="111111"/>
-                </a:solidFill>
-                <a:latin typeface="Times New Roman" pitchFamily="34" charset="0"/>
-                <a:ea typeface="Times New Roman" pitchFamily="34" charset="-122"/>
-                <a:cs typeface="Times New Roman" pitchFamily="34" charset="-120"/>
-              </a:rPr>
-              <a:t>High state spending: </a:t>
-            </a:r>
-            <a:pPr algn="l" indent="0" marL="0">
-              <a:spcAft>
-                <a:spcPts val="800"/>
-              </a:spcAft>
-              <a:buNone/>
-            </a:pPr>
-            <a:r>
-              <a:rPr lang="en-US" sz="3600" dirty="0">
-                <a:solidFill>
-                  <a:srgbClr val="111111"/>
-                </a:solidFill>
-                <a:latin typeface="Times New Roman" pitchFamily="34" charset="0"/>
-                <a:ea typeface="Times New Roman" pitchFamily="34" charset="-122"/>
-                <a:cs typeface="Times New Roman" pitchFamily="34" charset="-120"/>
-              </a:rPr>
-              <a:t>Governments spend a lot on pensions, hospitals and care for the elderly. Fewer workers must pay taxes to support them.</a:t>
-            </a:r>
-            <a:endParaRPr lang="en-US" sz="3600" dirty="0"/>
-          </a:p>
-        </p:txBody>
-      </p:sp>
       <p:pic>
         <p:nvPicPr>
-          <p:cNvPr id="6" name="Image 0" descr="/home/claude/f4/img/v2/f2t_doctor.jpg">    </p:cNvPr>
+          <p:cNvPr id="3" name="Image 0" descr="/home/claude/f4/img/minesec_sheet.png">    </p:cNvPr>
           <p:cNvPicPr>
             <a:picLocks noChangeAspect="1"/>
           </p:cNvPicPr>
@@ -19492,8 +19943,8 @@
         </p:blipFill>
         <p:spPr>
           <a:xfrm>
-            <a:off x="6537960" y="2400897"/>
-            <a:ext cx="5470855" cy="3034615"/>
+            <a:off x="0" y="658368"/>
+            <a:ext cx="2468880" cy="5833872"/>
           </a:xfrm>
           <a:prstGeom prst="rect">
             <a:avLst/>
@@ -19502,14 +19953,14 @@
       </p:pic>
       <p:sp>
         <p:nvSpPr>
-          <p:cNvPr id="7" name="Text 4"/>
+          <p:cNvPr id="4" name="Text 1"/>
           <p:cNvSpPr/>
           <p:nvPr/>
         </p:nvSpPr>
         <p:spPr>
           <a:xfrm>
-            <a:off x="6537960" y="6089904"/>
-            <a:ext cx="5470855" cy="347472"/>
+            <a:off x="2697480" y="1005840"/>
+            <a:ext cx="9174175" cy="731520"/>
           </a:xfrm>
           <a:prstGeom prst="rect">
             <a:avLst/>
@@ -19518,24 +19969,124 @@
           <a:ln/>
         </p:spPr>
         <p:txBody>
-          <a:bodyPr wrap="square" lIns="0" tIns="0" rIns="0" bIns="0" rtlCol="0" anchor="ctr"/>
+          <a:bodyPr wrap="square" lIns="0" tIns="0" rIns="0" bIns="0" rtlCol="0" anchor="ctr">
+            <a:normAutofit/>
+          </a:bodyPr>
           <a:lstStyle/>
           <a:p>
             <a:pPr algn="ctr" indent="0" marL="0">
               <a:buNone/>
             </a:pPr>
             <a:r>
-              <a:rPr lang="en-US" sz="1600" i="1" dirty="0">
-                <a:solidFill>
-                  <a:srgbClr val="555555"/>
+              <a:rPr lang="en-US" sz="3600" b="1" dirty="0">
+                <a:solidFill>
+                  <a:srgbClr val="990011"/>
                 </a:solidFill>
                 <a:latin typeface="Times New Roman" pitchFamily="34" charset="0"/>
                 <a:ea typeface="Times New Roman" pitchFamily="34" charset="-122"/>
                 <a:cs typeface="Times New Roman" pitchFamily="34" charset="-120"/>
               </a:rPr>
-              <a:t>Illustration: health care</a:t>
-            </a:r>
-            <a:endParaRPr lang="en-US" sz="1600" dirty="0"/>
+              <a:t>2. Global Patterns</a:t>
+            </a:r>
+            <a:endParaRPr lang="en-US" sz="3600" dirty="0"/>
+          </a:p>
+        </p:txBody>
+      </p:sp>
+      <p:sp>
+        <p:nvSpPr>
+          <p:cNvPr id="5" name="Text 2"/>
+          <p:cNvSpPr/>
+          <p:nvPr/>
+        </p:nvSpPr>
+        <p:spPr>
+          <a:xfrm>
+            <a:off x="2697480" y="1737360"/>
+            <a:ext cx="9174175" cy="457200"/>
+          </a:xfrm>
+          <a:prstGeom prst="rect">
+            <a:avLst/>
+          </a:prstGeom>
+          <a:noFill/>
+          <a:ln/>
+        </p:spPr>
+        <p:txBody>
+          <a:bodyPr wrap="square" lIns="0" tIns="0" rIns="0" bIns="0" rtlCol="0" anchor="ctr"/>
+          <a:lstStyle/>
+          <a:p>
+            <a:pPr algn="l" indent="0" marL="0">
+              <a:buNone/>
+            </a:pPr>
+            <a:r>
+              <a:rPr lang="en-US" sz="3200" b="1" dirty="0">
+                <a:solidFill>
+                  <a:srgbClr val="990011"/>
+                </a:solidFill>
+                <a:latin typeface="Times New Roman" pitchFamily="34" charset="0"/>
+                <a:ea typeface="Times New Roman" pitchFamily="34" charset="-122"/>
+                <a:cs typeface="Times New Roman" pitchFamily="34" charset="-120"/>
+              </a:rPr>
+              <a:t>B) Consequences of a Youthful Population</a:t>
+            </a:r>
+            <a:endParaRPr lang="en-US" sz="3200" dirty="0"/>
+          </a:p>
+        </p:txBody>
+      </p:sp>
+      <p:sp>
+        <p:nvSpPr>
+          <p:cNvPr id="6" name="Text 3"/>
+          <p:cNvSpPr/>
+          <p:nvPr/>
+        </p:nvSpPr>
+        <p:spPr>
+          <a:xfrm>
+            <a:off x="2697480" y="2240280"/>
+            <a:ext cx="9174175" cy="4206240"/>
+          </a:xfrm>
+          <a:prstGeom prst="rect">
+            <a:avLst/>
+          </a:prstGeom>
+          <a:noFill/>
+          <a:ln/>
+        </p:spPr>
+        <p:txBody>
+          <a:bodyPr wrap="square" lIns="0" tIns="0" rIns="0" bIns="0" rtlCol="0" anchor="t"/>
+          <a:lstStyle/>
+          <a:p>
+            <a:pPr algn="l" indent="0" marL="0">
+              <a:spcAft>
+                <a:spcPts val="800"/>
+              </a:spcAft>
+              <a:buNone/>
+            </a:pPr>
+            <a:r>
+              <a:rPr lang="en-US" sz="4000" b="1" dirty="0">
+                <a:solidFill>
+                  <a:srgbClr val="111111"/>
+                </a:solidFill>
+                <a:latin typeface="Times New Roman" pitchFamily="34" charset="0"/>
+                <a:ea typeface="Times New Roman" pitchFamily="34" charset="-122"/>
+                <a:cs typeface="Times New Roman" pitchFamily="34" charset="-120"/>
+              </a:rPr>
+              <a:t>A future labour force: </a:t>
+            </a:r>
+            <a:pPr algn="l" indent="0" marL="0">
+              <a:spcAft>
+                <a:spcPts val="800"/>
+              </a:spcAft>
+              <a:buNone/>
+            </a:pPr>
+            <a:r>
+              <a:rPr lang="en-US" sz="4000" dirty="0">
+                <a:solidFill>
+                  <a:srgbClr val="111111"/>
+                </a:solidFill>
+                <a:latin typeface="Times New Roman" pitchFamily="34" charset="0"/>
+                <a:ea typeface="Times New Roman" pitchFamily="34" charset="-122"/>
+                <a:cs typeface="Times New Roman" pitchFamily="34" charset="-120"/>
+              </a:rPr>
+              <a:t>The many young people will soon have children, so the population will keep growing fast. If they are educated and employed, they can become a large workforce that boosts growth.</a:t>
+            </a:r>
+            <a:endParaRPr lang="en-US" sz="4000" dirty="0"/>
           </a:p>
         </p:txBody>
       </p:sp>
@@ -19651,9 +20202,170 @@
           </a:p>
         </p:txBody>
       </p:sp>
+      <p:sp>
+        <p:nvSpPr>
+          <p:cNvPr id="3" name="Text 1"/>
+          <p:cNvSpPr/>
+          <p:nvPr/>
+        </p:nvSpPr>
+        <p:spPr>
+          <a:xfrm>
+            <a:off x="365760" y="1005840"/>
+            <a:ext cx="11460175" cy="731520"/>
+          </a:xfrm>
+          <a:prstGeom prst="rect">
+            <a:avLst/>
+          </a:prstGeom>
+          <a:noFill/>
+          <a:ln/>
+        </p:spPr>
+        <p:txBody>
+          <a:bodyPr wrap="square" lIns="0" tIns="0" rIns="0" bIns="0" rtlCol="0" anchor="ctr">
+            <a:normAutofit/>
+          </a:bodyPr>
+          <a:lstStyle/>
+          <a:p>
+            <a:pPr algn="ctr" indent="0" marL="0">
+              <a:buNone/>
+            </a:pPr>
+            <a:r>
+              <a:rPr lang="en-US" sz="3600" b="1" dirty="0">
+                <a:solidFill>
+                  <a:srgbClr val="990011"/>
+                </a:solidFill>
+                <a:latin typeface="Times New Roman" pitchFamily="34" charset="0"/>
+                <a:ea typeface="Times New Roman" pitchFamily="34" charset="-122"/>
+                <a:cs typeface="Times New Roman" pitchFamily="34" charset="-120"/>
+              </a:rPr>
+              <a:t>2. Global Patterns</a:t>
+            </a:r>
+            <a:endParaRPr lang="en-US" sz="3600" dirty="0"/>
+          </a:p>
+        </p:txBody>
+      </p:sp>
+      <p:sp>
+        <p:nvSpPr>
+          <p:cNvPr id="4" name="Text 2"/>
+          <p:cNvSpPr/>
+          <p:nvPr/>
+        </p:nvSpPr>
+        <p:spPr>
+          <a:xfrm>
+            <a:off x="365760" y="1737360"/>
+            <a:ext cx="6035040" cy="457200"/>
+          </a:xfrm>
+          <a:prstGeom prst="rect">
+            <a:avLst/>
+          </a:prstGeom>
+          <a:noFill/>
+          <a:ln/>
+        </p:spPr>
+        <p:txBody>
+          <a:bodyPr wrap="square" lIns="0" tIns="0" rIns="0" bIns="0" rtlCol="0" anchor="ctr">
+            <a:normAutofit/>
+          </a:bodyPr>
+          <a:lstStyle/>
+          <a:p>
+            <a:pPr algn="l" indent="0" marL="0">
+              <a:buNone/>
+            </a:pPr>
+            <a:r>
+              <a:rPr lang="en-US" sz="3000" b="1" dirty="0">
+                <a:solidFill>
+                  <a:srgbClr val="990011"/>
+                </a:solidFill>
+                <a:latin typeface="Times New Roman" pitchFamily="34" charset="0"/>
+                <a:ea typeface="Times New Roman" pitchFamily="34" charset="-122"/>
+                <a:cs typeface="Times New Roman" pitchFamily="34" charset="-120"/>
+              </a:rPr>
+              <a:t>C) The Ageing Population</a:t>
+            </a:r>
+            <a:endParaRPr lang="en-US" sz="3000" dirty="0"/>
+          </a:p>
+        </p:txBody>
+      </p:sp>
+      <p:sp>
+        <p:nvSpPr>
+          <p:cNvPr id="5" name="Text 3"/>
+          <p:cNvSpPr/>
+          <p:nvPr/>
+        </p:nvSpPr>
+        <p:spPr>
+          <a:xfrm>
+            <a:off x="365760" y="2240280"/>
+            <a:ext cx="6035040" cy="4160520"/>
+          </a:xfrm>
+          <a:prstGeom prst="rect">
+            <a:avLst/>
+          </a:prstGeom>
+          <a:noFill/>
+          <a:ln/>
+        </p:spPr>
+        <p:txBody>
+          <a:bodyPr wrap="square" lIns="0" tIns="0" rIns="0" bIns="0" rtlCol="0" anchor="t"/>
+          <a:lstStyle/>
+          <a:p>
+            <a:pPr algn="l" indent="0" marL="0">
+              <a:spcAft>
+                <a:spcPts val="800"/>
+              </a:spcAft>
+              <a:buNone/>
+            </a:pPr>
+            <a:r>
+              <a:rPr lang="en-US" sz="3600" i="1" dirty="0">
+                <a:solidFill>
+                  <a:srgbClr val="111111"/>
+                </a:solidFill>
+                <a:latin typeface="Times New Roman" pitchFamily="34" charset="0"/>
+                <a:ea typeface="Times New Roman" pitchFamily="34" charset="-122"/>
+                <a:cs typeface="Times New Roman" pitchFamily="34" charset="-120"/>
+              </a:rPr>
+              <a:t>The ageing population has the following characteristics:</a:t>
+            </a:r>
+            <a:endParaRPr lang="en-US" sz="3600" dirty="0"/>
+          </a:p>
+          <a:p>
+            <a:pPr algn="l" indent="0" marL="0">
+              <a:spcAft>
+                <a:spcPts val="800"/>
+              </a:spcAft>
+              <a:buNone/>
+            </a:pPr>
+            <a:r>
+              <a:rPr lang="en-US" sz="3600" b="1" dirty="0">
+                <a:solidFill>
+                  <a:srgbClr val="111111"/>
+                </a:solidFill>
+                <a:latin typeface="Times New Roman" pitchFamily="34" charset="0"/>
+                <a:ea typeface="Times New Roman" pitchFamily="34" charset="-122"/>
+                <a:cs typeface="Times New Roman" pitchFamily="34" charset="-120"/>
+              </a:rPr>
+              <a:t>Many old people: </a:t>
+            </a:r>
+            <a:pPr algn="l" indent="0" marL="0">
+              <a:spcAft>
+                <a:spcPts val="800"/>
+              </a:spcAft>
+              <a:buNone/>
+            </a:pPr>
+            <a:r>
+              <a:rPr lang="en-US" sz="3600" dirty="0">
+                <a:solidFill>
+                  <a:srgbClr val="111111"/>
+                </a:solidFill>
+                <a:latin typeface="Times New Roman" pitchFamily="34" charset="0"/>
+                <a:ea typeface="Times New Roman" pitchFamily="34" charset="-122"/>
+                <a:cs typeface="Times New Roman" pitchFamily="34" charset="-120"/>
+              </a:rPr>
+              <a:t>More than 15 % of the people are 65 or over. This is because people live longer thanks to good health care.</a:t>
+            </a:r>
+            <a:endParaRPr lang="en-US" sz="3600" dirty="0"/>
+          </a:p>
+        </p:txBody>
+      </p:sp>
       <p:pic>
         <p:nvPicPr>
-          <p:cNvPr id="3" name="Image 0" descr="/home/claude/f4/img/minesec_sheet.png">    </p:cNvPr>
+          <p:cNvPr id="6" name="Image 0" descr="/home/claude/f4/img/v2/pyramid_japan_big.png">    </p:cNvPr>
           <p:cNvPicPr>
             <a:picLocks noChangeAspect="1"/>
           </p:cNvPicPr>
@@ -19667,8 +20379,8 @@
         </p:blipFill>
         <p:spPr>
           <a:xfrm>
-            <a:off x="0" y="658368"/>
-            <a:ext cx="5120640" cy="5833872"/>
+            <a:off x="6537960" y="2678713"/>
+            <a:ext cx="5470855" cy="2478981"/>
           </a:xfrm>
           <a:prstGeom prst="rect">
             <a:avLst/>
@@ -19677,14 +20389,14 @@
       </p:pic>
       <p:sp>
         <p:nvSpPr>
-          <p:cNvPr id="4" name="Text 1"/>
+          <p:cNvPr id="7" name="Text 4"/>
           <p:cNvSpPr/>
           <p:nvPr/>
         </p:nvSpPr>
         <p:spPr>
           <a:xfrm>
-            <a:off x="5349240" y="1005840"/>
-            <a:ext cx="6522415" cy="731520"/>
+            <a:off x="6537960" y="6089904"/>
+            <a:ext cx="5470855" cy="347472"/>
           </a:xfrm>
           <a:prstGeom prst="rect">
             <a:avLst/>
@@ -19693,124 +20405,24 @@
           <a:ln/>
         </p:spPr>
         <p:txBody>
-          <a:bodyPr wrap="square" lIns="0" tIns="0" rIns="0" bIns="0" rtlCol="0" anchor="ctr">
-            <a:normAutofit/>
-          </a:bodyPr>
+          <a:bodyPr wrap="square" lIns="0" tIns="0" rIns="0" bIns="0" rtlCol="0" anchor="ctr"/>
           <a:lstStyle/>
           <a:p>
             <a:pPr algn="ctr" indent="0" marL="0">
               <a:buNone/>
             </a:pPr>
             <a:r>
-              <a:rPr lang="en-US" sz="3600" b="1" dirty="0">
-                <a:solidFill>
-                  <a:srgbClr val="990011"/>
+              <a:rPr lang="en-US" sz="1600" i="1" dirty="0">
+                <a:solidFill>
+                  <a:srgbClr val="555555"/>
                 </a:solidFill>
                 <a:latin typeface="Times New Roman" pitchFamily="34" charset="0"/>
                 <a:ea typeface="Times New Roman" pitchFamily="34" charset="-122"/>
                 <a:cs typeface="Times New Roman" pitchFamily="34" charset="-120"/>
               </a:rPr>
-              <a:t>2. Global Patterns</a:t>
-            </a:r>
-            <a:endParaRPr lang="en-US" sz="3600" dirty="0"/>
-          </a:p>
-        </p:txBody>
-      </p:sp>
-      <p:sp>
-        <p:nvSpPr>
-          <p:cNvPr id="5" name="Text 2"/>
-          <p:cNvSpPr/>
-          <p:nvPr/>
-        </p:nvSpPr>
-        <p:spPr>
-          <a:xfrm>
-            <a:off x="5349240" y="1737360"/>
-            <a:ext cx="6522415" cy="457200"/>
-          </a:xfrm>
-          <a:prstGeom prst="rect">
-            <a:avLst/>
-          </a:prstGeom>
-          <a:noFill/>
-          <a:ln/>
-        </p:spPr>
-        <p:txBody>
-          <a:bodyPr wrap="square" lIns="0" tIns="0" rIns="0" bIns="0" rtlCol="0" anchor="ctr"/>
-          <a:lstStyle/>
-          <a:p>
-            <a:pPr algn="l" indent="0" marL="0">
-              <a:buNone/>
-            </a:pPr>
-            <a:r>
-              <a:rPr lang="en-US" sz="2600" b="1" dirty="0">
-                <a:solidFill>
-                  <a:srgbClr val="990011"/>
-                </a:solidFill>
-                <a:latin typeface="Times New Roman" pitchFamily="34" charset="0"/>
-                <a:ea typeface="Times New Roman" pitchFamily="34" charset="-122"/>
-                <a:cs typeface="Times New Roman" pitchFamily="34" charset="-120"/>
-              </a:rPr>
-              <a:t>D) Consequences of an Ageing Population</a:t>
-            </a:r>
-            <a:endParaRPr lang="en-US" sz="2600" dirty="0"/>
-          </a:p>
-        </p:txBody>
-      </p:sp>
-      <p:sp>
-        <p:nvSpPr>
-          <p:cNvPr id="6" name="Text 3"/>
-          <p:cNvSpPr/>
-          <p:nvPr/>
-        </p:nvSpPr>
-        <p:spPr>
-          <a:xfrm>
-            <a:off x="5349240" y="2240280"/>
-            <a:ext cx="6522415" cy="4206240"/>
-          </a:xfrm>
-          <a:prstGeom prst="rect">
-            <a:avLst/>
-          </a:prstGeom>
-          <a:noFill/>
-          <a:ln/>
-        </p:spPr>
-        <p:txBody>
-          <a:bodyPr wrap="square" lIns="0" tIns="0" rIns="0" bIns="0" rtlCol="0" anchor="t"/>
-          <a:lstStyle/>
-          <a:p>
-            <a:pPr algn="l" indent="0" marL="0">
-              <a:spcAft>
-                <a:spcPts val="800"/>
-              </a:spcAft>
-              <a:buNone/>
-            </a:pPr>
-            <a:r>
-              <a:rPr lang="en-US" sz="4000" b="1" dirty="0">
-                <a:solidFill>
-                  <a:srgbClr val="111111"/>
-                </a:solidFill>
-                <a:latin typeface="Times New Roman" pitchFamily="34" charset="0"/>
-                <a:ea typeface="Times New Roman" pitchFamily="34" charset="-122"/>
-                <a:cs typeface="Times New Roman" pitchFamily="34" charset="-120"/>
-              </a:rPr>
-              <a:t>Closure of services: </a:t>
-            </a:r>
-            <a:pPr algn="l" indent="0" marL="0">
-              <a:spcAft>
-                <a:spcPts val="800"/>
-              </a:spcAft>
-              <a:buNone/>
-            </a:pPr>
-            <a:r>
-              <a:rPr lang="en-US" sz="4000" dirty="0">
-                <a:solidFill>
-                  <a:srgbClr val="111111"/>
-                </a:solidFill>
-                <a:latin typeface="Times New Roman" pitchFamily="34" charset="0"/>
-                <a:ea typeface="Times New Roman" pitchFamily="34" charset="-122"/>
-                <a:cs typeface="Times New Roman" pitchFamily="34" charset="-120"/>
-              </a:rPr>
-              <a:t>Schools and maternity wards close because there are fewer children. Some villages lose their young people and die out.</a:t>
-            </a:r>
-            <a:endParaRPr lang="en-US" sz="4000" dirty="0"/>
+              <a:t>Illustration: the pyramid of Japan</a:t>
+            </a:r>
+            <a:endParaRPr lang="en-US" sz="1600" dirty="0"/>
           </a:p>
         </p:txBody>
       </p:sp>
@@ -19943,7 +20555,7 @@
         <p:spPr>
           <a:xfrm>
             <a:off x="0" y="658368"/>
-            <a:ext cx="3840480" cy="5833872"/>
+            <a:ext cx="5120640" cy="5833872"/>
           </a:xfrm>
           <a:prstGeom prst="rect">
             <a:avLst/>
@@ -19958,8 +20570,8 @@
         </p:nvSpPr>
         <p:spPr>
           <a:xfrm>
-            <a:off x="4069080" y="1005840"/>
-            <a:ext cx="7802575" cy="731520"/>
+            <a:off x="5349240" y="1005840"/>
+            <a:ext cx="6522415" cy="731520"/>
           </a:xfrm>
           <a:prstGeom prst="rect">
             <a:avLst/>
@@ -19999,8 +20611,8 @@
         </p:nvSpPr>
         <p:spPr>
           <a:xfrm>
-            <a:off x="4069080" y="1737360"/>
-            <a:ext cx="7802575" cy="457200"/>
+            <a:off x="5349240" y="1737360"/>
+            <a:ext cx="6522415" cy="457200"/>
           </a:xfrm>
           <a:prstGeom prst="rect">
             <a:avLst/>
@@ -20016,7 +20628,7 @@
               <a:buNone/>
             </a:pPr>
             <a:r>
-              <a:rPr lang="en-US" sz="3100" b="1" dirty="0">
+              <a:rPr lang="en-US" sz="3200" b="1" dirty="0">
                 <a:solidFill>
                   <a:srgbClr val="990011"/>
                 </a:solidFill>
@@ -20024,9 +20636,9 @@
                 <a:ea typeface="Times New Roman" pitchFamily="34" charset="-122"/>
                 <a:cs typeface="Times New Roman" pitchFamily="34" charset="-120"/>
               </a:rPr>
-              <a:t>D) Consequences of an Ageing Population</a:t>
-            </a:r>
-            <a:endParaRPr lang="en-US" sz="3100" dirty="0"/>
+              <a:t>C) The Ageing Population</a:t>
+            </a:r>
+            <a:endParaRPr lang="en-US" sz="3200" dirty="0"/>
           </a:p>
         </p:txBody>
       </p:sp>
@@ -20038,8 +20650,8 @@
         </p:nvSpPr>
         <p:spPr>
           <a:xfrm>
-            <a:off x="4069080" y="2240280"/>
-            <a:ext cx="7802575" cy="4206240"/>
+            <a:off x="5349240" y="2240280"/>
+            <a:ext cx="6522415" cy="4206240"/>
           </a:xfrm>
           <a:prstGeom prst="rect">
             <a:avLst/>
@@ -20066,7 +20678,7 @@
                 <a:ea typeface="Times New Roman" pitchFamily="34" charset="-122"/>
                 <a:cs typeface="Times New Roman" pitchFamily="34" charset="-120"/>
               </a:rPr>
-              <a:t>Government responses: </a:t>
+              <a:t>Few young people: </a:t>
             </a:r>
             <a:pPr algn="l" indent="0" marL="0">
               <a:spcAft>
@@ -20083,7 +20695,7 @@
                 <a:ea typeface="Times New Roman" pitchFamily="34" charset="-122"/>
                 <a:cs typeface="Times New Roman" pitchFamily="34" charset="-120"/>
               </a:rPr>
-              <a:t>Governments raise the retirement age and encourage births with family allowances. They also accept immigrant workers to fill labour shortages.</a:t>
+              <a:t>Fewer than 20 % of the people are under 15. Birth rates are low because couples choose small families.</a:t>
             </a:r>
             <a:endParaRPr lang="en-US" sz="4000" dirty="0"/>
           </a:p>
@@ -20195,7 +20807,7 @@
                 <a:ea typeface="Calibri" pitchFamily="34" charset="-122"/>
                 <a:cs typeface="Calibri" pitchFamily="34" charset="-120"/>
               </a:rPr>
-              <a:t>FORMATIVE EVALUATION</a:t>
+              <a:t>BOARD SUMMARY</a:t>
             </a:r>
             <a:endParaRPr lang="en-US" sz="1400" dirty="0"/>
           </a:p>
@@ -20260,7 +20872,7 @@
                 <a:ea typeface="Times New Roman" pitchFamily="34" charset="-122"/>
                 <a:cs typeface="Times New Roman" pitchFamily="34" charset="-120"/>
               </a:rPr>
-              <a:t>Evaluation 1</a:t>
+              <a:t>2. Global Patterns</a:t>
             </a:r>
             <a:endParaRPr lang="en-US" sz="3600" dirty="0"/>
           </a:p>
@@ -20274,8 +20886,47 @@
         </p:nvSpPr>
         <p:spPr>
           <a:xfrm>
-            <a:off x="5349240" y="1783080"/>
-            <a:ext cx="6522415" cy="4663440"/>
+            <a:off x="5349240" y="1737360"/>
+            <a:ext cx="6522415" cy="457200"/>
+          </a:xfrm>
+          <a:prstGeom prst="rect">
+            <a:avLst/>
+          </a:prstGeom>
+          <a:noFill/>
+          <a:ln/>
+        </p:spPr>
+        <p:txBody>
+          <a:bodyPr wrap="square" lIns="0" tIns="0" rIns="0" bIns="0" rtlCol="0" anchor="ctr"/>
+          <a:lstStyle/>
+          <a:p>
+            <a:pPr algn="l" indent="0" marL="0">
+              <a:buNone/>
+            </a:pPr>
+            <a:r>
+              <a:rPr lang="en-US" sz="3200" b="1" dirty="0">
+                <a:solidFill>
+                  <a:srgbClr val="990011"/>
+                </a:solidFill>
+                <a:latin typeface="Times New Roman" pitchFamily="34" charset="0"/>
+                <a:ea typeface="Times New Roman" pitchFamily="34" charset="-122"/>
+                <a:cs typeface="Times New Roman" pitchFamily="34" charset="-120"/>
+              </a:rPr>
+              <a:t>C) The Ageing Population</a:t>
+            </a:r>
+            <a:endParaRPr lang="en-US" sz="3200" dirty="0"/>
+          </a:p>
+        </p:txBody>
+      </p:sp>
+      <p:sp>
+        <p:nvSpPr>
+          <p:cNvPr id="6" name="Text 3"/>
+          <p:cNvSpPr/>
+          <p:nvPr/>
+        </p:nvSpPr>
+        <p:spPr>
+          <a:xfrm>
+            <a:off x="5349240" y="2240280"/>
+            <a:ext cx="6522415" cy="4206240"/>
           </a:xfrm>
           <a:prstGeom prst="rect">
             <a:avLst/>
@@ -20294,7 +20945,7 @@
               <a:buNone/>
             </a:pPr>
             <a:r>
-              <a:rPr lang="en-US" sz="4000" dirty="0">
+              <a:rPr lang="en-US" sz="4000" b="1" dirty="0">
                 <a:solidFill>
                   <a:srgbClr val="111111"/>
                 </a:solidFill>
@@ -20302,7 +20953,24 @@
                 <a:ea typeface="Times New Roman" pitchFamily="34" charset="-122"/>
                 <a:cs typeface="Times New Roman" pitchFamily="34" charset="-120"/>
               </a:rPr>
-              <a:t>Give two characteristics of a youthful population.</a:t>
+              <a:t>Location: </a:t>
+            </a:r>
+            <a:pPr algn="l" indent="0" marL="0">
+              <a:spcAft>
+                <a:spcPts val="800"/>
+              </a:spcAft>
+              <a:buNone/>
+            </a:pPr>
+            <a:r>
+              <a:rPr lang="en-US" sz="4000" dirty="0">
+                <a:solidFill>
+                  <a:srgbClr val="111111"/>
+                </a:solidFill>
+                <a:latin typeface="Times New Roman" pitchFamily="34" charset="0"/>
+                <a:ea typeface="Times New Roman" pitchFamily="34" charset="-122"/>
+                <a:cs typeface="Times New Roman" pitchFamily="34" charset="-120"/>
+              </a:rPr>
+              <a:t>Ageing populations are found in developed countries, such as Japan, Germany and Italy. Most of Europe is in this situation.</a:t>
             </a:r>
             <a:endParaRPr lang="en-US" sz="4000" dirty="0"/>
           </a:p>
@@ -20414,7 +21082,7 @@
                 <a:ea typeface="Calibri" pitchFamily="34" charset="-122"/>
                 <a:cs typeface="Calibri" pitchFamily="34" charset="-120"/>
               </a:rPr>
-              <a:t>FORMATIVE EVALUATION</a:t>
+              <a:t>BOARD SUMMARY</a:t>
             </a:r>
             <a:endParaRPr lang="en-US" sz="1400" dirty="0"/>
           </a:p>
@@ -20479,7 +21147,7 @@
                 <a:ea typeface="Times New Roman" pitchFamily="34" charset="-122"/>
                 <a:cs typeface="Times New Roman" pitchFamily="34" charset="-120"/>
               </a:rPr>
-              <a:t>Expected Answer</a:t>
+              <a:t>2. Global Patterns</a:t>
             </a:r>
             <a:endParaRPr lang="en-US" sz="3600" dirty="0"/>
           </a:p>
@@ -20493,8 +21161,47 @@
         </p:nvSpPr>
         <p:spPr>
           <a:xfrm>
-            <a:off x="5349240" y="1783080"/>
-            <a:ext cx="6522415" cy="4663440"/>
+            <a:off x="5349240" y="1737360"/>
+            <a:ext cx="6522415" cy="457200"/>
+          </a:xfrm>
+          <a:prstGeom prst="rect">
+            <a:avLst/>
+          </a:prstGeom>
+          <a:noFill/>
+          <a:ln/>
+        </p:spPr>
+        <p:txBody>
+          <a:bodyPr wrap="square" lIns="0" tIns="0" rIns="0" bIns="0" rtlCol="0" anchor="ctr"/>
+          <a:lstStyle/>
+          <a:p>
+            <a:pPr algn="l" indent="0" marL="0">
+              <a:buNone/>
+            </a:pPr>
+            <a:r>
+              <a:rPr lang="en-US" sz="3200" b="1" dirty="0">
+                <a:solidFill>
+                  <a:srgbClr val="990011"/>
+                </a:solidFill>
+                <a:latin typeface="Times New Roman" pitchFamily="34" charset="0"/>
+                <a:ea typeface="Times New Roman" pitchFamily="34" charset="-122"/>
+                <a:cs typeface="Times New Roman" pitchFamily="34" charset="-120"/>
+              </a:rPr>
+              <a:t>C) The Ageing Population</a:t>
+            </a:r>
+            <a:endParaRPr lang="en-US" sz="3200" dirty="0"/>
+          </a:p>
+        </p:txBody>
+      </p:sp>
+      <p:sp>
+        <p:nvSpPr>
+          <p:cNvPr id="6" name="Text 3"/>
+          <p:cNvSpPr/>
+          <p:nvPr/>
+        </p:nvSpPr>
+        <p:spPr>
+          <a:xfrm>
+            <a:off x="5349240" y="2240280"/>
+            <a:ext cx="6522415" cy="4206240"/>
           </a:xfrm>
           <a:prstGeom prst="rect">
             <a:avLst/>
@@ -20513,7 +21220,7 @@
               <a:buNone/>
             </a:pPr>
             <a:r>
-              <a:rPr lang="en-US" sz="4000" dirty="0">
+              <a:rPr lang="en-US" sz="4000" b="1" dirty="0">
                 <a:solidFill>
                   <a:srgbClr val="111111"/>
                 </a:solidFill>
@@ -20521,7 +21228,24 @@
                 <a:ea typeface="Times New Roman" pitchFamily="34" charset="-122"/>
                 <a:cs typeface="Times New Roman" pitchFamily="34" charset="-120"/>
               </a:rPr>
-              <a:t>Over 40 % of people under 15 and fewer than 5 % aged 65 or over; high birth rates.</a:t>
+              <a:t>Example of Japan: </a:t>
+            </a:r>
+            <a:pPr algn="l" indent="0" marL="0">
+              <a:spcAft>
+                <a:spcPts val="800"/>
+              </a:spcAft>
+              <a:buNone/>
+            </a:pPr>
+            <a:r>
+              <a:rPr lang="en-US" sz="4000" dirty="0">
+                <a:solidFill>
+                  <a:srgbClr val="111111"/>
+                </a:solidFill>
+                <a:latin typeface="Times New Roman" pitchFamily="34" charset="0"/>
+                <a:ea typeface="Times New Roman" pitchFamily="34" charset="-122"/>
+                <a:cs typeface="Times New Roman" pitchFamily="34" charset="-120"/>
+              </a:rPr>
+              <a:t>About 29 % of Japanese are 65 or over, one of the highest shares in the world. Its population has been falling since about 2010.</a:t>
             </a:r>
             <a:endParaRPr lang="en-US" sz="4000" dirty="0"/>
           </a:p>
@@ -20633,7 +21357,7 @@
                 <a:ea typeface="Calibri" pitchFamily="34" charset="-122"/>
                 <a:cs typeface="Calibri" pitchFamily="34" charset="-120"/>
               </a:rPr>
-              <a:t>FORMATIVE EVALUATION</a:t>
+              <a:t>BOARD SUMMARY</a:t>
             </a:r>
             <a:endParaRPr lang="en-US" sz="1400" dirty="0"/>
           </a:p>
@@ -20656,7 +21380,7 @@
         <p:spPr>
           <a:xfrm>
             <a:off x="0" y="658368"/>
-            <a:ext cx="5120640" cy="5833872"/>
+            <a:ext cx="2468880" cy="5833872"/>
           </a:xfrm>
           <a:prstGeom prst="rect">
             <a:avLst/>
@@ -20671,8 +21395,8 @@
         </p:nvSpPr>
         <p:spPr>
           <a:xfrm>
-            <a:off x="5349240" y="1005840"/>
-            <a:ext cx="6522415" cy="731520"/>
+            <a:off x="2697480" y="1005840"/>
+            <a:ext cx="9174175" cy="731520"/>
           </a:xfrm>
           <a:prstGeom prst="rect">
             <a:avLst/>
@@ -20698,7 +21422,7 @@
                 <a:ea typeface="Times New Roman" pitchFamily="34" charset="-122"/>
                 <a:cs typeface="Times New Roman" pitchFamily="34" charset="-120"/>
               </a:rPr>
-              <a:t>Evaluation 2</a:t>
+              <a:t>2. Global Patterns</a:t>
             </a:r>
             <a:endParaRPr lang="en-US" sz="3600" dirty="0"/>
           </a:p>
@@ -20712,8 +21436,47 @@
         </p:nvSpPr>
         <p:spPr>
           <a:xfrm>
-            <a:off x="5349240" y="1783080"/>
-            <a:ext cx="6522415" cy="4663440"/>
+            <a:off x="2697480" y="1737360"/>
+            <a:ext cx="9174175" cy="457200"/>
+          </a:xfrm>
+          <a:prstGeom prst="rect">
+            <a:avLst/>
+          </a:prstGeom>
+          <a:noFill/>
+          <a:ln/>
+        </p:spPr>
+        <p:txBody>
+          <a:bodyPr wrap="square" lIns="0" tIns="0" rIns="0" bIns="0" rtlCol="0" anchor="ctr"/>
+          <a:lstStyle/>
+          <a:p>
+            <a:pPr algn="l" indent="0" marL="0">
+              <a:buNone/>
+            </a:pPr>
+            <a:r>
+              <a:rPr lang="en-US" sz="3200" b="1" dirty="0">
+                <a:solidFill>
+                  <a:srgbClr val="990011"/>
+                </a:solidFill>
+                <a:latin typeface="Times New Roman" pitchFamily="34" charset="0"/>
+                <a:ea typeface="Times New Roman" pitchFamily="34" charset="-122"/>
+                <a:cs typeface="Times New Roman" pitchFamily="34" charset="-120"/>
+              </a:rPr>
+              <a:t>D) Consequences of an Ageing Population</a:t>
+            </a:r>
+            <a:endParaRPr lang="en-US" sz="3200" dirty="0"/>
+          </a:p>
+        </p:txBody>
+      </p:sp>
+      <p:sp>
+        <p:nvSpPr>
+          <p:cNvPr id="6" name="Text 3"/>
+          <p:cNvSpPr/>
+          <p:nvPr/>
+        </p:nvSpPr>
+        <p:spPr>
+          <a:xfrm>
+            <a:off x="2697480" y="2240280"/>
+            <a:ext cx="9174175" cy="4206240"/>
           </a:xfrm>
           <a:prstGeom prst="rect">
             <a:avLst/>
@@ -20732,7 +21495,7 @@
               <a:buNone/>
             </a:pPr>
             <a:r>
-              <a:rPr lang="en-US" sz="4000" dirty="0">
+              <a:rPr lang="en-US" sz="4000" i="1" dirty="0">
                 <a:solidFill>
                   <a:srgbClr val="111111"/>
                 </a:solidFill>
@@ -20740,7 +21503,44 @@
                 <a:ea typeface="Times New Roman" pitchFamily="34" charset="-122"/>
                 <a:cs typeface="Times New Roman" pitchFamily="34" charset="-120"/>
               </a:rPr>
-              <a:t>Give two consequences of an ageing population.</a:t>
+              <a:t>An ageing population has the following socio-economic consequences:</a:t>
+            </a:r>
+            <a:endParaRPr lang="en-US" sz="4000" dirty="0"/>
+          </a:p>
+          <a:p>
+            <a:pPr algn="l" indent="0" marL="0">
+              <a:spcAft>
+                <a:spcPts val="800"/>
+              </a:spcAft>
+              <a:buNone/>
+            </a:pPr>
+            <a:r>
+              <a:rPr lang="en-US" sz="4000" b="1" dirty="0">
+                <a:solidFill>
+                  <a:srgbClr val="111111"/>
+                </a:solidFill>
+                <a:latin typeface="Times New Roman" pitchFamily="34" charset="0"/>
+                <a:ea typeface="Times New Roman" pitchFamily="34" charset="-122"/>
+                <a:cs typeface="Times New Roman" pitchFamily="34" charset="-120"/>
+              </a:rPr>
+              <a:t>A shrinking workforce: </a:t>
+            </a:r>
+            <a:pPr algn="l" indent="0" marL="0">
+              <a:spcAft>
+                <a:spcPts val="800"/>
+              </a:spcAft>
+              <a:buNone/>
+            </a:pPr>
+            <a:r>
+              <a:rPr lang="en-US" sz="4000" dirty="0">
+                <a:solidFill>
+                  <a:srgbClr val="111111"/>
+                </a:solidFill>
+                <a:latin typeface="Times New Roman" pitchFamily="34" charset="0"/>
+                <a:ea typeface="Times New Roman" pitchFamily="34" charset="-122"/>
+                <a:cs typeface="Times New Roman" pitchFamily="34" charset="-120"/>
+              </a:rPr>
+              <a:t>There are fewer young people to replace the workers who retire. Labour shortages appear, which lowers production.</a:t>
             </a:r>
             <a:endParaRPr lang="en-US" sz="4000" dirty="0"/>
           </a:p>
@@ -20852,15 +21652,156 @@
                 <a:ea typeface="Calibri" pitchFamily="34" charset="-122"/>
                 <a:cs typeface="Calibri" pitchFamily="34" charset="-120"/>
               </a:rPr>
-              <a:t>FORMATIVE EVALUATION</a:t>
+              <a:t>BOARD SUMMARY</a:t>
             </a:r>
             <a:endParaRPr lang="en-US" sz="1400" dirty="0"/>
+          </a:p>
+        </p:txBody>
+      </p:sp>
+      <p:sp>
+        <p:nvSpPr>
+          <p:cNvPr id="3" name="Text 1"/>
+          <p:cNvSpPr/>
+          <p:nvPr/>
+        </p:nvSpPr>
+        <p:spPr>
+          <a:xfrm>
+            <a:off x="365760" y="1005840"/>
+            <a:ext cx="11460175" cy="731520"/>
+          </a:xfrm>
+          <a:prstGeom prst="rect">
+            <a:avLst/>
+          </a:prstGeom>
+          <a:noFill/>
+          <a:ln/>
+        </p:spPr>
+        <p:txBody>
+          <a:bodyPr wrap="square" lIns="0" tIns="0" rIns="0" bIns="0" rtlCol="0" anchor="ctr">
+            <a:normAutofit/>
+          </a:bodyPr>
+          <a:lstStyle/>
+          <a:p>
+            <a:pPr algn="ctr" indent="0" marL="0">
+              <a:buNone/>
+            </a:pPr>
+            <a:r>
+              <a:rPr lang="en-US" sz="3600" b="1" dirty="0">
+                <a:solidFill>
+                  <a:srgbClr val="990011"/>
+                </a:solidFill>
+                <a:latin typeface="Times New Roman" pitchFamily="34" charset="0"/>
+                <a:ea typeface="Times New Roman" pitchFamily="34" charset="-122"/>
+                <a:cs typeface="Times New Roman" pitchFamily="34" charset="-120"/>
+              </a:rPr>
+              <a:t>2. Global Patterns</a:t>
+            </a:r>
+            <a:endParaRPr lang="en-US" sz="3600" dirty="0"/>
+          </a:p>
+        </p:txBody>
+      </p:sp>
+      <p:sp>
+        <p:nvSpPr>
+          <p:cNvPr id="4" name="Text 2"/>
+          <p:cNvSpPr/>
+          <p:nvPr/>
+        </p:nvSpPr>
+        <p:spPr>
+          <a:xfrm>
+            <a:off x="365760" y="1737360"/>
+            <a:ext cx="6035040" cy="457200"/>
+          </a:xfrm>
+          <a:prstGeom prst="rect">
+            <a:avLst/>
+          </a:prstGeom>
+          <a:noFill/>
+          <a:ln/>
+        </p:spPr>
+        <p:txBody>
+          <a:bodyPr wrap="square" lIns="0" tIns="0" rIns="0" bIns="0" rtlCol="0" anchor="ctr">
+            <a:normAutofit/>
+          </a:bodyPr>
+          <a:lstStyle/>
+          <a:p>
+            <a:pPr algn="l" indent="0" marL="0">
+              <a:buNone/>
+            </a:pPr>
+            <a:r>
+              <a:rPr lang="en-US" sz="3000" b="1" dirty="0">
+                <a:solidFill>
+                  <a:srgbClr val="990011"/>
+                </a:solidFill>
+                <a:latin typeface="Times New Roman" pitchFamily="34" charset="0"/>
+                <a:ea typeface="Times New Roman" pitchFamily="34" charset="-122"/>
+                <a:cs typeface="Times New Roman" pitchFamily="34" charset="-120"/>
+              </a:rPr>
+              <a:t>D) Consequences of an Ageing Population</a:t>
+            </a:r>
+            <a:endParaRPr lang="en-US" sz="3000" dirty="0"/>
+          </a:p>
+        </p:txBody>
+      </p:sp>
+      <p:sp>
+        <p:nvSpPr>
+          <p:cNvPr id="5" name="Text 3"/>
+          <p:cNvSpPr/>
+          <p:nvPr/>
+        </p:nvSpPr>
+        <p:spPr>
+          <a:xfrm>
+            <a:off x="365760" y="2240280"/>
+            <a:ext cx="6035040" cy="4160520"/>
+          </a:xfrm>
+          <a:prstGeom prst="rect">
+            <a:avLst/>
+          </a:prstGeom>
+          <a:noFill/>
+          <a:ln/>
+        </p:spPr>
+        <p:txBody>
+          <a:bodyPr wrap="square" lIns="0" tIns="0" rIns="0" bIns="0" rtlCol="0" anchor="t"/>
+          <a:lstStyle/>
+          <a:p>
+            <a:pPr algn="l" indent="0" marL="0">
+              <a:spcAft>
+                <a:spcPts val="800"/>
+              </a:spcAft>
+              <a:buNone/>
+            </a:pPr>
+            <a:r>
+              <a:rPr lang="en-US" sz="3600" b="1" dirty="0">
+                <a:solidFill>
+                  <a:srgbClr val="111111"/>
+                </a:solidFill>
+                <a:latin typeface="Times New Roman" pitchFamily="34" charset="0"/>
+                <a:ea typeface="Times New Roman" pitchFamily="34" charset="-122"/>
+                <a:cs typeface="Times New Roman" pitchFamily="34" charset="-120"/>
+              </a:rPr>
+              <a:t>High state spending: </a:t>
+            </a:r>
+            <a:pPr algn="l" indent="0" marL="0">
+              <a:spcAft>
+                <a:spcPts val="800"/>
+              </a:spcAft>
+              <a:buNone/>
+            </a:pPr>
+            <a:r>
+              <a:rPr lang="en-US" sz="3600" dirty="0">
+                <a:solidFill>
+                  <a:srgbClr val="111111"/>
+                </a:solidFill>
+                <a:latin typeface="Times New Roman" pitchFamily="34" charset="0"/>
+                <a:ea typeface="Times New Roman" pitchFamily="34" charset="-122"/>
+                <a:cs typeface="Times New Roman" pitchFamily="34" charset="-120"/>
+              </a:rPr>
+              <a:t>Governments spend a lot on pensions, hospitals and care for the elderly. Fewer workers must pay taxes to support them.</a:t>
+            </a:r>
+            <a:endParaRPr lang="en-US" sz="3600" dirty="0"/>
           </a:p>
         </p:txBody>
       </p:sp>
       <p:pic>
         <p:nvPicPr>
-          <p:cNvPr id="3" name="Image 0" descr="/home/claude/f4/img/minesec_sheet.png">    </p:cNvPr>
+          <p:cNvPr id="6" name="Image 0" descr="/home/claude/f4/img/v2/f2t_doctor.jpg">    </p:cNvPr>
           <p:cNvPicPr>
             <a:picLocks noChangeAspect="1"/>
           </p:cNvPicPr>
@@ -20874,8 +21815,8 @@
         </p:blipFill>
         <p:spPr>
           <a:xfrm>
-            <a:off x="0" y="658368"/>
-            <a:ext cx="5120640" cy="5833872"/>
+            <a:off x="6537960" y="2400897"/>
+            <a:ext cx="5470855" cy="3034615"/>
           </a:xfrm>
           <a:prstGeom prst="rect">
             <a:avLst/>
@@ -20884,14 +21825,14 @@
       </p:pic>
       <p:sp>
         <p:nvSpPr>
-          <p:cNvPr id="4" name="Text 1"/>
+          <p:cNvPr id="7" name="Text 4"/>
           <p:cNvSpPr/>
           <p:nvPr/>
         </p:nvSpPr>
         <p:spPr>
           <a:xfrm>
-            <a:off x="5349240" y="1005840"/>
-            <a:ext cx="6522415" cy="731520"/>
+            <a:off x="6537960" y="6089904"/>
+            <a:ext cx="5470855" cy="347472"/>
           </a:xfrm>
           <a:prstGeom prst="rect">
             <a:avLst/>
@@ -20900,68 +21841,24 @@
           <a:ln/>
         </p:spPr>
         <p:txBody>
-          <a:bodyPr wrap="square" lIns="0" tIns="0" rIns="0" bIns="0" rtlCol="0" anchor="ctr">
-            <a:normAutofit/>
-          </a:bodyPr>
+          <a:bodyPr wrap="square" lIns="0" tIns="0" rIns="0" bIns="0" rtlCol="0" anchor="ctr"/>
           <a:lstStyle/>
           <a:p>
             <a:pPr algn="ctr" indent="0" marL="0">
               <a:buNone/>
             </a:pPr>
             <a:r>
-              <a:rPr lang="en-US" sz="3600" b="1" dirty="0">
-                <a:solidFill>
-                  <a:srgbClr val="990011"/>
+              <a:rPr lang="en-US" sz="1600" i="1" dirty="0">
+                <a:solidFill>
+                  <a:srgbClr val="555555"/>
                 </a:solidFill>
                 <a:latin typeface="Times New Roman" pitchFamily="34" charset="0"/>
                 <a:ea typeface="Times New Roman" pitchFamily="34" charset="-122"/>
                 <a:cs typeface="Times New Roman" pitchFamily="34" charset="-120"/>
               </a:rPr>
-              <a:t>Expected Answer</a:t>
-            </a:r>
-            <a:endParaRPr lang="en-US" sz="3600" dirty="0"/>
-          </a:p>
-        </p:txBody>
-      </p:sp>
-      <p:sp>
-        <p:nvSpPr>
-          <p:cNvPr id="5" name="Text 2"/>
-          <p:cNvSpPr/>
-          <p:nvPr/>
-        </p:nvSpPr>
-        <p:spPr>
-          <a:xfrm>
-            <a:off x="5349240" y="1783080"/>
-            <a:ext cx="6522415" cy="4663440"/>
-          </a:xfrm>
-          <a:prstGeom prst="rect">
-            <a:avLst/>
-          </a:prstGeom>
-          <a:noFill/>
-          <a:ln/>
-        </p:spPr>
-        <p:txBody>
-          <a:bodyPr wrap="square" lIns="0" tIns="0" rIns="0" bIns="0" rtlCol="0" anchor="t"/>
-          <a:lstStyle/>
-          <a:p>
-            <a:pPr algn="l" indent="0" marL="0">
-              <a:spcAft>
-                <a:spcPts val="800"/>
-              </a:spcAft>
-              <a:buNone/>
-            </a:pPr>
-            <a:r>
-              <a:rPr lang="en-US" sz="4000" dirty="0">
-                <a:solidFill>
-                  <a:srgbClr val="111111"/>
-                </a:solidFill>
-                <a:latin typeface="Times New Roman" pitchFamily="34" charset="0"/>
-                <a:ea typeface="Times New Roman" pitchFamily="34" charset="-122"/>
-                <a:cs typeface="Times New Roman" pitchFamily="34" charset="-120"/>
-              </a:rPr>
-              <a:t>Labour shortages and high spending on pensions and health care (also school closures).</a:t>
-            </a:r>
-            <a:endParaRPr lang="en-US" sz="4000" dirty="0"/>
+              <a:t>Illustration: health care</a:t>
+            </a:r>
+            <a:endParaRPr lang="en-US" sz="1600" dirty="0"/>
           </a:p>
         </p:txBody>
       </p:sp>
@@ -21071,7 +21968,7 @@
                 <a:ea typeface="Calibri" pitchFamily="34" charset="-122"/>
                 <a:cs typeface="Calibri" pitchFamily="34" charset="-120"/>
               </a:rPr>
-              <a:t>REMEDIATION</a:t>
+              <a:t>BOARD SUMMARY</a:t>
             </a:r>
             <a:endParaRPr lang="en-US" sz="1400" dirty="0"/>
           </a:p>
@@ -21094,7 +21991,7 @@
         <p:spPr>
           <a:xfrm>
             <a:off x="0" y="658368"/>
-            <a:ext cx="3840480" cy="5833872"/>
+            <a:ext cx="5120640" cy="5833872"/>
           </a:xfrm>
           <a:prstGeom prst="rect">
             <a:avLst/>
@@ -21109,8 +22006,8 @@
         </p:nvSpPr>
         <p:spPr>
           <a:xfrm>
-            <a:off x="4069080" y="1005840"/>
-            <a:ext cx="7802575" cy="731520"/>
+            <a:off x="5349240" y="1005840"/>
+            <a:ext cx="6522415" cy="731520"/>
           </a:xfrm>
           <a:prstGeom prst="rect">
             <a:avLst/>
@@ -21136,7 +22033,7 @@
                 <a:ea typeface="Times New Roman" pitchFamily="34" charset="-122"/>
                 <a:cs typeface="Times New Roman" pitchFamily="34" charset="-120"/>
               </a:rPr>
-              <a:t>Remediation</a:t>
+              <a:t>2. Global Patterns</a:t>
             </a:r>
             <a:endParaRPr lang="en-US" sz="3600" dirty="0"/>
           </a:p>
@@ -21150,8 +22047,47 @@
         </p:nvSpPr>
         <p:spPr>
           <a:xfrm>
-            <a:off x="4069080" y="1783080"/>
-            <a:ext cx="7802575" cy="4663440"/>
+            <a:off x="5349240" y="1737360"/>
+            <a:ext cx="6522415" cy="457200"/>
+          </a:xfrm>
+          <a:prstGeom prst="rect">
+            <a:avLst/>
+          </a:prstGeom>
+          <a:noFill/>
+          <a:ln/>
+        </p:spPr>
+        <p:txBody>
+          <a:bodyPr wrap="square" lIns="0" tIns="0" rIns="0" bIns="0" rtlCol="0" anchor="ctr"/>
+          <a:lstStyle/>
+          <a:p>
+            <a:pPr algn="l" indent="0" marL="0">
+              <a:buNone/>
+            </a:pPr>
+            <a:r>
+              <a:rPr lang="en-US" sz="2600" b="1" dirty="0">
+                <a:solidFill>
+                  <a:srgbClr val="990011"/>
+                </a:solidFill>
+                <a:latin typeface="Times New Roman" pitchFamily="34" charset="0"/>
+                <a:ea typeface="Times New Roman" pitchFamily="34" charset="-122"/>
+                <a:cs typeface="Times New Roman" pitchFamily="34" charset="-120"/>
+              </a:rPr>
+              <a:t>D) Consequences of an Ageing Population</a:t>
+            </a:r>
+            <a:endParaRPr lang="en-US" sz="2600" dirty="0"/>
+          </a:p>
+        </p:txBody>
+      </p:sp>
+      <p:sp>
+        <p:nvSpPr>
+          <p:cNvPr id="6" name="Text 3"/>
+          <p:cNvSpPr/>
+          <p:nvPr/>
+        </p:nvSpPr>
+        <p:spPr>
+          <a:xfrm>
+            <a:off x="5349240" y="2240280"/>
+            <a:ext cx="6522415" cy="4206240"/>
           </a:xfrm>
           <a:prstGeom prst="rect">
             <a:avLst/>
@@ -21178,18 +22114,13 @@
                 <a:ea typeface="Times New Roman" pitchFamily="34" charset="-122"/>
                 <a:cs typeface="Times New Roman" pitchFamily="34" charset="-120"/>
               </a:rPr>
-              <a:t>Fill in the blanks:</a:t>
-            </a:r>
-            <a:endParaRPr lang="en-US" sz="4000" dirty="0"/>
-          </a:p>
-          <a:p>
-            <a:pPr algn="l" marL="342900" indent="-342900">
+              <a:t>Closure of services: </a:t>
+            </a:r>
+            <a:pPr algn="l" indent="0" marL="0">
               <a:spcAft>
                 <a:spcPts val="800"/>
               </a:spcAft>
-              <a:buSzPct val="100000"/>
-              <a:buFont typeface="+mj-lt"/>
-              <a:buAutoNum type="arabicPeriod" startAt="1"/>
+              <a:buNone/>
             </a:pPr>
             <a:r>
               <a:rPr lang="en-US" sz="4000" dirty="0">
@@ -21200,51 +22131,7 @@
                 <a:ea typeface="Times New Roman" pitchFamily="34" charset="-122"/>
                 <a:cs typeface="Times New Roman" pitchFamily="34" charset="-120"/>
               </a:rPr>
-              <a:t>The number of males per 100 females is the ______.</a:t>
-            </a:r>
-            <a:endParaRPr lang="en-US" sz="4000" dirty="0"/>
-          </a:p>
-          <a:p>
-            <a:pPr algn="l" marL="342900" indent="-342900">
-              <a:spcAft>
-                <a:spcPts val="800"/>
-              </a:spcAft>
-              <a:buSzPct val="100000"/>
-              <a:buFont typeface="+mj-lt"/>
-              <a:buAutoNum type="arabicPeriod" startAt="1"/>
-            </a:pPr>
-            <a:r>
-              <a:rPr lang="en-US" sz="4000" dirty="0">
-                <a:solidFill>
-                  <a:srgbClr val="111111"/>
-                </a:solidFill>
-                <a:latin typeface="Times New Roman" pitchFamily="34" charset="0"/>
-                <a:ea typeface="Times New Roman" pitchFamily="34" charset="-122"/>
-                <a:cs typeface="Times New Roman" pitchFamily="34" charset="-120"/>
-              </a:rPr>
-              <a:t>A population with over 40 % under 15 is ______.</a:t>
-            </a:r>
-            <a:endParaRPr lang="en-US" sz="4000" dirty="0"/>
-          </a:p>
-          <a:p>
-            <a:pPr algn="l" marL="342900" indent="-342900">
-              <a:spcAft>
-                <a:spcPts val="800"/>
-              </a:spcAft>
-              <a:buSzPct val="100000"/>
-              <a:buFont typeface="+mj-lt"/>
-              <a:buAutoNum type="arabicPeriod" startAt="1"/>
-            </a:pPr>
-            <a:r>
-              <a:rPr lang="en-US" sz="4000" dirty="0">
-                <a:solidFill>
-                  <a:srgbClr val="111111"/>
-                </a:solidFill>
-                <a:latin typeface="Times New Roman" pitchFamily="34" charset="0"/>
-                <a:ea typeface="Times New Roman" pitchFamily="34" charset="-122"/>
-                <a:cs typeface="Times New Roman" pitchFamily="34" charset="-120"/>
-              </a:rPr>
-              <a:t>Japan has an ______ population.</a:t>
+              <a:t>Schools and maternity wards close because there are fewer children. Some villages lose their young people and die out.</a:t>
             </a:r>
             <a:endParaRPr lang="en-US" sz="4000" dirty="0"/>
           </a:p>
@@ -21356,7 +22243,7 @@
                 <a:ea typeface="Calibri" pitchFamily="34" charset="-122"/>
                 <a:cs typeface="Calibri" pitchFamily="34" charset="-120"/>
               </a:rPr>
-              <a:t>HOMEWORK</a:t>
+              <a:t>BOARD SUMMARY</a:t>
             </a:r>
             <a:endParaRPr lang="en-US" sz="1400" dirty="0"/>
           </a:p>
@@ -21379,7 +22266,7 @@
         <p:spPr>
           <a:xfrm>
             <a:off x="0" y="658368"/>
-            <a:ext cx="5120640" cy="5833872"/>
+            <a:ext cx="3840480" cy="5833872"/>
           </a:xfrm>
           <a:prstGeom prst="rect">
             <a:avLst/>
@@ -21394,8 +22281,8 @@
         </p:nvSpPr>
         <p:spPr>
           <a:xfrm>
-            <a:off x="5349240" y="1005840"/>
-            <a:ext cx="6522415" cy="731520"/>
+            <a:off x="4069080" y="1005840"/>
+            <a:ext cx="7802575" cy="731520"/>
           </a:xfrm>
           <a:prstGeom prst="rect">
             <a:avLst/>
@@ -21421,7 +22308,7 @@
                 <a:ea typeface="Times New Roman" pitchFamily="34" charset="-122"/>
                 <a:cs typeface="Times New Roman" pitchFamily="34" charset="-120"/>
               </a:rPr>
-              <a:t>Homework</a:t>
+              <a:t>2. Global Patterns</a:t>
             </a:r>
             <a:endParaRPr lang="en-US" sz="3600" dirty="0"/>
           </a:p>
@@ -21435,8 +22322,47 @@
         </p:nvSpPr>
         <p:spPr>
           <a:xfrm>
-            <a:off x="5349240" y="1783080"/>
-            <a:ext cx="6522415" cy="4663440"/>
+            <a:off x="4069080" y="1737360"/>
+            <a:ext cx="7802575" cy="457200"/>
+          </a:xfrm>
+          <a:prstGeom prst="rect">
+            <a:avLst/>
+          </a:prstGeom>
+          <a:noFill/>
+          <a:ln/>
+        </p:spPr>
+        <p:txBody>
+          <a:bodyPr wrap="square" lIns="0" tIns="0" rIns="0" bIns="0" rtlCol="0" anchor="ctr"/>
+          <a:lstStyle/>
+          <a:p>
+            <a:pPr algn="l" indent="0" marL="0">
+              <a:buNone/>
+            </a:pPr>
+            <a:r>
+              <a:rPr lang="en-US" sz="3100" b="1" dirty="0">
+                <a:solidFill>
+                  <a:srgbClr val="990011"/>
+                </a:solidFill>
+                <a:latin typeface="Times New Roman" pitchFamily="34" charset="0"/>
+                <a:ea typeface="Times New Roman" pitchFamily="34" charset="-122"/>
+                <a:cs typeface="Times New Roman" pitchFamily="34" charset="-120"/>
+              </a:rPr>
+              <a:t>D) Consequences of an Ageing Population</a:t>
+            </a:r>
+            <a:endParaRPr lang="en-US" sz="3100" dirty="0"/>
+          </a:p>
+        </p:txBody>
+      </p:sp>
+      <p:sp>
+        <p:nvSpPr>
+          <p:cNvPr id="6" name="Text 3"/>
+          <p:cNvSpPr/>
+          <p:nvPr/>
+        </p:nvSpPr>
+        <p:spPr>
+          <a:xfrm>
+            <a:off x="4069080" y="2240280"/>
+            <a:ext cx="7802575" cy="4206240"/>
           </a:xfrm>
           <a:prstGeom prst="rect">
             <a:avLst/>
@@ -21455,7 +22381,7 @@
               <a:buNone/>
             </a:pPr>
             <a:r>
-              <a:rPr lang="en-US" sz="4000" dirty="0">
+              <a:rPr lang="en-US" sz="4000" b="1" dirty="0">
                 <a:solidFill>
                   <a:srgbClr val="111111"/>
                 </a:solidFill>
@@ -21463,7 +22389,24 @@
                 <a:ea typeface="Times New Roman" pitchFamily="34" charset="-122"/>
                 <a:cs typeface="Times New Roman" pitchFamily="34" charset="-120"/>
               </a:rPr>
-              <a:t>State what the base of a population pyramid represents.</a:t>
+              <a:t>Government responses: </a:t>
+            </a:r>
+            <a:pPr algn="l" indent="0" marL="0">
+              <a:spcAft>
+                <a:spcPts val="800"/>
+              </a:spcAft>
+              <a:buNone/>
+            </a:pPr>
+            <a:r>
+              <a:rPr lang="en-US" sz="4000" dirty="0">
+                <a:solidFill>
+                  <a:srgbClr val="111111"/>
+                </a:solidFill>
+                <a:latin typeface="Times New Roman" pitchFamily="34" charset="0"/>
+                <a:ea typeface="Times New Roman" pitchFamily="34" charset="-122"/>
+                <a:cs typeface="Times New Roman" pitchFamily="34" charset="-120"/>
+              </a:rPr>
+              <a:t>Governments raise the retirement age and encourage births with family allowances. They also accept immigrant workers to fill labour shortages.</a:t>
             </a:r>
             <a:endParaRPr lang="en-US" sz="4000" dirty="0"/>
           </a:p>
@@ -21575,7 +22518,7 @@
                 <a:ea typeface="Calibri" pitchFamily="34" charset="-122"/>
                 <a:cs typeface="Calibri" pitchFamily="34" charset="-120"/>
               </a:rPr>
-              <a:t>NEXT LESSON</a:t>
+              <a:t>FORMATIVE EVALUATION</a:t>
             </a:r>
             <a:endParaRPr lang="en-US" sz="1400" dirty="0"/>
           </a:p>
@@ -21640,7 +22583,7 @@
                 <a:ea typeface="Times New Roman" pitchFamily="34" charset="-122"/>
                 <a:cs typeface="Times New Roman" pitchFamily="34" charset="-120"/>
               </a:rPr>
-              <a:t>Next Lesson</a:t>
+              <a:t>Evaluation 1</a:t>
             </a:r>
             <a:endParaRPr lang="en-US" sz="3600" dirty="0"/>
           </a:p>
@@ -21664,17 +22607,17 @@
           <a:ln/>
         </p:spPr>
         <p:txBody>
-          <a:bodyPr wrap="square" lIns="0" tIns="0" rIns="0" bIns="0" rtlCol="0" anchor="ctr"/>
-          <a:lstStyle/>
-          <a:p>
-            <a:pPr algn="ctr" indent="0" marL="0">
+          <a:bodyPr wrap="square" lIns="0" tIns="0" rIns="0" bIns="0" rtlCol="0" anchor="t"/>
+          <a:lstStyle/>
+          <a:p>
+            <a:pPr algn="l" indent="0" marL="0">
               <a:spcAft>
                 <a:spcPts val="800"/>
               </a:spcAft>
               <a:buNone/>
             </a:pPr>
             <a:r>
-              <a:rPr lang="en-US" sz="4000" b="1" dirty="0">
+              <a:rPr lang="en-US" sz="4000" dirty="0">
                 <a:solidFill>
                   <a:srgbClr val="111111"/>
                 </a:solidFill>
@@ -21682,27 +22625,7 @@
                 <a:ea typeface="Times New Roman" pitchFamily="34" charset="-122"/>
                 <a:cs typeface="Times New Roman" pitchFamily="34" charset="-120"/>
               </a:rPr>
-              <a:t>Our next lesson will be on:</a:t>
-            </a:r>
-            <a:endParaRPr lang="en-US" sz="4000" dirty="0"/>
-          </a:p>
-          <a:p>
-            <a:pPr algn="ctr" indent="0" marL="0">
-              <a:spcAft>
-                <a:spcPts val="800"/>
-              </a:spcAft>
-              <a:buNone/>
-            </a:pPr>
-            <a:r>
-              <a:rPr lang="en-US" sz="4000" b="1" dirty="0">
-                <a:solidFill>
-                  <a:srgbClr val="990011"/>
-                </a:solidFill>
-                <a:latin typeface="Times New Roman" pitchFamily="34" charset="0"/>
-                <a:ea typeface="Times New Roman" pitchFamily="34" charset="-122"/>
-                <a:cs typeface="Times New Roman" pitchFamily="34" charset="-120"/>
-              </a:rPr>
-              <a:t>Lesson 7: Population Pyramids</a:t>
+              <a:t>Give two characteristics of a youthful population.</a:t>
             </a:r>
             <a:endParaRPr lang="en-US" sz="4000" dirty="0"/>
           </a:p>
@@ -22145,22 +23068,46 @@
                 <a:ea typeface="Calibri" pitchFamily="34" charset="-122"/>
                 <a:cs typeface="Calibri" pitchFamily="34" charset="-120"/>
               </a:rPr>
-              <a:t>BILINGUAL GAME</a:t>
+              <a:t>FORMATIVE EVALUATION</a:t>
             </a:r>
             <a:endParaRPr lang="en-US" sz="1400" dirty="0"/>
           </a:p>
         </p:txBody>
       </p:sp>
-      <p:sp>
-        <p:nvSpPr>
-          <p:cNvPr id="3" name="Text 1"/>
+      <p:pic>
+        <p:nvPicPr>
+          <p:cNvPr id="3" name="Image 0" descr="/home/claude/f4/img/minesec_sheet.png">    </p:cNvPr>
+          <p:cNvPicPr>
+            <a:picLocks noChangeAspect="1"/>
+          </p:cNvPicPr>
+          <p:nvPr/>
+        </p:nvPicPr>
+        <p:blipFill>
+          <a:blip r:embed="rId1"/>
+          <a:stretch>
+            <a:fillRect/>
+          </a:stretch>
+        </p:blipFill>
+        <p:spPr>
+          <a:xfrm>
+            <a:off x="0" y="658368"/>
+            <a:ext cx="5120640" cy="5833872"/>
+          </a:xfrm>
+          <a:prstGeom prst="rect">
+            <a:avLst/>
+          </a:prstGeom>
+        </p:spPr>
+      </p:pic>
+      <p:sp>
+        <p:nvSpPr>
+          <p:cNvPr id="4" name="Text 1"/>
           <p:cNvSpPr/>
           <p:nvPr/>
         </p:nvSpPr>
         <p:spPr>
           <a:xfrm>
-            <a:off x="457200" y="1005840"/>
-            <a:ext cx="11277295" cy="731520"/>
+            <a:off x="5349240" y="1005840"/>
+            <a:ext cx="6522415" cy="731520"/>
           </a:xfrm>
           <a:prstGeom prst="rect">
             <a:avLst/>
@@ -22169,7 +23116,9 @@
           <a:ln/>
         </p:spPr>
         <p:txBody>
-          <a:bodyPr wrap="square" lIns="0" tIns="0" rIns="0" bIns="0" rtlCol="0" anchor="ctr"/>
+          <a:bodyPr wrap="square" lIns="0" tIns="0" rIns="0" bIns="0" rtlCol="0" anchor="ctr">
+            <a:normAutofit/>
+          </a:bodyPr>
           <a:lstStyle/>
           <a:p>
             <a:pPr algn="ctr" indent="0" marL="0">
@@ -22184,6 +23133,1380 @@
                 <a:ea typeface="Times New Roman" pitchFamily="34" charset="-122"/>
                 <a:cs typeface="Times New Roman" pitchFamily="34" charset="-120"/>
               </a:rPr>
+              <a:t>Expected Answer</a:t>
+            </a:r>
+            <a:endParaRPr lang="en-US" sz="3600" dirty="0"/>
+          </a:p>
+        </p:txBody>
+      </p:sp>
+      <p:sp>
+        <p:nvSpPr>
+          <p:cNvPr id="5" name="Text 2"/>
+          <p:cNvSpPr/>
+          <p:nvPr/>
+        </p:nvSpPr>
+        <p:spPr>
+          <a:xfrm>
+            <a:off x="5349240" y="1783080"/>
+            <a:ext cx="6522415" cy="4663440"/>
+          </a:xfrm>
+          <a:prstGeom prst="rect">
+            <a:avLst/>
+          </a:prstGeom>
+          <a:noFill/>
+          <a:ln/>
+        </p:spPr>
+        <p:txBody>
+          <a:bodyPr wrap="square" lIns="0" tIns="0" rIns="0" bIns="0" rtlCol="0" anchor="t"/>
+          <a:lstStyle/>
+          <a:p>
+            <a:pPr algn="l" indent="0" marL="0">
+              <a:spcAft>
+                <a:spcPts val="800"/>
+              </a:spcAft>
+              <a:buNone/>
+            </a:pPr>
+            <a:r>
+              <a:rPr lang="en-US" sz="4000" dirty="0">
+                <a:solidFill>
+                  <a:srgbClr val="111111"/>
+                </a:solidFill>
+                <a:latin typeface="Times New Roman" pitchFamily="34" charset="0"/>
+                <a:ea typeface="Times New Roman" pitchFamily="34" charset="-122"/>
+                <a:cs typeface="Times New Roman" pitchFamily="34" charset="-120"/>
+              </a:rPr>
+              <a:t>Over 40 % of people under 15 and fewer than 5 % aged 65 or over; high birth rates.</a:t>
+            </a:r>
+            <a:endParaRPr lang="en-US" sz="4000" dirty="0"/>
+          </a:p>
+        </p:txBody>
+      </p:sp>
+      <p:sp>
+        <p:nvSpPr>
+          <p:cNvPr id="25" name="Slide Number Placeholder 0"/>
+          <p:cNvSpPr>
+            <a:spLocks noGrp="1"/>
+          </p:cNvSpPr>
+          <p:nvPr>
+            <p:ph type="sldNum" sz="quarter" idx="4294967295"/>
+          </p:nvPr>
+        </p:nvSpPr>
+        <p:spPr>
+          <a:xfrm>
+            <a:off x="27432" y="91440"/>
+            <a:ext cx="585216" cy="475488"/>
+          </a:xfrm>
+          <a:prstGeom prst="rect">
+            <a:avLst/>
+          </a:prstGeom>
+          <a:extLst>
+            <a:ext uri="{C572A759-6A51-4108-AA02-DFA0A04FC94B}">
+              <ma14:wrappingTextBoxFlag xmlns:ma14="http://schemas.microsoft.com/office/mac/drawingml/2011/main" val="0"/>
+            </a:ext>
+          </a:extLst>
+        </p:spPr>
+        <p:txBody>
+          <a:bodyPr/>
+          <a:lstStyle>
+            <a:lvl1pPr>
+              <a:defRPr sz="2000">
+                <a:solidFill>
+                  <a:srgbClr val="FFFFFF"/>
+                </a:solidFill>
+                <a:latin typeface="Calibri"/>
+                <a:ea typeface="Calibri"/>
+                <a:cs typeface="Calibri"/>
+              </a:defRPr>
+            </a:lvl1pPr>
+          </a:lstStyle>
+          <a:p>
+            <a:pPr algn="ctr"/>
+            <a:fld id="{F7021451-1387-4CA6-816F-3879F97B5CBC}" type="slidenum">
+              <a:rPr b="1" lang="en-US"/>
+              <a:t>60</a:t>
+            </a:fld>
+            <a:endParaRPr lang="en-US"/>
+          </a:p>
+        </p:txBody>
+      </p:sp>
+    </p:spTree>
+  </p:cSld>
+  <p:clrMapOvr>
+    <a:masterClrMapping/>
+  </p:clrMapOvr>
+</p:sld>
+</file>
+
+<file path=ppt/slides/slide61.xml><?xml version="1.0" encoding="utf-8"?>
+<p:sld xmlns:a="http://schemas.openxmlformats.org/drawingml/2006/main" xmlns:r="http://schemas.openxmlformats.org/officeDocument/2006/relationships" xmlns:p="http://schemas.openxmlformats.org/presentationml/2006/main">
+  <p:cSld name="Slide 61">
+    <p:spTree>
+      <p:nvGrpSpPr>
+        <p:cNvPr id="1" name=""/>
+        <p:cNvGrpSpPr/>
+        <p:nvPr/>
+      </p:nvGrpSpPr>
+      <p:grpSpPr>
+        <a:xfrm>
+          <a:off x="0" y="0"/>
+          <a:ext cx="0" cy="0"/>
+          <a:chOff x="0" y="0"/>
+          <a:chExt cx="0" cy="0"/>
+        </a:xfrm>
+      </p:grpSpPr>
+      <p:sp>
+        <p:nvSpPr>
+          <p:cNvPr id="2" name="Text 0"/>
+          <p:cNvSpPr/>
+          <p:nvPr/>
+        </p:nvSpPr>
+        <p:spPr>
+          <a:xfrm>
+            <a:off x="457200" y="713232"/>
+            <a:ext cx="11368735" cy="274320"/>
+          </a:xfrm>
+          <a:prstGeom prst="rect">
+            <a:avLst/>
+          </a:prstGeom>
+          <a:noFill/>
+          <a:ln/>
+        </p:spPr>
+        <p:txBody>
+          <a:bodyPr wrap="square" lIns="0" tIns="0" rIns="0" bIns="0" rtlCol="0" anchor="ctr"/>
+          <a:lstStyle/>
+          <a:p>
+            <a:pPr algn="r" indent="0" marL="0">
+              <a:buNone/>
+            </a:pPr>
+            <a:r>
+              <a:rPr lang="en-US" sz="1400" b="1" dirty="0">
+                <a:solidFill>
+                  <a:srgbClr val="1C3F6E"/>
+                </a:solidFill>
+                <a:latin typeface="Calibri" pitchFamily="34" charset="0"/>
+                <a:ea typeface="Calibri" pitchFamily="34" charset="-122"/>
+                <a:cs typeface="Calibri" pitchFamily="34" charset="-120"/>
+              </a:rPr>
+              <a:t>FORMATIVE EVALUATION</a:t>
+            </a:r>
+            <a:endParaRPr lang="en-US" sz="1400" dirty="0"/>
+          </a:p>
+        </p:txBody>
+      </p:sp>
+      <p:pic>
+        <p:nvPicPr>
+          <p:cNvPr id="3" name="Image 0" descr="/home/claude/f4/img/minesec_sheet.png">    </p:cNvPr>
+          <p:cNvPicPr>
+            <a:picLocks noChangeAspect="1"/>
+          </p:cNvPicPr>
+          <p:nvPr/>
+        </p:nvPicPr>
+        <p:blipFill>
+          <a:blip r:embed="rId1"/>
+          <a:stretch>
+            <a:fillRect/>
+          </a:stretch>
+        </p:blipFill>
+        <p:spPr>
+          <a:xfrm>
+            <a:off x="0" y="658368"/>
+            <a:ext cx="5120640" cy="5833872"/>
+          </a:xfrm>
+          <a:prstGeom prst="rect">
+            <a:avLst/>
+          </a:prstGeom>
+        </p:spPr>
+      </p:pic>
+      <p:sp>
+        <p:nvSpPr>
+          <p:cNvPr id="4" name="Text 1"/>
+          <p:cNvSpPr/>
+          <p:nvPr/>
+        </p:nvSpPr>
+        <p:spPr>
+          <a:xfrm>
+            <a:off x="5349240" y="1005840"/>
+            <a:ext cx="6522415" cy="731520"/>
+          </a:xfrm>
+          <a:prstGeom prst="rect">
+            <a:avLst/>
+          </a:prstGeom>
+          <a:noFill/>
+          <a:ln/>
+        </p:spPr>
+        <p:txBody>
+          <a:bodyPr wrap="square" lIns="0" tIns="0" rIns="0" bIns="0" rtlCol="0" anchor="ctr">
+            <a:normAutofit/>
+          </a:bodyPr>
+          <a:lstStyle/>
+          <a:p>
+            <a:pPr algn="ctr" indent="0" marL="0">
+              <a:buNone/>
+            </a:pPr>
+            <a:r>
+              <a:rPr lang="en-US" sz="3600" b="1" dirty="0">
+                <a:solidFill>
+                  <a:srgbClr val="990011"/>
+                </a:solidFill>
+                <a:latin typeface="Times New Roman" pitchFamily="34" charset="0"/>
+                <a:ea typeface="Times New Roman" pitchFamily="34" charset="-122"/>
+                <a:cs typeface="Times New Roman" pitchFamily="34" charset="-120"/>
+              </a:rPr>
+              <a:t>Evaluation 2</a:t>
+            </a:r>
+            <a:endParaRPr lang="en-US" sz="3600" dirty="0"/>
+          </a:p>
+        </p:txBody>
+      </p:sp>
+      <p:sp>
+        <p:nvSpPr>
+          <p:cNvPr id="5" name="Text 2"/>
+          <p:cNvSpPr/>
+          <p:nvPr/>
+        </p:nvSpPr>
+        <p:spPr>
+          <a:xfrm>
+            <a:off x="5349240" y="1783080"/>
+            <a:ext cx="6522415" cy="4663440"/>
+          </a:xfrm>
+          <a:prstGeom prst="rect">
+            <a:avLst/>
+          </a:prstGeom>
+          <a:noFill/>
+          <a:ln/>
+        </p:spPr>
+        <p:txBody>
+          <a:bodyPr wrap="square" lIns="0" tIns="0" rIns="0" bIns="0" rtlCol="0" anchor="t"/>
+          <a:lstStyle/>
+          <a:p>
+            <a:pPr algn="l" indent="0" marL="0">
+              <a:spcAft>
+                <a:spcPts val="800"/>
+              </a:spcAft>
+              <a:buNone/>
+            </a:pPr>
+            <a:r>
+              <a:rPr lang="en-US" sz="4000" dirty="0">
+                <a:solidFill>
+                  <a:srgbClr val="111111"/>
+                </a:solidFill>
+                <a:latin typeface="Times New Roman" pitchFamily="34" charset="0"/>
+                <a:ea typeface="Times New Roman" pitchFamily="34" charset="-122"/>
+                <a:cs typeface="Times New Roman" pitchFamily="34" charset="-120"/>
+              </a:rPr>
+              <a:t>Give two consequences of an ageing population.</a:t>
+            </a:r>
+            <a:endParaRPr lang="en-US" sz="4000" dirty="0"/>
+          </a:p>
+        </p:txBody>
+      </p:sp>
+      <p:sp>
+        <p:nvSpPr>
+          <p:cNvPr id="25" name="Slide Number Placeholder 0"/>
+          <p:cNvSpPr>
+            <a:spLocks noGrp="1"/>
+          </p:cNvSpPr>
+          <p:nvPr>
+            <p:ph type="sldNum" sz="quarter" idx="4294967295"/>
+          </p:nvPr>
+        </p:nvSpPr>
+        <p:spPr>
+          <a:xfrm>
+            <a:off x="27432" y="91440"/>
+            <a:ext cx="585216" cy="475488"/>
+          </a:xfrm>
+          <a:prstGeom prst="rect">
+            <a:avLst/>
+          </a:prstGeom>
+          <a:extLst>
+            <a:ext uri="{C572A759-6A51-4108-AA02-DFA0A04FC94B}">
+              <ma14:wrappingTextBoxFlag xmlns:ma14="http://schemas.microsoft.com/office/mac/drawingml/2011/main" val="0"/>
+            </a:ext>
+          </a:extLst>
+        </p:spPr>
+        <p:txBody>
+          <a:bodyPr/>
+          <a:lstStyle>
+            <a:lvl1pPr>
+              <a:defRPr sz="2000">
+                <a:solidFill>
+                  <a:srgbClr val="FFFFFF"/>
+                </a:solidFill>
+                <a:latin typeface="Calibri"/>
+                <a:ea typeface="Calibri"/>
+                <a:cs typeface="Calibri"/>
+              </a:defRPr>
+            </a:lvl1pPr>
+          </a:lstStyle>
+          <a:p>
+            <a:pPr algn="ctr"/>
+            <a:fld id="{F7021451-1387-4CA6-816F-3879F97B5CBC}" type="slidenum">
+              <a:rPr b="1" lang="en-US"/>
+              <a:t>61</a:t>
+            </a:fld>
+            <a:endParaRPr lang="en-US"/>
+          </a:p>
+        </p:txBody>
+      </p:sp>
+    </p:spTree>
+  </p:cSld>
+  <p:clrMapOvr>
+    <a:masterClrMapping/>
+  </p:clrMapOvr>
+</p:sld>
+</file>
+
+<file path=ppt/slides/slide62.xml><?xml version="1.0" encoding="utf-8"?>
+<p:sld xmlns:a="http://schemas.openxmlformats.org/drawingml/2006/main" xmlns:r="http://schemas.openxmlformats.org/officeDocument/2006/relationships" xmlns:p="http://schemas.openxmlformats.org/presentationml/2006/main">
+  <p:cSld name="Slide 62">
+    <p:spTree>
+      <p:nvGrpSpPr>
+        <p:cNvPr id="1" name=""/>
+        <p:cNvGrpSpPr/>
+        <p:nvPr/>
+      </p:nvGrpSpPr>
+      <p:grpSpPr>
+        <a:xfrm>
+          <a:off x="0" y="0"/>
+          <a:ext cx="0" cy="0"/>
+          <a:chOff x="0" y="0"/>
+          <a:chExt cx="0" cy="0"/>
+        </a:xfrm>
+      </p:grpSpPr>
+      <p:sp>
+        <p:nvSpPr>
+          <p:cNvPr id="2" name="Text 0"/>
+          <p:cNvSpPr/>
+          <p:nvPr/>
+        </p:nvSpPr>
+        <p:spPr>
+          <a:xfrm>
+            <a:off x="457200" y="713232"/>
+            <a:ext cx="11368735" cy="274320"/>
+          </a:xfrm>
+          <a:prstGeom prst="rect">
+            <a:avLst/>
+          </a:prstGeom>
+          <a:noFill/>
+          <a:ln/>
+        </p:spPr>
+        <p:txBody>
+          <a:bodyPr wrap="square" lIns="0" tIns="0" rIns="0" bIns="0" rtlCol="0" anchor="ctr"/>
+          <a:lstStyle/>
+          <a:p>
+            <a:pPr algn="r" indent="0" marL="0">
+              <a:buNone/>
+            </a:pPr>
+            <a:r>
+              <a:rPr lang="en-US" sz="1400" b="1" dirty="0">
+                <a:solidFill>
+                  <a:srgbClr val="1C3F6E"/>
+                </a:solidFill>
+                <a:latin typeface="Calibri" pitchFamily="34" charset="0"/>
+                <a:ea typeface="Calibri" pitchFamily="34" charset="-122"/>
+                <a:cs typeface="Calibri" pitchFamily="34" charset="-120"/>
+              </a:rPr>
+              <a:t>FORMATIVE EVALUATION</a:t>
+            </a:r>
+            <a:endParaRPr lang="en-US" sz="1400" dirty="0"/>
+          </a:p>
+        </p:txBody>
+      </p:sp>
+      <p:pic>
+        <p:nvPicPr>
+          <p:cNvPr id="3" name="Image 0" descr="/home/claude/f4/img/minesec_sheet.png">    </p:cNvPr>
+          <p:cNvPicPr>
+            <a:picLocks noChangeAspect="1"/>
+          </p:cNvPicPr>
+          <p:nvPr/>
+        </p:nvPicPr>
+        <p:blipFill>
+          <a:blip r:embed="rId1"/>
+          <a:stretch>
+            <a:fillRect/>
+          </a:stretch>
+        </p:blipFill>
+        <p:spPr>
+          <a:xfrm>
+            <a:off x="0" y="658368"/>
+            <a:ext cx="5120640" cy="5833872"/>
+          </a:xfrm>
+          <a:prstGeom prst="rect">
+            <a:avLst/>
+          </a:prstGeom>
+        </p:spPr>
+      </p:pic>
+      <p:sp>
+        <p:nvSpPr>
+          <p:cNvPr id="4" name="Text 1"/>
+          <p:cNvSpPr/>
+          <p:nvPr/>
+        </p:nvSpPr>
+        <p:spPr>
+          <a:xfrm>
+            <a:off x="5349240" y="1005840"/>
+            <a:ext cx="6522415" cy="731520"/>
+          </a:xfrm>
+          <a:prstGeom prst="rect">
+            <a:avLst/>
+          </a:prstGeom>
+          <a:noFill/>
+          <a:ln/>
+        </p:spPr>
+        <p:txBody>
+          <a:bodyPr wrap="square" lIns="0" tIns="0" rIns="0" bIns="0" rtlCol="0" anchor="ctr">
+            <a:normAutofit/>
+          </a:bodyPr>
+          <a:lstStyle/>
+          <a:p>
+            <a:pPr algn="ctr" indent="0" marL="0">
+              <a:buNone/>
+            </a:pPr>
+            <a:r>
+              <a:rPr lang="en-US" sz="3600" b="1" dirty="0">
+                <a:solidFill>
+                  <a:srgbClr val="990011"/>
+                </a:solidFill>
+                <a:latin typeface="Times New Roman" pitchFamily="34" charset="0"/>
+                <a:ea typeface="Times New Roman" pitchFamily="34" charset="-122"/>
+                <a:cs typeface="Times New Roman" pitchFamily="34" charset="-120"/>
+              </a:rPr>
+              <a:t>Expected Answer</a:t>
+            </a:r>
+            <a:endParaRPr lang="en-US" sz="3600" dirty="0"/>
+          </a:p>
+        </p:txBody>
+      </p:sp>
+      <p:sp>
+        <p:nvSpPr>
+          <p:cNvPr id="5" name="Text 2"/>
+          <p:cNvSpPr/>
+          <p:nvPr/>
+        </p:nvSpPr>
+        <p:spPr>
+          <a:xfrm>
+            <a:off x="5349240" y="1783080"/>
+            <a:ext cx="6522415" cy="4663440"/>
+          </a:xfrm>
+          <a:prstGeom prst="rect">
+            <a:avLst/>
+          </a:prstGeom>
+          <a:noFill/>
+          <a:ln/>
+        </p:spPr>
+        <p:txBody>
+          <a:bodyPr wrap="square" lIns="0" tIns="0" rIns="0" bIns="0" rtlCol="0" anchor="t"/>
+          <a:lstStyle/>
+          <a:p>
+            <a:pPr algn="l" indent="0" marL="0">
+              <a:spcAft>
+                <a:spcPts val="800"/>
+              </a:spcAft>
+              <a:buNone/>
+            </a:pPr>
+            <a:r>
+              <a:rPr lang="en-US" sz="4000" dirty="0">
+                <a:solidFill>
+                  <a:srgbClr val="111111"/>
+                </a:solidFill>
+                <a:latin typeface="Times New Roman" pitchFamily="34" charset="0"/>
+                <a:ea typeface="Times New Roman" pitchFamily="34" charset="-122"/>
+                <a:cs typeface="Times New Roman" pitchFamily="34" charset="-120"/>
+              </a:rPr>
+              <a:t>Labour shortages and high spending on pensions and health care (also school closures).</a:t>
+            </a:r>
+            <a:endParaRPr lang="en-US" sz="4000" dirty="0"/>
+          </a:p>
+        </p:txBody>
+      </p:sp>
+      <p:sp>
+        <p:nvSpPr>
+          <p:cNvPr id="25" name="Slide Number Placeholder 0"/>
+          <p:cNvSpPr>
+            <a:spLocks noGrp="1"/>
+          </p:cNvSpPr>
+          <p:nvPr>
+            <p:ph type="sldNum" sz="quarter" idx="4294967295"/>
+          </p:nvPr>
+        </p:nvSpPr>
+        <p:spPr>
+          <a:xfrm>
+            <a:off x="27432" y="91440"/>
+            <a:ext cx="585216" cy="475488"/>
+          </a:xfrm>
+          <a:prstGeom prst="rect">
+            <a:avLst/>
+          </a:prstGeom>
+          <a:extLst>
+            <a:ext uri="{C572A759-6A51-4108-AA02-DFA0A04FC94B}">
+              <ma14:wrappingTextBoxFlag xmlns:ma14="http://schemas.microsoft.com/office/mac/drawingml/2011/main" val="0"/>
+            </a:ext>
+          </a:extLst>
+        </p:spPr>
+        <p:txBody>
+          <a:bodyPr/>
+          <a:lstStyle>
+            <a:lvl1pPr>
+              <a:defRPr sz="2000">
+                <a:solidFill>
+                  <a:srgbClr val="FFFFFF"/>
+                </a:solidFill>
+                <a:latin typeface="Calibri"/>
+                <a:ea typeface="Calibri"/>
+                <a:cs typeface="Calibri"/>
+              </a:defRPr>
+            </a:lvl1pPr>
+          </a:lstStyle>
+          <a:p>
+            <a:pPr algn="ctr"/>
+            <a:fld id="{F7021451-1387-4CA6-816F-3879F97B5CBC}" type="slidenum">
+              <a:rPr b="1" lang="en-US"/>
+              <a:t>62</a:t>
+            </a:fld>
+            <a:endParaRPr lang="en-US"/>
+          </a:p>
+        </p:txBody>
+      </p:sp>
+    </p:spTree>
+  </p:cSld>
+  <p:clrMapOvr>
+    <a:masterClrMapping/>
+  </p:clrMapOvr>
+</p:sld>
+</file>
+
+<file path=ppt/slides/slide63.xml><?xml version="1.0" encoding="utf-8"?>
+<p:sld xmlns:a="http://schemas.openxmlformats.org/drawingml/2006/main" xmlns:r="http://schemas.openxmlformats.org/officeDocument/2006/relationships" xmlns:p="http://schemas.openxmlformats.org/presentationml/2006/main">
+  <p:cSld name="Slide 63">
+    <p:spTree>
+      <p:nvGrpSpPr>
+        <p:cNvPr id="1" name=""/>
+        <p:cNvGrpSpPr/>
+        <p:nvPr/>
+      </p:nvGrpSpPr>
+      <p:grpSpPr>
+        <a:xfrm>
+          <a:off x="0" y="0"/>
+          <a:ext cx="0" cy="0"/>
+          <a:chOff x="0" y="0"/>
+          <a:chExt cx="0" cy="0"/>
+        </a:xfrm>
+      </p:grpSpPr>
+      <p:sp>
+        <p:nvSpPr>
+          <p:cNvPr id="2" name="Text 0"/>
+          <p:cNvSpPr/>
+          <p:nvPr/>
+        </p:nvSpPr>
+        <p:spPr>
+          <a:xfrm>
+            <a:off x="457200" y="713232"/>
+            <a:ext cx="11368735" cy="274320"/>
+          </a:xfrm>
+          <a:prstGeom prst="rect">
+            <a:avLst/>
+          </a:prstGeom>
+          <a:noFill/>
+          <a:ln/>
+        </p:spPr>
+        <p:txBody>
+          <a:bodyPr wrap="square" lIns="0" tIns="0" rIns="0" bIns="0" rtlCol="0" anchor="ctr"/>
+          <a:lstStyle/>
+          <a:p>
+            <a:pPr algn="r" indent="0" marL="0">
+              <a:buNone/>
+            </a:pPr>
+            <a:r>
+              <a:rPr lang="en-US" sz="1400" b="1" dirty="0">
+                <a:solidFill>
+                  <a:srgbClr val="1C3F6E"/>
+                </a:solidFill>
+                <a:latin typeface="Calibri" pitchFamily="34" charset="0"/>
+                <a:ea typeface="Calibri" pitchFamily="34" charset="-122"/>
+                <a:cs typeface="Calibri" pitchFamily="34" charset="-120"/>
+              </a:rPr>
+              <a:t>REMEDIATION</a:t>
+            </a:r>
+            <a:endParaRPr lang="en-US" sz="1400" dirty="0"/>
+          </a:p>
+        </p:txBody>
+      </p:sp>
+      <p:pic>
+        <p:nvPicPr>
+          <p:cNvPr id="3" name="Image 0" descr="/home/claude/f4/img/minesec_sheet.png">    </p:cNvPr>
+          <p:cNvPicPr>
+            <a:picLocks noChangeAspect="1"/>
+          </p:cNvPicPr>
+          <p:nvPr/>
+        </p:nvPicPr>
+        <p:blipFill>
+          <a:blip r:embed="rId1"/>
+          <a:stretch>
+            <a:fillRect/>
+          </a:stretch>
+        </p:blipFill>
+        <p:spPr>
+          <a:xfrm>
+            <a:off x="0" y="658368"/>
+            <a:ext cx="3840480" cy="5833872"/>
+          </a:xfrm>
+          <a:prstGeom prst="rect">
+            <a:avLst/>
+          </a:prstGeom>
+        </p:spPr>
+      </p:pic>
+      <p:sp>
+        <p:nvSpPr>
+          <p:cNvPr id="4" name="Text 1"/>
+          <p:cNvSpPr/>
+          <p:nvPr/>
+        </p:nvSpPr>
+        <p:spPr>
+          <a:xfrm>
+            <a:off x="4069080" y="1005840"/>
+            <a:ext cx="7802575" cy="731520"/>
+          </a:xfrm>
+          <a:prstGeom prst="rect">
+            <a:avLst/>
+          </a:prstGeom>
+          <a:noFill/>
+          <a:ln/>
+        </p:spPr>
+        <p:txBody>
+          <a:bodyPr wrap="square" lIns="0" tIns="0" rIns="0" bIns="0" rtlCol="0" anchor="ctr">
+            <a:normAutofit/>
+          </a:bodyPr>
+          <a:lstStyle/>
+          <a:p>
+            <a:pPr algn="ctr" indent="0" marL="0">
+              <a:buNone/>
+            </a:pPr>
+            <a:r>
+              <a:rPr lang="en-US" sz="3600" b="1" dirty="0">
+                <a:solidFill>
+                  <a:srgbClr val="990011"/>
+                </a:solidFill>
+                <a:latin typeface="Times New Roman" pitchFamily="34" charset="0"/>
+                <a:ea typeface="Times New Roman" pitchFamily="34" charset="-122"/>
+                <a:cs typeface="Times New Roman" pitchFamily="34" charset="-120"/>
+              </a:rPr>
+              <a:t>Remediation</a:t>
+            </a:r>
+            <a:endParaRPr lang="en-US" sz="3600" dirty="0"/>
+          </a:p>
+        </p:txBody>
+      </p:sp>
+      <p:sp>
+        <p:nvSpPr>
+          <p:cNvPr id="5" name="Text 2"/>
+          <p:cNvSpPr/>
+          <p:nvPr/>
+        </p:nvSpPr>
+        <p:spPr>
+          <a:xfrm>
+            <a:off x="4069080" y="1783080"/>
+            <a:ext cx="7802575" cy="4663440"/>
+          </a:xfrm>
+          <a:prstGeom prst="rect">
+            <a:avLst/>
+          </a:prstGeom>
+          <a:noFill/>
+          <a:ln/>
+        </p:spPr>
+        <p:txBody>
+          <a:bodyPr wrap="square" lIns="0" tIns="0" rIns="0" bIns="0" rtlCol="0" anchor="t"/>
+          <a:lstStyle/>
+          <a:p>
+            <a:pPr algn="l" indent="0" marL="0">
+              <a:spcAft>
+                <a:spcPts val="800"/>
+              </a:spcAft>
+              <a:buNone/>
+            </a:pPr>
+            <a:r>
+              <a:rPr lang="en-US" sz="4000" b="1" dirty="0">
+                <a:solidFill>
+                  <a:srgbClr val="111111"/>
+                </a:solidFill>
+                <a:latin typeface="Times New Roman" pitchFamily="34" charset="0"/>
+                <a:ea typeface="Times New Roman" pitchFamily="34" charset="-122"/>
+                <a:cs typeface="Times New Roman" pitchFamily="34" charset="-120"/>
+              </a:rPr>
+              <a:t>Fill in the blanks:</a:t>
+            </a:r>
+            <a:endParaRPr lang="en-US" sz="4000" dirty="0"/>
+          </a:p>
+          <a:p>
+            <a:pPr algn="l" marL="342900" indent="-342900">
+              <a:spcAft>
+                <a:spcPts val="800"/>
+              </a:spcAft>
+              <a:buSzPct val="100000"/>
+              <a:buFont typeface="+mj-lt"/>
+              <a:buAutoNum type="arabicPeriod" startAt="1"/>
+            </a:pPr>
+            <a:r>
+              <a:rPr lang="en-US" sz="4000" dirty="0">
+                <a:solidFill>
+                  <a:srgbClr val="111111"/>
+                </a:solidFill>
+                <a:latin typeface="Times New Roman" pitchFamily="34" charset="0"/>
+                <a:ea typeface="Times New Roman" pitchFamily="34" charset="-122"/>
+                <a:cs typeface="Times New Roman" pitchFamily="34" charset="-120"/>
+              </a:rPr>
+              <a:t>The number of males per 100 females is the ______.</a:t>
+            </a:r>
+            <a:endParaRPr lang="en-US" sz="4000" dirty="0"/>
+          </a:p>
+          <a:p>
+            <a:pPr algn="l" marL="342900" indent="-342900">
+              <a:spcAft>
+                <a:spcPts val="800"/>
+              </a:spcAft>
+              <a:buSzPct val="100000"/>
+              <a:buFont typeface="+mj-lt"/>
+              <a:buAutoNum type="arabicPeriod" startAt="1"/>
+            </a:pPr>
+            <a:r>
+              <a:rPr lang="en-US" sz="4000" dirty="0">
+                <a:solidFill>
+                  <a:srgbClr val="111111"/>
+                </a:solidFill>
+                <a:latin typeface="Times New Roman" pitchFamily="34" charset="0"/>
+                <a:ea typeface="Times New Roman" pitchFamily="34" charset="-122"/>
+                <a:cs typeface="Times New Roman" pitchFamily="34" charset="-120"/>
+              </a:rPr>
+              <a:t>A population with over 40 % under 15 is ______.</a:t>
+            </a:r>
+            <a:endParaRPr lang="en-US" sz="4000" dirty="0"/>
+          </a:p>
+          <a:p>
+            <a:pPr algn="l" marL="342900" indent="-342900">
+              <a:spcAft>
+                <a:spcPts val="800"/>
+              </a:spcAft>
+              <a:buSzPct val="100000"/>
+              <a:buFont typeface="+mj-lt"/>
+              <a:buAutoNum type="arabicPeriod" startAt="1"/>
+            </a:pPr>
+            <a:r>
+              <a:rPr lang="en-US" sz="4000" dirty="0">
+                <a:solidFill>
+                  <a:srgbClr val="111111"/>
+                </a:solidFill>
+                <a:latin typeface="Times New Roman" pitchFamily="34" charset="0"/>
+                <a:ea typeface="Times New Roman" pitchFamily="34" charset="-122"/>
+                <a:cs typeface="Times New Roman" pitchFamily="34" charset="-120"/>
+              </a:rPr>
+              <a:t>Japan has an ______ population.</a:t>
+            </a:r>
+            <a:endParaRPr lang="en-US" sz="4000" dirty="0"/>
+          </a:p>
+        </p:txBody>
+      </p:sp>
+      <p:sp>
+        <p:nvSpPr>
+          <p:cNvPr id="25" name="Slide Number Placeholder 0"/>
+          <p:cNvSpPr>
+            <a:spLocks noGrp="1"/>
+          </p:cNvSpPr>
+          <p:nvPr>
+            <p:ph type="sldNum" sz="quarter" idx="4294967295"/>
+          </p:nvPr>
+        </p:nvSpPr>
+        <p:spPr>
+          <a:xfrm>
+            <a:off x="27432" y="91440"/>
+            <a:ext cx="585216" cy="475488"/>
+          </a:xfrm>
+          <a:prstGeom prst="rect">
+            <a:avLst/>
+          </a:prstGeom>
+          <a:extLst>
+            <a:ext uri="{C572A759-6A51-4108-AA02-DFA0A04FC94B}">
+              <ma14:wrappingTextBoxFlag xmlns:ma14="http://schemas.microsoft.com/office/mac/drawingml/2011/main" val="0"/>
+            </a:ext>
+          </a:extLst>
+        </p:spPr>
+        <p:txBody>
+          <a:bodyPr/>
+          <a:lstStyle>
+            <a:lvl1pPr>
+              <a:defRPr sz="2000">
+                <a:solidFill>
+                  <a:srgbClr val="FFFFFF"/>
+                </a:solidFill>
+                <a:latin typeface="Calibri"/>
+                <a:ea typeface="Calibri"/>
+                <a:cs typeface="Calibri"/>
+              </a:defRPr>
+            </a:lvl1pPr>
+          </a:lstStyle>
+          <a:p>
+            <a:pPr algn="ctr"/>
+            <a:fld id="{F7021451-1387-4CA6-816F-3879F97B5CBC}" type="slidenum">
+              <a:rPr b="1" lang="en-US"/>
+              <a:t>63</a:t>
+            </a:fld>
+            <a:endParaRPr lang="en-US"/>
+          </a:p>
+        </p:txBody>
+      </p:sp>
+    </p:spTree>
+  </p:cSld>
+  <p:clrMapOvr>
+    <a:masterClrMapping/>
+  </p:clrMapOvr>
+</p:sld>
+</file>
+
+<file path=ppt/slides/slide64.xml><?xml version="1.0" encoding="utf-8"?>
+<p:sld xmlns:a="http://schemas.openxmlformats.org/drawingml/2006/main" xmlns:r="http://schemas.openxmlformats.org/officeDocument/2006/relationships" xmlns:p="http://schemas.openxmlformats.org/presentationml/2006/main">
+  <p:cSld name="Slide 64">
+    <p:spTree>
+      <p:nvGrpSpPr>
+        <p:cNvPr id="1" name=""/>
+        <p:cNvGrpSpPr/>
+        <p:nvPr/>
+      </p:nvGrpSpPr>
+      <p:grpSpPr>
+        <a:xfrm>
+          <a:off x="0" y="0"/>
+          <a:ext cx="0" cy="0"/>
+          <a:chOff x="0" y="0"/>
+          <a:chExt cx="0" cy="0"/>
+        </a:xfrm>
+      </p:grpSpPr>
+      <p:sp>
+        <p:nvSpPr>
+          <p:cNvPr id="2" name="Text 0"/>
+          <p:cNvSpPr/>
+          <p:nvPr/>
+        </p:nvSpPr>
+        <p:spPr>
+          <a:xfrm>
+            <a:off x="457200" y="713232"/>
+            <a:ext cx="11368735" cy="274320"/>
+          </a:xfrm>
+          <a:prstGeom prst="rect">
+            <a:avLst/>
+          </a:prstGeom>
+          <a:noFill/>
+          <a:ln/>
+        </p:spPr>
+        <p:txBody>
+          <a:bodyPr wrap="square" lIns="0" tIns="0" rIns="0" bIns="0" rtlCol="0" anchor="ctr"/>
+          <a:lstStyle/>
+          <a:p>
+            <a:pPr algn="r" indent="0" marL="0">
+              <a:buNone/>
+            </a:pPr>
+            <a:r>
+              <a:rPr lang="en-US" sz="1400" b="1" dirty="0">
+                <a:solidFill>
+                  <a:srgbClr val="1C3F6E"/>
+                </a:solidFill>
+                <a:latin typeface="Calibri" pitchFamily="34" charset="0"/>
+                <a:ea typeface="Calibri" pitchFamily="34" charset="-122"/>
+                <a:cs typeface="Calibri" pitchFamily="34" charset="-120"/>
+              </a:rPr>
+              <a:t>HOMEWORK</a:t>
+            </a:r>
+            <a:endParaRPr lang="en-US" sz="1400" dirty="0"/>
+          </a:p>
+        </p:txBody>
+      </p:sp>
+      <p:pic>
+        <p:nvPicPr>
+          <p:cNvPr id="3" name="Image 0" descr="/home/claude/f4/img/minesec_sheet.png">    </p:cNvPr>
+          <p:cNvPicPr>
+            <a:picLocks noChangeAspect="1"/>
+          </p:cNvPicPr>
+          <p:nvPr/>
+        </p:nvPicPr>
+        <p:blipFill>
+          <a:blip r:embed="rId1"/>
+          <a:stretch>
+            <a:fillRect/>
+          </a:stretch>
+        </p:blipFill>
+        <p:spPr>
+          <a:xfrm>
+            <a:off x="0" y="658368"/>
+            <a:ext cx="5120640" cy="5833872"/>
+          </a:xfrm>
+          <a:prstGeom prst="rect">
+            <a:avLst/>
+          </a:prstGeom>
+        </p:spPr>
+      </p:pic>
+      <p:sp>
+        <p:nvSpPr>
+          <p:cNvPr id="4" name="Text 1"/>
+          <p:cNvSpPr/>
+          <p:nvPr/>
+        </p:nvSpPr>
+        <p:spPr>
+          <a:xfrm>
+            <a:off x="5349240" y="1005840"/>
+            <a:ext cx="6522415" cy="731520"/>
+          </a:xfrm>
+          <a:prstGeom prst="rect">
+            <a:avLst/>
+          </a:prstGeom>
+          <a:noFill/>
+          <a:ln/>
+        </p:spPr>
+        <p:txBody>
+          <a:bodyPr wrap="square" lIns="0" tIns="0" rIns="0" bIns="0" rtlCol="0" anchor="ctr">
+            <a:normAutofit/>
+          </a:bodyPr>
+          <a:lstStyle/>
+          <a:p>
+            <a:pPr algn="ctr" indent="0" marL="0">
+              <a:buNone/>
+            </a:pPr>
+            <a:r>
+              <a:rPr lang="en-US" sz="3600" b="1" dirty="0">
+                <a:solidFill>
+                  <a:srgbClr val="990011"/>
+                </a:solidFill>
+                <a:latin typeface="Times New Roman" pitchFamily="34" charset="0"/>
+                <a:ea typeface="Times New Roman" pitchFamily="34" charset="-122"/>
+                <a:cs typeface="Times New Roman" pitchFamily="34" charset="-120"/>
+              </a:rPr>
+              <a:t>Homework</a:t>
+            </a:r>
+            <a:endParaRPr lang="en-US" sz="3600" dirty="0"/>
+          </a:p>
+        </p:txBody>
+      </p:sp>
+      <p:sp>
+        <p:nvSpPr>
+          <p:cNvPr id="5" name="Text 2"/>
+          <p:cNvSpPr/>
+          <p:nvPr/>
+        </p:nvSpPr>
+        <p:spPr>
+          <a:xfrm>
+            <a:off x="5349240" y="1783080"/>
+            <a:ext cx="6522415" cy="4663440"/>
+          </a:xfrm>
+          <a:prstGeom prst="rect">
+            <a:avLst/>
+          </a:prstGeom>
+          <a:noFill/>
+          <a:ln/>
+        </p:spPr>
+        <p:txBody>
+          <a:bodyPr wrap="square" lIns="0" tIns="0" rIns="0" bIns="0" rtlCol="0" anchor="t"/>
+          <a:lstStyle/>
+          <a:p>
+            <a:pPr algn="l" indent="0" marL="0">
+              <a:spcAft>
+                <a:spcPts val="800"/>
+              </a:spcAft>
+              <a:buNone/>
+            </a:pPr>
+            <a:r>
+              <a:rPr lang="en-US" sz="4000" dirty="0">
+                <a:solidFill>
+                  <a:srgbClr val="111111"/>
+                </a:solidFill>
+                <a:latin typeface="Times New Roman" pitchFamily="34" charset="0"/>
+                <a:ea typeface="Times New Roman" pitchFamily="34" charset="-122"/>
+                <a:cs typeface="Times New Roman" pitchFamily="34" charset="-120"/>
+              </a:rPr>
+              <a:t>State what the base of a population pyramid represents.</a:t>
+            </a:r>
+            <a:endParaRPr lang="en-US" sz="4000" dirty="0"/>
+          </a:p>
+        </p:txBody>
+      </p:sp>
+      <p:sp>
+        <p:nvSpPr>
+          <p:cNvPr id="25" name="Slide Number Placeholder 0"/>
+          <p:cNvSpPr>
+            <a:spLocks noGrp="1"/>
+          </p:cNvSpPr>
+          <p:nvPr>
+            <p:ph type="sldNum" sz="quarter" idx="4294967295"/>
+          </p:nvPr>
+        </p:nvSpPr>
+        <p:spPr>
+          <a:xfrm>
+            <a:off x="27432" y="91440"/>
+            <a:ext cx="585216" cy="475488"/>
+          </a:xfrm>
+          <a:prstGeom prst="rect">
+            <a:avLst/>
+          </a:prstGeom>
+          <a:extLst>
+            <a:ext uri="{C572A759-6A51-4108-AA02-DFA0A04FC94B}">
+              <ma14:wrappingTextBoxFlag xmlns:ma14="http://schemas.microsoft.com/office/mac/drawingml/2011/main" val="0"/>
+            </a:ext>
+          </a:extLst>
+        </p:spPr>
+        <p:txBody>
+          <a:bodyPr/>
+          <a:lstStyle>
+            <a:lvl1pPr>
+              <a:defRPr sz="2000">
+                <a:solidFill>
+                  <a:srgbClr val="FFFFFF"/>
+                </a:solidFill>
+                <a:latin typeface="Calibri"/>
+                <a:ea typeface="Calibri"/>
+                <a:cs typeface="Calibri"/>
+              </a:defRPr>
+            </a:lvl1pPr>
+          </a:lstStyle>
+          <a:p>
+            <a:pPr algn="ctr"/>
+            <a:fld id="{F7021451-1387-4CA6-816F-3879F97B5CBC}" type="slidenum">
+              <a:rPr b="1" lang="en-US"/>
+              <a:t>64</a:t>
+            </a:fld>
+            <a:endParaRPr lang="en-US"/>
+          </a:p>
+        </p:txBody>
+      </p:sp>
+    </p:spTree>
+  </p:cSld>
+  <p:clrMapOvr>
+    <a:masterClrMapping/>
+  </p:clrMapOvr>
+</p:sld>
+</file>
+
+<file path=ppt/slides/slide65.xml><?xml version="1.0" encoding="utf-8"?>
+<p:sld xmlns:a="http://schemas.openxmlformats.org/drawingml/2006/main" xmlns:r="http://schemas.openxmlformats.org/officeDocument/2006/relationships" xmlns:p="http://schemas.openxmlformats.org/presentationml/2006/main">
+  <p:cSld name="Slide 65">
+    <p:spTree>
+      <p:nvGrpSpPr>
+        <p:cNvPr id="1" name=""/>
+        <p:cNvGrpSpPr/>
+        <p:nvPr/>
+      </p:nvGrpSpPr>
+      <p:grpSpPr>
+        <a:xfrm>
+          <a:off x="0" y="0"/>
+          <a:ext cx="0" cy="0"/>
+          <a:chOff x="0" y="0"/>
+          <a:chExt cx="0" cy="0"/>
+        </a:xfrm>
+      </p:grpSpPr>
+      <p:sp>
+        <p:nvSpPr>
+          <p:cNvPr id="2" name="Text 0"/>
+          <p:cNvSpPr/>
+          <p:nvPr/>
+        </p:nvSpPr>
+        <p:spPr>
+          <a:xfrm>
+            <a:off x="457200" y="713232"/>
+            <a:ext cx="11368735" cy="274320"/>
+          </a:xfrm>
+          <a:prstGeom prst="rect">
+            <a:avLst/>
+          </a:prstGeom>
+          <a:noFill/>
+          <a:ln/>
+        </p:spPr>
+        <p:txBody>
+          <a:bodyPr wrap="square" lIns="0" tIns="0" rIns="0" bIns="0" rtlCol="0" anchor="ctr"/>
+          <a:lstStyle/>
+          <a:p>
+            <a:pPr algn="r" indent="0" marL="0">
+              <a:buNone/>
+            </a:pPr>
+            <a:r>
+              <a:rPr lang="en-US" sz="1400" b="1" dirty="0">
+                <a:solidFill>
+                  <a:srgbClr val="1C3F6E"/>
+                </a:solidFill>
+                <a:latin typeface="Calibri" pitchFamily="34" charset="0"/>
+                <a:ea typeface="Calibri" pitchFamily="34" charset="-122"/>
+                <a:cs typeface="Calibri" pitchFamily="34" charset="-120"/>
+              </a:rPr>
+              <a:t>NEXT LESSON</a:t>
+            </a:r>
+            <a:endParaRPr lang="en-US" sz="1400" dirty="0"/>
+          </a:p>
+        </p:txBody>
+      </p:sp>
+      <p:pic>
+        <p:nvPicPr>
+          <p:cNvPr id="3" name="Image 0" descr="/home/claude/f4/img/minesec_sheet.png">    </p:cNvPr>
+          <p:cNvPicPr>
+            <a:picLocks noChangeAspect="1"/>
+          </p:cNvPicPr>
+          <p:nvPr/>
+        </p:nvPicPr>
+        <p:blipFill>
+          <a:blip r:embed="rId1"/>
+          <a:stretch>
+            <a:fillRect/>
+          </a:stretch>
+        </p:blipFill>
+        <p:spPr>
+          <a:xfrm>
+            <a:off x="0" y="658368"/>
+            <a:ext cx="5120640" cy="5833872"/>
+          </a:xfrm>
+          <a:prstGeom prst="rect">
+            <a:avLst/>
+          </a:prstGeom>
+        </p:spPr>
+      </p:pic>
+      <p:sp>
+        <p:nvSpPr>
+          <p:cNvPr id="4" name="Text 1"/>
+          <p:cNvSpPr/>
+          <p:nvPr/>
+        </p:nvSpPr>
+        <p:spPr>
+          <a:xfrm>
+            <a:off x="5349240" y="1005840"/>
+            <a:ext cx="6522415" cy="731520"/>
+          </a:xfrm>
+          <a:prstGeom prst="rect">
+            <a:avLst/>
+          </a:prstGeom>
+          <a:noFill/>
+          <a:ln/>
+        </p:spPr>
+        <p:txBody>
+          <a:bodyPr wrap="square" lIns="0" tIns="0" rIns="0" bIns="0" rtlCol="0" anchor="ctr">
+            <a:normAutofit/>
+          </a:bodyPr>
+          <a:lstStyle/>
+          <a:p>
+            <a:pPr algn="ctr" indent="0" marL="0">
+              <a:buNone/>
+            </a:pPr>
+            <a:r>
+              <a:rPr lang="en-US" sz="3600" b="1" dirty="0">
+                <a:solidFill>
+                  <a:srgbClr val="990011"/>
+                </a:solidFill>
+                <a:latin typeface="Times New Roman" pitchFamily="34" charset="0"/>
+                <a:ea typeface="Times New Roman" pitchFamily="34" charset="-122"/>
+                <a:cs typeface="Times New Roman" pitchFamily="34" charset="-120"/>
+              </a:rPr>
+              <a:t>Next Lesson</a:t>
+            </a:r>
+            <a:endParaRPr lang="en-US" sz="3600" dirty="0"/>
+          </a:p>
+        </p:txBody>
+      </p:sp>
+      <p:sp>
+        <p:nvSpPr>
+          <p:cNvPr id="5" name="Text 2"/>
+          <p:cNvSpPr/>
+          <p:nvPr/>
+        </p:nvSpPr>
+        <p:spPr>
+          <a:xfrm>
+            <a:off x="5349240" y="1783080"/>
+            <a:ext cx="6522415" cy="4663440"/>
+          </a:xfrm>
+          <a:prstGeom prst="rect">
+            <a:avLst/>
+          </a:prstGeom>
+          <a:noFill/>
+          <a:ln/>
+        </p:spPr>
+        <p:txBody>
+          <a:bodyPr wrap="square" lIns="0" tIns="0" rIns="0" bIns="0" rtlCol="0" anchor="ctr"/>
+          <a:lstStyle/>
+          <a:p>
+            <a:pPr algn="ctr" indent="0" marL="0">
+              <a:spcAft>
+                <a:spcPts val="800"/>
+              </a:spcAft>
+              <a:buNone/>
+            </a:pPr>
+            <a:r>
+              <a:rPr lang="en-US" sz="4000" b="1" dirty="0">
+                <a:solidFill>
+                  <a:srgbClr val="111111"/>
+                </a:solidFill>
+                <a:latin typeface="Times New Roman" pitchFamily="34" charset="0"/>
+                <a:ea typeface="Times New Roman" pitchFamily="34" charset="-122"/>
+                <a:cs typeface="Times New Roman" pitchFamily="34" charset="-120"/>
+              </a:rPr>
+              <a:t>Our next lesson will be on:</a:t>
+            </a:r>
+            <a:endParaRPr lang="en-US" sz="4000" dirty="0"/>
+          </a:p>
+          <a:p>
+            <a:pPr algn="ctr" indent="0" marL="0">
+              <a:spcAft>
+                <a:spcPts val="800"/>
+              </a:spcAft>
+              <a:buNone/>
+            </a:pPr>
+            <a:r>
+              <a:rPr lang="en-US" sz="4000" b="1" dirty="0">
+                <a:solidFill>
+                  <a:srgbClr val="990011"/>
+                </a:solidFill>
+                <a:latin typeface="Times New Roman" pitchFamily="34" charset="0"/>
+                <a:ea typeface="Times New Roman" pitchFamily="34" charset="-122"/>
+                <a:cs typeface="Times New Roman" pitchFamily="34" charset="-120"/>
+              </a:rPr>
+              <a:t>Lesson 7: Population Pyramids</a:t>
+            </a:r>
+            <a:endParaRPr lang="en-US" sz="4000" dirty="0"/>
+          </a:p>
+        </p:txBody>
+      </p:sp>
+      <p:sp>
+        <p:nvSpPr>
+          <p:cNvPr id="25" name="Slide Number Placeholder 0"/>
+          <p:cNvSpPr>
+            <a:spLocks noGrp="1"/>
+          </p:cNvSpPr>
+          <p:nvPr>
+            <p:ph type="sldNum" sz="quarter" idx="4294967295"/>
+          </p:nvPr>
+        </p:nvSpPr>
+        <p:spPr>
+          <a:xfrm>
+            <a:off x="27432" y="91440"/>
+            <a:ext cx="585216" cy="475488"/>
+          </a:xfrm>
+          <a:prstGeom prst="rect">
+            <a:avLst/>
+          </a:prstGeom>
+          <a:extLst>
+            <a:ext uri="{C572A759-6A51-4108-AA02-DFA0A04FC94B}">
+              <ma14:wrappingTextBoxFlag xmlns:ma14="http://schemas.microsoft.com/office/mac/drawingml/2011/main" val="0"/>
+            </a:ext>
+          </a:extLst>
+        </p:spPr>
+        <p:txBody>
+          <a:bodyPr/>
+          <a:lstStyle>
+            <a:lvl1pPr>
+              <a:defRPr sz="2000">
+                <a:solidFill>
+                  <a:srgbClr val="FFFFFF"/>
+                </a:solidFill>
+                <a:latin typeface="Calibri"/>
+                <a:ea typeface="Calibri"/>
+                <a:cs typeface="Calibri"/>
+              </a:defRPr>
+            </a:lvl1pPr>
+          </a:lstStyle>
+          <a:p>
+            <a:pPr algn="ctr"/>
+            <a:fld id="{F7021451-1387-4CA6-816F-3879F97B5CBC}" type="slidenum">
+              <a:rPr b="1" lang="en-US"/>
+              <a:t>65</a:t>
+            </a:fld>
+            <a:endParaRPr lang="en-US"/>
+          </a:p>
+        </p:txBody>
+      </p:sp>
+    </p:spTree>
+  </p:cSld>
+  <p:clrMapOvr>
+    <a:masterClrMapping/>
+  </p:clrMapOvr>
+</p:sld>
+</file>
+
+<file path=ppt/slides/slide66.xml><?xml version="1.0" encoding="utf-8"?>
+<p:sld xmlns:a="http://schemas.openxmlformats.org/drawingml/2006/main" xmlns:r="http://schemas.openxmlformats.org/officeDocument/2006/relationships" xmlns:p="http://schemas.openxmlformats.org/presentationml/2006/main">
+  <p:cSld name="Slide 66">
+    <p:spTree>
+      <p:nvGrpSpPr>
+        <p:cNvPr id="1" name=""/>
+        <p:cNvGrpSpPr/>
+        <p:nvPr/>
+      </p:nvGrpSpPr>
+      <p:grpSpPr>
+        <a:xfrm>
+          <a:off x="0" y="0"/>
+          <a:ext cx="0" cy="0"/>
+          <a:chOff x="0" y="0"/>
+          <a:chExt cx="0" cy="0"/>
+        </a:xfrm>
+      </p:grpSpPr>
+      <p:sp>
+        <p:nvSpPr>
+          <p:cNvPr id="2" name="Text 0"/>
+          <p:cNvSpPr/>
+          <p:nvPr/>
+        </p:nvSpPr>
+        <p:spPr>
+          <a:xfrm>
+            <a:off x="457200" y="713232"/>
+            <a:ext cx="11368735" cy="274320"/>
+          </a:xfrm>
+          <a:prstGeom prst="rect">
+            <a:avLst/>
+          </a:prstGeom>
+          <a:noFill/>
+          <a:ln/>
+        </p:spPr>
+        <p:txBody>
+          <a:bodyPr wrap="square" lIns="0" tIns="0" rIns="0" bIns="0" rtlCol="0" anchor="ctr"/>
+          <a:lstStyle/>
+          <a:p>
+            <a:pPr algn="r" indent="0" marL="0">
+              <a:buNone/>
+            </a:pPr>
+            <a:r>
+              <a:rPr lang="en-US" sz="1400" b="1" dirty="0">
+                <a:solidFill>
+                  <a:srgbClr val="1C3F6E"/>
+                </a:solidFill>
+                <a:latin typeface="Calibri" pitchFamily="34" charset="0"/>
+                <a:ea typeface="Calibri" pitchFamily="34" charset="-122"/>
+                <a:cs typeface="Calibri" pitchFamily="34" charset="-120"/>
+              </a:rPr>
+              <a:t>BILINGUAL GAME</a:t>
+            </a:r>
+            <a:endParaRPr lang="en-US" sz="1400" dirty="0"/>
+          </a:p>
+        </p:txBody>
+      </p:sp>
+      <p:sp>
+        <p:nvSpPr>
+          <p:cNvPr id="3" name="Text 1"/>
+          <p:cNvSpPr/>
+          <p:nvPr/>
+        </p:nvSpPr>
+        <p:spPr>
+          <a:xfrm>
+            <a:off x="457200" y="1005840"/>
+            <a:ext cx="11277295" cy="731520"/>
+          </a:xfrm>
+          <a:prstGeom prst="rect">
+            <a:avLst/>
+          </a:prstGeom>
+          <a:noFill/>
+          <a:ln/>
+        </p:spPr>
+        <p:txBody>
+          <a:bodyPr wrap="square" lIns="0" tIns="0" rIns="0" bIns="0" rtlCol="0" anchor="ctr"/>
+          <a:lstStyle/>
+          <a:p>
+            <a:pPr algn="ctr" indent="0" marL="0">
+              <a:buNone/>
+            </a:pPr>
+            <a:r>
+              <a:rPr lang="en-US" sz="3600" b="1" dirty="0">
+                <a:solidFill>
+                  <a:srgbClr val="990011"/>
+                </a:solidFill>
+                <a:latin typeface="Times New Roman" pitchFamily="34" charset="0"/>
+                <a:ea typeface="Times New Roman" pitchFamily="34" charset="-122"/>
+                <a:cs typeface="Times New Roman" pitchFamily="34" charset="-120"/>
+              </a:rPr>
               <a:t>Bilingual Game (Jeu Bilingue)</a:t>
             </a:r>
             <a:endParaRPr lang="en-US" sz="3600" dirty="0"/>
@@ -22192,7 +24515,7 @@
       </p:sp>
       <p:graphicFrame>
         <p:nvGraphicFramePr>
-          <p:cNvPr id="61" name="Table 0"/>
+          <p:cNvPr id="67" name="Table 0"/>
           <p:cNvGraphicFramePr>
             <a:graphicFrameLocks noGrp="1"/>
           </p:cNvGraphicFramePr>
@@ -23228,7 +25551,7 @@
             <a:pPr algn="ctr"/>
             <a:fld id="{F7021451-1387-4CA6-816F-3879F97B5CBC}" type="slidenum">
               <a:rPr b="1" lang="en-US"/>
-              <a:t>60</a:t>
+              <a:t>66</a:t>
             </a:fld>
             <a:endParaRPr lang="en-US"/>
           </a:p>
@@ -23242,9 +25565,9 @@
 </p:sld>
 </file>
 
-<file path=ppt/slides/slide61.xml><?xml version="1.0" encoding="utf-8"?>
+<file path=ppt/slides/slide67.xml><?xml version="1.0" encoding="utf-8"?>
 <p:sld xmlns:a="http://schemas.openxmlformats.org/drawingml/2006/main" xmlns:r="http://schemas.openxmlformats.org/officeDocument/2006/relationships" xmlns:p="http://schemas.openxmlformats.org/presentationml/2006/main">
-  <p:cSld name="Slide 61">
+  <p:cSld name="Slide 67">
     <p:spTree>
       <p:nvGrpSpPr>
         <p:cNvPr id="1" name=""/>
@@ -23339,7 +25662,7 @@
       </p:sp>
       <p:graphicFrame>
         <p:nvGraphicFramePr>
-          <p:cNvPr id="62" name="Table 0"/>
+          <p:cNvPr id="68" name="Table 0"/>
           <p:cNvGraphicFramePr>
             <a:graphicFrameLocks noGrp="1"/>
           </p:cNvGraphicFramePr>
@@ -23961,7 +26284,7 @@
             <a:pPr algn="ctr"/>
             <a:fld id="{F7021451-1387-4CA6-816F-3879F97B5CBC}" type="slidenum">
               <a:rPr b="1" lang="en-US"/>
-              <a:t>61</a:t>
+              <a:t>67</a:t>
             </a:fld>
             <a:endParaRPr lang="en-US"/>
           </a:p>
@@ -23975,9 +26298,9 @@
 </p:sld>
 </file>
 
-<file path=ppt/slides/slide62.xml><?xml version="1.0" encoding="utf-8"?>
+<file path=ppt/slides/slide68.xml><?xml version="1.0" encoding="utf-8"?>
 <p:sld xmlns:a="http://schemas.openxmlformats.org/drawingml/2006/main" xmlns:r="http://schemas.openxmlformats.org/officeDocument/2006/relationships" xmlns:p="http://schemas.openxmlformats.org/presentationml/2006/main">
-  <p:cSld name="Slide 62">
+  <p:cSld name="Slide 68">
     <p:spTree>
       <p:nvGrpSpPr>
         <p:cNvPr id="1" name=""/>
@@ -24072,7 +26395,7 @@
       </p:sp>
       <p:graphicFrame>
         <p:nvGraphicFramePr>
-          <p:cNvPr id="63" name="Table 0"/>
+          <p:cNvPr id="69" name="Table 0"/>
           <p:cNvGraphicFramePr>
             <a:graphicFrameLocks noGrp="1"/>
           </p:cNvGraphicFramePr>
@@ -24182,7 +26505,7 @@
                           <a:ea typeface="Calibri" pitchFamily="34" charset="-122"/>
                           <a:cs typeface="Calibri" pitchFamily="34" charset="-120"/>
                         </a:rPr>
-                        <a:t>DEFINITIONS; Meaning of Age and Sex Composition; The Youthful Population; Consequences of a Youthful Population; The Ageing Population; Consequences of an Ageing Population.</a:t>
+                        <a:t>DEFINITIONS; Age Groups and Sex Ratio; Factors of the Sex Ratio; The Youthful Population; Consequences of a Youthful Population; The Ageing Population; Consequences of an Ageing Population.</a:t>
                       </a:r>
                       <a:endParaRPr lang="en-US" sz="1600" dirty="0">
                         <a:latin typeface="Calibri" charset="0"/>
@@ -24832,7 +27155,7 @@
             <a:pPr algn="ctr"/>
             <a:fld id="{F7021451-1387-4CA6-816F-3879F97B5CBC}" type="slidenum">
               <a:rPr b="1" lang="en-US"/>
-              <a:t>62</a:t>
+              <a:t>68</a:t>
             </a:fld>
             <a:endParaRPr lang="en-US"/>
           </a:p>
@@ -24846,9 +27169,9 @@
 </p:sld>
 </file>
 
-<file path=ppt/slides/slide63.xml><?xml version="1.0" encoding="utf-8"?>
+<file path=ppt/slides/slide69.xml><?xml version="1.0" encoding="utf-8"?>
 <p:sld xmlns:a="http://schemas.openxmlformats.org/drawingml/2006/main" xmlns:r="http://schemas.openxmlformats.org/officeDocument/2006/relationships" xmlns:p="http://schemas.openxmlformats.org/presentationml/2006/main">
-  <p:cSld name="Slide 63">
+  <p:cSld name="Slide 69">
     <p:spTree>
       <p:nvGrpSpPr>
         <p:cNvPr id="1" name=""/>
@@ -25157,332 +27480,7 @@
             <a:pPr algn="ctr"/>
             <a:fld id="{F7021451-1387-4CA6-816F-3879F97B5CBC}" type="slidenum">
               <a:rPr b="1" lang="en-US"/>
-              <a:t>63</a:t>
-            </a:fld>
-            <a:endParaRPr lang="en-US"/>
-          </a:p>
-        </p:txBody>
-      </p:sp>
-    </p:spTree>
-  </p:cSld>
-  <p:clrMapOvr>
-    <a:masterClrMapping/>
-  </p:clrMapOvr>
-</p:sld>
-</file>
-
-<file path=ppt/slides/slide64.xml><?xml version="1.0" encoding="utf-8"?>
-<p:sld xmlns:a="http://schemas.openxmlformats.org/drawingml/2006/main" xmlns:r="http://schemas.openxmlformats.org/officeDocument/2006/relationships" xmlns:p="http://schemas.openxmlformats.org/presentationml/2006/main">
-  <p:cSld name="Slide 64">
-    <p:spTree>
-      <p:nvGrpSpPr>
-        <p:cNvPr id="1" name=""/>
-        <p:cNvGrpSpPr/>
-        <p:nvPr/>
-      </p:nvGrpSpPr>
-      <p:grpSpPr>
-        <a:xfrm>
-          <a:off x="0" y="0"/>
-          <a:ext cx="0" cy="0"/>
-          <a:chOff x="0" y="0"/>
-          <a:chExt cx="0" cy="0"/>
-        </a:xfrm>
-      </p:grpSpPr>
-      <p:sp>
-        <p:nvSpPr>
-          <p:cNvPr id="2" name="Text 0"/>
-          <p:cNvSpPr/>
-          <p:nvPr/>
-        </p:nvSpPr>
-        <p:spPr>
-          <a:xfrm>
-            <a:off x="457200" y="713232"/>
-            <a:ext cx="11368735" cy="274320"/>
-          </a:xfrm>
-          <a:prstGeom prst="rect">
-            <a:avLst/>
-          </a:prstGeom>
-          <a:noFill/>
-          <a:ln/>
-        </p:spPr>
-        <p:txBody>
-          <a:bodyPr wrap="square" lIns="0" tIns="0" rIns="0" bIns="0" rtlCol="0" anchor="ctr"/>
-          <a:lstStyle/>
-          <a:p>
-            <a:pPr algn="r" indent="0" marL="0">
-              <a:buNone/>
-            </a:pPr>
-            <a:r>
-              <a:rPr lang="en-US" sz="1400" b="1" dirty="0">
-                <a:solidFill>
-                  <a:srgbClr val="1C3F6E"/>
-                </a:solidFill>
-                <a:latin typeface="Calibri" pitchFamily="34" charset="0"/>
-                <a:ea typeface="Calibri" pitchFamily="34" charset="-122"/>
-                <a:cs typeface="Calibri" pitchFamily="34" charset="-120"/>
-              </a:rPr>
-              <a:t>REFERENCES</a:t>
-            </a:r>
-            <a:endParaRPr lang="en-US" sz="1400" dirty="0"/>
-          </a:p>
-        </p:txBody>
-      </p:sp>
-      <p:pic>
-        <p:nvPicPr>
-          <p:cNvPr id="3" name="Image 0" descr="/home/claude/f4/img/minesec_sheet.png">    </p:cNvPr>
-          <p:cNvPicPr>
-            <a:picLocks noChangeAspect="1"/>
-          </p:cNvPicPr>
-          <p:nvPr/>
-        </p:nvPicPr>
-        <p:blipFill>
-          <a:blip r:embed="rId1"/>
-          <a:stretch>
-            <a:fillRect/>
-          </a:stretch>
-        </p:blipFill>
-        <p:spPr>
-          <a:xfrm>
-            <a:off x="0" y="658368"/>
-            <a:ext cx="5120640" cy="5833872"/>
-          </a:xfrm>
-          <a:prstGeom prst="rect">
-            <a:avLst/>
-          </a:prstGeom>
-        </p:spPr>
-      </p:pic>
-      <p:sp>
-        <p:nvSpPr>
-          <p:cNvPr id="4" name="Text 1"/>
-          <p:cNvSpPr/>
-          <p:nvPr/>
-        </p:nvSpPr>
-        <p:spPr>
-          <a:xfrm>
-            <a:off x="5349240" y="1005840"/>
-            <a:ext cx="6522415" cy="731520"/>
-          </a:xfrm>
-          <a:prstGeom prst="rect">
-            <a:avLst/>
-          </a:prstGeom>
-          <a:noFill/>
-          <a:ln/>
-        </p:spPr>
-        <p:txBody>
-          <a:bodyPr wrap="square" lIns="0" tIns="0" rIns="0" bIns="0" rtlCol="0" anchor="ctr">
-            <a:normAutofit/>
-          </a:bodyPr>
-          <a:lstStyle/>
-          <a:p>
-            <a:pPr algn="ctr" indent="0" marL="0">
-              <a:buNone/>
-            </a:pPr>
-            <a:r>
-              <a:rPr lang="en-US" sz="3600" b="1" dirty="0">
-                <a:solidFill>
-                  <a:srgbClr val="990011"/>
-                </a:solidFill>
-                <a:latin typeface="Times New Roman" pitchFamily="34" charset="0"/>
-                <a:ea typeface="Times New Roman" pitchFamily="34" charset="-122"/>
-                <a:cs typeface="Times New Roman" pitchFamily="34" charset="-120"/>
-              </a:rPr>
-              <a:t>References</a:t>
-            </a:r>
-            <a:endParaRPr lang="en-US" sz="3600" dirty="0"/>
-          </a:p>
-        </p:txBody>
-      </p:sp>
-      <p:sp>
-        <p:nvSpPr>
-          <p:cNvPr id="5" name="Text 2"/>
-          <p:cNvSpPr/>
-          <p:nvPr/>
-        </p:nvSpPr>
-        <p:spPr>
-          <a:xfrm>
-            <a:off x="5349240" y="1783080"/>
-            <a:ext cx="6522415" cy="4663440"/>
-          </a:xfrm>
-          <a:prstGeom prst="rect">
-            <a:avLst/>
-          </a:prstGeom>
-          <a:noFill/>
-          <a:ln/>
-        </p:spPr>
-        <p:txBody>
-          <a:bodyPr wrap="square" lIns="0" tIns="0" rIns="0" bIns="0" rtlCol="0" anchor="t"/>
-          <a:lstStyle/>
-          <a:p>
-            <a:pPr algn="l" marL="342900" indent="-342900">
-              <a:spcAft>
-                <a:spcPts val="800"/>
-              </a:spcAft>
-              <a:buSzPct val="100000"/>
-              <a:buChar char="•"/>
-            </a:pPr>
-            <a:r>
-              <a:rPr lang="en-US" sz="1800" dirty="0">
-                <a:solidFill>
-                  <a:srgbClr val="111111"/>
-                </a:solidFill>
-                <a:latin typeface="Calibri" pitchFamily="34" charset="0"/>
-                <a:ea typeface="Calibri" pitchFamily="34" charset="-122"/>
-                <a:cs typeface="Calibri" pitchFamily="34" charset="-120"/>
-              </a:rPr>
-              <a:t>Geography Syllabus for Sixth Forms (Lower and Upper Sixth), MINESEC, 2019 — Module 4 (Population Geography).</a:t>
-            </a:r>
-            <a:endParaRPr lang="en-US" sz="1800" dirty="0"/>
-          </a:p>
-          <a:p>
-            <a:pPr algn="l" marL="342900" indent="-342900">
-              <a:spcAft>
-                <a:spcPts val="800"/>
-              </a:spcAft>
-              <a:buSzPct val="100000"/>
-              <a:buChar char="•"/>
-            </a:pPr>
-            <a:r>
-              <a:rPr lang="en-US" sz="1800" dirty="0">
-                <a:solidFill>
-                  <a:srgbClr val="111111"/>
-                </a:solidFill>
-                <a:latin typeface="Calibri" pitchFamily="34" charset="0"/>
-                <a:ea typeface="Calibri" pitchFamily="34" charset="-122"/>
-                <a:cs typeface="Calibri" pitchFamily="34" charset="-120"/>
-              </a:rPr>
-              <a:t>Teacher's course notes: Mr KAMDEM E., Population Geography (USA), GBHS Garoua, 2026.</a:t>
-            </a:r>
-            <a:endParaRPr lang="en-US" sz="1800" dirty="0"/>
-          </a:p>
-          <a:p>
-            <a:pPr algn="l" marL="342900" indent="-342900">
-              <a:spcAft>
-                <a:spcPts val="800"/>
-              </a:spcAft>
-              <a:buSzPct val="100000"/>
-              <a:buChar char="•"/>
-            </a:pPr>
-            <a:r>
-              <a:rPr lang="en-US" sz="1800" dirty="0">
-                <a:solidFill>
-                  <a:srgbClr val="111111"/>
-                </a:solidFill>
-                <a:latin typeface="Calibri" pitchFamily="34" charset="0"/>
-                <a:ea typeface="Calibri" pitchFamily="34" charset="-122"/>
-                <a:cs typeface="Calibri" pitchFamily="34" charset="-120"/>
-              </a:rPr>
-              <a:t>United Nations, World Population Prospects 2024.</a:t>
-            </a:r>
-            <a:endParaRPr lang="en-US" sz="1800" dirty="0"/>
-          </a:p>
-          <a:p>
-            <a:pPr algn="l" marL="342900" indent="-342900">
-              <a:spcAft>
-                <a:spcPts val="800"/>
-              </a:spcAft>
-              <a:buSzPct val="100000"/>
-              <a:buChar char="•"/>
-            </a:pPr>
-            <a:r>
-              <a:rPr lang="en-US" sz="1800" dirty="0">
-                <a:solidFill>
-                  <a:srgbClr val="111111"/>
-                </a:solidFill>
-                <a:latin typeface="Calibri" pitchFamily="34" charset="0"/>
-                <a:ea typeface="Calibri" pitchFamily="34" charset="-122"/>
-                <a:cs typeface="Calibri" pitchFamily="34" charset="-120"/>
-              </a:rPr>
-              <a:t>Photo, Activity 3: “Class” by WABC Certified Business Coach • Counselor, CC BY 2.0, via Flickr (https://www.flickr.com/photos/43919827@N00/3617014360)</a:t>
-            </a:r>
-            <a:endParaRPr lang="en-US" sz="1800" dirty="0"/>
-          </a:p>
-          <a:p>
-            <a:pPr algn="l" marL="342900" indent="-342900">
-              <a:spcAft>
-                <a:spcPts val="800"/>
-              </a:spcAft>
-              <a:buSzPct val="100000"/>
-              <a:buChar char="•"/>
-            </a:pPr>
-            <a:r>
-              <a:rPr lang="en-US" sz="1800" dirty="0">
-                <a:solidFill>
-                  <a:srgbClr val="111111"/>
-                </a:solidFill>
-                <a:latin typeface="Calibri" pitchFamily="34" charset="0"/>
-                <a:ea typeface="Calibri" pitchFamily="34" charset="-122"/>
-                <a:cs typeface="Calibri" pitchFamily="34" charset="-120"/>
-              </a:rPr>
-              <a:t>Photo, Activity 5: “Medical Readiness and Training Exercise 15-3” by US Army Africa, CC BY 2.0, via Flickr (https://www.flickr.com/photos/36281822@N08/16958932197)</a:t>
-            </a:r>
-            <a:endParaRPr lang="en-US" sz="1800" dirty="0"/>
-          </a:p>
-          <a:p>
-            <a:pPr algn="l" marL="342900" indent="-342900">
-              <a:spcAft>
-                <a:spcPts val="800"/>
-              </a:spcAft>
-              <a:buSzPct val="100000"/>
-              <a:buChar char="•"/>
-            </a:pPr>
-            <a:r>
-              <a:rPr lang="en-US" sz="1800" dirty="0">
-                <a:solidFill>
-                  <a:srgbClr val="111111"/>
-                </a:solidFill>
-                <a:latin typeface="Calibri" pitchFamily="34" charset="0"/>
-                <a:ea typeface="Calibri" pitchFamily="34" charset="-122"/>
-                <a:cs typeface="Calibri" pitchFamily="34" charset="-120"/>
-              </a:rPr>
-              <a:t>Diagrams and animations: drawn for this lesson (Geography Department).</a:t>
-            </a:r>
-            <a:endParaRPr lang="en-US" sz="1800" dirty="0"/>
-          </a:p>
-        </p:txBody>
-      </p:sp>
-      <p:sp>
-        <p:nvSpPr>
-          <p:cNvPr id="25" name="Slide Number Placeholder 0"/>
-          <p:cNvSpPr>
-            <a:spLocks noGrp="1"/>
-          </p:cNvSpPr>
-          <p:nvPr>
-            <p:ph type="sldNum" sz="quarter" idx="4294967295"/>
-          </p:nvPr>
-        </p:nvSpPr>
-        <p:spPr>
-          <a:xfrm>
-            <a:off x="27432" y="91440"/>
-            <a:ext cx="585216" cy="475488"/>
-          </a:xfrm>
-          <a:prstGeom prst="rect">
-            <a:avLst/>
-          </a:prstGeom>
-          <a:extLst>
-            <a:ext uri="{C572A759-6A51-4108-AA02-DFA0A04FC94B}">
-              <ma14:wrappingTextBoxFlag xmlns:ma14="http://schemas.microsoft.com/office/mac/drawingml/2011/main" val="0"/>
-            </a:ext>
-          </a:extLst>
-        </p:spPr>
-        <p:txBody>
-          <a:bodyPr/>
-          <a:lstStyle>
-            <a:lvl1pPr>
-              <a:defRPr sz="2000">
-                <a:solidFill>
-                  <a:srgbClr val="FFFFFF"/>
-                </a:solidFill>
-                <a:latin typeface="Calibri"/>
-                <a:ea typeface="Calibri"/>
-                <a:cs typeface="Calibri"/>
-              </a:defRPr>
-            </a:lvl1pPr>
-          </a:lstStyle>
-          <a:p>
-            <a:pPr algn="ctr"/>
-            <a:fld id="{F7021451-1387-4CA6-816F-3879F97B5CBC}" type="slidenum">
-              <a:rPr b="1" lang="en-US"/>
-              <a:t>64</a:t>
+              <a:t>69</a:t>
             </a:fld>
             <a:endParaRPr lang="en-US"/>
           </a:p>
@@ -25746,6 +27744,331 @@
             <a:fld id="{F7021451-1387-4CA6-816F-3879F97B5CBC}" type="slidenum">
               <a:rPr b="1" lang="en-US"/>
               <a:t>7</a:t>
+            </a:fld>
+            <a:endParaRPr lang="en-US"/>
+          </a:p>
+        </p:txBody>
+      </p:sp>
+    </p:spTree>
+  </p:cSld>
+  <p:clrMapOvr>
+    <a:masterClrMapping/>
+  </p:clrMapOvr>
+</p:sld>
+</file>
+
+<file path=ppt/slides/slide70.xml><?xml version="1.0" encoding="utf-8"?>
+<p:sld xmlns:a="http://schemas.openxmlformats.org/drawingml/2006/main" xmlns:r="http://schemas.openxmlformats.org/officeDocument/2006/relationships" xmlns:p="http://schemas.openxmlformats.org/presentationml/2006/main">
+  <p:cSld name="Slide 70">
+    <p:spTree>
+      <p:nvGrpSpPr>
+        <p:cNvPr id="1" name=""/>
+        <p:cNvGrpSpPr/>
+        <p:nvPr/>
+      </p:nvGrpSpPr>
+      <p:grpSpPr>
+        <a:xfrm>
+          <a:off x="0" y="0"/>
+          <a:ext cx="0" cy="0"/>
+          <a:chOff x="0" y="0"/>
+          <a:chExt cx="0" cy="0"/>
+        </a:xfrm>
+      </p:grpSpPr>
+      <p:sp>
+        <p:nvSpPr>
+          <p:cNvPr id="2" name="Text 0"/>
+          <p:cNvSpPr/>
+          <p:nvPr/>
+        </p:nvSpPr>
+        <p:spPr>
+          <a:xfrm>
+            <a:off x="457200" y="713232"/>
+            <a:ext cx="11368735" cy="274320"/>
+          </a:xfrm>
+          <a:prstGeom prst="rect">
+            <a:avLst/>
+          </a:prstGeom>
+          <a:noFill/>
+          <a:ln/>
+        </p:spPr>
+        <p:txBody>
+          <a:bodyPr wrap="square" lIns="0" tIns="0" rIns="0" bIns="0" rtlCol="0" anchor="ctr"/>
+          <a:lstStyle/>
+          <a:p>
+            <a:pPr algn="r" indent="0" marL="0">
+              <a:buNone/>
+            </a:pPr>
+            <a:r>
+              <a:rPr lang="en-US" sz="1400" b="1" dirty="0">
+                <a:solidFill>
+                  <a:srgbClr val="1C3F6E"/>
+                </a:solidFill>
+                <a:latin typeface="Calibri" pitchFamily="34" charset="0"/>
+                <a:ea typeface="Calibri" pitchFamily="34" charset="-122"/>
+                <a:cs typeface="Calibri" pitchFamily="34" charset="-120"/>
+              </a:rPr>
+              <a:t>REFERENCES</a:t>
+            </a:r>
+            <a:endParaRPr lang="en-US" sz="1400" dirty="0"/>
+          </a:p>
+        </p:txBody>
+      </p:sp>
+      <p:pic>
+        <p:nvPicPr>
+          <p:cNvPr id="3" name="Image 0" descr="/home/claude/f4/img/minesec_sheet.png">    </p:cNvPr>
+          <p:cNvPicPr>
+            <a:picLocks noChangeAspect="1"/>
+          </p:cNvPicPr>
+          <p:nvPr/>
+        </p:nvPicPr>
+        <p:blipFill>
+          <a:blip r:embed="rId1"/>
+          <a:stretch>
+            <a:fillRect/>
+          </a:stretch>
+        </p:blipFill>
+        <p:spPr>
+          <a:xfrm>
+            <a:off x="0" y="658368"/>
+            <a:ext cx="5120640" cy="5833872"/>
+          </a:xfrm>
+          <a:prstGeom prst="rect">
+            <a:avLst/>
+          </a:prstGeom>
+        </p:spPr>
+      </p:pic>
+      <p:sp>
+        <p:nvSpPr>
+          <p:cNvPr id="4" name="Text 1"/>
+          <p:cNvSpPr/>
+          <p:nvPr/>
+        </p:nvSpPr>
+        <p:spPr>
+          <a:xfrm>
+            <a:off x="5349240" y="1005840"/>
+            <a:ext cx="6522415" cy="731520"/>
+          </a:xfrm>
+          <a:prstGeom prst="rect">
+            <a:avLst/>
+          </a:prstGeom>
+          <a:noFill/>
+          <a:ln/>
+        </p:spPr>
+        <p:txBody>
+          <a:bodyPr wrap="square" lIns="0" tIns="0" rIns="0" bIns="0" rtlCol="0" anchor="ctr">
+            <a:normAutofit/>
+          </a:bodyPr>
+          <a:lstStyle/>
+          <a:p>
+            <a:pPr algn="ctr" indent="0" marL="0">
+              <a:buNone/>
+            </a:pPr>
+            <a:r>
+              <a:rPr lang="en-US" sz="3600" b="1" dirty="0">
+                <a:solidFill>
+                  <a:srgbClr val="990011"/>
+                </a:solidFill>
+                <a:latin typeface="Times New Roman" pitchFamily="34" charset="0"/>
+                <a:ea typeface="Times New Roman" pitchFamily="34" charset="-122"/>
+                <a:cs typeface="Times New Roman" pitchFamily="34" charset="-120"/>
+              </a:rPr>
+              <a:t>References</a:t>
+            </a:r>
+            <a:endParaRPr lang="en-US" sz="3600" dirty="0"/>
+          </a:p>
+        </p:txBody>
+      </p:sp>
+      <p:sp>
+        <p:nvSpPr>
+          <p:cNvPr id="5" name="Text 2"/>
+          <p:cNvSpPr/>
+          <p:nvPr/>
+        </p:nvSpPr>
+        <p:spPr>
+          <a:xfrm>
+            <a:off x="5349240" y="1783080"/>
+            <a:ext cx="6522415" cy="4663440"/>
+          </a:xfrm>
+          <a:prstGeom prst="rect">
+            <a:avLst/>
+          </a:prstGeom>
+          <a:noFill/>
+          <a:ln/>
+        </p:spPr>
+        <p:txBody>
+          <a:bodyPr wrap="square" lIns="0" tIns="0" rIns="0" bIns="0" rtlCol="0" anchor="t"/>
+          <a:lstStyle/>
+          <a:p>
+            <a:pPr algn="l" marL="342900" indent="-342900">
+              <a:spcAft>
+                <a:spcPts val="800"/>
+              </a:spcAft>
+              <a:buSzPct val="100000"/>
+              <a:buChar char="•"/>
+            </a:pPr>
+            <a:r>
+              <a:rPr lang="en-US" sz="1800" dirty="0">
+                <a:solidFill>
+                  <a:srgbClr val="111111"/>
+                </a:solidFill>
+                <a:latin typeface="Calibri" pitchFamily="34" charset="0"/>
+                <a:ea typeface="Calibri" pitchFamily="34" charset="-122"/>
+                <a:cs typeface="Calibri" pitchFamily="34" charset="-120"/>
+              </a:rPr>
+              <a:t>Geography Syllabus for Sixth Forms (Lower and Upper Sixth), MINESEC, 2019 — Module 4 (Population Geography).</a:t>
+            </a:r>
+            <a:endParaRPr lang="en-US" sz="1800" dirty="0"/>
+          </a:p>
+          <a:p>
+            <a:pPr algn="l" marL="342900" indent="-342900">
+              <a:spcAft>
+                <a:spcPts val="800"/>
+              </a:spcAft>
+              <a:buSzPct val="100000"/>
+              <a:buChar char="•"/>
+            </a:pPr>
+            <a:r>
+              <a:rPr lang="en-US" sz="1800" dirty="0">
+                <a:solidFill>
+                  <a:srgbClr val="111111"/>
+                </a:solidFill>
+                <a:latin typeface="Calibri" pitchFamily="34" charset="0"/>
+                <a:ea typeface="Calibri" pitchFamily="34" charset="-122"/>
+                <a:cs typeface="Calibri" pitchFamily="34" charset="-120"/>
+              </a:rPr>
+              <a:t>Teacher's course notes: Mr KAMDEM E., Population Geography (USA), GBHS Garoua, 2026.</a:t>
+            </a:r>
+            <a:endParaRPr lang="en-US" sz="1800" dirty="0"/>
+          </a:p>
+          <a:p>
+            <a:pPr algn="l" marL="342900" indent="-342900">
+              <a:spcAft>
+                <a:spcPts val="800"/>
+              </a:spcAft>
+              <a:buSzPct val="100000"/>
+              <a:buChar char="•"/>
+            </a:pPr>
+            <a:r>
+              <a:rPr lang="en-US" sz="1800" dirty="0">
+                <a:solidFill>
+                  <a:srgbClr val="111111"/>
+                </a:solidFill>
+                <a:latin typeface="Calibri" pitchFamily="34" charset="0"/>
+                <a:ea typeface="Calibri" pitchFamily="34" charset="-122"/>
+                <a:cs typeface="Calibri" pitchFamily="34" charset="-120"/>
+              </a:rPr>
+              <a:t>United Nations, World Population Prospects 2024.</a:t>
+            </a:r>
+            <a:endParaRPr lang="en-US" sz="1800" dirty="0"/>
+          </a:p>
+          <a:p>
+            <a:pPr algn="l" marL="342900" indent="-342900">
+              <a:spcAft>
+                <a:spcPts val="800"/>
+              </a:spcAft>
+              <a:buSzPct val="100000"/>
+              <a:buChar char="•"/>
+            </a:pPr>
+            <a:r>
+              <a:rPr lang="en-US" sz="1800" dirty="0">
+                <a:solidFill>
+                  <a:srgbClr val="111111"/>
+                </a:solidFill>
+                <a:latin typeface="Calibri" pitchFamily="34" charset="0"/>
+                <a:ea typeface="Calibri" pitchFamily="34" charset="-122"/>
+                <a:cs typeface="Calibri" pitchFamily="34" charset="-120"/>
+              </a:rPr>
+              <a:t>Photo, Activity 3: “Class” by WABC Certified Business Coach • Counselor, CC BY 2.0, via Flickr (https://www.flickr.com/photos/43919827@N00/3617014360)</a:t>
+            </a:r>
+            <a:endParaRPr lang="en-US" sz="1800" dirty="0"/>
+          </a:p>
+          <a:p>
+            <a:pPr algn="l" marL="342900" indent="-342900">
+              <a:spcAft>
+                <a:spcPts val="800"/>
+              </a:spcAft>
+              <a:buSzPct val="100000"/>
+              <a:buChar char="•"/>
+            </a:pPr>
+            <a:r>
+              <a:rPr lang="en-US" sz="1800" dirty="0">
+                <a:solidFill>
+                  <a:srgbClr val="111111"/>
+                </a:solidFill>
+                <a:latin typeface="Calibri" pitchFamily="34" charset="0"/>
+                <a:ea typeface="Calibri" pitchFamily="34" charset="-122"/>
+                <a:cs typeface="Calibri" pitchFamily="34" charset="-120"/>
+              </a:rPr>
+              <a:t>Photo, Activity 5: “Medical Readiness and Training Exercise 15-3” by US Army Africa, CC BY 2.0, via Flickr (https://www.flickr.com/photos/36281822@N08/16958932197)</a:t>
+            </a:r>
+            <a:endParaRPr lang="en-US" sz="1800" dirty="0"/>
+          </a:p>
+          <a:p>
+            <a:pPr algn="l" marL="342900" indent="-342900">
+              <a:spcAft>
+                <a:spcPts val="800"/>
+              </a:spcAft>
+              <a:buSzPct val="100000"/>
+              <a:buChar char="•"/>
+            </a:pPr>
+            <a:r>
+              <a:rPr lang="en-US" sz="1800" dirty="0">
+                <a:solidFill>
+                  <a:srgbClr val="111111"/>
+                </a:solidFill>
+                <a:latin typeface="Calibri" pitchFamily="34" charset="0"/>
+                <a:ea typeface="Calibri" pitchFamily="34" charset="-122"/>
+                <a:cs typeface="Calibri" pitchFamily="34" charset="-120"/>
+              </a:rPr>
+              <a:t>Diagrams and animations: drawn for this lesson (Geography Department).</a:t>
+            </a:r>
+            <a:endParaRPr lang="en-US" sz="1800" dirty="0"/>
+          </a:p>
+        </p:txBody>
+      </p:sp>
+      <p:sp>
+        <p:nvSpPr>
+          <p:cNvPr id="25" name="Slide Number Placeholder 0"/>
+          <p:cNvSpPr>
+            <a:spLocks noGrp="1"/>
+          </p:cNvSpPr>
+          <p:nvPr>
+            <p:ph type="sldNum" sz="quarter" idx="4294967295"/>
+          </p:nvPr>
+        </p:nvSpPr>
+        <p:spPr>
+          <a:xfrm>
+            <a:off x="27432" y="91440"/>
+            <a:ext cx="585216" cy="475488"/>
+          </a:xfrm>
+          <a:prstGeom prst="rect">
+            <a:avLst/>
+          </a:prstGeom>
+          <a:extLst>
+            <a:ext uri="{C572A759-6A51-4108-AA02-DFA0A04FC94B}">
+              <ma14:wrappingTextBoxFlag xmlns:ma14="http://schemas.microsoft.com/office/mac/drawingml/2011/main" val="0"/>
+            </a:ext>
+          </a:extLst>
+        </p:spPr>
+        <p:txBody>
+          <a:bodyPr/>
+          <a:lstStyle>
+            <a:lvl1pPr>
+              <a:defRPr sz="2000">
+                <a:solidFill>
+                  <a:srgbClr val="FFFFFF"/>
+                </a:solidFill>
+                <a:latin typeface="Calibri"/>
+                <a:ea typeface="Calibri"/>
+                <a:cs typeface="Calibri"/>
+              </a:defRPr>
+            </a:lvl1pPr>
+          </a:lstStyle>
+          <a:p>
+            <a:pPr algn="ctr"/>
+            <a:fld id="{F7021451-1387-4CA6-816F-3879F97B5CBC}" type="slidenum">
+              <a:rPr b="1" lang="en-US"/>
+              <a:t>70</a:t>
             </a:fld>
             <a:endParaRPr lang="en-US"/>
           </a:p>
